--- a/downloads/presentations/modules/lesson-62-requirements-writing-for-ai-procurement-and-implementation.pptx
+++ b/downloads/presentations/modules/lesson-62-requirements-writing-for-ai-procurement-and-implementation.pptx
@@ -25,9 +25,11 @@
     <p:sldId id="273" r:id="rId19"/>
     <p:sldId id="274" r:id="rId20"/>
     <p:sldId id="275" r:id="rId21"/>
+    <p:sldId id="276" r:id="rId22"/>
+    <p:sldId id="277" r:id="rId23"/>
   </p:sldIdLst>
   <p:notesMasterIdLst>
-    <p:notesMasterId r:id="rId22"/>
+    <p:notesMasterId r:id="rId24"/>
   </p:notesMasterIdLst>
   <p:sldSz cx="12192000" cy="6858000"/>
   <p:notesSz cx="6858000" cy="12192000"/>
@@ -610,10 +612,10 @@
           <a:p>
             <a:r>
               <a:rPr lang="en-US" dirty="0"/>
-              <a:t>Topic Deep Dive
-Strong AI requirements begin with intended use. The agency should state the specific workflow, users, data sources, outputs, and decisions the system may support. It should also state prohibited uses. This prevents scope creep and reduces the chance that a tool will be used for decisions it was not designed or approved to support.
-Data requirements should specify allowed data sources, minimum necessary fields, terminology standards, data quality expectations, retention, ownership, reuse limits, and deletion requirements. If vendors will use agency data to improve models, that use should be explicitly approved or prohibited.
-Acceptance and monitoring requirements should specify what evidence the vendor must provide before launch and throughout operations. This may include validation reports, test cases, model cards, change logs, uptime reports, incident reports, bias assessments, security documentation, and user training materials.</a:t>
+              <a:t>Core Concepts
+A requirement is a clear statement of what a system must do or how it must perform. AI requirements must cover functional capabilities, nonfunctional expectations, data handling, validation, transparency, monitoring, security, accessibility, interoperability, and support.
+Functional requirements describe what the tool must do, such as summarize a case report, classify a complaint, or generate a draft message. Nonfunctional requirements describe how the tool must perform, such as uptime, response time, security, auditability, explainability, and accessibility.
+Procurement requirements must be testable. If a requirement cannot be evaluated during proposal review, implementation, or acceptance testing, it is unlikely to protect the agency. Requirements should avoid vague claims such as “uses responsible AI” unless they are translated into evidence, controls, and deliverables.</a:t>
             </a:r>
             <a:endParaRPr lang="en-US" dirty="0"/>
           </a:p>
@@ -701,10 +703,8 @@
           <a:p>
             <a:r>
               <a:rPr lang="en-US" dirty="0"/>
-              <a:t>Risks, Failure Modes, and Guardrails
-A common failure mode is treating the topic as a technical detail rather than a public health control. When staff do not connect technical decisions to authority, workflow, equity, privacy, security, and accountability, the agency may adopt a tool that appears useful but cannot be sustained or defended.
-Another risk is relying on vendor claims without agency-defined evidence. Vendors may provide demonstrations, dashboards, or summary metrics that do not match the agency workflow or data environment. A guardrail is to require documentation, test results, acceptance criteria, and agency-controlled review.
-A third risk is failing to plan for change. Public health data, policies, systems, and emergencies change. Any technical approach must include monitoring, review, versioning, escalation, and retirement pathways so the agency can respond when assumptions no longer hold.</a:t>
+              <a:t>Public Health Example
+A state health agency procuring an AI-supported case triage tool should require interoperability with the surveillance system, role-based access, source traceability, validation results, subgroup performance reporting, audit logs, human review controls, incident reporting, documentation, and data deletion at contract end. These requirements make vendor claims testable and enforceable.</a:t>
             </a:r>
             <a:endParaRPr lang="en-US" dirty="0"/>
           </a:p>
@@ -792,9 +792,10 @@
           <a:p>
             <a:r>
               <a:rPr lang="en-US" dirty="0"/>
-              <a:t>Application to AI-Supported Workflows
-Generative AI, predictive analytics, RAG, automation, and agentic workflows all depend on the controls described in this module. The controls should be scaled to the risk of the use case. A tool that drafts internal training text may require lighter review than a tool that updates case records, prioritizes outreach, or supports public communication during an emergency.
-The module should be applied during readiness assessment, procurement, implementation planning, pilot testing, and post-deployment monitoring. Learners should document how the topic affects data, systems, users, safeguards, and decision-making for the selected workflow.</a:t>
+              <a:t>Topic Deep Dive
+Strong AI requirements begin with intended use. The agency should state the specific workflow, users, data sources, outputs, and decisions the system may support. It should also state prohibited uses. This prevents scope creep and reduces the chance that a tool will be used for decisions it was not designed or approved to support.
+Data requirements should specify allowed data sources, minimum necessary fields, terminology standards, data quality expectations, retention, ownership, reuse limits, and deletion requirements. If vendors will use agency data to improve models, that use should be explicitly approved or prohibited.
+Acceptance and monitoring requirements should specify what evidence the vendor must provide before launch and throughout operations. This may include validation reports, test cases, model cards, change logs, uptime reports, incident reports, bias assessments, security documentation, and user training materials.</a:t>
             </a:r>
             <a:endParaRPr lang="en-US" dirty="0"/>
           </a:p>
@@ -882,10 +883,10 @@
           <a:p>
             <a:r>
               <a:rPr lang="en-US" dirty="0"/>
-              <a:t>Reflection Questions
-Where does this topic appear in one current or proposed AI workflow in your agency?
-What decisions, data sources, users, or partners would be affected if this area is poorly designed?
-What evidence would governance reviewers need before approving the workflow?</a:t>
+              <a:t>Risks, Failure Modes, and Guardrails
+A common failure mode is treating the topic as a technical detail rather than a public health control. When staff do not connect technical decisions to authority, workflow, equity, privacy, security, and accountability, the agency may adopt a tool that appears useful but cannot be sustained or defended.
+Another risk is relying on vendor claims without agency-defined evidence. Vendors may provide demonstrations, dashboards, or summary metrics that do not match the agency workflow or data environment. A guardrail is to require documentation, test results, acceptance criteria, and agency-controlled review.
+A third risk is failing to plan for change. Public health data, policies, systems, and emergencies change. Any technical approach must include monitoring, review, versioning, escalation, and retirement pathways so the agency can respond when assumptions no longer hold.</a:t>
             </a:r>
             <a:endParaRPr lang="en-US" dirty="0"/>
           </a:p>
@@ -973,9 +974,9 @@
           <a:p>
             <a:r>
               <a:rPr lang="en-US" dirty="0"/>
-              <a:t>Reflection Questions
-Which safeguards should be required before pilot testing?
-Who owns ongoing monitoring and review?</a:t>
+              <a:t>Application to AI-Supported Workflows
+Generative AI, predictive analytics, RAG, automation, and agentic workflows all depend on the controls described in this module. The controls should be scaled to the risk of the use case. A tool that drafts internal training text may require lighter review than a tool that updates case records, prioritizes outreach, or supports public communication during an emergency.
+The module should be applied during readiness assessment, procurement, implementation planning, pilot testing, and post-deployment monitoring. Learners should document how the topic affects data, systems, users, safeguards, and decision-making for the selected workflow.</a:t>
             </a:r>
             <a:endParaRPr lang="en-US" dirty="0"/>
           </a:p>
@@ -1063,9 +1064,10 @@
           <a:p>
             <a:r>
               <a:rPr lang="en-US" dirty="0"/>
-              <a:t>Practical Exercise
-Create a AI requirements matrix for one real or realistic public health AI workflow. The artifact should describe the use case, affected users, data sources, system dependencies, risks, guardrails, review points, and unresolved questions.
-The exercise should produce a work product that could be used in a governance meeting, procurement review, implementation planning session, pilot evaluation, or monitoring review. Learners should document assumptions and identify which staff or partners need to be consulted.</a:t>
+              <a:t>Reflection Questions
+Where does this topic appear in one current or proposed AI workflow in your agency?
+What decisions, data sources, users, or partners would be affected if this area is poorly designed?
+What evidence would governance reviewers need before approving the workflow?</a:t>
             </a:r>
             <a:endParaRPr lang="en-US" dirty="0"/>
           </a:p>
@@ -1153,8 +1155,9 @@
           <a:p>
             <a:r>
               <a:rPr lang="en-US" dirty="0"/>
-              <a:t>Expected Artifact or Evidence
-The expected artifact is a completed AI requirements matrix. It should be specific to a public health workflow and should include technical dependencies, governance questions, human review expectations, monitoring indicators, and unresolved risks.</a:t>
+              <a:t>Reflection Questions
+Which safeguards should be required before pilot testing?
+Who owns ongoing monitoring and review?</a:t>
             </a:r>
             <a:endParaRPr lang="en-US" dirty="0"/>
           </a:p>
@@ -1242,8 +1245,9 @@
           <a:p>
             <a:r>
               <a:rPr lang="en-US" dirty="0"/>
-              <a:t>Expected Assignment
-The expected artifact is a completed AI requirements matrix. It should be specific to a public health workflow and should include technical dependencies, governance questions, human review expectations, monitoring indicators, and unresolved risks.</a:t>
+              <a:t>Practical Exercise
+Create a AI requirements matrix for one real or realistic public health AI workflow. The artifact should describe the use case, affected users, data sources, system dependencies, risks, guardrails, review points, and unresolved questions.
+The exercise should produce a work product that could be used in a governance meeting, procurement review, implementation planning session, pilot evaluation, or monitoring review. Learners should document assumptions and identify which staff or partners need to be consulted.</a:t>
             </a:r>
             <a:endParaRPr lang="en-US" dirty="0"/>
           </a:p>
@@ -1331,12 +1335,8 @@
           <a:p>
             <a:r>
               <a:rPr lang="en-US" dirty="0"/>
-              <a:t>Knowledge Check
-1. What is the best reason to address requirements writing for ai procurement and implementation before deployment?
-2. Which practice best supports responsible implementation?
-3. Which statement best describes a common failure mode?
-4. What should be included in the practical artifact for this module?
-5. When should the issue be escalated for governance or leadership review?</a:t>
+              <a:t>Expected Artifact or Evidence
+The expected artifact is a completed AI requirements matrix. It should be specific to a public health workflow and should include technical dependencies, governance questions, human review expectations, monitoring indicators, and unresolved risks.</a:t>
             </a:r>
             <a:endParaRPr lang="en-US" dirty="0"/>
           </a:p>
@@ -1424,12 +1424,8 @@
           <a:p>
             <a:r>
               <a:rPr lang="en-US" dirty="0"/>
-              <a:t>References and Resources
-NIST AI Risk Management Framework: https://www.nist.gov/itl/ai-risk-management-framework
-ONC interoperability resources and agency procurement templates
-NIST Generative AI Profile: https://www.nist.gov/publications/artificial-intelligence-risk-management-framework-generative-artificial-intelligence
-CDC Public Health Data Strategy and Data Modernization resources: https://www.cdc.gov/public-health-data-strategy/php/about/index.html
-OWASP Top 10 for LLM Applications, when security or AI integrations are relevant</a:t>
+              <a:t>Expected Assignment
+The expected artifact is a completed AI requirements matrix. It should be specific to a public health workflow and should include technical dependencies, governance questions, human review expectations, monitoring indicators, and unresolved risks.</a:t>
             </a:r>
             <a:endParaRPr lang="en-US" dirty="0"/>
           </a:p>
@@ -1609,8 +1605,12 @@
           <a:p>
             <a:r>
               <a:rPr lang="en-US" dirty="0"/>
-              <a:t>References and Resources
-Agency privacy, cybersecurity, data governance, procurement, and records management policies</a:t>
+              <a:t>Knowledge Check
+1. What is the best reason to address requirements writing for ai procurement and implementation before deployment?
+2. Which practice best supports responsible implementation?
+3. Which statement best describes a common failure mode?
+4. What should be included in the practical artifact for this module?
+5. When should the issue be escalated for governance or leadership review?</a:t>
             </a:r>
             <a:endParaRPr lang="en-US" dirty="0"/>
           </a:p>
@@ -1634,6 +1634,188 @@
             <a:fld id="{F7021451-1387-4CA6-816F-3879F97B5CBC}" type="slidenum">
               <a:rPr lang="en-US"/>
               <a:t>20</a:t>
+            </a:fld>
+            <a:endParaRPr lang="en-US"/>
+          </a:p>
+        </p:txBody>
+      </p:sp>
+    </p:spTree>
+    <p:extLst>
+      <p:ext uri="{BB962C8B-B14F-4D97-AF65-F5344CB8AC3E}">
+        <p14:creationId xmlns:p14="http://schemas.microsoft.com/office/powerpoint/2010/main" val="1024086991"/>
+      </p:ext>
+    </p:extLst>
+  </p:cSld>
+  <p:clrMapOvr>
+    <a:masterClrMapping/>
+  </p:clrMapOvr>
+</p:notes>
+</file>
+
+<file path=ppt/notesSlides/notesSlide21.xml><?xml version="1.0" encoding="utf-8"?>
+<p:notes xmlns:a="http://schemas.openxmlformats.org/drawingml/2006/main" xmlns:r="http://schemas.openxmlformats.org/officeDocument/2006/relationships" xmlns:p="http://schemas.openxmlformats.org/presentationml/2006/main">
+  <p:cSld>
+    <p:spTree>
+      <p:nvGrpSpPr>
+        <p:cNvPr id="1" name=""/>
+        <p:cNvGrpSpPr/>
+        <p:nvPr/>
+      </p:nvGrpSpPr>
+      <p:grpSpPr>
+        <a:xfrm>
+          <a:off x="0" y="0"/>
+          <a:ext cx="0" cy="0"/>
+          <a:chOff x="0" y="0"/>
+          <a:chExt cx="0" cy="0"/>
+        </a:xfrm>
+      </p:grpSpPr>
+      <p:sp>
+        <p:nvSpPr>
+          <p:cNvPr id="2" name="Slide Image Placeholder 1"/>
+          <p:cNvSpPr>
+            <a:spLocks noGrp="1" noRot="1" noChangeAspect="1"/>
+          </p:cNvSpPr>
+          <p:nvPr>
+            <p:ph type="sldImg"/>
+          </p:nvPr>
+        </p:nvSpPr>
+        <p:spPr/>
+      </p:sp>
+      <p:sp>
+        <p:nvSpPr>
+          <p:cNvPr id="3" name="Notes Placeholder 2"/>
+          <p:cNvSpPr>
+            <a:spLocks noGrp="1"/>
+          </p:cNvSpPr>
+          <p:nvPr>
+            <p:ph type="body" idx="1"/>
+          </p:nvPr>
+        </p:nvSpPr>
+        <p:spPr/>
+        <p:txBody>
+          <a:bodyPr/>
+          <a:lstStyle/>
+          <a:p>
+            <a:r>
+              <a:rPr lang="en-US" dirty="0"/>
+              <a:t>References and Resources
+NIST AI Risk Management Framework: https://www.nist.gov/itl/ai-risk-management-framework
+ONC interoperability resources and agency procurement templates
+NIST Generative AI Profile: https://www.nist.gov/publications/artificial-intelligence-risk-management-framework-generative-artificial-intelligence
+CDC Public Health Data Strategy and Data Modernization resources: https://www.cdc.gov/public-health-data-strategy/php/about/index.html
+OWASP Top 10 for LLM Applications, when security or AI integrations are relevant</a:t>
+            </a:r>
+            <a:endParaRPr lang="en-US" dirty="0"/>
+          </a:p>
+        </p:txBody>
+      </p:sp>
+      <p:sp>
+        <p:nvSpPr>
+          <p:cNvPr id="4" name="Slide Number Placeholder 3"/>
+          <p:cNvSpPr>
+            <a:spLocks noGrp="1"/>
+          </p:cNvSpPr>
+          <p:nvPr>
+            <p:ph type="sldNum" sz="quarter" idx="10"/>
+          </p:nvPr>
+        </p:nvSpPr>
+        <p:spPr/>
+        <p:txBody>
+          <a:bodyPr/>
+          <a:lstStyle/>
+          <a:p>
+            <a:fld id="{F7021451-1387-4CA6-816F-3879F97B5CBC}" type="slidenum">
+              <a:rPr lang="en-US"/>
+              <a:t>21</a:t>
+            </a:fld>
+            <a:endParaRPr lang="en-US"/>
+          </a:p>
+        </p:txBody>
+      </p:sp>
+    </p:spTree>
+    <p:extLst>
+      <p:ext uri="{BB962C8B-B14F-4D97-AF65-F5344CB8AC3E}">
+        <p14:creationId xmlns:p14="http://schemas.microsoft.com/office/powerpoint/2010/main" val="1024086991"/>
+      </p:ext>
+    </p:extLst>
+  </p:cSld>
+  <p:clrMapOvr>
+    <a:masterClrMapping/>
+  </p:clrMapOvr>
+</p:notes>
+</file>
+
+<file path=ppt/notesSlides/notesSlide22.xml><?xml version="1.0" encoding="utf-8"?>
+<p:notes xmlns:a="http://schemas.openxmlformats.org/drawingml/2006/main" xmlns:r="http://schemas.openxmlformats.org/officeDocument/2006/relationships" xmlns:p="http://schemas.openxmlformats.org/presentationml/2006/main">
+  <p:cSld>
+    <p:spTree>
+      <p:nvGrpSpPr>
+        <p:cNvPr id="1" name=""/>
+        <p:cNvGrpSpPr/>
+        <p:nvPr/>
+      </p:nvGrpSpPr>
+      <p:grpSpPr>
+        <a:xfrm>
+          <a:off x="0" y="0"/>
+          <a:ext cx="0" cy="0"/>
+          <a:chOff x="0" y="0"/>
+          <a:chExt cx="0" cy="0"/>
+        </a:xfrm>
+      </p:grpSpPr>
+      <p:sp>
+        <p:nvSpPr>
+          <p:cNvPr id="2" name="Slide Image Placeholder 1"/>
+          <p:cNvSpPr>
+            <a:spLocks noGrp="1" noRot="1" noChangeAspect="1"/>
+          </p:cNvSpPr>
+          <p:nvPr>
+            <p:ph type="sldImg"/>
+          </p:nvPr>
+        </p:nvSpPr>
+        <p:spPr/>
+      </p:sp>
+      <p:sp>
+        <p:nvSpPr>
+          <p:cNvPr id="3" name="Notes Placeholder 2"/>
+          <p:cNvSpPr>
+            <a:spLocks noGrp="1"/>
+          </p:cNvSpPr>
+          <p:nvPr>
+            <p:ph type="body" idx="1"/>
+          </p:nvPr>
+        </p:nvSpPr>
+        <p:spPr/>
+        <p:txBody>
+          <a:bodyPr/>
+          <a:lstStyle/>
+          <a:p>
+            <a:r>
+              <a:rPr lang="en-US" dirty="0"/>
+              <a:t>References and Resources
+Agency privacy, cybersecurity, data governance, procurement, and records management policies</a:t>
+            </a:r>
+            <a:endParaRPr lang="en-US" dirty="0"/>
+          </a:p>
+        </p:txBody>
+      </p:sp>
+      <p:sp>
+        <p:nvSpPr>
+          <p:cNvPr id="4" name="Slide Number Placeholder 3"/>
+          <p:cNvSpPr>
+            <a:spLocks noGrp="1"/>
+          </p:cNvSpPr>
+          <p:nvPr>
+            <p:ph type="sldNum" sz="quarter" idx="10"/>
+          </p:nvPr>
+        </p:nvSpPr>
+        <p:spPr/>
+        <p:txBody>
+          <a:bodyPr/>
+          <a:lstStyle/>
+          <a:p>
+            <a:fld id="{F7021451-1387-4CA6-816F-3879F97B5CBC}" type="slidenum">
+              <a:rPr lang="en-US"/>
+              <a:t>22</a:t>
             </a:fld>
             <a:endParaRPr lang="en-US"/>
           </a:p>
@@ -1698,12 +1880,11 @@
           <a:p>
             <a:r>
               <a:rPr lang="en-US" dirty="0"/>
-              <a:t>Learning Objectives
-Explain the purpose of requirements writing for ai procurement and implementation in public health AI work.
-Identify the technical, operational, privacy, security, equity, and governance issues associated with the topic.
-Apply the topic to a real or realistic public health workflow, system, or implementation scenario.
-Recognize common failure modes that can affect safety, accuracy, trust, workflow fit, or sustainability.
-Identify practical guardrails that should be documented before implementation.</a:t>
+              <a:t>Related Playbook Plays
+Play 11: Build and Deploy AI Solutions - This lesson informs Play 11 by helping learners connect the lesson topic to build and deploy ai solutions work in the AI Playbook.
+Play 2: Readiness Assessment - This lesson informs Play 2 by helping learners connect the lesson topic to readiness assessment work in the AI Playbook sequence.
+Play 7: Prioritize Use Cases - This lesson informs Play 7 by helping learners connect the lesson topic to prioritize use cases work in the AI Playbook sequence.
+Play 3: Establish AI Governance - This lesson informs Play 3 by helping learners connect the lesson topic to establish ai governance work in the AI Playbook sequence.</a:t>
             </a:r>
             <a:endParaRPr lang="en-US" dirty="0"/>
           </a:p>
@@ -1791,8 +1972,13 @@
           <a:p>
             <a:r>
               <a:rPr lang="en-US" dirty="0"/>
-              <a:t>Learning Objectives
-Produce a AI requirements matrix that can support readiness assessment, governance review, procurement, implementation, or monitoring.</a:t>
+              <a:t>Related Toolkit Resources
+Tool 4: AI Policy Landscape Scan (Worksheet) - Use AI Policy Landscape Scan to translate this lesson into a documented public health AI planning, governance, implementation,.
+Tool 5: AI Environmental and Resource Impact Review (Checklist) - Use this tool to complete or strengthen the practical exercise for the module using fictional, de-identified, or generalized.
+Tool 6: Human-Centered AI Decision Rule Checklist (Checklist) - Use Human-Centered AI Decision Rule Checklist to translate this lesson into a documented public health AI planning, governance,.
+Tool 8: AI Project Charter (Planning) - Use AI Project Charter to translate this lesson into a documented public health AI planning, governance, implementation, or.
+Tool 9: Data Quality Assessment Checklist (Checklist) - Use this tool to complete or strengthen the practical exercise for the module using fictional, de-identified, or generalized.
+Tool 10: Tiered Data Classification for AI Use (Worksheet) - Use this tool to complete or strengthen the practical exercise for the module using fictional, de-identified, or generalized.</a:t>
             </a:r>
             <a:endParaRPr lang="en-US" dirty="0"/>
           </a:p>
@@ -1880,8 +2066,12 @@
           <a:p>
             <a:r>
               <a:rPr lang="en-US" dirty="0"/>
-              <a:t>Module Overview
-AI procurement requires stronger requirements than ordinary software purchasing because agencies must define not only features, but also data rights, validation, interoperability, security, privacy, monitoring, documentation, accessibility, and exit strategy. This module teaches learners how to write requirements that can be evaluated, tested, enforced, and monitored throughout implementation.</a:t>
+              <a:t>Learning Objectives
+Explain the purpose of requirements writing for ai procurement and implementation in public health AI work.
+Identify the technical, operational, privacy, security, equity, and governance issues associated with the topic.
+Apply the topic to a real or realistic public health workflow, system, or implementation scenario.
+Recognize common failure modes that can affect safety, accuracy, trust, workflow fit, or sustainability.
+Identify practical guardrails that should be documented before implementation.</a:t>
             </a:r>
             <a:endParaRPr lang="en-US" dirty="0"/>
           </a:p>
@@ -1969,8 +2159,8 @@
           <a:p>
             <a:r>
               <a:rPr lang="en-US" dirty="0"/>
-              <a:t>Jurisdiction and Agency Policy Note
-This module provides national-level training guidance for public health agencies and partners. It is not legal advice and does not replace review by agency legal counsel, privacy officers, procurement officials, civil rights staff, records officers, or other authorized decision-makers. Requirements may vary by state, locality, territory, Tribe, agency, funding source, data-sharing agreement, emergency authority, and organizational policy. Learners should use this module to identify the issues that require review and should confirm applicable requirements before approving, procuring, deploying, or publicly communicating about AI-supported work.</a:t>
+              <a:t>Learning Objectives
+Produce a AI requirements matrix that can support readiness assessment, governance review, procurement, implementation, or monitoring.</a:t>
             </a:r>
             <a:endParaRPr lang="en-US" dirty="0"/>
           </a:p>
@@ -2058,9 +2248,8 @@
           <a:p>
             <a:r>
               <a:rPr lang="en-US" dirty="0"/>
-              <a:t>Why This Topic Matters for Public Health AI
-Requirements Writing for AI Procurement and Implementation matters because AI systems are embedded in public health programs, data systems, and decision processes rather than operating in isolation. The topic affects whether AI outputs are accurate, explainable, safe, equitable, secure, and sustainable. Agencies that ignore this area may create tools that work in a demonstration but fail in actual practice.
-The topic also affects accountability. Public health agencies must be able to explain how data are used, why a tool was approved, what evidence supports the workflow, who reviews outputs, and what happens when the system fails. These responsibilities become more important as AI tools move from experimentation into operational use.</a:t>
+              <a:t>Module Overview
+AI procurement requires stronger requirements than ordinary software purchasing because agencies must define not only features, but also data rights, validation, interoperability, security, privacy, monitoring, documentation, accessibility, and exit strategy. This module teaches learners how to write requirements that can be evaluated, tested, enforced, and monitored throughout implementation.</a:t>
             </a:r>
             <a:endParaRPr lang="en-US" dirty="0"/>
           </a:p>
@@ -2148,10 +2337,8 @@
           <a:p>
             <a:r>
               <a:rPr lang="en-US" dirty="0"/>
-              <a:t>Core Concepts
-A requirement is a clear statement of what a system must do or how it must perform. AI requirements must cover functional capabilities, nonfunctional expectations, data handling, validation, transparency, monitoring, security, accessibility, interoperability, and support.
-Functional requirements describe what the tool must do, such as summarize a case report, classify a complaint, or generate a draft message. Nonfunctional requirements describe how the tool must perform, such as uptime, response time, security, auditability, explainability, and accessibility.
-Procurement requirements must be testable. If a requirement cannot be evaluated during proposal review, implementation, or acceptance testing, it is unlikely to protect the agency. Requirements should avoid vague claims such as “uses responsible AI” unless they are translated into evidence, controls, and deliverables.</a:t>
+              <a:t>Jurisdiction and Agency Policy Note
+This module provides national-level training guidance for public health agencies and partners. It is not legal advice and does not replace review by agency legal counsel, privacy officers, procurement officials, civil rights staff, records officers, or other authorized decision-makers. Requirements may vary by state, locality, territory, Tribe, agency, funding source, data-sharing agreement, emergency authority, and organizational policy. Learners should use this module to identify the issues that require review and should confirm applicable requirements before approving, procuring, deploying, or publicly communicating about AI-supported work.</a:t>
             </a:r>
             <a:endParaRPr lang="en-US" dirty="0"/>
           </a:p>
@@ -2239,8 +2426,9 @@
           <a:p>
             <a:r>
               <a:rPr lang="en-US" dirty="0"/>
-              <a:t>Public Health Example
-A state health agency procuring an AI-supported case triage tool should require interoperability with the surveillance system, role-based access, source traceability, validation results, subgroup performance reporting, audit logs, human review controls, incident reporting, documentation, and data deletion at contract end. These requirements make vendor claims testable and enforceable.</a:t>
+              <a:t>Why This Topic Matters for Public Health AI
+Requirements Writing for AI Procurement and Implementation matters because AI systems are embedded in public health programs, data systems, and decision processes rather than operating in isolation. The topic affects whether AI outputs are accurate, explainable, safe, equitable, secure, and sustainable. Agencies that ignore this area may create tools that work in a demonstration but fail in actual practice.
+The topic also affects accountability. Public health agencies must be able to explain how data are used, why a tool was approved, what evidence supports the workflow, who reviews outputs, and what happens when the system fails. These responsibilities become more important as AI tools move from experimentation into operational use.</a:t>
             </a:r>
             <a:endParaRPr lang="en-US" dirty="0"/>
           </a:p>
@@ -2863,7 +3051,32 @@
       </p:sp>
       <p:sp>
         <p:nvSpPr>
-          <p:cNvPr id="3" name="Text 1"/>
+          <p:cNvPr id="3" name="Shape 1"/>
+          <p:cNvSpPr/>
+          <p:nvPr/>
+        </p:nvSpPr>
+        <p:spPr>
+          <a:xfrm>
+            <a:off x="0" y="164592"/>
+            <a:ext cx="146304" cy="6693408"/>
+          </a:xfrm>
+          <a:prstGeom prst="rect">
+            <a:avLst/>
+          </a:prstGeom>
+          <a:solidFill>
+            <a:srgbClr val="2F8A28"/>
+          </a:solidFill>
+          <a:ln w="12700">
+            <a:solidFill>
+              <a:srgbClr val="2F8A28"/>
+            </a:solidFill>
+            <a:prstDash val="solid"/>
+          </a:ln>
+        </p:spPr>
+      </p:sp>
+      <p:sp>
+        <p:nvSpPr>
+          <p:cNvPr id="4" name="Text 2"/>
           <p:cNvSpPr/>
           <p:nvPr/>
         </p:nvSpPr>
@@ -2902,7 +3115,7 @@
       </p:sp>
       <p:sp>
         <p:nvSpPr>
-          <p:cNvPr id="4" name="Text 2"/>
+          <p:cNvPr id="5" name="Text 3"/>
           <p:cNvSpPr/>
           <p:nvPr/>
         </p:nvSpPr>
@@ -2941,7 +3154,7 @@
       </p:sp>
       <p:sp>
         <p:nvSpPr>
-          <p:cNvPr id="5" name="Text 3"/>
+          <p:cNvPr id="6" name="Text 4"/>
           <p:cNvSpPr/>
           <p:nvPr/>
         </p:nvSpPr>
@@ -2980,13 +3193,77 @@
       </p:sp>
       <p:sp>
         <p:nvSpPr>
-          <p:cNvPr id="6" name="Text 4"/>
+          <p:cNvPr id="7" name="Shape 5"/>
           <p:cNvSpPr/>
           <p:nvPr/>
         </p:nvSpPr>
         <p:spPr>
           <a:xfrm>
             <a:off x="640080" y="658368"/>
+            <a:ext cx="420624" cy="420624"/>
+          </a:xfrm>
+          <a:prstGeom prst="ellipse">
+            <a:avLst/>
+          </a:prstGeom>
+          <a:solidFill>
+            <a:srgbClr val="0068B7"/>
+          </a:solidFill>
+          <a:ln w="12700">
+            <a:solidFill>
+              <a:srgbClr val="0068B7"/>
+            </a:solidFill>
+            <a:prstDash val="solid"/>
+          </a:ln>
+        </p:spPr>
+      </p:sp>
+      <p:sp>
+        <p:nvSpPr>
+          <p:cNvPr id="8" name="Text 6"/>
+          <p:cNvSpPr/>
+          <p:nvPr/>
+        </p:nvSpPr>
+        <p:spPr>
+          <a:xfrm>
+            <a:off x="640080" y="731520"/>
+            <a:ext cx="420624" cy="164592"/>
+          </a:xfrm>
+          <a:prstGeom prst="rect">
+            <a:avLst/>
+          </a:prstGeom>
+          <a:noFill/>
+          <a:ln/>
+        </p:spPr>
+        <p:txBody>
+          <a:bodyPr wrap="square" lIns="0" tIns="0" rIns="0" bIns="0" rtlCol="0" anchor="ctr"/>
+          <a:lstStyle/>
+          <a:p>
+            <a:pPr algn="ctr" indent="0" marL="0">
+              <a:buNone/>
+            </a:pPr>
+            <a:r>
+              <a:rPr lang="en-US" sz="1100" b="1" dirty="0">
+                <a:solidFill>
+                  <a:srgbClr val="FFFFFF"/>
+                </a:solidFill>
+                <a:latin typeface="Aptos" pitchFamily="34" charset="0"/>
+                <a:ea typeface="Aptos" pitchFamily="34" charset="-122"/>
+                <a:cs typeface="Aptos" pitchFamily="34" charset="-120"/>
+              </a:rPr>
+              <a:t>5</a:t>
+            </a:r>
+            <a:endParaRPr lang="en-US" sz="1100" dirty="0"/>
+          </a:p>
+        </p:txBody>
+      </p:sp>
+      <p:sp>
+        <p:nvSpPr>
+          <p:cNvPr id="9" name="Text 7"/>
+          <p:cNvSpPr/>
+          <p:nvPr/>
+        </p:nvSpPr>
+        <p:spPr>
+          <a:xfrm>
+            <a:off x="640080" y="621792"/>
             <a:ext cx="10881360" cy="566928"/>
           </a:xfrm>
           <a:prstGeom prst="rect">
@@ -3013,7 +3290,7 @@
                 <a:ea typeface="Aptos Display" pitchFamily="34" charset="-122"/>
                 <a:cs typeface="Aptos Display" pitchFamily="34" charset="-120"/>
               </a:rPr>
-              <a:t>Topic Deep Dive</a:t>
+              <a:t>Core Concepts</a:t>
             </a:r>
             <a:endParaRPr lang="en-US" sz="2700" dirty="0"/>
           </a:p>
@@ -3021,32 +3298,178 @@
       </p:sp>
       <p:sp>
         <p:nvSpPr>
-          <p:cNvPr id="7" name="Text 5"/>
-          <p:cNvSpPr/>
-          <p:nvPr/>
-        </p:nvSpPr>
-        <p:spPr>
-          <a:xfrm>
-            <a:off x="822960" y="1325880"/>
-            <a:ext cx="10378440" cy="4800600"/>
-          </a:xfrm>
-          <a:prstGeom prst="rect">
-            <a:avLst/>
-          </a:prstGeom>
-          <a:noFill/>
-          <a:ln/>
-        </p:spPr>
-        <p:txBody>
-          <a:bodyPr wrap="square" lIns="1016" tIns="1016" rIns="1016" bIns="1016" rtlCol="0" anchor="t">
+          <p:cNvPr id="10" name="Text 8"/>
+          <p:cNvSpPr/>
+          <p:nvPr/>
+        </p:nvSpPr>
+        <p:spPr>
+          <a:xfrm>
+            <a:off x="868680" y="1417320"/>
+            <a:ext cx="6675120" cy="4434840"/>
+          </a:xfrm>
+          <a:prstGeom prst="rect">
+            <a:avLst/>
+          </a:prstGeom>
+          <a:noFill/>
+          <a:ln/>
+        </p:spPr>
+        <p:txBody>
+          <a:bodyPr wrap="square" lIns="635" tIns="635" rIns="635" bIns="635" rtlCol="0" anchor="t">
             <a:normAutofit/>
           </a:bodyPr>
           <a:lstStyle/>
           <a:p>
+            <a:r>
+              <a:rPr lang="en-US" sz="1700" dirty="0">
+                <a:solidFill>
+                  <a:srgbClr val="17364A"/>
+                </a:solidFill>
+                <a:latin typeface="Aptos" pitchFamily="34" charset="0"/>
+                <a:ea typeface="Aptos" pitchFamily="34" charset="-122"/>
+                <a:cs typeface="Aptos" pitchFamily="34" charset="-120"/>
+              </a:rPr>
+              <a:t>A requirement is a clear statement of what a system must do or how it must perform.</a:t>
+            </a:r>
+            <a:endParaRPr lang="en-US" sz="1700" dirty="0"/>
+          </a:p>
+          <a:p>
+            <a:r>
+              <a:rPr lang="en-US" sz="1700" dirty="0">
+                <a:solidFill>
+                  <a:srgbClr val="17364A"/>
+                </a:solidFill>
+                <a:latin typeface="Aptos" pitchFamily="34" charset="0"/>
+                <a:ea typeface="Aptos" pitchFamily="34" charset="-122"/>
+                <a:cs typeface="Aptos" pitchFamily="34" charset="-120"/>
+              </a:rPr>
+              <a:t>AI requirements must cover functional capabilities, nonfunctional expectations, data handling, validation, transparency,.</a:t>
+            </a:r>
+            <a:endParaRPr lang="en-US" sz="1700" dirty="0"/>
+          </a:p>
+          <a:p>
+            <a:r>
+              <a:rPr lang="en-US" sz="1700" dirty="0">
+                <a:solidFill>
+                  <a:srgbClr val="17364A"/>
+                </a:solidFill>
+                <a:latin typeface="Aptos" pitchFamily="34" charset="0"/>
+                <a:ea typeface="Aptos" pitchFamily="34" charset="-122"/>
+                <a:cs typeface="Aptos" pitchFamily="34" charset="-120"/>
+              </a:rPr>
+              <a:t>Functional requirements describe what the tool must do, such as summarize a case report, classify a complaint, or generate.</a:t>
+            </a:r>
+            <a:endParaRPr lang="en-US" sz="1700" dirty="0"/>
+          </a:p>
+          <a:p>
+            <a:r>
+              <a:rPr lang="en-US" sz="1700" dirty="0">
+                <a:solidFill>
+                  <a:srgbClr val="17364A"/>
+                </a:solidFill>
+                <a:latin typeface="Aptos" pitchFamily="34" charset="0"/>
+                <a:ea typeface="Aptos" pitchFamily="34" charset="-122"/>
+                <a:cs typeface="Aptos" pitchFamily="34" charset="-120"/>
+              </a:rPr>
+              <a:t>Nonfunctional requirements describe how the tool must perform, such as uptime, response time, security, auditability,.</a:t>
+            </a:r>
+            <a:endParaRPr lang="en-US" sz="1700" dirty="0"/>
+          </a:p>
+        </p:txBody>
+      </p:sp>
+      <p:sp>
+        <p:nvSpPr>
+          <p:cNvPr id="11" name="Shape 9"/>
+          <p:cNvSpPr/>
+          <p:nvPr/>
+        </p:nvSpPr>
+        <p:spPr>
+          <a:xfrm>
+            <a:off x="7909560" y="1417320"/>
+            <a:ext cx="3154680" cy="1828800"/>
+          </a:xfrm>
+          <a:prstGeom prst="roundRect">
+            <a:avLst>
+              <a:gd name="adj" fmla="val 6000"/>
+            </a:avLst>
+          </a:prstGeom>
+          <a:solidFill>
+            <a:srgbClr val="EEF8ED"/>
+          </a:solidFill>
+          <a:ln w="12700">
+            <a:solidFill>
+              <a:srgbClr val="B9D7E6"/>
+            </a:solidFill>
+            <a:prstDash val="solid"/>
+          </a:ln>
+        </p:spPr>
+      </p:sp>
+      <p:sp>
+        <p:nvSpPr>
+          <p:cNvPr id="12" name="Text 10"/>
+          <p:cNvSpPr/>
+          <p:nvPr/>
+        </p:nvSpPr>
+        <p:spPr>
+          <a:xfrm>
+            <a:off x="8074152" y="1563624"/>
+            <a:ext cx="2825496" cy="201168"/>
+          </a:xfrm>
+          <a:prstGeom prst="rect">
+            <a:avLst/>
+          </a:prstGeom>
+          <a:noFill/>
+          <a:ln/>
+        </p:spPr>
+        <p:txBody>
+          <a:bodyPr wrap="square" lIns="0" tIns="0" rIns="0" bIns="0" rtlCol="0" anchor="ctr"/>
+          <a:lstStyle/>
+          <a:p>
             <a:pPr indent="0" marL="0">
               <a:buNone/>
             </a:pPr>
             <a:r>
-              <a:rPr lang="en-US" sz="1420" dirty="0">
+              <a:rPr lang="en-US" sz="950" b="1" dirty="0">
+                <a:solidFill>
+                  <a:srgbClr val="0068B7"/>
+                </a:solidFill>
+                <a:latin typeface="Aptos" pitchFamily="34" charset="0"/>
+                <a:ea typeface="Aptos" pitchFamily="34" charset="-122"/>
+                <a:cs typeface="Aptos" pitchFamily="34" charset="-120"/>
+              </a:rPr>
+              <a:t>Key idea</a:t>
+            </a:r>
+            <a:endParaRPr lang="en-US" sz="950" dirty="0"/>
+          </a:p>
+        </p:txBody>
+      </p:sp>
+      <p:sp>
+        <p:nvSpPr>
+          <p:cNvPr id="13" name="Text 11"/>
+          <p:cNvSpPr/>
+          <p:nvPr/>
+        </p:nvSpPr>
+        <p:spPr>
+          <a:xfrm>
+            <a:off x="8074152" y="1856232"/>
+            <a:ext cx="2825496" cy="1261872"/>
+          </a:xfrm>
+          <a:prstGeom prst="rect">
+            <a:avLst/>
+          </a:prstGeom>
+          <a:noFill/>
+          <a:ln/>
+        </p:spPr>
+        <p:txBody>
+          <a:bodyPr wrap="square" lIns="0" tIns="0" rIns="0" bIns="0" rtlCol="0" anchor="t">
+            <a:normAutofit/>
+          </a:bodyPr>
+          <a:lstStyle/>
+          <a:p>
+            <a:pPr indent="0" marL="0">
+              <a:buNone/>
+            </a:pPr>
+            <a:r>
+              <a:rPr lang="en-US" sz="1250" dirty="0">
                 <a:solidFill>
                   <a:srgbClr val="17364A"/>
                 </a:solidFill>
@@ -3054,9 +3477,116 @@
                 <a:ea typeface="Aptos" pitchFamily="34" charset="-122"/>
                 <a:cs typeface="Aptos" pitchFamily="34" charset="-120"/>
               </a:rPr>
-              <a:t>Strong AI requirements begin with intended use. The agency should state the specific workflow, users, data sources, outputs, and decisions the system may support. It should also state prohibited uses. This prevents scope creep and reduces the chance that a tool will be used for decisions it was not designed or approved to support. Data requirements should specify allowed data sources, minimum necessary fields, terminology standards, data quality expectations, retention, ownership, reuse limits, and deletion requirements. If vendors will use agency data to improve models, that use should be explicitly approved or prohibited. Acceptance and monitoring requirements should specify what evidence the vendor must provide before launch and throughout operations. This may include validation reports, test cases, model cards, change logs, uptime reports, incident reports, bias assessments, security documentation, and user training materials.</a:t>
-            </a:r>
-            <a:endParaRPr lang="en-US" sz="1420" dirty="0"/>
+              <a:t>A requirement is a clear statement of what a system must do or how it must perform.</a:t>
+            </a:r>
+            <a:endParaRPr lang="en-US" sz="1250" dirty="0"/>
+          </a:p>
+        </p:txBody>
+      </p:sp>
+      <p:sp>
+        <p:nvSpPr>
+          <p:cNvPr id="14" name="Shape 12"/>
+          <p:cNvSpPr/>
+          <p:nvPr/>
+        </p:nvSpPr>
+        <p:spPr>
+          <a:xfrm>
+            <a:off x="7909560" y="3520440"/>
+            <a:ext cx="3154680" cy="1737360"/>
+          </a:xfrm>
+          <a:prstGeom prst="roundRect">
+            <a:avLst>
+              <a:gd name="adj" fmla="val 6316"/>
+            </a:avLst>
+          </a:prstGeom>
+          <a:solidFill>
+            <a:srgbClr val="EAF6F8"/>
+          </a:solidFill>
+          <a:ln w="12700">
+            <a:solidFill>
+              <a:srgbClr val="B9D7E6"/>
+            </a:solidFill>
+            <a:prstDash val="solid"/>
+          </a:ln>
+        </p:spPr>
+      </p:sp>
+      <p:sp>
+        <p:nvSpPr>
+          <p:cNvPr id="15" name="Text 13"/>
+          <p:cNvSpPr/>
+          <p:nvPr/>
+        </p:nvSpPr>
+        <p:spPr>
+          <a:xfrm>
+            <a:off x="8074152" y="3666744"/>
+            <a:ext cx="2825496" cy="201168"/>
+          </a:xfrm>
+          <a:prstGeom prst="rect">
+            <a:avLst/>
+          </a:prstGeom>
+          <a:noFill/>
+          <a:ln/>
+        </p:spPr>
+        <p:txBody>
+          <a:bodyPr wrap="square" lIns="0" tIns="0" rIns="0" bIns="0" rtlCol="0" anchor="ctr"/>
+          <a:lstStyle/>
+          <a:p>
+            <a:pPr indent="0" marL="0">
+              <a:buNone/>
+            </a:pPr>
+            <a:r>
+              <a:rPr lang="en-US" sz="950" b="1" dirty="0">
+                <a:solidFill>
+                  <a:srgbClr val="0068B7"/>
+                </a:solidFill>
+                <a:latin typeface="Aptos" pitchFamily="34" charset="0"/>
+                <a:ea typeface="Aptos" pitchFamily="34" charset="-122"/>
+                <a:cs typeface="Aptos" pitchFamily="34" charset="-120"/>
+              </a:rPr>
+              <a:t>Use this for</a:t>
+            </a:r>
+            <a:endParaRPr lang="en-US" sz="950" dirty="0"/>
+          </a:p>
+        </p:txBody>
+      </p:sp>
+      <p:sp>
+        <p:nvSpPr>
+          <p:cNvPr id="16" name="Text 14"/>
+          <p:cNvSpPr/>
+          <p:nvPr/>
+        </p:nvSpPr>
+        <p:spPr>
+          <a:xfrm>
+            <a:off x="8074152" y="3959352"/>
+            <a:ext cx="2825496" cy="1170432"/>
+          </a:xfrm>
+          <a:prstGeom prst="rect">
+            <a:avLst/>
+          </a:prstGeom>
+          <a:noFill/>
+          <a:ln/>
+        </p:spPr>
+        <p:txBody>
+          <a:bodyPr wrap="square" lIns="0" tIns="0" rIns="0" bIns="0" rtlCol="0" anchor="t">
+            <a:normAutofit/>
+          </a:bodyPr>
+          <a:lstStyle/>
+          <a:p>
+            <a:pPr indent="0" marL="0">
+              <a:buNone/>
+            </a:pPr>
+            <a:r>
+              <a:rPr lang="en-US" sz="1250" dirty="0">
+                <a:solidFill>
+                  <a:srgbClr val="17364A"/>
+                </a:solidFill>
+                <a:latin typeface="Aptos" pitchFamily="34" charset="0"/>
+                <a:ea typeface="Aptos" pitchFamily="34" charset="-122"/>
+                <a:cs typeface="Aptos" pitchFamily="34" charset="-120"/>
+              </a:rPr>
+              <a:t>Connect the concept to public health decisions, safeguards, documentation, or implementation work.</a:t>
+            </a:r>
+            <a:endParaRPr lang="en-US" sz="1250" dirty="0"/>
           </a:p>
         </p:txBody>
       </p:sp>
@@ -3119,7 +3649,32 @@
       </p:sp>
       <p:sp>
         <p:nvSpPr>
-          <p:cNvPr id="3" name="Text 1"/>
+          <p:cNvPr id="3" name="Shape 1"/>
+          <p:cNvSpPr/>
+          <p:nvPr/>
+        </p:nvSpPr>
+        <p:spPr>
+          <a:xfrm>
+            <a:off x="0" y="164592"/>
+            <a:ext cx="146304" cy="6693408"/>
+          </a:xfrm>
+          <a:prstGeom prst="rect">
+            <a:avLst/>
+          </a:prstGeom>
+          <a:solidFill>
+            <a:srgbClr val="2F8A28"/>
+          </a:solidFill>
+          <a:ln w="12700">
+            <a:solidFill>
+              <a:srgbClr val="2F8A28"/>
+            </a:solidFill>
+            <a:prstDash val="solid"/>
+          </a:ln>
+        </p:spPr>
+      </p:sp>
+      <p:sp>
+        <p:nvSpPr>
+          <p:cNvPr id="4" name="Text 2"/>
           <p:cNvSpPr/>
           <p:nvPr/>
         </p:nvSpPr>
@@ -3158,7 +3713,7 @@
       </p:sp>
       <p:sp>
         <p:nvSpPr>
-          <p:cNvPr id="4" name="Text 2"/>
+          <p:cNvPr id="5" name="Text 3"/>
           <p:cNvSpPr/>
           <p:nvPr/>
         </p:nvSpPr>
@@ -3197,7 +3752,7 @@
       </p:sp>
       <p:sp>
         <p:nvSpPr>
-          <p:cNvPr id="5" name="Text 3"/>
+          <p:cNvPr id="6" name="Text 4"/>
           <p:cNvSpPr/>
           <p:nvPr/>
         </p:nvSpPr>
@@ -3236,13 +3791,77 @@
       </p:sp>
       <p:sp>
         <p:nvSpPr>
-          <p:cNvPr id="6" name="Text 4"/>
+          <p:cNvPr id="7" name="Shape 5"/>
           <p:cNvSpPr/>
           <p:nvPr/>
         </p:nvSpPr>
         <p:spPr>
           <a:xfrm>
             <a:off x="640080" y="658368"/>
+            <a:ext cx="420624" cy="420624"/>
+          </a:xfrm>
+          <a:prstGeom prst="ellipse">
+            <a:avLst/>
+          </a:prstGeom>
+          <a:solidFill>
+            <a:srgbClr val="0068B7"/>
+          </a:solidFill>
+          <a:ln w="12700">
+            <a:solidFill>
+              <a:srgbClr val="0068B7"/>
+            </a:solidFill>
+            <a:prstDash val="solid"/>
+          </a:ln>
+        </p:spPr>
+      </p:sp>
+      <p:sp>
+        <p:nvSpPr>
+          <p:cNvPr id="8" name="Text 6"/>
+          <p:cNvSpPr/>
+          <p:nvPr/>
+        </p:nvSpPr>
+        <p:spPr>
+          <a:xfrm>
+            <a:off x="640080" y="731520"/>
+            <a:ext cx="420624" cy="164592"/>
+          </a:xfrm>
+          <a:prstGeom prst="rect">
+            <a:avLst/>
+          </a:prstGeom>
+          <a:noFill/>
+          <a:ln/>
+        </p:spPr>
+        <p:txBody>
+          <a:bodyPr wrap="square" lIns="0" tIns="0" rIns="0" bIns="0" rtlCol="0" anchor="ctr"/>
+          <a:lstStyle/>
+          <a:p>
+            <a:pPr algn="ctr" indent="0" marL="0">
+              <a:buNone/>
+            </a:pPr>
+            <a:r>
+              <a:rPr lang="en-US" sz="1100" b="1" dirty="0">
+                <a:solidFill>
+                  <a:srgbClr val="FFFFFF"/>
+                </a:solidFill>
+                <a:latin typeface="Aptos" pitchFamily="34" charset="0"/>
+                <a:ea typeface="Aptos" pitchFamily="34" charset="-122"/>
+                <a:cs typeface="Aptos" pitchFamily="34" charset="-120"/>
+              </a:rPr>
+              <a:t>6</a:t>
+            </a:r>
+            <a:endParaRPr lang="en-US" sz="1100" dirty="0"/>
+          </a:p>
+        </p:txBody>
+      </p:sp>
+      <p:sp>
+        <p:nvSpPr>
+          <p:cNvPr id="9" name="Text 7"/>
+          <p:cNvSpPr/>
+          <p:nvPr/>
+        </p:nvSpPr>
+        <p:spPr>
+          <a:xfrm>
+            <a:off x="640080" y="621792"/>
             <a:ext cx="10881360" cy="566928"/>
           </a:xfrm>
           <a:prstGeom prst="rect">
@@ -3269,7 +3888,7 @@
                 <a:ea typeface="Aptos Display" pitchFamily="34" charset="-122"/>
                 <a:cs typeface="Aptos Display" pitchFamily="34" charset="-120"/>
               </a:rPr>
-              <a:t>Risks, Failure Modes, and Guardrails</a:t>
+              <a:t>Public Health Example</a:t>
             </a:r>
             <a:endParaRPr lang="en-US" sz="2700" dirty="0"/>
           </a:p>
@@ -3277,32 +3896,150 @@
       </p:sp>
       <p:sp>
         <p:nvSpPr>
-          <p:cNvPr id="7" name="Text 5"/>
-          <p:cNvSpPr/>
-          <p:nvPr/>
-        </p:nvSpPr>
-        <p:spPr>
-          <a:xfrm>
-            <a:off x="822960" y="1325880"/>
-            <a:ext cx="10378440" cy="4800600"/>
-          </a:xfrm>
-          <a:prstGeom prst="rect">
-            <a:avLst/>
-          </a:prstGeom>
-          <a:noFill/>
-          <a:ln/>
-        </p:spPr>
-        <p:txBody>
-          <a:bodyPr wrap="square" lIns="1016" tIns="1016" rIns="1016" bIns="1016" rtlCol="0" anchor="t">
+          <p:cNvPr id="10" name="Text 8"/>
+          <p:cNvSpPr/>
+          <p:nvPr/>
+        </p:nvSpPr>
+        <p:spPr>
+          <a:xfrm>
+            <a:off x="868680" y="1417320"/>
+            <a:ext cx="6675120" cy="4434840"/>
+          </a:xfrm>
+          <a:prstGeom prst="rect">
+            <a:avLst/>
+          </a:prstGeom>
+          <a:noFill/>
+          <a:ln/>
+        </p:spPr>
+        <p:txBody>
+          <a:bodyPr wrap="square" lIns="635" tIns="635" rIns="635" bIns="635" rtlCol="0" anchor="t">
             <a:normAutofit/>
           </a:bodyPr>
           <a:lstStyle/>
           <a:p>
+            <a:r>
+              <a:rPr lang="en-US" sz="1700" dirty="0">
+                <a:solidFill>
+                  <a:srgbClr val="17364A"/>
+                </a:solidFill>
+                <a:latin typeface="Aptos" pitchFamily="34" charset="0"/>
+                <a:ea typeface="Aptos" pitchFamily="34" charset="-122"/>
+                <a:cs typeface="Aptos" pitchFamily="34" charset="-120"/>
+              </a:rPr>
+              <a:t>A state health agency procuring an AI-supported case triage tool should require interoperability with the surveillance.</a:t>
+            </a:r>
+            <a:endParaRPr lang="en-US" sz="1700" dirty="0"/>
+          </a:p>
+          <a:p>
+            <a:r>
+              <a:rPr lang="en-US" sz="1700" dirty="0">
+                <a:solidFill>
+                  <a:srgbClr val="17364A"/>
+                </a:solidFill>
+                <a:latin typeface="Aptos" pitchFamily="34" charset="0"/>
+                <a:ea typeface="Aptos" pitchFamily="34" charset="-122"/>
+                <a:cs typeface="Aptos" pitchFamily="34" charset="-120"/>
+              </a:rPr>
+              <a:t>These requirements make vendor claims testable and enforceable.</a:t>
+            </a:r>
+            <a:endParaRPr lang="en-US" sz="1700" dirty="0"/>
+          </a:p>
+        </p:txBody>
+      </p:sp>
+      <p:sp>
+        <p:nvSpPr>
+          <p:cNvPr id="11" name="Shape 9"/>
+          <p:cNvSpPr/>
+          <p:nvPr/>
+        </p:nvSpPr>
+        <p:spPr>
+          <a:xfrm>
+            <a:off x="7909560" y="1417320"/>
+            <a:ext cx="3154680" cy="1828800"/>
+          </a:xfrm>
+          <a:prstGeom prst="roundRect">
+            <a:avLst>
+              <a:gd name="adj" fmla="val 6000"/>
+            </a:avLst>
+          </a:prstGeom>
+          <a:solidFill>
+            <a:srgbClr val="EEF8ED"/>
+          </a:solidFill>
+          <a:ln w="12700">
+            <a:solidFill>
+              <a:srgbClr val="B9D7E6"/>
+            </a:solidFill>
+            <a:prstDash val="solid"/>
+          </a:ln>
+        </p:spPr>
+      </p:sp>
+      <p:sp>
+        <p:nvSpPr>
+          <p:cNvPr id="12" name="Text 10"/>
+          <p:cNvSpPr/>
+          <p:nvPr/>
+        </p:nvSpPr>
+        <p:spPr>
+          <a:xfrm>
+            <a:off x="8074152" y="1563624"/>
+            <a:ext cx="2825496" cy="201168"/>
+          </a:xfrm>
+          <a:prstGeom prst="rect">
+            <a:avLst/>
+          </a:prstGeom>
+          <a:noFill/>
+          <a:ln/>
+        </p:spPr>
+        <p:txBody>
+          <a:bodyPr wrap="square" lIns="0" tIns="0" rIns="0" bIns="0" rtlCol="0" anchor="ctr"/>
+          <a:lstStyle/>
+          <a:p>
             <a:pPr indent="0" marL="0">
               <a:buNone/>
             </a:pPr>
             <a:r>
-              <a:rPr lang="en-US" sz="1420" dirty="0">
+              <a:rPr lang="en-US" sz="950" b="1" dirty="0">
+                <a:solidFill>
+                  <a:srgbClr val="0068B7"/>
+                </a:solidFill>
+                <a:latin typeface="Aptos" pitchFamily="34" charset="0"/>
+                <a:ea typeface="Aptos" pitchFamily="34" charset="-122"/>
+                <a:cs typeface="Aptos" pitchFamily="34" charset="-120"/>
+              </a:rPr>
+              <a:t>Key idea</a:t>
+            </a:r>
+            <a:endParaRPr lang="en-US" sz="950" dirty="0"/>
+          </a:p>
+        </p:txBody>
+      </p:sp>
+      <p:sp>
+        <p:nvSpPr>
+          <p:cNvPr id="13" name="Text 11"/>
+          <p:cNvSpPr/>
+          <p:nvPr/>
+        </p:nvSpPr>
+        <p:spPr>
+          <a:xfrm>
+            <a:off x="8074152" y="1856232"/>
+            <a:ext cx="2825496" cy="1261872"/>
+          </a:xfrm>
+          <a:prstGeom prst="rect">
+            <a:avLst/>
+          </a:prstGeom>
+          <a:noFill/>
+          <a:ln/>
+        </p:spPr>
+        <p:txBody>
+          <a:bodyPr wrap="square" lIns="0" tIns="0" rIns="0" bIns="0" rtlCol="0" anchor="t">
+            <a:normAutofit/>
+          </a:bodyPr>
+          <a:lstStyle/>
+          <a:p>
+            <a:pPr indent="0" marL="0">
+              <a:buNone/>
+            </a:pPr>
+            <a:r>
+              <a:rPr lang="en-US" sz="1250" dirty="0">
                 <a:solidFill>
                   <a:srgbClr val="17364A"/>
                 </a:solidFill>
@@ -3310,9 +4047,116 @@
                 <a:ea typeface="Aptos" pitchFamily="34" charset="-122"/>
                 <a:cs typeface="Aptos" pitchFamily="34" charset="-120"/>
               </a:rPr>
-              <a:t>A common failure mode is treating the topic as a technical detail rather than a public health control. When staff do not connect technical decisions to authority, workflow, equity, privacy, security, and accountability, the agency may adopt a tool that appears useful but cannot be sustained or defended. Another risk is relying on vendor claims without agency-defined evidence. Vendors may provide demonstrations, dashboards, or summary metrics that do not match the agency workflow or data environment. A guardrail is to require documentation, test results, acceptance criteria, and agency-controlled review. A third risk is failing to plan for change. Public health data, policies, systems, and emergencies change. Any technical approach must include monitoring, review, versioning, escalation, and retirement pathways so the agency can respond when assumptions no longer hold.</a:t>
-            </a:r>
-            <a:endParaRPr lang="en-US" sz="1420" dirty="0"/>
+              <a:t>A state health agency procuring an AI-supported case triage tool should require interoperability with the surveillance.</a:t>
+            </a:r>
+            <a:endParaRPr lang="en-US" sz="1250" dirty="0"/>
+          </a:p>
+        </p:txBody>
+      </p:sp>
+      <p:sp>
+        <p:nvSpPr>
+          <p:cNvPr id="14" name="Shape 12"/>
+          <p:cNvSpPr/>
+          <p:nvPr/>
+        </p:nvSpPr>
+        <p:spPr>
+          <a:xfrm>
+            <a:off x="7909560" y="3520440"/>
+            <a:ext cx="3154680" cy="1737360"/>
+          </a:xfrm>
+          <a:prstGeom prst="roundRect">
+            <a:avLst>
+              <a:gd name="adj" fmla="val 6316"/>
+            </a:avLst>
+          </a:prstGeom>
+          <a:solidFill>
+            <a:srgbClr val="EAF6F8"/>
+          </a:solidFill>
+          <a:ln w="12700">
+            <a:solidFill>
+              <a:srgbClr val="B9D7E6"/>
+            </a:solidFill>
+            <a:prstDash val="solid"/>
+          </a:ln>
+        </p:spPr>
+      </p:sp>
+      <p:sp>
+        <p:nvSpPr>
+          <p:cNvPr id="15" name="Text 13"/>
+          <p:cNvSpPr/>
+          <p:nvPr/>
+        </p:nvSpPr>
+        <p:spPr>
+          <a:xfrm>
+            <a:off x="8074152" y="3666744"/>
+            <a:ext cx="2825496" cy="201168"/>
+          </a:xfrm>
+          <a:prstGeom prst="rect">
+            <a:avLst/>
+          </a:prstGeom>
+          <a:noFill/>
+          <a:ln/>
+        </p:spPr>
+        <p:txBody>
+          <a:bodyPr wrap="square" lIns="0" tIns="0" rIns="0" bIns="0" rtlCol="0" anchor="ctr"/>
+          <a:lstStyle/>
+          <a:p>
+            <a:pPr indent="0" marL="0">
+              <a:buNone/>
+            </a:pPr>
+            <a:r>
+              <a:rPr lang="en-US" sz="950" b="1" dirty="0">
+                <a:solidFill>
+                  <a:srgbClr val="0068B7"/>
+                </a:solidFill>
+                <a:latin typeface="Aptos" pitchFamily="34" charset="0"/>
+                <a:ea typeface="Aptos" pitchFamily="34" charset="-122"/>
+                <a:cs typeface="Aptos" pitchFamily="34" charset="-120"/>
+              </a:rPr>
+              <a:t>Use this for</a:t>
+            </a:r>
+            <a:endParaRPr lang="en-US" sz="950" dirty="0"/>
+          </a:p>
+        </p:txBody>
+      </p:sp>
+      <p:sp>
+        <p:nvSpPr>
+          <p:cNvPr id="16" name="Text 14"/>
+          <p:cNvSpPr/>
+          <p:nvPr/>
+        </p:nvSpPr>
+        <p:spPr>
+          <a:xfrm>
+            <a:off x="8074152" y="3959352"/>
+            <a:ext cx="2825496" cy="1170432"/>
+          </a:xfrm>
+          <a:prstGeom prst="rect">
+            <a:avLst/>
+          </a:prstGeom>
+          <a:noFill/>
+          <a:ln/>
+        </p:spPr>
+        <p:txBody>
+          <a:bodyPr wrap="square" lIns="0" tIns="0" rIns="0" bIns="0" rtlCol="0" anchor="t">
+            <a:normAutofit/>
+          </a:bodyPr>
+          <a:lstStyle/>
+          <a:p>
+            <a:pPr indent="0" marL="0">
+              <a:buNone/>
+            </a:pPr>
+            <a:r>
+              <a:rPr lang="en-US" sz="1250" dirty="0">
+                <a:solidFill>
+                  <a:srgbClr val="17364A"/>
+                </a:solidFill>
+                <a:latin typeface="Aptos" pitchFamily="34" charset="0"/>
+                <a:ea typeface="Aptos" pitchFamily="34" charset="-122"/>
+                <a:cs typeface="Aptos" pitchFamily="34" charset="-120"/>
+              </a:rPr>
+              <a:t>Connect the concept to public health decisions, safeguards, documentation, or implementation work.</a:t>
+            </a:r>
+            <a:endParaRPr lang="en-US" sz="1250" dirty="0"/>
           </a:p>
         </p:txBody>
       </p:sp>
@@ -3375,7 +4219,32 @@
       </p:sp>
       <p:sp>
         <p:nvSpPr>
-          <p:cNvPr id="3" name="Text 1"/>
+          <p:cNvPr id="3" name="Shape 1"/>
+          <p:cNvSpPr/>
+          <p:nvPr/>
+        </p:nvSpPr>
+        <p:spPr>
+          <a:xfrm>
+            <a:off x="0" y="164592"/>
+            <a:ext cx="146304" cy="6693408"/>
+          </a:xfrm>
+          <a:prstGeom prst="rect">
+            <a:avLst/>
+          </a:prstGeom>
+          <a:solidFill>
+            <a:srgbClr val="2F8A28"/>
+          </a:solidFill>
+          <a:ln w="12700">
+            <a:solidFill>
+              <a:srgbClr val="2F8A28"/>
+            </a:solidFill>
+            <a:prstDash val="solid"/>
+          </a:ln>
+        </p:spPr>
+      </p:sp>
+      <p:sp>
+        <p:nvSpPr>
+          <p:cNvPr id="4" name="Text 2"/>
           <p:cNvSpPr/>
           <p:nvPr/>
         </p:nvSpPr>
@@ -3414,7 +4283,7 @@
       </p:sp>
       <p:sp>
         <p:nvSpPr>
-          <p:cNvPr id="4" name="Text 2"/>
+          <p:cNvPr id="5" name="Text 3"/>
           <p:cNvSpPr/>
           <p:nvPr/>
         </p:nvSpPr>
@@ -3453,7 +4322,7 @@
       </p:sp>
       <p:sp>
         <p:nvSpPr>
-          <p:cNvPr id="5" name="Text 3"/>
+          <p:cNvPr id="6" name="Text 4"/>
           <p:cNvSpPr/>
           <p:nvPr/>
         </p:nvSpPr>
@@ -3492,13 +4361,77 @@
       </p:sp>
       <p:sp>
         <p:nvSpPr>
-          <p:cNvPr id="6" name="Text 4"/>
+          <p:cNvPr id="7" name="Shape 5"/>
           <p:cNvSpPr/>
           <p:nvPr/>
         </p:nvSpPr>
         <p:spPr>
           <a:xfrm>
             <a:off x="640080" y="658368"/>
+            <a:ext cx="420624" cy="420624"/>
+          </a:xfrm>
+          <a:prstGeom prst="ellipse">
+            <a:avLst/>
+          </a:prstGeom>
+          <a:solidFill>
+            <a:srgbClr val="0068B7"/>
+          </a:solidFill>
+          <a:ln w="12700">
+            <a:solidFill>
+              <a:srgbClr val="0068B7"/>
+            </a:solidFill>
+            <a:prstDash val="solid"/>
+          </a:ln>
+        </p:spPr>
+      </p:sp>
+      <p:sp>
+        <p:nvSpPr>
+          <p:cNvPr id="8" name="Text 6"/>
+          <p:cNvSpPr/>
+          <p:nvPr/>
+        </p:nvSpPr>
+        <p:spPr>
+          <a:xfrm>
+            <a:off x="640080" y="731520"/>
+            <a:ext cx="420624" cy="164592"/>
+          </a:xfrm>
+          <a:prstGeom prst="rect">
+            <a:avLst/>
+          </a:prstGeom>
+          <a:noFill/>
+          <a:ln/>
+        </p:spPr>
+        <p:txBody>
+          <a:bodyPr wrap="square" lIns="0" tIns="0" rIns="0" bIns="0" rtlCol="0" anchor="ctr"/>
+          <a:lstStyle/>
+          <a:p>
+            <a:pPr algn="ctr" indent="0" marL="0">
+              <a:buNone/>
+            </a:pPr>
+            <a:r>
+              <a:rPr lang="en-US" sz="1100" b="1" dirty="0">
+                <a:solidFill>
+                  <a:srgbClr val="FFFFFF"/>
+                </a:solidFill>
+                <a:latin typeface="Aptos" pitchFamily="34" charset="0"/>
+                <a:ea typeface="Aptos" pitchFamily="34" charset="-122"/>
+                <a:cs typeface="Aptos" pitchFamily="34" charset="-120"/>
+              </a:rPr>
+              <a:t>7</a:t>
+            </a:r>
+            <a:endParaRPr lang="en-US" sz="1100" dirty="0"/>
+          </a:p>
+        </p:txBody>
+      </p:sp>
+      <p:sp>
+        <p:nvSpPr>
+          <p:cNvPr id="9" name="Text 7"/>
+          <p:cNvSpPr/>
+          <p:nvPr/>
+        </p:nvSpPr>
+        <p:spPr>
+          <a:xfrm>
+            <a:off x="640080" y="621792"/>
             <a:ext cx="10881360" cy="566928"/>
           </a:xfrm>
           <a:prstGeom prst="rect">
@@ -3525,7 +4458,7 @@
                 <a:ea typeface="Aptos Display" pitchFamily="34" charset="-122"/>
                 <a:cs typeface="Aptos Display" pitchFamily="34" charset="-120"/>
               </a:rPr>
-              <a:t>Application to AI-Supported Workflows</a:t>
+              <a:t>Topic Deep Dive</a:t>
             </a:r>
             <a:endParaRPr lang="en-US" sz="2700" dirty="0"/>
           </a:p>
@@ -3533,32 +4466,178 @@
       </p:sp>
       <p:sp>
         <p:nvSpPr>
-          <p:cNvPr id="7" name="Text 5"/>
-          <p:cNvSpPr/>
-          <p:nvPr/>
-        </p:nvSpPr>
-        <p:spPr>
-          <a:xfrm>
-            <a:off x="822960" y="1325880"/>
-            <a:ext cx="10378440" cy="4800600"/>
-          </a:xfrm>
-          <a:prstGeom prst="rect">
-            <a:avLst/>
-          </a:prstGeom>
-          <a:noFill/>
-          <a:ln/>
-        </p:spPr>
-        <p:txBody>
-          <a:bodyPr wrap="square" lIns="1016" tIns="1016" rIns="1016" bIns="1016" rtlCol="0" anchor="t">
+          <p:cNvPr id="10" name="Text 8"/>
+          <p:cNvSpPr/>
+          <p:nvPr/>
+        </p:nvSpPr>
+        <p:spPr>
+          <a:xfrm>
+            <a:off x="868680" y="1417320"/>
+            <a:ext cx="6675120" cy="4434840"/>
+          </a:xfrm>
+          <a:prstGeom prst="rect">
+            <a:avLst/>
+          </a:prstGeom>
+          <a:noFill/>
+          <a:ln/>
+        </p:spPr>
+        <p:txBody>
+          <a:bodyPr wrap="square" lIns="635" tIns="635" rIns="635" bIns="635" rtlCol="0" anchor="t">
             <a:normAutofit/>
           </a:bodyPr>
           <a:lstStyle/>
           <a:p>
+            <a:r>
+              <a:rPr lang="en-US" sz="1700" dirty="0">
+                <a:solidFill>
+                  <a:srgbClr val="17364A"/>
+                </a:solidFill>
+                <a:latin typeface="Aptos" pitchFamily="34" charset="0"/>
+                <a:ea typeface="Aptos" pitchFamily="34" charset="-122"/>
+                <a:cs typeface="Aptos" pitchFamily="34" charset="-120"/>
+              </a:rPr>
+              <a:t>Strong AI requirements begin with intended use.</a:t>
+            </a:r>
+            <a:endParaRPr lang="en-US" sz="1700" dirty="0"/>
+          </a:p>
+          <a:p>
+            <a:r>
+              <a:rPr lang="en-US" sz="1700" dirty="0">
+                <a:solidFill>
+                  <a:srgbClr val="17364A"/>
+                </a:solidFill>
+                <a:latin typeface="Aptos" pitchFamily="34" charset="0"/>
+                <a:ea typeface="Aptos" pitchFamily="34" charset="-122"/>
+                <a:cs typeface="Aptos" pitchFamily="34" charset="-120"/>
+              </a:rPr>
+              <a:t>The agency should state the specific workflow, users, data sources, outputs, and decisions the system may support.</a:t>
+            </a:r>
+            <a:endParaRPr lang="en-US" sz="1700" dirty="0"/>
+          </a:p>
+          <a:p>
+            <a:r>
+              <a:rPr lang="en-US" sz="1700" dirty="0">
+                <a:solidFill>
+                  <a:srgbClr val="17364A"/>
+                </a:solidFill>
+                <a:latin typeface="Aptos" pitchFamily="34" charset="0"/>
+                <a:ea typeface="Aptos" pitchFamily="34" charset="-122"/>
+                <a:cs typeface="Aptos" pitchFamily="34" charset="-120"/>
+              </a:rPr>
+              <a:t>It should also state prohibited uses.</a:t>
+            </a:r>
+            <a:endParaRPr lang="en-US" sz="1700" dirty="0"/>
+          </a:p>
+          <a:p>
+            <a:r>
+              <a:rPr lang="en-US" sz="1700" dirty="0">
+                <a:solidFill>
+                  <a:srgbClr val="17364A"/>
+                </a:solidFill>
+                <a:latin typeface="Aptos" pitchFamily="34" charset="0"/>
+                <a:ea typeface="Aptos" pitchFamily="34" charset="-122"/>
+                <a:cs typeface="Aptos" pitchFamily="34" charset="-120"/>
+              </a:rPr>
+              <a:t>This prevents scope creep and reduces the chance that a tool will be used for decisions it was not designed or approved to.</a:t>
+            </a:r>
+            <a:endParaRPr lang="en-US" sz="1700" dirty="0"/>
+          </a:p>
+        </p:txBody>
+      </p:sp>
+      <p:sp>
+        <p:nvSpPr>
+          <p:cNvPr id="11" name="Shape 9"/>
+          <p:cNvSpPr/>
+          <p:nvPr/>
+        </p:nvSpPr>
+        <p:spPr>
+          <a:xfrm>
+            <a:off x="7909560" y="1417320"/>
+            <a:ext cx="3154680" cy="1828800"/>
+          </a:xfrm>
+          <a:prstGeom prst="roundRect">
+            <a:avLst>
+              <a:gd name="adj" fmla="val 6000"/>
+            </a:avLst>
+          </a:prstGeom>
+          <a:solidFill>
+            <a:srgbClr val="EEF8ED"/>
+          </a:solidFill>
+          <a:ln w="12700">
+            <a:solidFill>
+              <a:srgbClr val="B9D7E6"/>
+            </a:solidFill>
+            <a:prstDash val="solid"/>
+          </a:ln>
+        </p:spPr>
+      </p:sp>
+      <p:sp>
+        <p:nvSpPr>
+          <p:cNvPr id="12" name="Text 10"/>
+          <p:cNvSpPr/>
+          <p:nvPr/>
+        </p:nvSpPr>
+        <p:spPr>
+          <a:xfrm>
+            <a:off x="8074152" y="1563624"/>
+            <a:ext cx="2825496" cy="201168"/>
+          </a:xfrm>
+          <a:prstGeom prst="rect">
+            <a:avLst/>
+          </a:prstGeom>
+          <a:noFill/>
+          <a:ln/>
+        </p:spPr>
+        <p:txBody>
+          <a:bodyPr wrap="square" lIns="0" tIns="0" rIns="0" bIns="0" rtlCol="0" anchor="ctr"/>
+          <a:lstStyle/>
+          <a:p>
             <a:pPr indent="0" marL="0">
               <a:buNone/>
             </a:pPr>
             <a:r>
-              <a:rPr lang="en-US" sz="1420" dirty="0">
+              <a:rPr lang="en-US" sz="950" b="1" dirty="0">
+                <a:solidFill>
+                  <a:srgbClr val="0068B7"/>
+                </a:solidFill>
+                <a:latin typeface="Aptos" pitchFamily="34" charset="0"/>
+                <a:ea typeface="Aptos" pitchFamily="34" charset="-122"/>
+                <a:cs typeface="Aptos" pitchFamily="34" charset="-120"/>
+              </a:rPr>
+              <a:t>Key idea</a:t>
+            </a:r>
+            <a:endParaRPr lang="en-US" sz="950" dirty="0"/>
+          </a:p>
+        </p:txBody>
+      </p:sp>
+      <p:sp>
+        <p:nvSpPr>
+          <p:cNvPr id="13" name="Text 11"/>
+          <p:cNvSpPr/>
+          <p:nvPr/>
+        </p:nvSpPr>
+        <p:spPr>
+          <a:xfrm>
+            <a:off x="8074152" y="1856232"/>
+            <a:ext cx="2825496" cy="1261872"/>
+          </a:xfrm>
+          <a:prstGeom prst="rect">
+            <a:avLst/>
+          </a:prstGeom>
+          <a:noFill/>
+          <a:ln/>
+        </p:spPr>
+        <p:txBody>
+          <a:bodyPr wrap="square" lIns="0" tIns="0" rIns="0" bIns="0" rtlCol="0" anchor="t">
+            <a:normAutofit/>
+          </a:bodyPr>
+          <a:lstStyle/>
+          <a:p>
+            <a:pPr indent="0" marL="0">
+              <a:buNone/>
+            </a:pPr>
+            <a:r>
+              <a:rPr lang="en-US" sz="1250" dirty="0">
                 <a:solidFill>
                   <a:srgbClr val="17364A"/>
                 </a:solidFill>
@@ -3566,9 +4645,116 @@
                 <a:ea typeface="Aptos" pitchFamily="34" charset="-122"/>
                 <a:cs typeface="Aptos" pitchFamily="34" charset="-120"/>
               </a:rPr>
-              <a:t>Generative AI, predictive analytics, RAG, automation, and agentic workflows all depend on the controls described in this module. The controls should be scaled to the risk of the use case. A tool that drafts internal training text may require lighter review than a tool that updates case records, prioritizes outreach, or supports public communication during an emergency. The module should be applied during readiness assessment, procurement, implementation planning, pilot testing, and post-deployment monitoring. Learners should document how the topic affects data, systems, users, safeguards, and decision-making for the selected workflow.</a:t>
-            </a:r>
-            <a:endParaRPr lang="en-US" sz="1420" dirty="0"/>
+              <a:t>Strong AI requirements begin with intended use.</a:t>
+            </a:r>
+            <a:endParaRPr lang="en-US" sz="1250" dirty="0"/>
+          </a:p>
+        </p:txBody>
+      </p:sp>
+      <p:sp>
+        <p:nvSpPr>
+          <p:cNvPr id="14" name="Shape 12"/>
+          <p:cNvSpPr/>
+          <p:nvPr/>
+        </p:nvSpPr>
+        <p:spPr>
+          <a:xfrm>
+            <a:off x="7909560" y="3520440"/>
+            <a:ext cx="3154680" cy="1737360"/>
+          </a:xfrm>
+          <a:prstGeom prst="roundRect">
+            <a:avLst>
+              <a:gd name="adj" fmla="val 6316"/>
+            </a:avLst>
+          </a:prstGeom>
+          <a:solidFill>
+            <a:srgbClr val="EAF6F8"/>
+          </a:solidFill>
+          <a:ln w="12700">
+            <a:solidFill>
+              <a:srgbClr val="B9D7E6"/>
+            </a:solidFill>
+            <a:prstDash val="solid"/>
+          </a:ln>
+        </p:spPr>
+      </p:sp>
+      <p:sp>
+        <p:nvSpPr>
+          <p:cNvPr id="15" name="Text 13"/>
+          <p:cNvSpPr/>
+          <p:nvPr/>
+        </p:nvSpPr>
+        <p:spPr>
+          <a:xfrm>
+            <a:off x="8074152" y="3666744"/>
+            <a:ext cx="2825496" cy="201168"/>
+          </a:xfrm>
+          <a:prstGeom prst="rect">
+            <a:avLst/>
+          </a:prstGeom>
+          <a:noFill/>
+          <a:ln/>
+        </p:spPr>
+        <p:txBody>
+          <a:bodyPr wrap="square" lIns="0" tIns="0" rIns="0" bIns="0" rtlCol="0" anchor="ctr"/>
+          <a:lstStyle/>
+          <a:p>
+            <a:pPr indent="0" marL="0">
+              <a:buNone/>
+            </a:pPr>
+            <a:r>
+              <a:rPr lang="en-US" sz="950" b="1" dirty="0">
+                <a:solidFill>
+                  <a:srgbClr val="0068B7"/>
+                </a:solidFill>
+                <a:latin typeface="Aptos" pitchFamily="34" charset="0"/>
+                <a:ea typeface="Aptos" pitchFamily="34" charset="-122"/>
+                <a:cs typeface="Aptos" pitchFamily="34" charset="-120"/>
+              </a:rPr>
+              <a:t>Use this for</a:t>
+            </a:r>
+            <a:endParaRPr lang="en-US" sz="950" dirty="0"/>
+          </a:p>
+        </p:txBody>
+      </p:sp>
+      <p:sp>
+        <p:nvSpPr>
+          <p:cNvPr id="16" name="Text 14"/>
+          <p:cNvSpPr/>
+          <p:nvPr/>
+        </p:nvSpPr>
+        <p:spPr>
+          <a:xfrm>
+            <a:off x="8074152" y="3959352"/>
+            <a:ext cx="2825496" cy="1170432"/>
+          </a:xfrm>
+          <a:prstGeom prst="rect">
+            <a:avLst/>
+          </a:prstGeom>
+          <a:noFill/>
+          <a:ln/>
+        </p:spPr>
+        <p:txBody>
+          <a:bodyPr wrap="square" lIns="0" tIns="0" rIns="0" bIns="0" rtlCol="0" anchor="t">
+            <a:normAutofit/>
+          </a:bodyPr>
+          <a:lstStyle/>
+          <a:p>
+            <a:pPr indent="0" marL="0">
+              <a:buNone/>
+            </a:pPr>
+            <a:r>
+              <a:rPr lang="en-US" sz="1250" dirty="0">
+                <a:solidFill>
+                  <a:srgbClr val="17364A"/>
+                </a:solidFill>
+                <a:latin typeface="Aptos" pitchFamily="34" charset="0"/>
+                <a:ea typeface="Aptos" pitchFamily="34" charset="-122"/>
+                <a:cs typeface="Aptos" pitchFamily="34" charset="-120"/>
+              </a:rPr>
+              <a:t>Connect the concept to public health decisions, safeguards, documentation, or implementation work.</a:t>
+            </a:r>
+            <a:endParaRPr lang="en-US" sz="1250" dirty="0"/>
           </a:p>
         </p:txBody>
       </p:sp>
@@ -3631,7 +4817,32 @@
       </p:sp>
       <p:sp>
         <p:nvSpPr>
-          <p:cNvPr id="3" name="Text 1"/>
+          <p:cNvPr id="3" name="Shape 1"/>
+          <p:cNvSpPr/>
+          <p:nvPr/>
+        </p:nvSpPr>
+        <p:spPr>
+          <a:xfrm>
+            <a:off x="0" y="164592"/>
+            <a:ext cx="146304" cy="6693408"/>
+          </a:xfrm>
+          <a:prstGeom prst="rect">
+            <a:avLst/>
+          </a:prstGeom>
+          <a:solidFill>
+            <a:srgbClr val="2F8A28"/>
+          </a:solidFill>
+          <a:ln w="12700">
+            <a:solidFill>
+              <a:srgbClr val="2F8A28"/>
+            </a:solidFill>
+            <a:prstDash val="solid"/>
+          </a:ln>
+        </p:spPr>
+      </p:sp>
+      <p:sp>
+        <p:nvSpPr>
+          <p:cNvPr id="4" name="Text 2"/>
           <p:cNvSpPr/>
           <p:nvPr/>
         </p:nvSpPr>
@@ -3670,7 +4881,7 @@
       </p:sp>
       <p:sp>
         <p:nvSpPr>
-          <p:cNvPr id="4" name="Text 2"/>
+          <p:cNvPr id="5" name="Text 3"/>
           <p:cNvSpPr/>
           <p:nvPr/>
         </p:nvSpPr>
@@ -3709,7 +4920,7 @@
       </p:sp>
       <p:sp>
         <p:nvSpPr>
-          <p:cNvPr id="5" name="Text 3"/>
+          <p:cNvPr id="6" name="Text 4"/>
           <p:cNvSpPr/>
           <p:nvPr/>
         </p:nvSpPr>
@@ -3748,13 +4959,77 @@
       </p:sp>
       <p:sp>
         <p:nvSpPr>
-          <p:cNvPr id="6" name="Text 4"/>
+          <p:cNvPr id="7" name="Shape 5"/>
           <p:cNvSpPr/>
           <p:nvPr/>
         </p:nvSpPr>
         <p:spPr>
           <a:xfrm>
             <a:off x="640080" y="658368"/>
+            <a:ext cx="420624" cy="420624"/>
+          </a:xfrm>
+          <a:prstGeom prst="ellipse">
+            <a:avLst/>
+          </a:prstGeom>
+          <a:solidFill>
+            <a:srgbClr val="0068B7"/>
+          </a:solidFill>
+          <a:ln w="12700">
+            <a:solidFill>
+              <a:srgbClr val="0068B7"/>
+            </a:solidFill>
+            <a:prstDash val="solid"/>
+          </a:ln>
+        </p:spPr>
+      </p:sp>
+      <p:sp>
+        <p:nvSpPr>
+          <p:cNvPr id="8" name="Text 6"/>
+          <p:cNvSpPr/>
+          <p:nvPr/>
+        </p:nvSpPr>
+        <p:spPr>
+          <a:xfrm>
+            <a:off x="640080" y="731520"/>
+            <a:ext cx="420624" cy="164592"/>
+          </a:xfrm>
+          <a:prstGeom prst="rect">
+            <a:avLst/>
+          </a:prstGeom>
+          <a:noFill/>
+          <a:ln/>
+        </p:spPr>
+        <p:txBody>
+          <a:bodyPr wrap="square" lIns="0" tIns="0" rIns="0" bIns="0" rtlCol="0" anchor="ctr"/>
+          <a:lstStyle/>
+          <a:p>
+            <a:pPr algn="ctr" indent="0" marL="0">
+              <a:buNone/>
+            </a:pPr>
+            <a:r>
+              <a:rPr lang="en-US" sz="1100" b="1" dirty="0">
+                <a:solidFill>
+                  <a:srgbClr val="FFFFFF"/>
+                </a:solidFill>
+                <a:latin typeface="Aptos" pitchFamily="34" charset="0"/>
+                <a:ea typeface="Aptos" pitchFamily="34" charset="-122"/>
+                <a:cs typeface="Aptos" pitchFamily="34" charset="-120"/>
+              </a:rPr>
+              <a:t>8</a:t>
+            </a:r>
+            <a:endParaRPr lang="en-US" sz="1100" dirty="0"/>
+          </a:p>
+        </p:txBody>
+      </p:sp>
+      <p:sp>
+        <p:nvSpPr>
+          <p:cNvPr id="9" name="Text 7"/>
+          <p:cNvSpPr/>
+          <p:nvPr/>
+        </p:nvSpPr>
+        <p:spPr>
+          <a:xfrm>
+            <a:off x="640080" y="621792"/>
             <a:ext cx="10881360" cy="566928"/>
           </a:xfrm>
           <a:prstGeom prst="rect">
@@ -3781,7 +5056,7 @@
                 <a:ea typeface="Aptos Display" pitchFamily="34" charset="-122"/>
                 <a:cs typeface="Aptos Display" pitchFamily="34" charset="-120"/>
               </a:rPr>
-              <a:t>Reflection Questions</a:t>
+              <a:t>Risks, Failure Modes, and Guardrails</a:t>
             </a:r>
             <a:endParaRPr lang="en-US" sz="2700" dirty="0"/>
           </a:p>
@@ -3789,32 +5064,178 @@
       </p:sp>
       <p:sp>
         <p:nvSpPr>
-          <p:cNvPr id="7" name="Text 5"/>
-          <p:cNvSpPr/>
-          <p:nvPr/>
-        </p:nvSpPr>
-        <p:spPr>
-          <a:xfrm>
-            <a:off x="822960" y="1325880"/>
-            <a:ext cx="10378440" cy="4800600"/>
-          </a:xfrm>
-          <a:prstGeom prst="rect">
-            <a:avLst/>
-          </a:prstGeom>
-          <a:noFill/>
-          <a:ln/>
-        </p:spPr>
-        <p:txBody>
-          <a:bodyPr wrap="square" lIns="1016" tIns="1016" rIns="1016" bIns="1016" rtlCol="0" anchor="t">
+          <p:cNvPr id="10" name="Text 8"/>
+          <p:cNvSpPr/>
+          <p:nvPr/>
+        </p:nvSpPr>
+        <p:spPr>
+          <a:xfrm>
+            <a:off x="868680" y="1417320"/>
+            <a:ext cx="6675120" cy="4434840"/>
+          </a:xfrm>
+          <a:prstGeom prst="rect">
+            <a:avLst/>
+          </a:prstGeom>
+          <a:noFill/>
+          <a:ln/>
+        </p:spPr>
+        <p:txBody>
+          <a:bodyPr wrap="square" lIns="635" tIns="635" rIns="635" bIns="635" rtlCol="0" anchor="t">
             <a:normAutofit/>
           </a:bodyPr>
           <a:lstStyle/>
           <a:p>
+            <a:r>
+              <a:rPr lang="en-US" sz="1700" dirty="0">
+                <a:solidFill>
+                  <a:srgbClr val="17364A"/>
+                </a:solidFill>
+                <a:latin typeface="Aptos" pitchFamily="34" charset="0"/>
+                <a:ea typeface="Aptos" pitchFamily="34" charset="-122"/>
+                <a:cs typeface="Aptos" pitchFamily="34" charset="-120"/>
+              </a:rPr>
+              <a:t>A common failure mode is treating the topic as a technical detail rather than a public health control.</a:t>
+            </a:r>
+            <a:endParaRPr lang="en-US" sz="1700" dirty="0"/>
+          </a:p>
+          <a:p>
+            <a:r>
+              <a:rPr lang="en-US" sz="1700" dirty="0">
+                <a:solidFill>
+                  <a:srgbClr val="17364A"/>
+                </a:solidFill>
+                <a:latin typeface="Aptos" pitchFamily="34" charset="0"/>
+                <a:ea typeface="Aptos" pitchFamily="34" charset="-122"/>
+                <a:cs typeface="Aptos" pitchFamily="34" charset="-120"/>
+              </a:rPr>
+              <a:t>When staff do not connect technical decisions to authority, workflow, equity, privacy, security, and accountability, the.</a:t>
+            </a:r>
+            <a:endParaRPr lang="en-US" sz="1700" dirty="0"/>
+          </a:p>
+          <a:p>
+            <a:r>
+              <a:rPr lang="en-US" sz="1700" dirty="0">
+                <a:solidFill>
+                  <a:srgbClr val="17364A"/>
+                </a:solidFill>
+                <a:latin typeface="Aptos" pitchFamily="34" charset="0"/>
+                <a:ea typeface="Aptos" pitchFamily="34" charset="-122"/>
+                <a:cs typeface="Aptos" pitchFamily="34" charset="-120"/>
+              </a:rPr>
+              <a:t>Another risk is relying on vendor claims without agency-defined evidence.</a:t>
+            </a:r>
+            <a:endParaRPr lang="en-US" sz="1700" dirty="0"/>
+          </a:p>
+          <a:p>
+            <a:r>
+              <a:rPr lang="en-US" sz="1700" dirty="0">
+                <a:solidFill>
+                  <a:srgbClr val="17364A"/>
+                </a:solidFill>
+                <a:latin typeface="Aptos" pitchFamily="34" charset="0"/>
+                <a:ea typeface="Aptos" pitchFamily="34" charset="-122"/>
+                <a:cs typeface="Aptos" pitchFamily="34" charset="-120"/>
+              </a:rPr>
+              <a:t>Vendors may provide demonstrations, dashboards, or summary metrics that do not match the agency workflow or data environment.</a:t>
+            </a:r>
+            <a:endParaRPr lang="en-US" sz="1700" dirty="0"/>
+          </a:p>
+        </p:txBody>
+      </p:sp>
+      <p:sp>
+        <p:nvSpPr>
+          <p:cNvPr id="11" name="Shape 9"/>
+          <p:cNvSpPr/>
+          <p:nvPr/>
+        </p:nvSpPr>
+        <p:spPr>
+          <a:xfrm>
+            <a:off x="7909560" y="1417320"/>
+            <a:ext cx="3154680" cy="1828800"/>
+          </a:xfrm>
+          <a:prstGeom prst="roundRect">
+            <a:avLst>
+              <a:gd name="adj" fmla="val 6000"/>
+            </a:avLst>
+          </a:prstGeom>
+          <a:solidFill>
+            <a:srgbClr val="EEF8ED"/>
+          </a:solidFill>
+          <a:ln w="12700">
+            <a:solidFill>
+              <a:srgbClr val="B9D7E6"/>
+            </a:solidFill>
+            <a:prstDash val="solid"/>
+          </a:ln>
+        </p:spPr>
+      </p:sp>
+      <p:sp>
+        <p:nvSpPr>
+          <p:cNvPr id="12" name="Text 10"/>
+          <p:cNvSpPr/>
+          <p:nvPr/>
+        </p:nvSpPr>
+        <p:spPr>
+          <a:xfrm>
+            <a:off x="8074152" y="1563624"/>
+            <a:ext cx="2825496" cy="201168"/>
+          </a:xfrm>
+          <a:prstGeom prst="rect">
+            <a:avLst/>
+          </a:prstGeom>
+          <a:noFill/>
+          <a:ln/>
+        </p:spPr>
+        <p:txBody>
+          <a:bodyPr wrap="square" lIns="0" tIns="0" rIns="0" bIns="0" rtlCol="0" anchor="ctr"/>
+          <a:lstStyle/>
+          <a:p>
             <a:pPr indent="0" marL="0">
               <a:buNone/>
             </a:pPr>
             <a:r>
-              <a:rPr lang="en-US" sz="1420" dirty="0">
+              <a:rPr lang="en-US" sz="950" b="1" dirty="0">
+                <a:solidFill>
+                  <a:srgbClr val="0068B7"/>
+                </a:solidFill>
+                <a:latin typeface="Aptos" pitchFamily="34" charset="0"/>
+                <a:ea typeface="Aptos" pitchFamily="34" charset="-122"/>
+                <a:cs typeface="Aptos" pitchFamily="34" charset="-120"/>
+              </a:rPr>
+              <a:t>Key idea</a:t>
+            </a:r>
+            <a:endParaRPr lang="en-US" sz="950" dirty="0"/>
+          </a:p>
+        </p:txBody>
+      </p:sp>
+      <p:sp>
+        <p:nvSpPr>
+          <p:cNvPr id="13" name="Text 11"/>
+          <p:cNvSpPr/>
+          <p:nvPr/>
+        </p:nvSpPr>
+        <p:spPr>
+          <a:xfrm>
+            <a:off x="8074152" y="1856232"/>
+            <a:ext cx="2825496" cy="1261872"/>
+          </a:xfrm>
+          <a:prstGeom prst="rect">
+            <a:avLst/>
+          </a:prstGeom>
+          <a:noFill/>
+          <a:ln/>
+        </p:spPr>
+        <p:txBody>
+          <a:bodyPr wrap="square" lIns="0" tIns="0" rIns="0" bIns="0" rtlCol="0" anchor="t">
+            <a:normAutofit/>
+          </a:bodyPr>
+          <a:lstStyle/>
+          <a:p>
+            <a:pPr indent="0" marL="0">
+              <a:buNone/>
+            </a:pPr>
+            <a:r>
+              <a:rPr lang="en-US" sz="1250" dirty="0">
                 <a:solidFill>
                   <a:srgbClr val="17364A"/>
                 </a:solidFill>
@@ -3822,9 +5243,116 @@
                 <a:ea typeface="Aptos" pitchFamily="34" charset="-122"/>
                 <a:cs typeface="Aptos" pitchFamily="34" charset="-120"/>
               </a:rPr>
-              <a:t>Where does this topic appear in one current or proposed AI workflow in your agency? What decisions, data sources, users, or partners would be affected if this area is poorly designed? What evidence would governance reviewers need before approving the workflow?</a:t>
-            </a:r>
-            <a:endParaRPr lang="en-US" sz="1420" dirty="0"/>
+              <a:t>A common failure mode is treating the topic as a technical detail rather than a public health control.</a:t>
+            </a:r>
+            <a:endParaRPr lang="en-US" sz="1250" dirty="0"/>
+          </a:p>
+        </p:txBody>
+      </p:sp>
+      <p:sp>
+        <p:nvSpPr>
+          <p:cNvPr id="14" name="Shape 12"/>
+          <p:cNvSpPr/>
+          <p:nvPr/>
+        </p:nvSpPr>
+        <p:spPr>
+          <a:xfrm>
+            <a:off x="7909560" y="3520440"/>
+            <a:ext cx="3154680" cy="1737360"/>
+          </a:xfrm>
+          <a:prstGeom prst="roundRect">
+            <a:avLst>
+              <a:gd name="adj" fmla="val 6316"/>
+            </a:avLst>
+          </a:prstGeom>
+          <a:solidFill>
+            <a:srgbClr val="EAF6F8"/>
+          </a:solidFill>
+          <a:ln w="12700">
+            <a:solidFill>
+              <a:srgbClr val="B9D7E6"/>
+            </a:solidFill>
+            <a:prstDash val="solid"/>
+          </a:ln>
+        </p:spPr>
+      </p:sp>
+      <p:sp>
+        <p:nvSpPr>
+          <p:cNvPr id="15" name="Text 13"/>
+          <p:cNvSpPr/>
+          <p:nvPr/>
+        </p:nvSpPr>
+        <p:spPr>
+          <a:xfrm>
+            <a:off x="8074152" y="3666744"/>
+            <a:ext cx="2825496" cy="201168"/>
+          </a:xfrm>
+          <a:prstGeom prst="rect">
+            <a:avLst/>
+          </a:prstGeom>
+          <a:noFill/>
+          <a:ln/>
+        </p:spPr>
+        <p:txBody>
+          <a:bodyPr wrap="square" lIns="0" tIns="0" rIns="0" bIns="0" rtlCol="0" anchor="ctr"/>
+          <a:lstStyle/>
+          <a:p>
+            <a:pPr indent="0" marL="0">
+              <a:buNone/>
+            </a:pPr>
+            <a:r>
+              <a:rPr lang="en-US" sz="950" b="1" dirty="0">
+                <a:solidFill>
+                  <a:srgbClr val="0068B7"/>
+                </a:solidFill>
+                <a:latin typeface="Aptos" pitchFamily="34" charset="0"/>
+                <a:ea typeface="Aptos" pitchFamily="34" charset="-122"/>
+                <a:cs typeface="Aptos" pitchFamily="34" charset="-120"/>
+              </a:rPr>
+              <a:t>Use this for</a:t>
+            </a:r>
+            <a:endParaRPr lang="en-US" sz="950" dirty="0"/>
+          </a:p>
+        </p:txBody>
+      </p:sp>
+      <p:sp>
+        <p:nvSpPr>
+          <p:cNvPr id="16" name="Text 14"/>
+          <p:cNvSpPr/>
+          <p:nvPr/>
+        </p:nvSpPr>
+        <p:spPr>
+          <a:xfrm>
+            <a:off x="8074152" y="3959352"/>
+            <a:ext cx="2825496" cy="1170432"/>
+          </a:xfrm>
+          <a:prstGeom prst="rect">
+            <a:avLst/>
+          </a:prstGeom>
+          <a:noFill/>
+          <a:ln/>
+        </p:spPr>
+        <p:txBody>
+          <a:bodyPr wrap="square" lIns="0" tIns="0" rIns="0" bIns="0" rtlCol="0" anchor="t">
+            <a:normAutofit/>
+          </a:bodyPr>
+          <a:lstStyle/>
+          <a:p>
+            <a:pPr indent="0" marL="0">
+              <a:buNone/>
+            </a:pPr>
+            <a:r>
+              <a:rPr lang="en-US" sz="1250" dirty="0">
+                <a:solidFill>
+                  <a:srgbClr val="17364A"/>
+                </a:solidFill>
+                <a:latin typeface="Aptos" pitchFamily="34" charset="0"/>
+                <a:ea typeface="Aptos" pitchFamily="34" charset="-122"/>
+                <a:cs typeface="Aptos" pitchFamily="34" charset="-120"/>
+              </a:rPr>
+              <a:t>Connect the concept to public health decisions, safeguards, documentation, or implementation work.</a:t>
+            </a:r>
+            <a:endParaRPr lang="en-US" sz="1250" dirty="0"/>
           </a:p>
         </p:txBody>
       </p:sp>
@@ -3887,7 +5415,32 @@
       </p:sp>
       <p:sp>
         <p:nvSpPr>
-          <p:cNvPr id="3" name="Text 1"/>
+          <p:cNvPr id="3" name="Shape 1"/>
+          <p:cNvSpPr/>
+          <p:nvPr/>
+        </p:nvSpPr>
+        <p:spPr>
+          <a:xfrm>
+            <a:off x="0" y="164592"/>
+            <a:ext cx="146304" cy="6693408"/>
+          </a:xfrm>
+          <a:prstGeom prst="rect">
+            <a:avLst/>
+          </a:prstGeom>
+          <a:solidFill>
+            <a:srgbClr val="2F8A28"/>
+          </a:solidFill>
+          <a:ln w="12700">
+            <a:solidFill>
+              <a:srgbClr val="2F8A28"/>
+            </a:solidFill>
+            <a:prstDash val="solid"/>
+          </a:ln>
+        </p:spPr>
+      </p:sp>
+      <p:sp>
+        <p:nvSpPr>
+          <p:cNvPr id="4" name="Text 2"/>
           <p:cNvSpPr/>
           <p:nvPr/>
         </p:nvSpPr>
@@ -3926,7 +5479,7 @@
       </p:sp>
       <p:sp>
         <p:nvSpPr>
-          <p:cNvPr id="4" name="Text 2"/>
+          <p:cNvPr id="5" name="Text 3"/>
           <p:cNvSpPr/>
           <p:nvPr/>
         </p:nvSpPr>
@@ -3965,7 +5518,7 @@
       </p:sp>
       <p:sp>
         <p:nvSpPr>
-          <p:cNvPr id="5" name="Text 3"/>
+          <p:cNvPr id="6" name="Text 4"/>
           <p:cNvSpPr/>
           <p:nvPr/>
         </p:nvSpPr>
@@ -4004,13 +5557,77 @@
       </p:sp>
       <p:sp>
         <p:nvSpPr>
-          <p:cNvPr id="6" name="Text 4"/>
+          <p:cNvPr id="7" name="Shape 5"/>
           <p:cNvSpPr/>
           <p:nvPr/>
         </p:nvSpPr>
         <p:spPr>
           <a:xfrm>
             <a:off x="640080" y="658368"/>
+            <a:ext cx="420624" cy="420624"/>
+          </a:xfrm>
+          <a:prstGeom prst="ellipse">
+            <a:avLst/>
+          </a:prstGeom>
+          <a:solidFill>
+            <a:srgbClr val="0068B7"/>
+          </a:solidFill>
+          <a:ln w="12700">
+            <a:solidFill>
+              <a:srgbClr val="0068B7"/>
+            </a:solidFill>
+            <a:prstDash val="solid"/>
+          </a:ln>
+        </p:spPr>
+      </p:sp>
+      <p:sp>
+        <p:nvSpPr>
+          <p:cNvPr id="8" name="Text 6"/>
+          <p:cNvSpPr/>
+          <p:nvPr/>
+        </p:nvSpPr>
+        <p:spPr>
+          <a:xfrm>
+            <a:off x="640080" y="731520"/>
+            <a:ext cx="420624" cy="164592"/>
+          </a:xfrm>
+          <a:prstGeom prst="rect">
+            <a:avLst/>
+          </a:prstGeom>
+          <a:noFill/>
+          <a:ln/>
+        </p:spPr>
+        <p:txBody>
+          <a:bodyPr wrap="square" lIns="0" tIns="0" rIns="0" bIns="0" rtlCol="0" anchor="ctr"/>
+          <a:lstStyle/>
+          <a:p>
+            <a:pPr algn="ctr" indent="0" marL="0">
+              <a:buNone/>
+            </a:pPr>
+            <a:r>
+              <a:rPr lang="en-US" sz="1100" b="1" dirty="0">
+                <a:solidFill>
+                  <a:srgbClr val="FFFFFF"/>
+                </a:solidFill>
+                <a:latin typeface="Aptos" pitchFamily="34" charset="0"/>
+                <a:ea typeface="Aptos" pitchFamily="34" charset="-122"/>
+                <a:cs typeface="Aptos" pitchFamily="34" charset="-120"/>
+              </a:rPr>
+              <a:t>9</a:t>
+            </a:r>
+            <a:endParaRPr lang="en-US" sz="1100" dirty="0"/>
+          </a:p>
+        </p:txBody>
+      </p:sp>
+      <p:sp>
+        <p:nvSpPr>
+          <p:cNvPr id="9" name="Text 7"/>
+          <p:cNvSpPr/>
+          <p:nvPr/>
+        </p:nvSpPr>
+        <p:spPr>
+          <a:xfrm>
+            <a:off x="640080" y="621792"/>
             <a:ext cx="10881360" cy="566928"/>
           </a:xfrm>
           <a:prstGeom prst="rect">
@@ -4037,7 +5654,7 @@
                 <a:ea typeface="Aptos Display" pitchFamily="34" charset="-122"/>
                 <a:cs typeface="Aptos Display" pitchFamily="34" charset="-120"/>
               </a:rPr>
-              <a:t>Reflection Questions Continued</a:t>
+              <a:t>Application to AI-Supported Workflows</a:t>
             </a:r>
             <a:endParaRPr lang="en-US" sz="2700" dirty="0"/>
           </a:p>
@@ -4045,32 +5662,178 @@
       </p:sp>
       <p:sp>
         <p:nvSpPr>
-          <p:cNvPr id="7" name="Text 5"/>
-          <p:cNvSpPr/>
-          <p:nvPr/>
-        </p:nvSpPr>
-        <p:spPr>
-          <a:xfrm>
-            <a:off x="822960" y="1325880"/>
-            <a:ext cx="10378440" cy="4800600"/>
-          </a:xfrm>
-          <a:prstGeom prst="rect">
-            <a:avLst/>
-          </a:prstGeom>
-          <a:noFill/>
-          <a:ln/>
-        </p:spPr>
-        <p:txBody>
-          <a:bodyPr wrap="square" lIns="1016" tIns="1016" rIns="1016" bIns="1016" rtlCol="0" anchor="t">
+          <p:cNvPr id="10" name="Text 8"/>
+          <p:cNvSpPr/>
+          <p:nvPr/>
+        </p:nvSpPr>
+        <p:spPr>
+          <a:xfrm>
+            <a:off x="868680" y="1417320"/>
+            <a:ext cx="6675120" cy="4434840"/>
+          </a:xfrm>
+          <a:prstGeom prst="rect">
+            <a:avLst/>
+          </a:prstGeom>
+          <a:noFill/>
+          <a:ln/>
+        </p:spPr>
+        <p:txBody>
+          <a:bodyPr wrap="square" lIns="635" tIns="635" rIns="635" bIns="635" rtlCol="0" anchor="t">
             <a:normAutofit/>
           </a:bodyPr>
           <a:lstStyle/>
           <a:p>
+            <a:r>
+              <a:rPr lang="en-US" sz="1700" dirty="0">
+                <a:solidFill>
+                  <a:srgbClr val="17364A"/>
+                </a:solidFill>
+                <a:latin typeface="Aptos" pitchFamily="34" charset="0"/>
+                <a:ea typeface="Aptos" pitchFamily="34" charset="-122"/>
+                <a:cs typeface="Aptos" pitchFamily="34" charset="-120"/>
+              </a:rPr>
+              <a:t>Generative AI, predictive analytics, RAG, automation, and agentic workflows all depend on the controls described in this.</a:t>
+            </a:r>
+            <a:endParaRPr lang="en-US" sz="1700" dirty="0"/>
+          </a:p>
+          <a:p>
+            <a:r>
+              <a:rPr lang="en-US" sz="1700" dirty="0">
+                <a:solidFill>
+                  <a:srgbClr val="17364A"/>
+                </a:solidFill>
+                <a:latin typeface="Aptos" pitchFamily="34" charset="0"/>
+                <a:ea typeface="Aptos" pitchFamily="34" charset="-122"/>
+                <a:cs typeface="Aptos" pitchFamily="34" charset="-120"/>
+              </a:rPr>
+              <a:t>The controls should be scaled to the risk of the use case.</a:t>
+            </a:r>
+            <a:endParaRPr lang="en-US" sz="1700" dirty="0"/>
+          </a:p>
+          <a:p>
+            <a:r>
+              <a:rPr lang="en-US" sz="1700" dirty="0">
+                <a:solidFill>
+                  <a:srgbClr val="17364A"/>
+                </a:solidFill>
+                <a:latin typeface="Aptos" pitchFamily="34" charset="0"/>
+                <a:ea typeface="Aptos" pitchFamily="34" charset="-122"/>
+                <a:cs typeface="Aptos" pitchFamily="34" charset="-120"/>
+              </a:rPr>
+              <a:t>A tool that drafts internal training text may require lighter review than a tool that updates case records, prioritizes.</a:t>
+            </a:r>
+            <a:endParaRPr lang="en-US" sz="1700" dirty="0"/>
+          </a:p>
+          <a:p>
+            <a:r>
+              <a:rPr lang="en-US" sz="1700" dirty="0">
+                <a:solidFill>
+                  <a:srgbClr val="17364A"/>
+                </a:solidFill>
+                <a:latin typeface="Aptos" pitchFamily="34" charset="0"/>
+                <a:ea typeface="Aptos" pitchFamily="34" charset="-122"/>
+                <a:cs typeface="Aptos" pitchFamily="34" charset="-120"/>
+              </a:rPr>
+              <a:t>The module should be applied during readiness assessment, procurement, implementation planning, pilot testing, and.</a:t>
+            </a:r>
+            <a:endParaRPr lang="en-US" sz="1700" dirty="0"/>
+          </a:p>
+        </p:txBody>
+      </p:sp>
+      <p:sp>
+        <p:nvSpPr>
+          <p:cNvPr id="11" name="Shape 9"/>
+          <p:cNvSpPr/>
+          <p:nvPr/>
+        </p:nvSpPr>
+        <p:spPr>
+          <a:xfrm>
+            <a:off x="7909560" y="1417320"/>
+            <a:ext cx="3154680" cy="1828800"/>
+          </a:xfrm>
+          <a:prstGeom prst="roundRect">
+            <a:avLst>
+              <a:gd name="adj" fmla="val 6000"/>
+            </a:avLst>
+          </a:prstGeom>
+          <a:solidFill>
+            <a:srgbClr val="EEF8ED"/>
+          </a:solidFill>
+          <a:ln w="12700">
+            <a:solidFill>
+              <a:srgbClr val="B9D7E6"/>
+            </a:solidFill>
+            <a:prstDash val="solid"/>
+          </a:ln>
+        </p:spPr>
+      </p:sp>
+      <p:sp>
+        <p:nvSpPr>
+          <p:cNvPr id="12" name="Text 10"/>
+          <p:cNvSpPr/>
+          <p:nvPr/>
+        </p:nvSpPr>
+        <p:spPr>
+          <a:xfrm>
+            <a:off x="8074152" y="1563624"/>
+            <a:ext cx="2825496" cy="201168"/>
+          </a:xfrm>
+          <a:prstGeom prst="rect">
+            <a:avLst/>
+          </a:prstGeom>
+          <a:noFill/>
+          <a:ln/>
+        </p:spPr>
+        <p:txBody>
+          <a:bodyPr wrap="square" lIns="0" tIns="0" rIns="0" bIns="0" rtlCol="0" anchor="ctr"/>
+          <a:lstStyle/>
+          <a:p>
             <a:pPr indent="0" marL="0">
               <a:buNone/>
             </a:pPr>
             <a:r>
-              <a:rPr lang="en-US" sz="1420" dirty="0">
+              <a:rPr lang="en-US" sz="950" b="1" dirty="0">
+                <a:solidFill>
+                  <a:srgbClr val="0068B7"/>
+                </a:solidFill>
+                <a:latin typeface="Aptos" pitchFamily="34" charset="0"/>
+                <a:ea typeface="Aptos" pitchFamily="34" charset="-122"/>
+                <a:cs typeface="Aptos" pitchFamily="34" charset="-120"/>
+              </a:rPr>
+              <a:t>Key idea</a:t>
+            </a:r>
+            <a:endParaRPr lang="en-US" sz="950" dirty="0"/>
+          </a:p>
+        </p:txBody>
+      </p:sp>
+      <p:sp>
+        <p:nvSpPr>
+          <p:cNvPr id="13" name="Text 11"/>
+          <p:cNvSpPr/>
+          <p:nvPr/>
+        </p:nvSpPr>
+        <p:spPr>
+          <a:xfrm>
+            <a:off x="8074152" y="1856232"/>
+            <a:ext cx="2825496" cy="1261872"/>
+          </a:xfrm>
+          <a:prstGeom prst="rect">
+            <a:avLst/>
+          </a:prstGeom>
+          <a:noFill/>
+          <a:ln/>
+        </p:spPr>
+        <p:txBody>
+          <a:bodyPr wrap="square" lIns="0" tIns="0" rIns="0" bIns="0" rtlCol="0" anchor="t">
+            <a:normAutofit/>
+          </a:bodyPr>
+          <a:lstStyle/>
+          <a:p>
+            <a:pPr indent="0" marL="0">
+              <a:buNone/>
+            </a:pPr>
+            <a:r>
+              <a:rPr lang="en-US" sz="1250" dirty="0">
                 <a:solidFill>
                   <a:srgbClr val="17364A"/>
                 </a:solidFill>
@@ -4078,9 +5841,116 @@
                 <a:ea typeface="Aptos" pitchFamily="34" charset="-122"/>
                 <a:cs typeface="Aptos" pitchFamily="34" charset="-120"/>
               </a:rPr>
-              <a:t>Which safeguards should be required before pilot testing? Who owns ongoing monitoring and review?</a:t>
-            </a:r>
-            <a:endParaRPr lang="en-US" sz="1420" dirty="0"/>
+              <a:t>Generative AI, predictive analytics, RAG, automation, and agentic workflows all depend on the controls described in this.</a:t>
+            </a:r>
+            <a:endParaRPr lang="en-US" sz="1250" dirty="0"/>
+          </a:p>
+        </p:txBody>
+      </p:sp>
+      <p:sp>
+        <p:nvSpPr>
+          <p:cNvPr id="14" name="Shape 12"/>
+          <p:cNvSpPr/>
+          <p:nvPr/>
+        </p:nvSpPr>
+        <p:spPr>
+          <a:xfrm>
+            <a:off x="7909560" y="3520440"/>
+            <a:ext cx="3154680" cy="1737360"/>
+          </a:xfrm>
+          <a:prstGeom prst="roundRect">
+            <a:avLst>
+              <a:gd name="adj" fmla="val 6316"/>
+            </a:avLst>
+          </a:prstGeom>
+          <a:solidFill>
+            <a:srgbClr val="EAF6F8"/>
+          </a:solidFill>
+          <a:ln w="12700">
+            <a:solidFill>
+              <a:srgbClr val="B9D7E6"/>
+            </a:solidFill>
+            <a:prstDash val="solid"/>
+          </a:ln>
+        </p:spPr>
+      </p:sp>
+      <p:sp>
+        <p:nvSpPr>
+          <p:cNvPr id="15" name="Text 13"/>
+          <p:cNvSpPr/>
+          <p:nvPr/>
+        </p:nvSpPr>
+        <p:spPr>
+          <a:xfrm>
+            <a:off x="8074152" y="3666744"/>
+            <a:ext cx="2825496" cy="201168"/>
+          </a:xfrm>
+          <a:prstGeom prst="rect">
+            <a:avLst/>
+          </a:prstGeom>
+          <a:noFill/>
+          <a:ln/>
+        </p:spPr>
+        <p:txBody>
+          <a:bodyPr wrap="square" lIns="0" tIns="0" rIns="0" bIns="0" rtlCol="0" anchor="ctr"/>
+          <a:lstStyle/>
+          <a:p>
+            <a:pPr indent="0" marL="0">
+              <a:buNone/>
+            </a:pPr>
+            <a:r>
+              <a:rPr lang="en-US" sz="950" b="1" dirty="0">
+                <a:solidFill>
+                  <a:srgbClr val="0068B7"/>
+                </a:solidFill>
+                <a:latin typeface="Aptos" pitchFamily="34" charset="0"/>
+                <a:ea typeface="Aptos" pitchFamily="34" charset="-122"/>
+                <a:cs typeface="Aptos" pitchFamily="34" charset="-120"/>
+              </a:rPr>
+              <a:t>Use this for</a:t>
+            </a:r>
+            <a:endParaRPr lang="en-US" sz="950" dirty="0"/>
+          </a:p>
+        </p:txBody>
+      </p:sp>
+      <p:sp>
+        <p:nvSpPr>
+          <p:cNvPr id="16" name="Text 14"/>
+          <p:cNvSpPr/>
+          <p:nvPr/>
+        </p:nvSpPr>
+        <p:spPr>
+          <a:xfrm>
+            <a:off x="8074152" y="3959352"/>
+            <a:ext cx="2825496" cy="1170432"/>
+          </a:xfrm>
+          <a:prstGeom prst="rect">
+            <a:avLst/>
+          </a:prstGeom>
+          <a:noFill/>
+          <a:ln/>
+        </p:spPr>
+        <p:txBody>
+          <a:bodyPr wrap="square" lIns="0" tIns="0" rIns="0" bIns="0" rtlCol="0" anchor="t">
+            <a:normAutofit/>
+          </a:bodyPr>
+          <a:lstStyle/>
+          <a:p>
+            <a:pPr indent="0" marL="0">
+              <a:buNone/>
+            </a:pPr>
+            <a:r>
+              <a:rPr lang="en-US" sz="1250" dirty="0">
+                <a:solidFill>
+                  <a:srgbClr val="17364A"/>
+                </a:solidFill>
+                <a:latin typeface="Aptos" pitchFamily="34" charset="0"/>
+                <a:ea typeface="Aptos" pitchFamily="34" charset="-122"/>
+                <a:cs typeface="Aptos" pitchFamily="34" charset="-120"/>
+              </a:rPr>
+              <a:t>Connect the concept to public health decisions, safeguards, documentation, or implementation work.</a:t>
+            </a:r>
+            <a:endParaRPr lang="en-US" sz="1250" dirty="0"/>
           </a:p>
         </p:txBody>
       </p:sp>
@@ -4143,7 +6013,32 @@
       </p:sp>
       <p:sp>
         <p:nvSpPr>
-          <p:cNvPr id="3" name="Text 1"/>
+          <p:cNvPr id="3" name="Shape 1"/>
+          <p:cNvSpPr/>
+          <p:nvPr/>
+        </p:nvSpPr>
+        <p:spPr>
+          <a:xfrm>
+            <a:off x="0" y="164592"/>
+            <a:ext cx="146304" cy="6693408"/>
+          </a:xfrm>
+          <a:prstGeom prst="rect">
+            <a:avLst/>
+          </a:prstGeom>
+          <a:solidFill>
+            <a:srgbClr val="2F8A28"/>
+          </a:solidFill>
+          <a:ln w="12700">
+            <a:solidFill>
+              <a:srgbClr val="2F8A28"/>
+            </a:solidFill>
+            <a:prstDash val="solid"/>
+          </a:ln>
+        </p:spPr>
+      </p:sp>
+      <p:sp>
+        <p:nvSpPr>
+          <p:cNvPr id="4" name="Text 2"/>
           <p:cNvSpPr/>
           <p:nvPr/>
         </p:nvSpPr>
@@ -4182,7 +6077,7 @@
       </p:sp>
       <p:sp>
         <p:nvSpPr>
-          <p:cNvPr id="4" name="Text 2"/>
+          <p:cNvPr id="5" name="Text 3"/>
           <p:cNvSpPr/>
           <p:nvPr/>
         </p:nvSpPr>
@@ -4221,7 +6116,7 @@
       </p:sp>
       <p:sp>
         <p:nvSpPr>
-          <p:cNvPr id="5" name="Text 3"/>
+          <p:cNvPr id="6" name="Text 4"/>
           <p:cNvSpPr/>
           <p:nvPr/>
         </p:nvSpPr>
@@ -4260,13 +6155,77 @@
       </p:sp>
       <p:sp>
         <p:nvSpPr>
-          <p:cNvPr id="6" name="Text 4"/>
+          <p:cNvPr id="7" name="Shape 5"/>
           <p:cNvSpPr/>
           <p:nvPr/>
         </p:nvSpPr>
         <p:spPr>
           <a:xfrm>
             <a:off x="640080" y="658368"/>
+            <a:ext cx="420624" cy="420624"/>
+          </a:xfrm>
+          <a:prstGeom prst="ellipse">
+            <a:avLst/>
+          </a:prstGeom>
+          <a:solidFill>
+            <a:srgbClr val="0068B7"/>
+          </a:solidFill>
+          <a:ln w="12700">
+            <a:solidFill>
+              <a:srgbClr val="0068B7"/>
+            </a:solidFill>
+            <a:prstDash val="solid"/>
+          </a:ln>
+        </p:spPr>
+      </p:sp>
+      <p:sp>
+        <p:nvSpPr>
+          <p:cNvPr id="8" name="Text 6"/>
+          <p:cNvSpPr/>
+          <p:nvPr/>
+        </p:nvSpPr>
+        <p:spPr>
+          <a:xfrm>
+            <a:off x="640080" y="731520"/>
+            <a:ext cx="420624" cy="164592"/>
+          </a:xfrm>
+          <a:prstGeom prst="rect">
+            <a:avLst/>
+          </a:prstGeom>
+          <a:noFill/>
+          <a:ln/>
+        </p:spPr>
+        <p:txBody>
+          <a:bodyPr wrap="square" lIns="0" tIns="0" rIns="0" bIns="0" rtlCol="0" anchor="ctr"/>
+          <a:lstStyle/>
+          <a:p>
+            <a:pPr algn="ctr" indent="0" marL="0">
+              <a:buNone/>
+            </a:pPr>
+            <a:r>
+              <a:rPr lang="en-US" sz="1100" b="1" dirty="0">
+                <a:solidFill>
+                  <a:srgbClr val="FFFFFF"/>
+                </a:solidFill>
+                <a:latin typeface="Aptos" pitchFamily="34" charset="0"/>
+                <a:ea typeface="Aptos" pitchFamily="34" charset="-122"/>
+                <a:cs typeface="Aptos" pitchFamily="34" charset="-120"/>
+              </a:rPr>
+              <a:t>10</a:t>
+            </a:r>
+            <a:endParaRPr lang="en-US" sz="1100" dirty="0"/>
+          </a:p>
+        </p:txBody>
+      </p:sp>
+      <p:sp>
+        <p:nvSpPr>
+          <p:cNvPr id="9" name="Text 7"/>
+          <p:cNvSpPr/>
+          <p:nvPr/>
+        </p:nvSpPr>
+        <p:spPr>
+          <a:xfrm>
+            <a:off x="640080" y="621792"/>
             <a:ext cx="10881360" cy="566928"/>
           </a:xfrm>
           <a:prstGeom prst="rect">
@@ -4293,7 +6252,7 @@
                 <a:ea typeface="Aptos Display" pitchFamily="34" charset="-122"/>
                 <a:cs typeface="Aptos Display" pitchFamily="34" charset="-120"/>
               </a:rPr>
-              <a:t>Practical Exercise</a:t>
+              <a:t>Reflection Questions</a:t>
             </a:r>
             <a:endParaRPr lang="en-US" sz="2700" dirty="0"/>
           </a:p>
@@ -4301,32 +6260,164 @@
       </p:sp>
       <p:sp>
         <p:nvSpPr>
-          <p:cNvPr id="7" name="Text 5"/>
-          <p:cNvSpPr/>
-          <p:nvPr/>
-        </p:nvSpPr>
-        <p:spPr>
-          <a:xfrm>
-            <a:off x="822960" y="1325880"/>
-            <a:ext cx="10378440" cy="4800600"/>
-          </a:xfrm>
-          <a:prstGeom prst="rect">
-            <a:avLst/>
-          </a:prstGeom>
-          <a:noFill/>
-          <a:ln/>
-        </p:spPr>
-        <p:txBody>
-          <a:bodyPr wrap="square" lIns="1016" tIns="1016" rIns="1016" bIns="1016" rtlCol="0" anchor="t">
+          <p:cNvPr id="10" name="Text 8"/>
+          <p:cNvSpPr/>
+          <p:nvPr/>
+        </p:nvSpPr>
+        <p:spPr>
+          <a:xfrm>
+            <a:off x="868680" y="1417320"/>
+            <a:ext cx="6675120" cy="4434840"/>
+          </a:xfrm>
+          <a:prstGeom prst="rect">
+            <a:avLst/>
+          </a:prstGeom>
+          <a:noFill/>
+          <a:ln/>
+        </p:spPr>
+        <p:txBody>
+          <a:bodyPr wrap="square" lIns="635" tIns="635" rIns="635" bIns="635" rtlCol="0" anchor="t">
             <a:normAutofit/>
           </a:bodyPr>
           <a:lstStyle/>
           <a:p>
+            <a:r>
+              <a:rPr lang="en-US" sz="1700" dirty="0">
+                <a:solidFill>
+                  <a:srgbClr val="17364A"/>
+                </a:solidFill>
+                <a:latin typeface="Aptos" pitchFamily="34" charset="0"/>
+                <a:ea typeface="Aptos" pitchFamily="34" charset="-122"/>
+                <a:cs typeface="Aptos" pitchFamily="34" charset="-120"/>
+              </a:rPr>
+              <a:t>Where does this topic appear in one current or proposed AI workflow in your agency?</a:t>
+            </a:r>
+            <a:endParaRPr lang="en-US" sz="1700" dirty="0"/>
+          </a:p>
+          <a:p>
+            <a:r>
+              <a:rPr lang="en-US" sz="1700" dirty="0">
+                <a:solidFill>
+                  <a:srgbClr val="17364A"/>
+                </a:solidFill>
+                <a:latin typeface="Aptos" pitchFamily="34" charset="0"/>
+                <a:ea typeface="Aptos" pitchFamily="34" charset="-122"/>
+                <a:cs typeface="Aptos" pitchFamily="34" charset="-120"/>
+              </a:rPr>
+              <a:t>What decisions, data sources, users, or partners would be affected if this area is poorly designed?</a:t>
+            </a:r>
+            <a:endParaRPr lang="en-US" sz="1700" dirty="0"/>
+          </a:p>
+          <a:p>
+            <a:r>
+              <a:rPr lang="en-US" sz="1700" dirty="0">
+                <a:solidFill>
+                  <a:srgbClr val="17364A"/>
+                </a:solidFill>
+                <a:latin typeface="Aptos" pitchFamily="34" charset="0"/>
+                <a:ea typeface="Aptos" pitchFamily="34" charset="-122"/>
+                <a:cs typeface="Aptos" pitchFamily="34" charset="-120"/>
+              </a:rPr>
+              <a:t>What evidence would governance reviewers need before approving the workflow?</a:t>
+            </a:r>
+            <a:endParaRPr lang="en-US" sz="1700" dirty="0"/>
+          </a:p>
+        </p:txBody>
+      </p:sp>
+      <p:sp>
+        <p:nvSpPr>
+          <p:cNvPr id="11" name="Shape 9"/>
+          <p:cNvSpPr/>
+          <p:nvPr/>
+        </p:nvSpPr>
+        <p:spPr>
+          <a:xfrm>
+            <a:off x="7909560" y="1417320"/>
+            <a:ext cx="3154680" cy="1828800"/>
+          </a:xfrm>
+          <a:prstGeom prst="roundRect">
+            <a:avLst>
+              <a:gd name="adj" fmla="val 6000"/>
+            </a:avLst>
+          </a:prstGeom>
+          <a:solidFill>
+            <a:srgbClr val="EEF8ED"/>
+          </a:solidFill>
+          <a:ln w="12700">
+            <a:solidFill>
+              <a:srgbClr val="B9D7E6"/>
+            </a:solidFill>
+            <a:prstDash val="solid"/>
+          </a:ln>
+        </p:spPr>
+      </p:sp>
+      <p:sp>
+        <p:nvSpPr>
+          <p:cNvPr id="12" name="Text 10"/>
+          <p:cNvSpPr/>
+          <p:nvPr/>
+        </p:nvSpPr>
+        <p:spPr>
+          <a:xfrm>
+            <a:off x="8074152" y="1563624"/>
+            <a:ext cx="2825496" cy="201168"/>
+          </a:xfrm>
+          <a:prstGeom prst="rect">
+            <a:avLst/>
+          </a:prstGeom>
+          <a:noFill/>
+          <a:ln/>
+        </p:spPr>
+        <p:txBody>
+          <a:bodyPr wrap="square" lIns="0" tIns="0" rIns="0" bIns="0" rtlCol="0" anchor="ctr"/>
+          <a:lstStyle/>
+          <a:p>
             <a:pPr indent="0" marL="0">
               <a:buNone/>
             </a:pPr>
             <a:r>
-              <a:rPr lang="en-US" sz="1420" dirty="0">
+              <a:rPr lang="en-US" sz="950" b="1" dirty="0">
+                <a:solidFill>
+                  <a:srgbClr val="0068B7"/>
+                </a:solidFill>
+                <a:latin typeface="Aptos" pitchFamily="34" charset="0"/>
+                <a:ea typeface="Aptos" pitchFamily="34" charset="-122"/>
+                <a:cs typeface="Aptos" pitchFamily="34" charset="-120"/>
+              </a:rPr>
+              <a:t>Key idea</a:t>
+            </a:r>
+            <a:endParaRPr lang="en-US" sz="950" dirty="0"/>
+          </a:p>
+        </p:txBody>
+      </p:sp>
+      <p:sp>
+        <p:nvSpPr>
+          <p:cNvPr id="13" name="Text 11"/>
+          <p:cNvSpPr/>
+          <p:nvPr/>
+        </p:nvSpPr>
+        <p:spPr>
+          <a:xfrm>
+            <a:off x="8074152" y="1856232"/>
+            <a:ext cx="2825496" cy="1261872"/>
+          </a:xfrm>
+          <a:prstGeom prst="rect">
+            <a:avLst/>
+          </a:prstGeom>
+          <a:noFill/>
+          <a:ln/>
+        </p:spPr>
+        <p:txBody>
+          <a:bodyPr wrap="square" lIns="0" tIns="0" rIns="0" bIns="0" rtlCol="0" anchor="t">
+            <a:normAutofit/>
+          </a:bodyPr>
+          <a:lstStyle/>
+          <a:p>
+            <a:pPr indent="0" marL="0">
+              <a:buNone/>
+            </a:pPr>
+            <a:r>
+              <a:rPr lang="en-US" sz="1250" dirty="0">
                 <a:solidFill>
                   <a:srgbClr val="17364A"/>
                 </a:solidFill>
@@ -4334,9 +6425,116 @@
                 <a:ea typeface="Aptos" pitchFamily="34" charset="-122"/>
                 <a:cs typeface="Aptos" pitchFamily="34" charset="-120"/>
               </a:rPr>
-              <a:t>Create a AI requirements matrix for one real or realistic public health AI workflow. The artifact should describe the use case, affected users, data sources, system dependencies, risks, guardrails, review points, and unresolved questions. The exercise should produce a work product that could be used in a governance meeting, procurement review, implementation planning session, pilot evaluation, or monitoring review. Learners should document assumptions and identify which staff or partners need to be consulted.</a:t>
-            </a:r>
-            <a:endParaRPr lang="en-US" sz="1420" dirty="0"/>
+              <a:t>Where does this topic appear in one current or proposed AI workflow in your agency?</a:t>
+            </a:r>
+            <a:endParaRPr lang="en-US" sz="1250" dirty="0"/>
+          </a:p>
+        </p:txBody>
+      </p:sp>
+      <p:sp>
+        <p:nvSpPr>
+          <p:cNvPr id="14" name="Shape 12"/>
+          <p:cNvSpPr/>
+          <p:nvPr/>
+        </p:nvSpPr>
+        <p:spPr>
+          <a:xfrm>
+            <a:off x="7909560" y="3520440"/>
+            <a:ext cx="3154680" cy="1737360"/>
+          </a:xfrm>
+          <a:prstGeom prst="roundRect">
+            <a:avLst>
+              <a:gd name="adj" fmla="val 6316"/>
+            </a:avLst>
+          </a:prstGeom>
+          <a:solidFill>
+            <a:srgbClr val="EAF6F8"/>
+          </a:solidFill>
+          <a:ln w="12700">
+            <a:solidFill>
+              <a:srgbClr val="B9D7E6"/>
+            </a:solidFill>
+            <a:prstDash val="solid"/>
+          </a:ln>
+        </p:spPr>
+      </p:sp>
+      <p:sp>
+        <p:nvSpPr>
+          <p:cNvPr id="15" name="Text 13"/>
+          <p:cNvSpPr/>
+          <p:nvPr/>
+        </p:nvSpPr>
+        <p:spPr>
+          <a:xfrm>
+            <a:off x="8074152" y="3666744"/>
+            <a:ext cx="2825496" cy="201168"/>
+          </a:xfrm>
+          <a:prstGeom prst="rect">
+            <a:avLst/>
+          </a:prstGeom>
+          <a:noFill/>
+          <a:ln/>
+        </p:spPr>
+        <p:txBody>
+          <a:bodyPr wrap="square" lIns="0" tIns="0" rIns="0" bIns="0" rtlCol="0" anchor="ctr"/>
+          <a:lstStyle/>
+          <a:p>
+            <a:pPr indent="0" marL="0">
+              <a:buNone/>
+            </a:pPr>
+            <a:r>
+              <a:rPr lang="en-US" sz="950" b="1" dirty="0">
+                <a:solidFill>
+                  <a:srgbClr val="0068B7"/>
+                </a:solidFill>
+                <a:latin typeface="Aptos" pitchFamily="34" charset="0"/>
+                <a:ea typeface="Aptos" pitchFamily="34" charset="-122"/>
+                <a:cs typeface="Aptos" pitchFamily="34" charset="-120"/>
+              </a:rPr>
+              <a:t>Use this for</a:t>
+            </a:r>
+            <a:endParaRPr lang="en-US" sz="950" dirty="0"/>
+          </a:p>
+        </p:txBody>
+      </p:sp>
+      <p:sp>
+        <p:nvSpPr>
+          <p:cNvPr id="16" name="Text 14"/>
+          <p:cNvSpPr/>
+          <p:nvPr/>
+        </p:nvSpPr>
+        <p:spPr>
+          <a:xfrm>
+            <a:off x="8074152" y="3959352"/>
+            <a:ext cx="2825496" cy="1170432"/>
+          </a:xfrm>
+          <a:prstGeom prst="rect">
+            <a:avLst/>
+          </a:prstGeom>
+          <a:noFill/>
+          <a:ln/>
+        </p:spPr>
+        <p:txBody>
+          <a:bodyPr wrap="square" lIns="0" tIns="0" rIns="0" bIns="0" rtlCol="0" anchor="t">
+            <a:normAutofit/>
+          </a:bodyPr>
+          <a:lstStyle/>
+          <a:p>
+            <a:pPr indent="0" marL="0">
+              <a:buNone/>
+            </a:pPr>
+            <a:r>
+              <a:rPr lang="en-US" sz="1250" dirty="0">
+                <a:solidFill>
+                  <a:srgbClr val="17364A"/>
+                </a:solidFill>
+                <a:latin typeface="Aptos" pitchFamily="34" charset="0"/>
+                <a:ea typeface="Aptos" pitchFamily="34" charset="-122"/>
+                <a:cs typeface="Aptos" pitchFamily="34" charset="-120"/>
+              </a:rPr>
+              <a:t>Connect the concept to public health decisions, safeguards, documentation, or implementation work.</a:t>
+            </a:r>
+            <a:endParaRPr lang="en-US" sz="1250" dirty="0"/>
           </a:p>
         </p:txBody>
       </p:sp>
@@ -4399,7 +6597,32 @@
       </p:sp>
       <p:sp>
         <p:nvSpPr>
-          <p:cNvPr id="3" name="Text 1"/>
+          <p:cNvPr id="3" name="Shape 1"/>
+          <p:cNvSpPr/>
+          <p:nvPr/>
+        </p:nvSpPr>
+        <p:spPr>
+          <a:xfrm>
+            <a:off x="0" y="164592"/>
+            <a:ext cx="146304" cy="6693408"/>
+          </a:xfrm>
+          <a:prstGeom prst="rect">
+            <a:avLst/>
+          </a:prstGeom>
+          <a:solidFill>
+            <a:srgbClr val="2F8A28"/>
+          </a:solidFill>
+          <a:ln w="12700">
+            <a:solidFill>
+              <a:srgbClr val="2F8A28"/>
+            </a:solidFill>
+            <a:prstDash val="solid"/>
+          </a:ln>
+        </p:spPr>
+      </p:sp>
+      <p:sp>
+        <p:nvSpPr>
+          <p:cNvPr id="4" name="Text 2"/>
           <p:cNvSpPr/>
           <p:nvPr/>
         </p:nvSpPr>
@@ -4438,7 +6661,7 @@
       </p:sp>
       <p:sp>
         <p:nvSpPr>
-          <p:cNvPr id="4" name="Text 2"/>
+          <p:cNvPr id="5" name="Text 3"/>
           <p:cNvSpPr/>
           <p:nvPr/>
         </p:nvSpPr>
@@ -4477,7 +6700,7 @@
       </p:sp>
       <p:sp>
         <p:nvSpPr>
-          <p:cNvPr id="5" name="Text 3"/>
+          <p:cNvPr id="6" name="Text 4"/>
           <p:cNvSpPr/>
           <p:nvPr/>
         </p:nvSpPr>
@@ -4516,7 +6739,7 @@
       </p:sp>
       <p:sp>
         <p:nvSpPr>
-          <p:cNvPr id="6" name="Text 4"/>
+          <p:cNvPr id="7" name="Text 5"/>
           <p:cNvSpPr/>
           <p:nvPr/>
         </p:nvSpPr>
@@ -4549,7 +6772,7 @@
                 <a:ea typeface="Aptos Display" pitchFamily="34" charset="-122"/>
                 <a:cs typeface="Aptos Display" pitchFamily="34" charset="-120"/>
               </a:rPr>
-              <a:t>Expected Artifact or Evidence</a:t>
+              <a:t>Reflection Questions Continued</a:t>
             </a:r>
             <a:endParaRPr lang="en-US" sz="2700" dirty="0"/>
           </a:p>
@@ -4557,32 +6780,150 @@
       </p:sp>
       <p:sp>
         <p:nvSpPr>
-          <p:cNvPr id="7" name="Text 5"/>
-          <p:cNvSpPr/>
-          <p:nvPr/>
-        </p:nvSpPr>
-        <p:spPr>
-          <a:xfrm>
-            <a:off x="822960" y="1325880"/>
-            <a:ext cx="10378440" cy="4800600"/>
-          </a:xfrm>
-          <a:prstGeom prst="rect">
-            <a:avLst/>
-          </a:prstGeom>
-          <a:noFill/>
-          <a:ln/>
-        </p:spPr>
-        <p:txBody>
-          <a:bodyPr wrap="square" lIns="1016" tIns="1016" rIns="1016" bIns="1016" rtlCol="0" anchor="t">
+          <p:cNvPr id="8" name="Text 6"/>
+          <p:cNvSpPr/>
+          <p:nvPr/>
+        </p:nvSpPr>
+        <p:spPr>
+          <a:xfrm>
+            <a:off x="868680" y="1417320"/>
+            <a:ext cx="6675120" cy="4434840"/>
+          </a:xfrm>
+          <a:prstGeom prst="rect">
+            <a:avLst/>
+          </a:prstGeom>
+          <a:noFill/>
+          <a:ln/>
+        </p:spPr>
+        <p:txBody>
+          <a:bodyPr wrap="square" lIns="635" tIns="635" rIns="635" bIns="635" rtlCol="0" anchor="t">
             <a:normAutofit/>
           </a:bodyPr>
           <a:lstStyle/>
           <a:p>
+            <a:r>
+              <a:rPr lang="en-US" sz="1700" dirty="0">
+                <a:solidFill>
+                  <a:srgbClr val="17364A"/>
+                </a:solidFill>
+                <a:latin typeface="Aptos" pitchFamily="34" charset="0"/>
+                <a:ea typeface="Aptos" pitchFamily="34" charset="-122"/>
+                <a:cs typeface="Aptos" pitchFamily="34" charset="-120"/>
+              </a:rPr>
+              <a:t>Which safeguards should be required before pilot testing?</a:t>
+            </a:r>
+            <a:endParaRPr lang="en-US" sz="1700" dirty="0"/>
+          </a:p>
+          <a:p>
+            <a:r>
+              <a:rPr lang="en-US" sz="1700" dirty="0">
+                <a:solidFill>
+                  <a:srgbClr val="17364A"/>
+                </a:solidFill>
+                <a:latin typeface="Aptos" pitchFamily="34" charset="0"/>
+                <a:ea typeface="Aptos" pitchFamily="34" charset="-122"/>
+                <a:cs typeface="Aptos" pitchFamily="34" charset="-120"/>
+              </a:rPr>
+              <a:t>Who owns ongoing monitoring and review?</a:t>
+            </a:r>
+            <a:endParaRPr lang="en-US" sz="1700" dirty="0"/>
+          </a:p>
+        </p:txBody>
+      </p:sp>
+      <p:sp>
+        <p:nvSpPr>
+          <p:cNvPr id="9" name="Shape 7"/>
+          <p:cNvSpPr/>
+          <p:nvPr/>
+        </p:nvSpPr>
+        <p:spPr>
+          <a:xfrm>
+            <a:off x="7909560" y="1417320"/>
+            <a:ext cx="3154680" cy="1828800"/>
+          </a:xfrm>
+          <a:prstGeom prst="roundRect">
+            <a:avLst>
+              <a:gd name="adj" fmla="val 6000"/>
+            </a:avLst>
+          </a:prstGeom>
+          <a:solidFill>
+            <a:srgbClr val="EEF8ED"/>
+          </a:solidFill>
+          <a:ln w="12700">
+            <a:solidFill>
+              <a:srgbClr val="B9D7E6"/>
+            </a:solidFill>
+            <a:prstDash val="solid"/>
+          </a:ln>
+        </p:spPr>
+      </p:sp>
+      <p:sp>
+        <p:nvSpPr>
+          <p:cNvPr id="10" name="Text 8"/>
+          <p:cNvSpPr/>
+          <p:nvPr/>
+        </p:nvSpPr>
+        <p:spPr>
+          <a:xfrm>
+            <a:off x="8074152" y="1563624"/>
+            <a:ext cx="2825496" cy="201168"/>
+          </a:xfrm>
+          <a:prstGeom prst="rect">
+            <a:avLst/>
+          </a:prstGeom>
+          <a:noFill/>
+          <a:ln/>
+        </p:spPr>
+        <p:txBody>
+          <a:bodyPr wrap="square" lIns="0" tIns="0" rIns="0" bIns="0" rtlCol="0" anchor="ctr"/>
+          <a:lstStyle/>
+          <a:p>
             <a:pPr indent="0" marL="0">
               <a:buNone/>
             </a:pPr>
             <a:r>
-              <a:rPr lang="en-US" sz="1420" dirty="0">
+              <a:rPr lang="en-US" sz="950" b="1" dirty="0">
+                <a:solidFill>
+                  <a:srgbClr val="0068B7"/>
+                </a:solidFill>
+                <a:latin typeface="Aptos" pitchFamily="34" charset="0"/>
+                <a:ea typeface="Aptos" pitchFamily="34" charset="-122"/>
+                <a:cs typeface="Aptos" pitchFamily="34" charset="-120"/>
+              </a:rPr>
+              <a:t>Key idea</a:t>
+            </a:r>
+            <a:endParaRPr lang="en-US" sz="950" dirty="0"/>
+          </a:p>
+        </p:txBody>
+      </p:sp>
+      <p:sp>
+        <p:nvSpPr>
+          <p:cNvPr id="11" name="Text 9"/>
+          <p:cNvSpPr/>
+          <p:nvPr/>
+        </p:nvSpPr>
+        <p:spPr>
+          <a:xfrm>
+            <a:off x="8074152" y="1856232"/>
+            <a:ext cx="2825496" cy="1261872"/>
+          </a:xfrm>
+          <a:prstGeom prst="rect">
+            <a:avLst/>
+          </a:prstGeom>
+          <a:noFill/>
+          <a:ln/>
+        </p:spPr>
+        <p:txBody>
+          <a:bodyPr wrap="square" lIns="0" tIns="0" rIns="0" bIns="0" rtlCol="0" anchor="t">
+            <a:normAutofit/>
+          </a:bodyPr>
+          <a:lstStyle/>
+          <a:p>
+            <a:pPr indent="0" marL="0">
+              <a:buNone/>
+            </a:pPr>
+            <a:r>
+              <a:rPr lang="en-US" sz="1250" dirty="0">
                 <a:solidFill>
                   <a:srgbClr val="17364A"/>
                 </a:solidFill>
@@ -4590,9 +6931,116 @@
                 <a:ea typeface="Aptos" pitchFamily="34" charset="-122"/>
                 <a:cs typeface="Aptos" pitchFamily="34" charset="-120"/>
               </a:rPr>
-              <a:t>The expected artifact is a completed AI requirements matrix. It should be specific to a public health workflow and should include technical dependencies, governance questions, human review expectations, monitoring indicators, and unresolved risks.</a:t>
-            </a:r>
-            <a:endParaRPr lang="en-US" sz="1420" dirty="0"/>
+              <a:t>Which safeguards should be required before pilot testing?</a:t>
+            </a:r>
+            <a:endParaRPr lang="en-US" sz="1250" dirty="0"/>
+          </a:p>
+        </p:txBody>
+      </p:sp>
+      <p:sp>
+        <p:nvSpPr>
+          <p:cNvPr id="12" name="Shape 10"/>
+          <p:cNvSpPr/>
+          <p:nvPr/>
+        </p:nvSpPr>
+        <p:spPr>
+          <a:xfrm>
+            <a:off x="7909560" y="3520440"/>
+            <a:ext cx="3154680" cy="1737360"/>
+          </a:xfrm>
+          <a:prstGeom prst="roundRect">
+            <a:avLst>
+              <a:gd name="adj" fmla="val 6316"/>
+            </a:avLst>
+          </a:prstGeom>
+          <a:solidFill>
+            <a:srgbClr val="EAF6F8"/>
+          </a:solidFill>
+          <a:ln w="12700">
+            <a:solidFill>
+              <a:srgbClr val="B9D7E6"/>
+            </a:solidFill>
+            <a:prstDash val="solid"/>
+          </a:ln>
+        </p:spPr>
+      </p:sp>
+      <p:sp>
+        <p:nvSpPr>
+          <p:cNvPr id="13" name="Text 11"/>
+          <p:cNvSpPr/>
+          <p:nvPr/>
+        </p:nvSpPr>
+        <p:spPr>
+          <a:xfrm>
+            <a:off x="8074152" y="3666744"/>
+            <a:ext cx="2825496" cy="201168"/>
+          </a:xfrm>
+          <a:prstGeom prst="rect">
+            <a:avLst/>
+          </a:prstGeom>
+          <a:noFill/>
+          <a:ln/>
+        </p:spPr>
+        <p:txBody>
+          <a:bodyPr wrap="square" lIns="0" tIns="0" rIns="0" bIns="0" rtlCol="0" anchor="ctr"/>
+          <a:lstStyle/>
+          <a:p>
+            <a:pPr indent="0" marL="0">
+              <a:buNone/>
+            </a:pPr>
+            <a:r>
+              <a:rPr lang="en-US" sz="950" b="1" dirty="0">
+                <a:solidFill>
+                  <a:srgbClr val="0068B7"/>
+                </a:solidFill>
+                <a:latin typeface="Aptos" pitchFamily="34" charset="0"/>
+                <a:ea typeface="Aptos" pitchFamily="34" charset="-122"/>
+                <a:cs typeface="Aptos" pitchFamily="34" charset="-120"/>
+              </a:rPr>
+              <a:t>Use this for</a:t>
+            </a:r>
+            <a:endParaRPr lang="en-US" sz="950" dirty="0"/>
+          </a:p>
+        </p:txBody>
+      </p:sp>
+      <p:sp>
+        <p:nvSpPr>
+          <p:cNvPr id="14" name="Text 12"/>
+          <p:cNvSpPr/>
+          <p:nvPr/>
+        </p:nvSpPr>
+        <p:spPr>
+          <a:xfrm>
+            <a:off x="8074152" y="3959352"/>
+            <a:ext cx="2825496" cy="1170432"/>
+          </a:xfrm>
+          <a:prstGeom prst="rect">
+            <a:avLst/>
+          </a:prstGeom>
+          <a:noFill/>
+          <a:ln/>
+        </p:spPr>
+        <p:txBody>
+          <a:bodyPr wrap="square" lIns="0" tIns="0" rIns="0" bIns="0" rtlCol="0" anchor="t">
+            <a:normAutofit/>
+          </a:bodyPr>
+          <a:lstStyle/>
+          <a:p>
+            <a:pPr indent="0" marL="0">
+              <a:buNone/>
+            </a:pPr>
+            <a:r>
+              <a:rPr lang="en-US" sz="1250" dirty="0">
+                <a:solidFill>
+                  <a:srgbClr val="17364A"/>
+                </a:solidFill>
+                <a:latin typeface="Aptos" pitchFamily="34" charset="0"/>
+                <a:ea typeface="Aptos" pitchFamily="34" charset="-122"/>
+                <a:cs typeface="Aptos" pitchFamily="34" charset="-120"/>
+              </a:rPr>
+              <a:t>Connect the concept to public health decisions, safeguards, documentation, or implementation work.</a:t>
+            </a:r>
+            <a:endParaRPr lang="en-US" sz="1250" dirty="0"/>
           </a:p>
         </p:txBody>
       </p:sp>
@@ -4655,7 +7103,32 @@
       </p:sp>
       <p:sp>
         <p:nvSpPr>
-          <p:cNvPr id="3" name="Text 1"/>
+          <p:cNvPr id="3" name="Shape 1"/>
+          <p:cNvSpPr/>
+          <p:nvPr/>
+        </p:nvSpPr>
+        <p:spPr>
+          <a:xfrm>
+            <a:off x="0" y="164592"/>
+            <a:ext cx="146304" cy="6693408"/>
+          </a:xfrm>
+          <a:prstGeom prst="rect">
+            <a:avLst/>
+          </a:prstGeom>
+          <a:solidFill>
+            <a:srgbClr val="2F8A28"/>
+          </a:solidFill>
+          <a:ln w="12700">
+            <a:solidFill>
+              <a:srgbClr val="2F8A28"/>
+            </a:solidFill>
+            <a:prstDash val="solid"/>
+          </a:ln>
+        </p:spPr>
+      </p:sp>
+      <p:sp>
+        <p:nvSpPr>
+          <p:cNvPr id="4" name="Text 2"/>
           <p:cNvSpPr/>
           <p:nvPr/>
         </p:nvSpPr>
@@ -4694,7 +7167,7 @@
       </p:sp>
       <p:sp>
         <p:nvSpPr>
-          <p:cNvPr id="4" name="Text 2"/>
+          <p:cNvPr id="5" name="Text 3"/>
           <p:cNvSpPr/>
           <p:nvPr/>
         </p:nvSpPr>
@@ -4733,7 +7206,7 @@
       </p:sp>
       <p:sp>
         <p:nvSpPr>
-          <p:cNvPr id="5" name="Text 3"/>
+          <p:cNvPr id="6" name="Text 4"/>
           <p:cNvSpPr/>
           <p:nvPr/>
         </p:nvSpPr>
@@ -4772,13 +7245,77 @@
       </p:sp>
       <p:sp>
         <p:nvSpPr>
-          <p:cNvPr id="6" name="Text 4"/>
+          <p:cNvPr id="7" name="Shape 5"/>
           <p:cNvSpPr/>
           <p:nvPr/>
         </p:nvSpPr>
         <p:spPr>
           <a:xfrm>
             <a:off x="640080" y="658368"/>
+            <a:ext cx="420624" cy="420624"/>
+          </a:xfrm>
+          <a:prstGeom prst="ellipse">
+            <a:avLst/>
+          </a:prstGeom>
+          <a:solidFill>
+            <a:srgbClr val="0068B7"/>
+          </a:solidFill>
+          <a:ln w="12700">
+            <a:solidFill>
+              <a:srgbClr val="0068B7"/>
+            </a:solidFill>
+            <a:prstDash val="solid"/>
+          </a:ln>
+        </p:spPr>
+      </p:sp>
+      <p:sp>
+        <p:nvSpPr>
+          <p:cNvPr id="8" name="Text 6"/>
+          <p:cNvSpPr/>
+          <p:nvPr/>
+        </p:nvSpPr>
+        <p:spPr>
+          <a:xfrm>
+            <a:off x="640080" y="731520"/>
+            <a:ext cx="420624" cy="164592"/>
+          </a:xfrm>
+          <a:prstGeom prst="rect">
+            <a:avLst/>
+          </a:prstGeom>
+          <a:noFill/>
+          <a:ln/>
+        </p:spPr>
+        <p:txBody>
+          <a:bodyPr wrap="square" lIns="0" tIns="0" rIns="0" bIns="0" rtlCol="0" anchor="ctr"/>
+          <a:lstStyle/>
+          <a:p>
+            <a:pPr algn="ctr" indent="0" marL="0">
+              <a:buNone/>
+            </a:pPr>
+            <a:r>
+              <a:rPr lang="en-US" sz="1100" b="1" dirty="0">
+                <a:solidFill>
+                  <a:srgbClr val="FFFFFF"/>
+                </a:solidFill>
+                <a:latin typeface="Aptos" pitchFamily="34" charset="0"/>
+                <a:ea typeface="Aptos" pitchFamily="34" charset="-122"/>
+                <a:cs typeface="Aptos" pitchFamily="34" charset="-120"/>
+              </a:rPr>
+              <a:t>11</a:t>
+            </a:r>
+            <a:endParaRPr lang="en-US" sz="1100" dirty="0"/>
+          </a:p>
+        </p:txBody>
+      </p:sp>
+      <p:sp>
+        <p:nvSpPr>
+          <p:cNvPr id="9" name="Text 7"/>
+          <p:cNvSpPr/>
+          <p:nvPr/>
+        </p:nvSpPr>
+        <p:spPr>
+          <a:xfrm>
+            <a:off x="640080" y="621792"/>
             <a:ext cx="10881360" cy="566928"/>
           </a:xfrm>
           <a:prstGeom prst="rect">
@@ -4805,7 +7342,7 @@
                 <a:ea typeface="Aptos Display" pitchFamily="34" charset="-122"/>
                 <a:cs typeface="Aptos Display" pitchFamily="34" charset="-120"/>
               </a:rPr>
-              <a:t>Expected Assignment</a:t>
+              <a:t>Practical Exercise</a:t>
             </a:r>
             <a:endParaRPr lang="en-US" sz="2700" dirty="0"/>
           </a:p>
@@ -4813,14 +7350,14 @@
       </p:sp>
       <p:sp>
         <p:nvSpPr>
-          <p:cNvPr id="7" name="Text 5"/>
-          <p:cNvSpPr/>
-          <p:nvPr/>
-        </p:nvSpPr>
-        <p:spPr>
-          <a:xfrm>
-            <a:off x="822960" y="1325880"/>
-            <a:ext cx="10378440" cy="4800600"/>
+          <p:cNvPr id="10" name="Text 8"/>
+          <p:cNvSpPr/>
+          <p:nvPr/>
+        </p:nvSpPr>
+        <p:spPr>
+          <a:xfrm>
+            <a:off x="868680" y="1417320"/>
+            <a:ext cx="6675120" cy="4434840"/>
           </a:xfrm>
           <a:prstGeom prst="rect">
             <a:avLst/>
@@ -4835,7 +7372,7 @@
           <a:lstStyle/>
           <a:p>
             <a:r>
-              <a:rPr lang="en-US" sz="1450" dirty="0">
+              <a:rPr lang="en-US" sz="1700" dirty="0">
                 <a:solidFill>
                   <a:srgbClr val="17364A"/>
                 </a:solidFill>
@@ -4843,9 +7380,265 @@
                 <a:ea typeface="Aptos" pitchFamily="34" charset="-122"/>
                 <a:cs typeface="Aptos" pitchFamily="34" charset="-120"/>
               </a:rPr>
-              <a:t>The expected artifact is a completed AI requirements matrix. It should be specific to a public health workflow and should include technical dependencies, governance questions, human review expectations, monitoring indicators, and unresolved risks.</a:t>
-            </a:r>
-            <a:endParaRPr lang="en-US" sz="1450" dirty="0"/>
+              <a:t>Create a AI requirements matrix for one real or realistic public health AI workflow.</a:t>
+            </a:r>
+            <a:endParaRPr lang="en-US" sz="1700" dirty="0"/>
+          </a:p>
+          <a:p>
+            <a:r>
+              <a:rPr lang="en-US" sz="1700" dirty="0">
+                <a:solidFill>
+                  <a:srgbClr val="17364A"/>
+                </a:solidFill>
+                <a:latin typeface="Aptos" pitchFamily="34" charset="0"/>
+                <a:ea typeface="Aptos" pitchFamily="34" charset="-122"/>
+                <a:cs typeface="Aptos" pitchFamily="34" charset="-120"/>
+              </a:rPr>
+              <a:t>The artifact should describe the use case, affected users, data sources, system dependencies, risks, guardrails, review.</a:t>
+            </a:r>
+            <a:endParaRPr lang="en-US" sz="1700" dirty="0"/>
+          </a:p>
+          <a:p>
+            <a:r>
+              <a:rPr lang="en-US" sz="1700" dirty="0">
+                <a:solidFill>
+                  <a:srgbClr val="17364A"/>
+                </a:solidFill>
+                <a:latin typeface="Aptos" pitchFamily="34" charset="0"/>
+                <a:ea typeface="Aptos" pitchFamily="34" charset="-122"/>
+                <a:cs typeface="Aptos" pitchFamily="34" charset="-120"/>
+              </a:rPr>
+              <a:t>The exercise should produce a work product that could be used in a governance meeting, procurement review, implementation.</a:t>
+            </a:r>
+            <a:endParaRPr lang="en-US" sz="1700" dirty="0"/>
+          </a:p>
+          <a:p>
+            <a:r>
+              <a:rPr lang="en-US" sz="1700" dirty="0">
+                <a:solidFill>
+                  <a:srgbClr val="17364A"/>
+                </a:solidFill>
+                <a:latin typeface="Aptos" pitchFamily="34" charset="0"/>
+                <a:ea typeface="Aptos" pitchFamily="34" charset="-122"/>
+                <a:cs typeface="Aptos" pitchFamily="34" charset="-120"/>
+              </a:rPr>
+              <a:t>Learners should document assumptions and identify which staff or partners need to be consulted.</a:t>
+            </a:r>
+            <a:endParaRPr lang="en-US" sz="1700" dirty="0"/>
+          </a:p>
+        </p:txBody>
+      </p:sp>
+      <p:sp>
+        <p:nvSpPr>
+          <p:cNvPr id="11" name="Shape 9"/>
+          <p:cNvSpPr/>
+          <p:nvPr/>
+        </p:nvSpPr>
+        <p:spPr>
+          <a:xfrm>
+            <a:off x="7909560" y="1417320"/>
+            <a:ext cx="3154680" cy="1828800"/>
+          </a:xfrm>
+          <a:prstGeom prst="roundRect">
+            <a:avLst>
+              <a:gd name="adj" fmla="val 6000"/>
+            </a:avLst>
+          </a:prstGeom>
+          <a:solidFill>
+            <a:srgbClr val="EEF8ED"/>
+          </a:solidFill>
+          <a:ln w="12700">
+            <a:solidFill>
+              <a:srgbClr val="B9D7E6"/>
+            </a:solidFill>
+            <a:prstDash val="solid"/>
+          </a:ln>
+        </p:spPr>
+      </p:sp>
+      <p:sp>
+        <p:nvSpPr>
+          <p:cNvPr id="12" name="Text 10"/>
+          <p:cNvSpPr/>
+          <p:nvPr/>
+        </p:nvSpPr>
+        <p:spPr>
+          <a:xfrm>
+            <a:off x="8074152" y="1563624"/>
+            <a:ext cx="2825496" cy="201168"/>
+          </a:xfrm>
+          <a:prstGeom prst="rect">
+            <a:avLst/>
+          </a:prstGeom>
+          <a:noFill/>
+          <a:ln/>
+        </p:spPr>
+        <p:txBody>
+          <a:bodyPr wrap="square" lIns="0" tIns="0" rIns="0" bIns="0" rtlCol="0" anchor="ctr"/>
+          <a:lstStyle/>
+          <a:p>
+            <a:pPr indent="0" marL="0">
+              <a:buNone/>
+            </a:pPr>
+            <a:r>
+              <a:rPr lang="en-US" sz="950" b="1" dirty="0">
+                <a:solidFill>
+                  <a:srgbClr val="0068B7"/>
+                </a:solidFill>
+                <a:latin typeface="Aptos" pitchFamily="34" charset="0"/>
+                <a:ea typeface="Aptos" pitchFamily="34" charset="-122"/>
+                <a:cs typeface="Aptos" pitchFamily="34" charset="-120"/>
+              </a:rPr>
+              <a:t>Key idea</a:t>
+            </a:r>
+            <a:endParaRPr lang="en-US" sz="950" dirty="0"/>
+          </a:p>
+        </p:txBody>
+      </p:sp>
+      <p:sp>
+        <p:nvSpPr>
+          <p:cNvPr id="13" name="Text 11"/>
+          <p:cNvSpPr/>
+          <p:nvPr/>
+        </p:nvSpPr>
+        <p:spPr>
+          <a:xfrm>
+            <a:off x="8074152" y="1856232"/>
+            <a:ext cx="2825496" cy="1261872"/>
+          </a:xfrm>
+          <a:prstGeom prst="rect">
+            <a:avLst/>
+          </a:prstGeom>
+          <a:noFill/>
+          <a:ln/>
+        </p:spPr>
+        <p:txBody>
+          <a:bodyPr wrap="square" lIns="0" tIns="0" rIns="0" bIns="0" rtlCol="0" anchor="t">
+            <a:normAutofit/>
+          </a:bodyPr>
+          <a:lstStyle/>
+          <a:p>
+            <a:pPr indent="0" marL="0">
+              <a:buNone/>
+            </a:pPr>
+            <a:r>
+              <a:rPr lang="en-US" sz="1250" dirty="0">
+                <a:solidFill>
+                  <a:srgbClr val="17364A"/>
+                </a:solidFill>
+                <a:latin typeface="Aptos" pitchFamily="34" charset="0"/>
+                <a:ea typeface="Aptos" pitchFamily="34" charset="-122"/>
+                <a:cs typeface="Aptos" pitchFamily="34" charset="-120"/>
+              </a:rPr>
+              <a:t>Create a AI requirements matrix for one real or realistic public health AI workflow.</a:t>
+            </a:r>
+            <a:endParaRPr lang="en-US" sz="1250" dirty="0"/>
+          </a:p>
+        </p:txBody>
+      </p:sp>
+      <p:sp>
+        <p:nvSpPr>
+          <p:cNvPr id="14" name="Shape 12"/>
+          <p:cNvSpPr/>
+          <p:nvPr/>
+        </p:nvSpPr>
+        <p:spPr>
+          <a:xfrm>
+            <a:off x="7909560" y="3520440"/>
+            <a:ext cx="3154680" cy="1737360"/>
+          </a:xfrm>
+          <a:prstGeom prst="roundRect">
+            <a:avLst>
+              <a:gd name="adj" fmla="val 6316"/>
+            </a:avLst>
+          </a:prstGeom>
+          <a:solidFill>
+            <a:srgbClr val="EAF6F8"/>
+          </a:solidFill>
+          <a:ln w="12700">
+            <a:solidFill>
+              <a:srgbClr val="B9D7E6"/>
+            </a:solidFill>
+            <a:prstDash val="solid"/>
+          </a:ln>
+        </p:spPr>
+      </p:sp>
+      <p:sp>
+        <p:nvSpPr>
+          <p:cNvPr id="15" name="Text 13"/>
+          <p:cNvSpPr/>
+          <p:nvPr/>
+        </p:nvSpPr>
+        <p:spPr>
+          <a:xfrm>
+            <a:off x="8074152" y="3666744"/>
+            <a:ext cx="2825496" cy="201168"/>
+          </a:xfrm>
+          <a:prstGeom prst="rect">
+            <a:avLst/>
+          </a:prstGeom>
+          <a:noFill/>
+          <a:ln/>
+        </p:spPr>
+        <p:txBody>
+          <a:bodyPr wrap="square" lIns="0" tIns="0" rIns="0" bIns="0" rtlCol="0" anchor="ctr"/>
+          <a:lstStyle/>
+          <a:p>
+            <a:pPr indent="0" marL="0">
+              <a:buNone/>
+            </a:pPr>
+            <a:r>
+              <a:rPr lang="en-US" sz="950" b="1" dirty="0">
+                <a:solidFill>
+                  <a:srgbClr val="0068B7"/>
+                </a:solidFill>
+                <a:latin typeface="Aptos" pitchFamily="34" charset="0"/>
+                <a:ea typeface="Aptos" pitchFamily="34" charset="-122"/>
+                <a:cs typeface="Aptos" pitchFamily="34" charset="-120"/>
+              </a:rPr>
+              <a:t>Use this for</a:t>
+            </a:r>
+            <a:endParaRPr lang="en-US" sz="950" dirty="0"/>
+          </a:p>
+        </p:txBody>
+      </p:sp>
+      <p:sp>
+        <p:nvSpPr>
+          <p:cNvPr id="16" name="Text 14"/>
+          <p:cNvSpPr/>
+          <p:nvPr/>
+        </p:nvSpPr>
+        <p:spPr>
+          <a:xfrm>
+            <a:off x="8074152" y="3959352"/>
+            <a:ext cx="2825496" cy="1170432"/>
+          </a:xfrm>
+          <a:prstGeom prst="rect">
+            <a:avLst/>
+          </a:prstGeom>
+          <a:noFill/>
+          <a:ln/>
+        </p:spPr>
+        <p:txBody>
+          <a:bodyPr wrap="square" lIns="0" tIns="0" rIns="0" bIns="0" rtlCol="0" anchor="t">
+            <a:normAutofit/>
+          </a:bodyPr>
+          <a:lstStyle/>
+          <a:p>
+            <a:pPr indent="0" marL="0">
+              <a:buNone/>
+            </a:pPr>
+            <a:r>
+              <a:rPr lang="en-US" sz="1250" dirty="0">
+                <a:solidFill>
+                  <a:srgbClr val="17364A"/>
+                </a:solidFill>
+                <a:latin typeface="Aptos" pitchFamily="34" charset="0"/>
+                <a:ea typeface="Aptos" pitchFamily="34" charset="-122"/>
+                <a:cs typeface="Aptos" pitchFamily="34" charset="-120"/>
+              </a:rPr>
+              <a:t>Connect the concept to public health decisions, safeguards, documentation, or implementation work.</a:t>
+            </a:r>
+            <a:endParaRPr lang="en-US" sz="1250" dirty="0"/>
           </a:p>
         </p:txBody>
       </p:sp>
@@ -4908,7 +7701,32 @@
       </p:sp>
       <p:sp>
         <p:nvSpPr>
-          <p:cNvPr id="3" name="Text 1"/>
+          <p:cNvPr id="3" name="Shape 1"/>
+          <p:cNvSpPr/>
+          <p:nvPr/>
+        </p:nvSpPr>
+        <p:spPr>
+          <a:xfrm>
+            <a:off x="0" y="164592"/>
+            <a:ext cx="146304" cy="6693408"/>
+          </a:xfrm>
+          <a:prstGeom prst="rect">
+            <a:avLst/>
+          </a:prstGeom>
+          <a:solidFill>
+            <a:srgbClr val="2F8A28"/>
+          </a:solidFill>
+          <a:ln w="12700">
+            <a:solidFill>
+              <a:srgbClr val="2F8A28"/>
+            </a:solidFill>
+            <a:prstDash val="solid"/>
+          </a:ln>
+        </p:spPr>
+      </p:sp>
+      <p:sp>
+        <p:nvSpPr>
+          <p:cNvPr id="4" name="Text 2"/>
           <p:cNvSpPr/>
           <p:nvPr/>
         </p:nvSpPr>
@@ -4947,7 +7765,7 @@
       </p:sp>
       <p:sp>
         <p:nvSpPr>
-          <p:cNvPr id="4" name="Text 2"/>
+          <p:cNvPr id="5" name="Text 3"/>
           <p:cNvSpPr/>
           <p:nvPr/>
         </p:nvSpPr>
@@ -4986,7 +7804,7 @@
       </p:sp>
       <p:sp>
         <p:nvSpPr>
-          <p:cNvPr id="5" name="Text 3"/>
+          <p:cNvPr id="6" name="Text 4"/>
           <p:cNvSpPr/>
           <p:nvPr/>
         </p:nvSpPr>
@@ -5025,13 +7843,77 @@
       </p:sp>
       <p:sp>
         <p:nvSpPr>
-          <p:cNvPr id="6" name="Text 4"/>
+          <p:cNvPr id="7" name="Shape 5"/>
           <p:cNvSpPr/>
           <p:nvPr/>
         </p:nvSpPr>
         <p:spPr>
           <a:xfrm>
             <a:off x="640080" y="658368"/>
+            <a:ext cx="420624" cy="420624"/>
+          </a:xfrm>
+          <a:prstGeom prst="ellipse">
+            <a:avLst/>
+          </a:prstGeom>
+          <a:solidFill>
+            <a:srgbClr val="0068B7"/>
+          </a:solidFill>
+          <a:ln w="12700">
+            <a:solidFill>
+              <a:srgbClr val="0068B7"/>
+            </a:solidFill>
+            <a:prstDash val="solid"/>
+          </a:ln>
+        </p:spPr>
+      </p:sp>
+      <p:sp>
+        <p:nvSpPr>
+          <p:cNvPr id="8" name="Text 6"/>
+          <p:cNvSpPr/>
+          <p:nvPr/>
+        </p:nvSpPr>
+        <p:spPr>
+          <a:xfrm>
+            <a:off x="640080" y="731520"/>
+            <a:ext cx="420624" cy="164592"/>
+          </a:xfrm>
+          <a:prstGeom prst="rect">
+            <a:avLst/>
+          </a:prstGeom>
+          <a:noFill/>
+          <a:ln/>
+        </p:spPr>
+        <p:txBody>
+          <a:bodyPr wrap="square" lIns="0" tIns="0" rIns="0" bIns="0" rtlCol="0" anchor="ctr"/>
+          <a:lstStyle/>
+          <a:p>
+            <a:pPr algn="ctr" indent="0" marL="0">
+              <a:buNone/>
+            </a:pPr>
+            <a:r>
+              <a:rPr lang="en-US" sz="1100" b="1" dirty="0">
+                <a:solidFill>
+                  <a:srgbClr val="FFFFFF"/>
+                </a:solidFill>
+                <a:latin typeface="Aptos" pitchFamily="34" charset="0"/>
+                <a:ea typeface="Aptos" pitchFamily="34" charset="-122"/>
+                <a:cs typeface="Aptos" pitchFamily="34" charset="-120"/>
+              </a:rPr>
+              <a:t>12</a:t>
+            </a:r>
+            <a:endParaRPr lang="en-US" sz="1100" dirty="0"/>
+          </a:p>
+        </p:txBody>
+      </p:sp>
+      <p:sp>
+        <p:nvSpPr>
+          <p:cNvPr id="9" name="Text 7"/>
+          <p:cNvSpPr/>
+          <p:nvPr/>
+        </p:nvSpPr>
+        <p:spPr>
+          <a:xfrm>
+            <a:off x="640080" y="621792"/>
             <a:ext cx="10881360" cy="566928"/>
           </a:xfrm>
           <a:prstGeom prst="rect">
@@ -5058,7 +7940,7 @@
                 <a:ea typeface="Aptos Display" pitchFamily="34" charset="-122"/>
                 <a:cs typeface="Aptos Display" pitchFamily="34" charset="-120"/>
               </a:rPr>
-              <a:t>Knowledge Check</a:t>
+              <a:t>Expected Artifact or Evidence</a:t>
             </a:r>
             <a:endParaRPr lang="en-US" sz="2700" dirty="0"/>
           </a:p>
@@ -5066,14 +7948,14 @@
       </p:sp>
       <p:sp>
         <p:nvSpPr>
-          <p:cNvPr id="7" name="Text 5"/>
-          <p:cNvSpPr/>
-          <p:nvPr/>
-        </p:nvSpPr>
-        <p:spPr>
-          <a:xfrm>
-            <a:off x="822960" y="1325880"/>
-            <a:ext cx="10378440" cy="4800600"/>
+          <p:cNvPr id="10" name="Text 8"/>
+          <p:cNvSpPr/>
+          <p:nvPr/>
+        </p:nvSpPr>
+        <p:spPr>
+          <a:xfrm>
+            <a:off x="868680" y="1417320"/>
+            <a:ext cx="6675120" cy="4434840"/>
           </a:xfrm>
           <a:prstGeom prst="rect">
             <a:avLst/>
@@ -5088,7 +7970,7 @@
           <a:lstStyle/>
           <a:p>
             <a:r>
-              <a:rPr lang="en-US" sz="1450" dirty="0">
+              <a:rPr lang="en-US" sz="1700" dirty="0">
                 <a:solidFill>
                   <a:srgbClr val="17364A"/>
                 </a:solidFill>
@@ -5096,13 +7978,13 @@
                 <a:ea typeface="Aptos" pitchFamily="34" charset="-122"/>
                 <a:cs typeface="Aptos" pitchFamily="34" charset="-120"/>
               </a:rPr>
-              <a:t>1. What is the best reason to address requirements writing for ai procurement and implementation before deployment?</a:t>
-            </a:r>
-            <a:endParaRPr lang="en-US" sz="1450" dirty="0"/>
-          </a:p>
-          <a:p>
-            <a:r>
-              <a:rPr lang="en-US" sz="1450" dirty="0">
+              <a:t>The expected artifact is a completed AI requirements matrix.</a:t>
+            </a:r>
+            <a:endParaRPr lang="en-US" sz="1700" dirty="0"/>
+          </a:p>
+          <a:p>
+            <a:r>
+              <a:rPr lang="en-US" sz="1700" dirty="0">
                 <a:solidFill>
                   <a:srgbClr val="17364A"/>
                 </a:solidFill>
@@ -5110,13 +7992,106 @@
                 <a:ea typeface="Aptos" pitchFamily="34" charset="-122"/>
                 <a:cs typeface="Aptos" pitchFamily="34" charset="-120"/>
               </a:rPr>
-              <a:t>2. Which practice best supports responsible implementation?</a:t>
-            </a:r>
-            <a:endParaRPr lang="en-US" sz="1450" dirty="0"/>
-          </a:p>
-          <a:p>
-            <a:r>
-              <a:rPr lang="en-US" sz="1450" dirty="0">
+              <a:t>It should be specific to a public health workflow and should include technical dependencies, governance questions, human.</a:t>
+            </a:r>
+            <a:endParaRPr lang="en-US" sz="1700" dirty="0"/>
+          </a:p>
+        </p:txBody>
+      </p:sp>
+      <p:sp>
+        <p:nvSpPr>
+          <p:cNvPr id="11" name="Shape 9"/>
+          <p:cNvSpPr/>
+          <p:nvPr/>
+        </p:nvSpPr>
+        <p:spPr>
+          <a:xfrm>
+            <a:off x="7909560" y="1417320"/>
+            <a:ext cx="3154680" cy="1828800"/>
+          </a:xfrm>
+          <a:prstGeom prst="roundRect">
+            <a:avLst>
+              <a:gd name="adj" fmla="val 6000"/>
+            </a:avLst>
+          </a:prstGeom>
+          <a:solidFill>
+            <a:srgbClr val="EEF8ED"/>
+          </a:solidFill>
+          <a:ln w="12700">
+            <a:solidFill>
+              <a:srgbClr val="B9D7E6"/>
+            </a:solidFill>
+            <a:prstDash val="solid"/>
+          </a:ln>
+        </p:spPr>
+      </p:sp>
+      <p:sp>
+        <p:nvSpPr>
+          <p:cNvPr id="12" name="Text 10"/>
+          <p:cNvSpPr/>
+          <p:nvPr/>
+        </p:nvSpPr>
+        <p:spPr>
+          <a:xfrm>
+            <a:off x="8074152" y="1563624"/>
+            <a:ext cx="2825496" cy="201168"/>
+          </a:xfrm>
+          <a:prstGeom prst="rect">
+            <a:avLst/>
+          </a:prstGeom>
+          <a:noFill/>
+          <a:ln/>
+        </p:spPr>
+        <p:txBody>
+          <a:bodyPr wrap="square" lIns="0" tIns="0" rIns="0" bIns="0" rtlCol="0" anchor="ctr"/>
+          <a:lstStyle/>
+          <a:p>
+            <a:pPr indent="0" marL="0">
+              <a:buNone/>
+            </a:pPr>
+            <a:r>
+              <a:rPr lang="en-US" sz="950" b="1" dirty="0">
+                <a:solidFill>
+                  <a:srgbClr val="0068B7"/>
+                </a:solidFill>
+                <a:latin typeface="Aptos" pitchFamily="34" charset="0"/>
+                <a:ea typeface="Aptos" pitchFamily="34" charset="-122"/>
+                <a:cs typeface="Aptos" pitchFamily="34" charset="-120"/>
+              </a:rPr>
+              <a:t>Key idea</a:t>
+            </a:r>
+            <a:endParaRPr lang="en-US" sz="950" dirty="0"/>
+          </a:p>
+        </p:txBody>
+      </p:sp>
+      <p:sp>
+        <p:nvSpPr>
+          <p:cNvPr id="13" name="Text 11"/>
+          <p:cNvSpPr/>
+          <p:nvPr/>
+        </p:nvSpPr>
+        <p:spPr>
+          <a:xfrm>
+            <a:off x="8074152" y="1856232"/>
+            <a:ext cx="2825496" cy="1261872"/>
+          </a:xfrm>
+          <a:prstGeom prst="rect">
+            <a:avLst/>
+          </a:prstGeom>
+          <a:noFill/>
+          <a:ln/>
+        </p:spPr>
+        <p:txBody>
+          <a:bodyPr wrap="square" lIns="0" tIns="0" rIns="0" bIns="0" rtlCol="0" anchor="t">
+            <a:normAutofit/>
+          </a:bodyPr>
+          <a:lstStyle/>
+          <a:p>
+            <a:pPr indent="0" marL="0">
+              <a:buNone/>
+            </a:pPr>
+            <a:r>
+              <a:rPr lang="en-US" sz="1250" dirty="0">
                 <a:solidFill>
                   <a:srgbClr val="17364A"/>
                 </a:solidFill>
@@ -5124,13 +8099,106 @@
                 <a:ea typeface="Aptos" pitchFamily="34" charset="-122"/>
                 <a:cs typeface="Aptos" pitchFamily="34" charset="-120"/>
               </a:rPr>
-              <a:t>3. Which statement best describes a common failure mode?</a:t>
-            </a:r>
-            <a:endParaRPr lang="en-US" sz="1450" dirty="0"/>
-          </a:p>
-          <a:p>
-            <a:r>
-              <a:rPr lang="en-US" sz="1450" dirty="0">
+              <a:t>The expected artifact is a completed AI requirements matrix.</a:t>
+            </a:r>
+            <a:endParaRPr lang="en-US" sz="1250" dirty="0"/>
+          </a:p>
+        </p:txBody>
+      </p:sp>
+      <p:sp>
+        <p:nvSpPr>
+          <p:cNvPr id="14" name="Shape 12"/>
+          <p:cNvSpPr/>
+          <p:nvPr/>
+        </p:nvSpPr>
+        <p:spPr>
+          <a:xfrm>
+            <a:off x="7909560" y="3520440"/>
+            <a:ext cx="3154680" cy="1737360"/>
+          </a:xfrm>
+          <a:prstGeom prst="roundRect">
+            <a:avLst>
+              <a:gd name="adj" fmla="val 6316"/>
+            </a:avLst>
+          </a:prstGeom>
+          <a:solidFill>
+            <a:srgbClr val="EAF6F8"/>
+          </a:solidFill>
+          <a:ln w="12700">
+            <a:solidFill>
+              <a:srgbClr val="B9D7E6"/>
+            </a:solidFill>
+            <a:prstDash val="solid"/>
+          </a:ln>
+        </p:spPr>
+      </p:sp>
+      <p:sp>
+        <p:nvSpPr>
+          <p:cNvPr id="15" name="Text 13"/>
+          <p:cNvSpPr/>
+          <p:nvPr/>
+        </p:nvSpPr>
+        <p:spPr>
+          <a:xfrm>
+            <a:off x="8074152" y="3666744"/>
+            <a:ext cx="2825496" cy="201168"/>
+          </a:xfrm>
+          <a:prstGeom prst="rect">
+            <a:avLst/>
+          </a:prstGeom>
+          <a:noFill/>
+          <a:ln/>
+        </p:spPr>
+        <p:txBody>
+          <a:bodyPr wrap="square" lIns="0" tIns="0" rIns="0" bIns="0" rtlCol="0" anchor="ctr"/>
+          <a:lstStyle/>
+          <a:p>
+            <a:pPr indent="0" marL="0">
+              <a:buNone/>
+            </a:pPr>
+            <a:r>
+              <a:rPr lang="en-US" sz="950" b="1" dirty="0">
+                <a:solidFill>
+                  <a:srgbClr val="0068B7"/>
+                </a:solidFill>
+                <a:latin typeface="Aptos" pitchFamily="34" charset="0"/>
+                <a:ea typeface="Aptos" pitchFamily="34" charset="-122"/>
+                <a:cs typeface="Aptos" pitchFamily="34" charset="-120"/>
+              </a:rPr>
+              <a:t>Use this for</a:t>
+            </a:r>
+            <a:endParaRPr lang="en-US" sz="950" dirty="0"/>
+          </a:p>
+        </p:txBody>
+      </p:sp>
+      <p:sp>
+        <p:nvSpPr>
+          <p:cNvPr id="16" name="Text 14"/>
+          <p:cNvSpPr/>
+          <p:nvPr/>
+        </p:nvSpPr>
+        <p:spPr>
+          <a:xfrm>
+            <a:off x="8074152" y="3959352"/>
+            <a:ext cx="2825496" cy="1170432"/>
+          </a:xfrm>
+          <a:prstGeom prst="rect">
+            <a:avLst/>
+          </a:prstGeom>
+          <a:noFill/>
+          <a:ln/>
+        </p:spPr>
+        <p:txBody>
+          <a:bodyPr wrap="square" lIns="0" tIns="0" rIns="0" bIns="0" rtlCol="0" anchor="t">
+            <a:normAutofit/>
+          </a:bodyPr>
+          <a:lstStyle/>
+          <a:p>
+            <a:pPr indent="0" marL="0">
+              <a:buNone/>
+            </a:pPr>
+            <a:r>
+              <a:rPr lang="en-US" sz="1250" dirty="0">
                 <a:solidFill>
                   <a:srgbClr val="17364A"/>
                 </a:solidFill>
@@ -5138,23 +8206,9 @@
                 <a:ea typeface="Aptos" pitchFamily="34" charset="-122"/>
                 <a:cs typeface="Aptos" pitchFamily="34" charset="-120"/>
               </a:rPr>
-              <a:t>4. What should be included in the practical artifact for this module?</a:t>
-            </a:r>
-            <a:endParaRPr lang="en-US" sz="1450" dirty="0"/>
-          </a:p>
-          <a:p>
-            <a:r>
-              <a:rPr lang="en-US" sz="1450" dirty="0">
-                <a:solidFill>
-                  <a:srgbClr val="17364A"/>
-                </a:solidFill>
-                <a:latin typeface="Aptos" pitchFamily="34" charset="0"/>
-                <a:ea typeface="Aptos" pitchFamily="34" charset="-122"/>
-                <a:cs typeface="Aptos" pitchFamily="34" charset="-120"/>
-              </a:rPr>
-              <a:t>5. When should the issue be escalated for governance or leadership review?</a:t>
-            </a:r>
-            <a:endParaRPr lang="en-US" sz="1450" dirty="0"/>
+              <a:t>Connect the concept to public health decisions, safeguards, documentation, or implementation work.</a:t>
+            </a:r>
+            <a:endParaRPr lang="en-US" sz="1250" dirty="0"/>
           </a:p>
         </p:txBody>
       </p:sp>
@@ -5217,7 +8271,32 @@
       </p:sp>
       <p:sp>
         <p:nvSpPr>
-          <p:cNvPr id="3" name="Text 1"/>
+          <p:cNvPr id="3" name="Shape 1"/>
+          <p:cNvSpPr/>
+          <p:nvPr/>
+        </p:nvSpPr>
+        <p:spPr>
+          <a:xfrm>
+            <a:off x="0" y="164592"/>
+            <a:ext cx="146304" cy="6693408"/>
+          </a:xfrm>
+          <a:prstGeom prst="rect">
+            <a:avLst/>
+          </a:prstGeom>
+          <a:solidFill>
+            <a:srgbClr val="2F8A28"/>
+          </a:solidFill>
+          <a:ln w="12700">
+            <a:solidFill>
+              <a:srgbClr val="2F8A28"/>
+            </a:solidFill>
+            <a:prstDash val="solid"/>
+          </a:ln>
+        </p:spPr>
+      </p:sp>
+      <p:sp>
+        <p:nvSpPr>
+          <p:cNvPr id="4" name="Text 2"/>
           <p:cNvSpPr/>
           <p:nvPr/>
         </p:nvSpPr>
@@ -5256,7 +8335,7 @@
       </p:sp>
       <p:sp>
         <p:nvSpPr>
-          <p:cNvPr id="4" name="Text 2"/>
+          <p:cNvPr id="5" name="Text 3"/>
           <p:cNvSpPr/>
           <p:nvPr/>
         </p:nvSpPr>
@@ -5295,7 +8374,7 @@
       </p:sp>
       <p:sp>
         <p:nvSpPr>
-          <p:cNvPr id="5" name="Text 3"/>
+          <p:cNvPr id="6" name="Text 4"/>
           <p:cNvSpPr/>
           <p:nvPr/>
         </p:nvSpPr>
@@ -5334,13 +8413,77 @@
       </p:sp>
       <p:sp>
         <p:nvSpPr>
-          <p:cNvPr id="6" name="Text 4"/>
+          <p:cNvPr id="7" name="Shape 5"/>
           <p:cNvSpPr/>
           <p:nvPr/>
         </p:nvSpPr>
         <p:spPr>
           <a:xfrm>
             <a:off x="640080" y="658368"/>
+            <a:ext cx="420624" cy="420624"/>
+          </a:xfrm>
+          <a:prstGeom prst="ellipse">
+            <a:avLst/>
+          </a:prstGeom>
+          <a:solidFill>
+            <a:srgbClr val="0068B7"/>
+          </a:solidFill>
+          <a:ln w="12700">
+            <a:solidFill>
+              <a:srgbClr val="0068B7"/>
+            </a:solidFill>
+            <a:prstDash val="solid"/>
+          </a:ln>
+        </p:spPr>
+      </p:sp>
+      <p:sp>
+        <p:nvSpPr>
+          <p:cNvPr id="8" name="Text 6"/>
+          <p:cNvSpPr/>
+          <p:nvPr/>
+        </p:nvSpPr>
+        <p:spPr>
+          <a:xfrm>
+            <a:off x="640080" y="731520"/>
+            <a:ext cx="420624" cy="164592"/>
+          </a:xfrm>
+          <a:prstGeom prst="rect">
+            <a:avLst/>
+          </a:prstGeom>
+          <a:noFill/>
+          <a:ln/>
+        </p:spPr>
+        <p:txBody>
+          <a:bodyPr wrap="square" lIns="0" tIns="0" rIns="0" bIns="0" rtlCol="0" anchor="ctr"/>
+          <a:lstStyle/>
+          <a:p>
+            <a:pPr algn="ctr" indent="0" marL="0">
+              <a:buNone/>
+            </a:pPr>
+            <a:r>
+              <a:rPr lang="en-US" sz="1100" b="1" dirty="0">
+                <a:solidFill>
+                  <a:srgbClr val="FFFFFF"/>
+                </a:solidFill>
+                <a:latin typeface="Aptos" pitchFamily="34" charset="0"/>
+                <a:ea typeface="Aptos" pitchFamily="34" charset="-122"/>
+                <a:cs typeface="Aptos" pitchFamily="34" charset="-120"/>
+              </a:rPr>
+              <a:t>13</a:t>
+            </a:r>
+            <a:endParaRPr lang="en-US" sz="1100" dirty="0"/>
+          </a:p>
+        </p:txBody>
+      </p:sp>
+      <p:sp>
+        <p:nvSpPr>
+          <p:cNvPr id="9" name="Text 7"/>
+          <p:cNvSpPr/>
+          <p:nvPr/>
+        </p:nvSpPr>
+        <p:spPr>
+          <a:xfrm>
+            <a:off x="640080" y="621792"/>
             <a:ext cx="10881360" cy="566928"/>
           </a:xfrm>
           <a:prstGeom prst="rect">
@@ -5367,7 +8510,7 @@
                 <a:ea typeface="Aptos Display" pitchFamily="34" charset="-122"/>
                 <a:cs typeface="Aptos Display" pitchFamily="34" charset="-120"/>
               </a:rPr>
-              <a:t>References and Resources</a:t>
+              <a:t>Expected Assignment</a:t>
             </a:r>
             <a:endParaRPr lang="en-US" sz="2700" dirty="0"/>
           </a:p>
@@ -5375,14 +8518,14 @@
       </p:sp>
       <p:sp>
         <p:nvSpPr>
-          <p:cNvPr id="7" name="Text 5"/>
-          <p:cNvSpPr/>
-          <p:nvPr/>
-        </p:nvSpPr>
-        <p:spPr>
-          <a:xfrm>
-            <a:off x="822960" y="1325880"/>
-            <a:ext cx="10378440" cy="4800600"/>
+          <p:cNvPr id="10" name="Text 8"/>
+          <p:cNvSpPr/>
+          <p:nvPr/>
+        </p:nvSpPr>
+        <p:spPr>
+          <a:xfrm>
+            <a:off x="868680" y="1417320"/>
+            <a:ext cx="6675120" cy="4434840"/>
           </a:xfrm>
           <a:prstGeom prst="rect">
             <a:avLst/>
@@ -5397,7 +8540,7 @@
           <a:lstStyle/>
           <a:p>
             <a:r>
-              <a:rPr lang="en-US" sz="1450" dirty="0">
+              <a:rPr lang="en-US" sz="1700" dirty="0">
                 <a:solidFill>
                   <a:srgbClr val="17364A"/>
                 </a:solidFill>
@@ -5405,13 +8548,106 @@
                 <a:ea typeface="Aptos" pitchFamily="34" charset="-122"/>
                 <a:cs typeface="Aptos" pitchFamily="34" charset="-120"/>
               </a:rPr>
-              <a:t>NIST AI Risk Management Framework: https://www.nist.gov/itl/ai-risk-management-framework</a:t>
-            </a:r>
-            <a:endParaRPr lang="en-US" sz="1450" dirty="0"/>
-          </a:p>
-          <a:p>
-            <a:r>
-              <a:rPr lang="en-US" sz="1450" dirty="0">
+              <a:t>The expected artifact is a completed AI requirements matrix. It should be specific to a public health workflow and should.</a:t>
+            </a:r>
+            <a:endParaRPr lang="en-US" sz="1700" dirty="0"/>
+          </a:p>
+        </p:txBody>
+      </p:sp>
+      <p:sp>
+        <p:nvSpPr>
+          <p:cNvPr id="11" name="Shape 9"/>
+          <p:cNvSpPr/>
+          <p:nvPr/>
+        </p:nvSpPr>
+        <p:spPr>
+          <a:xfrm>
+            <a:off x="7909560" y="1417320"/>
+            <a:ext cx="3154680" cy="1828800"/>
+          </a:xfrm>
+          <a:prstGeom prst="roundRect">
+            <a:avLst>
+              <a:gd name="adj" fmla="val 6000"/>
+            </a:avLst>
+          </a:prstGeom>
+          <a:solidFill>
+            <a:srgbClr val="EEF8ED"/>
+          </a:solidFill>
+          <a:ln w="12700">
+            <a:solidFill>
+              <a:srgbClr val="B9D7E6"/>
+            </a:solidFill>
+            <a:prstDash val="solid"/>
+          </a:ln>
+        </p:spPr>
+      </p:sp>
+      <p:sp>
+        <p:nvSpPr>
+          <p:cNvPr id="12" name="Text 10"/>
+          <p:cNvSpPr/>
+          <p:nvPr/>
+        </p:nvSpPr>
+        <p:spPr>
+          <a:xfrm>
+            <a:off x="8074152" y="1563624"/>
+            <a:ext cx="2825496" cy="201168"/>
+          </a:xfrm>
+          <a:prstGeom prst="rect">
+            <a:avLst/>
+          </a:prstGeom>
+          <a:noFill/>
+          <a:ln/>
+        </p:spPr>
+        <p:txBody>
+          <a:bodyPr wrap="square" lIns="0" tIns="0" rIns="0" bIns="0" rtlCol="0" anchor="ctr"/>
+          <a:lstStyle/>
+          <a:p>
+            <a:pPr indent="0" marL="0">
+              <a:buNone/>
+            </a:pPr>
+            <a:r>
+              <a:rPr lang="en-US" sz="950" b="1" dirty="0">
+                <a:solidFill>
+                  <a:srgbClr val="0068B7"/>
+                </a:solidFill>
+                <a:latin typeface="Aptos" pitchFamily="34" charset="0"/>
+                <a:ea typeface="Aptos" pitchFamily="34" charset="-122"/>
+                <a:cs typeface="Aptos" pitchFamily="34" charset="-120"/>
+              </a:rPr>
+              <a:t>Key idea</a:t>
+            </a:r>
+            <a:endParaRPr lang="en-US" sz="950" dirty="0"/>
+          </a:p>
+        </p:txBody>
+      </p:sp>
+      <p:sp>
+        <p:nvSpPr>
+          <p:cNvPr id="13" name="Text 11"/>
+          <p:cNvSpPr/>
+          <p:nvPr/>
+        </p:nvSpPr>
+        <p:spPr>
+          <a:xfrm>
+            <a:off x="8074152" y="1856232"/>
+            <a:ext cx="2825496" cy="1261872"/>
+          </a:xfrm>
+          <a:prstGeom prst="rect">
+            <a:avLst/>
+          </a:prstGeom>
+          <a:noFill/>
+          <a:ln/>
+        </p:spPr>
+        <p:txBody>
+          <a:bodyPr wrap="square" lIns="0" tIns="0" rIns="0" bIns="0" rtlCol="0" anchor="t">
+            <a:normAutofit/>
+          </a:bodyPr>
+          <a:lstStyle/>
+          <a:p>
+            <a:pPr indent="0" marL="0">
+              <a:buNone/>
+            </a:pPr>
+            <a:r>
+              <a:rPr lang="en-US" sz="1250" dirty="0">
                 <a:solidFill>
                   <a:srgbClr val="17364A"/>
                 </a:solidFill>
@@ -5419,13 +8655,106 @@
                 <a:ea typeface="Aptos" pitchFamily="34" charset="-122"/>
                 <a:cs typeface="Aptos" pitchFamily="34" charset="-120"/>
               </a:rPr>
-              <a:t>ONC interoperability resources and agency procurement templates</a:t>
-            </a:r>
-            <a:endParaRPr lang="en-US" sz="1450" dirty="0"/>
-          </a:p>
-          <a:p>
-            <a:r>
-              <a:rPr lang="en-US" sz="1450" dirty="0">
+              <a:t>The expected artifact is a completed AI requirements matrix. It should be specific to a public health workflow and should.</a:t>
+            </a:r>
+            <a:endParaRPr lang="en-US" sz="1250" dirty="0"/>
+          </a:p>
+        </p:txBody>
+      </p:sp>
+      <p:sp>
+        <p:nvSpPr>
+          <p:cNvPr id="14" name="Shape 12"/>
+          <p:cNvSpPr/>
+          <p:nvPr/>
+        </p:nvSpPr>
+        <p:spPr>
+          <a:xfrm>
+            <a:off x="7909560" y="3520440"/>
+            <a:ext cx="3154680" cy="1737360"/>
+          </a:xfrm>
+          <a:prstGeom prst="roundRect">
+            <a:avLst>
+              <a:gd name="adj" fmla="val 6316"/>
+            </a:avLst>
+          </a:prstGeom>
+          <a:solidFill>
+            <a:srgbClr val="EAF6F8"/>
+          </a:solidFill>
+          <a:ln w="12700">
+            <a:solidFill>
+              <a:srgbClr val="B9D7E6"/>
+            </a:solidFill>
+            <a:prstDash val="solid"/>
+          </a:ln>
+        </p:spPr>
+      </p:sp>
+      <p:sp>
+        <p:nvSpPr>
+          <p:cNvPr id="15" name="Text 13"/>
+          <p:cNvSpPr/>
+          <p:nvPr/>
+        </p:nvSpPr>
+        <p:spPr>
+          <a:xfrm>
+            <a:off x="8074152" y="3666744"/>
+            <a:ext cx="2825496" cy="201168"/>
+          </a:xfrm>
+          <a:prstGeom prst="rect">
+            <a:avLst/>
+          </a:prstGeom>
+          <a:noFill/>
+          <a:ln/>
+        </p:spPr>
+        <p:txBody>
+          <a:bodyPr wrap="square" lIns="0" tIns="0" rIns="0" bIns="0" rtlCol="0" anchor="ctr"/>
+          <a:lstStyle/>
+          <a:p>
+            <a:pPr indent="0" marL="0">
+              <a:buNone/>
+            </a:pPr>
+            <a:r>
+              <a:rPr lang="en-US" sz="950" b="1" dirty="0">
+                <a:solidFill>
+                  <a:srgbClr val="0068B7"/>
+                </a:solidFill>
+                <a:latin typeface="Aptos" pitchFamily="34" charset="0"/>
+                <a:ea typeface="Aptos" pitchFamily="34" charset="-122"/>
+                <a:cs typeface="Aptos" pitchFamily="34" charset="-120"/>
+              </a:rPr>
+              <a:t>Use this for</a:t>
+            </a:r>
+            <a:endParaRPr lang="en-US" sz="950" dirty="0"/>
+          </a:p>
+        </p:txBody>
+      </p:sp>
+      <p:sp>
+        <p:nvSpPr>
+          <p:cNvPr id="16" name="Text 14"/>
+          <p:cNvSpPr/>
+          <p:nvPr/>
+        </p:nvSpPr>
+        <p:spPr>
+          <a:xfrm>
+            <a:off x="8074152" y="3959352"/>
+            <a:ext cx="2825496" cy="1170432"/>
+          </a:xfrm>
+          <a:prstGeom prst="rect">
+            <a:avLst/>
+          </a:prstGeom>
+          <a:noFill/>
+          <a:ln/>
+        </p:spPr>
+        <p:txBody>
+          <a:bodyPr wrap="square" lIns="0" tIns="0" rIns="0" bIns="0" rtlCol="0" anchor="t">
+            <a:normAutofit/>
+          </a:bodyPr>
+          <a:lstStyle/>
+          <a:p>
+            <a:pPr indent="0" marL="0">
+              <a:buNone/>
+            </a:pPr>
+            <a:r>
+              <a:rPr lang="en-US" sz="1250" dirty="0">
                 <a:solidFill>
                   <a:srgbClr val="17364A"/>
                 </a:solidFill>
@@ -5433,37 +8762,9 @@
                 <a:ea typeface="Aptos" pitchFamily="34" charset="-122"/>
                 <a:cs typeface="Aptos" pitchFamily="34" charset="-120"/>
               </a:rPr>
-              <a:t>NIST Generative AI Profile: https://www.nist.gov/publications/artificial-intelligence-risk-management-framework-generative-artificial-intelligence</a:t>
-            </a:r>
-            <a:endParaRPr lang="en-US" sz="1450" dirty="0"/>
-          </a:p>
-          <a:p>
-            <a:r>
-              <a:rPr lang="en-US" sz="1450" dirty="0">
-                <a:solidFill>
-                  <a:srgbClr val="17364A"/>
-                </a:solidFill>
-                <a:latin typeface="Aptos" pitchFamily="34" charset="0"/>
-                <a:ea typeface="Aptos" pitchFamily="34" charset="-122"/>
-                <a:cs typeface="Aptos" pitchFamily="34" charset="-120"/>
-              </a:rPr>
-              <a:t>CDC Public Health Data Strategy and Data Modernization resources: https://www.cdc.gov/public-health-data-strategy/php/about/index.html</a:t>
-            </a:r>
-            <a:endParaRPr lang="en-US" sz="1450" dirty="0"/>
-          </a:p>
-          <a:p>
-            <a:r>
-              <a:rPr lang="en-US" sz="1450" dirty="0">
-                <a:solidFill>
-                  <a:srgbClr val="17364A"/>
-                </a:solidFill>
-                <a:latin typeface="Aptos" pitchFamily="34" charset="0"/>
-                <a:ea typeface="Aptos" pitchFamily="34" charset="-122"/>
-                <a:cs typeface="Aptos" pitchFamily="34" charset="-120"/>
-              </a:rPr>
-              <a:t>OWASP Top 10 for LLM Applications, when security or AI integrations are relevant</a:t>
-            </a:r>
-            <a:endParaRPr lang="en-US" sz="1450" dirty="0"/>
+              <a:t>Connect the concept to public health decisions, safeguards, documentation, or implementation work.</a:t>
+            </a:r>
+            <a:endParaRPr lang="en-US" sz="1250" dirty="0"/>
           </a:p>
         </p:txBody>
       </p:sp>
@@ -5526,7 +8827,32 @@
       </p:sp>
       <p:sp>
         <p:nvSpPr>
-          <p:cNvPr id="3" name="Text 1"/>
+          <p:cNvPr id="3" name="Shape 1"/>
+          <p:cNvSpPr/>
+          <p:nvPr/>
+        </p:nvSpPr>
+        <p:spPr>
+          <a:xfrm>
+            <a:off x="0" y="164592"/>
+            <a:ext cx="146304" cy="6693408"/>
+          </a:xfrm>
+          <a:prstGeom prst="rect">
+            <a:avLst/>
+          </a:prstGeom>
+          <a:solidFill>
+            <a:srgbClr val="2F8A28"/>
+          </a:solidFill>
+          <a:ln w="12700">
+            <a:solidFill>
+              <a:srgbClr val="2F8A28"/>
+            </a:solidFill>
+            <a:prstDash val="solid"/>
+          </a:ln>
+        </p:spPr>
+      </p:sp>
+      <p:sp>
+        <p:nvSpPr>
+          <p:cNvPr id="4" name="Text 2"/>
           <p:cNvSpPr/>
           <p:nvPr/>
         </p:nvSpPr>
@@ -5565,7 +8891,7 @@
       </p:sp>
       <p:sp>
         <p:nvSpPr>
-          <p:cNvPr id="4" name="Text 2"/>
+          <p:cNvPr id="5" name="Text 3"/>
           <p:cNvSpPr/>
           <p:nvPr/>
         </p:nvSpPr>
@@ -5604,7 +8930,7 @@
       </p:sp>
       <p:sp>
         <p:nvSpPr>
-          <p:cNvPr id="5" name="Text 3"/>
+          <p:cNvPr id="6" name="Text 4"/>
           <p:cNvSpPr/>
           <p:nvPr/>
         </p:nvSpPr>
@@ -5643,7 +8969,7 @@
       </p:sp>
       <p:sp>
         <p:nvSpPr>
-          <p:cNvPr id="6" name="Text 4"/>
+          <p:cNvPr id="7" name="Text 5"/>
           <p:cNvSpPr/>
           <p:nvPr/>
         </p:nvSpPr>
@@ -5676,7 +9002,7 @@
                 <a:ea typeface="Aptos Display" pitchFamily="34" charset="-122"/>
                 <a:cs typeface="Aptos Display" pitchFamily="34" charset="-120"/>
               </a:rPr>
-              <a:t>Module Context</a:t>
+              <a:t>What this module helps you do</a:t>
             </a:r>
             <a:endParaRPr lang="en-US" sz="2700" dirty="0"/>
           </a:p>
@@ -5684,14 +9010,14 @@
       </p:sp>
       <p:sp>
         <p:nvSpPr>
-          <p:cNvPr id="7" name="Text 5"/>
-          <p:cNvSpPr/>
-          <p:nvPr/>
-        </p:nvSpPr>
-        <p:spPr>
-          <a:xfrm>
-            <a:off x="822960" y="1325880"/>
-            <a:ext cx="10378440" cy="1371600"/>
+          <p:cNvPr id="8" name="Text 6"/>
+          <p:cNvSpPr/>
+          <p:nvPr/>
+        </p:nvSpPr>
+        <p:spPr>
+          <a:xfrm>
+            <a:off x="868680" y="1417320"/>
+            <a:ext cx="6675120" cy="3291840"/>
           </a:xfrm>
           <a:prstGeom prst="rect">
             <a:avLst/>
@@ -5706,7 +9032,7 @@
           <a:lstStyle/>
           <a:p>
             <a:r>
-              <a:rPr lang="en-US" sz="1600" dirty="0">
+              <a:rPr lang="en-US" sz="1700" dirty="0">
                 <a:solidFill>
                   <a:srgbClr val="17364A"/>
                 </a:solidFill>
@@ -5714,13 +9040,13 @@
                 <a:ea typeface="Aptos" pitchFamily="34" charset="-122"/>
                 <a:cs typeface="Aptos" pitchFamily="34" charset="-120"/>
               </a:rPr>
-              <a:t>Level: applied/foundational</a:t>
-            </a:r>
-            <a:endParaRPr lang="en-US" sz="1600" dirty="0"/>
-          </a:p>
-          <a:p>
-            <a:r>
-              <a:rPr lang="en-US" sz="1600" dirty="0">
+              <a:t>AI procurement requires stronger requirements than ordinary software purchasing because agencies must define not only features, but also data.</a:t>
+            </a:r>
+            <a:endParaRPr lang="en-US" sz="1700" dirty="0"/>
+          </a:p>
+          <a:p>
+            <a:r>
+              <a:rPr lang="en-US" sz="1700" dirty="0">
                 <a:solidFill>
                   <a:srgbClr val="17364A"/>
                 </a:solidFill>
@@ -5728,45 +9054,97 @@
                 <a:ea typeface="Aptos" pitchFamily="34" charset="-122"/>
                 <a:cs typeface="Aptos" pitchFamily="34" charset="-120"/>
               </a:rPr>
-              <a:t>Primary track: Program Management Role-Based Track</a:t>
-            </a:r>
-            <a:endParaRPr lang="en-US" sz="1600" dirty="0"/>
-          </a:p>
-          <a:p>
-            <a:r>
-              <a:rPr lang="en-US" sz="1600" dirty="0">
-                <a:solidFill>
-                  <a:srgbClr val="17364A"/>
-                </a:solidFill>
-                <a:latin typeface="Aptos" pitchFamily="34" charset="0"/>
-                <a:ea typeface="Aptos" pitchFamily="34" charset="-122"/>
-                <a:cs typeface="Aptos" pitchFamily="34" charset="-120"/>
-              </a:rPr>
-              <a:t>Appears in tracks: operations-data-quality</a:t>
-            </a:r>
-            <a:endParaRPr lang="en-US" sz="1600" dirty="0"/>
-          </a:p>
-        </p:txBody>
-      </p:sp>
-      <p:sp>
-        <p:nvSpPr>
-          <p:cNvPr id="8" name="Text 6"/>
-          <p:cNvSpPr/>
-          <p:nvPr/>
-        </p:nvSpPr>
-        <p:spPr>
-          <a:xfrm>
-            <a:off x="822960" y="2743200"/>
-            <a:ext cx="10378440" cy="2834640"/>
-          </a:xfrm>
-          <a:prstGeom prst="rect">
-            <a:avLst/>
-          </a:prstGeom>
-          <a:noFill/>
-          <a:ln/>
-        </p:spPr>
-        <p:txBody>
-          <a:bodyPr wrap="square" lIns="1016" tIns="1016" rIns="1016" bIns="1016" rtlCol="0" anchor="t">
+              <a:t>This module teaches learners how to write requirements that can be evaluated, tested, enforced, and monitored throughout implementation.</a:t>
+            </a:r>
+            <a:endParaRPr lang="en-US" sz="1700" dirty="0"/>
+          </a:p>
+        </p:txBody>
+      </p:sp>
+      <p:sp>
+        <p:nvSpPr>
+          <p:cNvPr id="9" name="Shape 7"/>
+          <p:cNvSpPr/>
+          <p:nvPr/>
+        </p:nvSpPr>
+        <p:spPr>
+          <a:xfrm>
+            <a:off x="7909560" y="1417320"/>
+            <a:ext cx="3154680" cy="1920240"/>
+          </a:xfrm>
+          <a:prstGeom prst="roundRect">
+            <a:avLst>
+              <a:gd name="adj" fmla="val 5714"/>
+            </a:avLst>
+          </a:prstGeom>
+          <a:solidFill>
+            <a:srgbClr val="EAF6F8"/>
+          </a:solidFill>
+          <a:ln w="12700">
+            <a:solidFill>
+              <a:srgbClr val="B9D7E6"/>
+            </a:solidFill>
+            <a:prstDash val="solid"/>
+          </a:ln>
+        </p:spPr>
+      </p:sp>
+      <p:sp>
+        <p:nvSpPr>
+          <p:cNvPr id="10" name="Text 8"/>
+          <p:cNvSpPr/>
+          <p:nvPr/>
+        </p:nvSpPr>
+        <p:spPr>
+          <a:xfrm>
+            <a:off x="8074152" y="1563624"/>
+            <a:ext cx="2825496" cy="201168"/>
+          </a:xfrm>
+          <a:prstGeom prst="rect">
+            <a:avLst/>
+          </a:prstGeom>
+          <a:noFill/>
+          <a:ln/>
+        </p:spPr>
+        <p:txBody>
+          <a:bodyPr wrap="square" lIns="0" tIns="0" rIns="0" bIns="0" rtlCol="0" anchor="ctr"/>
+          <a:lstStyle/>
+          <a:p>
+            <a:pPr indent="0" marL="0">
+              <a:buNone/>
+            </a:pPr>
+            <a:r>
+              <a:rPr lang="en-US" sz="950" b="1" dirty="0">
+                <a:solidFill>
+                  <a:srgbClr val="0068B7"/>
+                </a:solidFill>
+                <a:latin typeface="Aptos" pitchFamily="34" charset="0"/>
+                <a:ea typeface="Aptos" pitchFamily="34" charset="-122"/>
+                <a:cs typeface="Aptos" pitchFamily="34" charset="-120"/>
+              </a:rPr>
+              <a:t>Module details</a:t>
+            </a:r>
+            <a:endParaRPr lang="en-US" sz="950" dirty="0"/>
+          </a:p>
+        </p:txBody>
+      </p:sp>
+      <p:sp>
+        <p:nvSpPr>
+          <p:cNvPr id="11" name="Text 9"/>
+          <p:cNvSpPr/>
+          <p:nvPr/>
+        </p:nvSpPr>
+        <p:spPr>
+          <a:xfrm>
+            <a:off x="8074152" y="1856232"/>
+            <a:ext cx="2825496" cy="1353312"/>
+          </a:xfrm>
+          <a:prstGeom prst="rect">
+            <a:avLst/>
+          </a:prstGeom>
+          <a:noFill/>
+          <a:ln/>
+        </p:spPr>
+        <p:txBody>
+          <a:bodyPr wrap="square" lIns="0" tIns="0" rIns="0" bIns="0" rtlCol="0" anchor="t">
             <a:normAutofit/>
           </a:bodyPr>
           <a:lstStyle/>
@@ -5775,7 +9153,7 @@
               <a:buNone/>
             </a:pPr>
             <a:r>
-              <a:rPr lang="en-US" sz="1400" dirty="0">
+              <a:rPr lang="en-US" sz="1250" dirty="0">
                 <a:solidFill>
                   <a:srgbClr val="17364A"/>
                 </a:solidFill>
@@ -5783,9 +9161,150 @@
                 <a:ea typeface="Aptos" pitchFamily="34" charset="-122"/>
                 <a:cs typeface="Aptos" pitchFamily="34" charset="-120"/>
               </a:rPr>
-              <a:t>AI procurement requires stronger requirements than ordinary software purchasing because agencies must define not only features, but also data rights, validation, interoperability, security, privacy, monitoring, documentation, accessibility, and exit strategy. This module teaches learners how to write requirements that can be evaluated, tested, enforced, and monitored throughout implementation.</a:t>
-            </a:r>
-            <a:endParaRPr lang="en-US" sz="1400" dirty="0"/>
+              <a:t>Level: applied/foundational</a:t>
+            </a:r>
+            <a:endParaRPr lang="en-US" sz="1250" dirty="0"/>
+          </a:p>
+          <a:p>
+            <a:pPr indent="0" marL="0">
+              <a:buNone/>
+            </a:pPr>
+            <a:r>
+              <a:rPr lang="en-US" sz="1250" dirty="0">
+                <a:solidFill>
+                  <a:srgbClr val="17364A"/>
+                </a:solidFill>
+                <a:latin typeface="Aptos" pitchFamily="34" charset="0"/>
+                <a:ea typeface="Aptos" pitchFamily="34" charset="-122"/>
+                <a:cs typeface="Aptos" pitchFamily="34" charset="-120"/>
+              </a:rPr>
+              <a:t>Primary track: Program Management Role-Based Track</a:t>
+            </a:r>
+            <a:endParaRPr lang="en-US" sz="1250" dirty="0"/>
+          </a:p>
+          <a:p>
+            <a:pPr indent="0" marL="0">
+              <a:buNone/>
+            </a:pPr>
+            <a:r>
+              <a:rPr lang="en-US" sz="1250" dirty="0">
+                <a:solidFill>
+                  <a:srgbClr val="17364A"/>
+                </a:solidFill>
+                <a:latin typeface="Aptos" pitchFamily="34" charset="0"/>
+                <a:ea typeface="Aptos" pitchFamily="34" charset="-122"/>
+                <a:cs typeface="Aptos" pitchFamily="34" charset="-120"/>
+              </a:rPr>
+              <a:t>Appears in tracks: operations-data-quality</a:t>
+            </a:r>
+            <a:endParaRPr lang="en-US" sz="1250" dirty="0"/>
+          </a:p>
+        </p:txBody>
+      </p:sp>
+      <p:sp>
+        <p:nvSpPr>
+          <p:cNvPr id="12" name="Shape 10"/>
+          <p:cNvSpPr/>
+          <p:nvPr/>
+        </p:nvSpPr>
+        <p:spPr>
+          <a:xfrm>
+            <a:off x="7909560" y="3611880"/>
+            <a:ext cx="3154680" cy="1783080"/>
+          </a:xfrm>
+          <a:prstGeom prst="roundRect">
+            <a:avLst>
+              <a:gd name="adj" fmla="val 6154"/>
+            </a:avLst>
+          </a:prstGeom>
+          <a:solidFill>
+            <a:srgbClr val="EEF8ED"/>
+          </a:solidFill>
+          <a:ln w="12700">
+            <a:solidFill>
+              <a:srgbClr val="B9D7E6"/>
+            </a:solidFill>
+            <a:prstDash val="solid"/>
+          </a:ln>
+        </p:spPr>
+      </p:sp>
+      <p:sp>
+        <p:nvSpPr>
+          <p:cNvPr id="13" name="Text 11"/>
+          <p:cNvSpPr/>
+          <p:nvPr/>
+        </p:nvSpPr>
+        <p:spPr>
+          <a:xfrm>
+            <a:off x="8074152" y="3758184"/>
+            <a:ext cx="2825496" cy="201168"/>
+          </a:xfrm>
+          <a:prstGeom prst="rect">
+            <a:avLst/>
+          </a:prstGeom>
+          <a:noFill/>
+          <a:ln/>
+        </p:spPr>
+        <p:txBody>
+          <a:bodyPr wrap="square" lIns="0" tIns="0" rIns="0" bIns="0" rtlCol="0" anchor="ctr"/>
+          <a:lstStyle/>
+          <a:p>
+            <a:pPr indent="0" marL="0">
+              <a:buNone/>
+            </a:pPr>
+            <a:r>
+              <a:rPr lang="en-US" sz="950" b="1" dirty="0">
+                <a:solidFill>
+                  <a:srgbClr val="0068B7"/>
+                </a:solidFill>
+                <a:latin typeface="Aptos" pitchFamily="34" charset="0"/>
+                <a:ea typeface="Aptos" pitchFamily="34" charset="-122"/>
+                <a:cs typeface="Aptos" pitchFamily="34" charset="-120"/>
+              </a:rPr>
+              <a:t>Learning approach</a:t>
+            </a:r>
+            <a:endParaRPr lang="en-US" sz="950" dirty="0"/>
+          </a:p>
+        </p:txBody>
+      </p:sp>
+      <p:sp>
+        <p:nvSpPr>
+          <p:cNvPr id="14" name="Text 12"/>
+          <p:cNvSpPr/>
+          <p:nvPr/>
+        </p:nvSpPr>
+        <p:spPr>
+          <a:xfrm>
+            <a:off x="8074152" y="4050792"/>
+            <a:ext cx="2825496" cy="1216152"/>
+          </a:xfrm>
+          <a:prstGeom prst="rect">
+            <a:avLst/>
+          </a:prstGeom>
+          <a:noFill/>
+          <a:ln/>
+        </p:spPr>
+        <p:txBody>
+          <a:bodyPr wrap="square" lIns="0" tIns="0" rIns="0" bIns="0" rtlCol="0" anchor="t">
+            <a:normAutofit/>
+          </a:bodyPr>
+          <a:lstStyle/>
+          <a:p>
+            <a:pPr indent="0" marL="0">
+              <a:buNone/>
+            </a:pPr>
+            <a:r>
+              <a:rPr lang="en-US" sz="1250" dirty="0">
+                <a:solidFill>
+                  <a:srgbClr val="17364A"/>
+                </a:solidFill>
+                <a:latin typeface="Aptos" pitchFamily="34" charset="0"/>
+                <a:ea typeface="Aptos" pitchFamily="34" charset="-122"/>
+                <a:cs typeface="Aptos" pitchFamily="34" charset="-120"/>
+              </a:rPr>
+              <a:t>Review the core ideas, complete the practical exercise, check your understanding, and use the related plays and tools to apply the lesson.</a:t>
+            </a:r>
+            <a:endParaRPr lang="en-US" sz="1250" dirty="0"/>
           </a:p>
         </p:txBody>
       </p:sp>
@@ -5848,7 +9367,32 @@
       </p:sp>
       <p:sp>
         <p:nvSpPr>
-          <p:cNvPr id="3" name="Text 1"/>
+          <p:cNvPr id="3" name="Shape 1"/>
+          <p:cNvSpPr/>
+          <p:nvPr/>
+        </p:nvSpPr>
+        <p:spPr>
+          <a:xfrm>
+            <a:off x="0" y="164592"/>
+            <a:ext cx="146304" cy="6693408"/>
+          </a:xfrm>
+          <a:prstGeom prst="rect">
+            <a:avLst/>
+          </a:prstGeom>
+          <a:solidFill>
+            <a:srgbClr val="2F8A28"/>
+          </a:solidFill>
+          <a:ln w="12700">
+            <a:solidFill>
+              <a:srgbClr val="2F8A28"/>
+            </a:solidFill>
+            <a:prstDash val="solid"/>
+          </a:ln>
+        </p:spPr>
+      </p:sp>
+      <p:sp>
+        <p:nvSpPr>
+          <p:cNvPr id="4" name="Text 2"/>
           <p:cNvSpPr/>
           <p:nvPr/>
         </p:nvSpPr>
@@ -5887,7 +9431,7 @@
       </p:sp>
       <p:sp>
         <p:nvSpPr>
-          <p:cNvPr id="4" name="Text 2"/>
+          <p:cNvPr id="5" name="Text 3"/>
           <p:cNvSpPr/>
           <p:nvPr/>
         </p:nvSpPr>
@@ -5926,7 +9470,7 @@
       </p:sp>
       <p:sp>
         <p:nvSpPr>
-          <p:cNvPr id="5" name="Text 3"/>
+          <p:cNvPr id="6" name="Text 4"/>
           <p:cNvSpPr/>
           <p:nvPr/>
         </p:nvSpPr>
@@ -5965,13 +9509,77 @@
       </p:sp>
       <p:sp>
         <p:nvSpPr>
-          <p:cNvPr id="6" name="Text 4"/>
+          <p:cNvPr id="7" name="Shape 5"/>
           <p:cNvSpPr/>
           <p:nvPr/>
         </p:nvSpPr>
         <p:spPr>
           <a:xfrm>
             <a:off x="640080" y="658368"/>
+            <a:ext cx="420624" cy="420624"/>
+          </a:xfrm>
+          <a:prstGeom prst="ellipse">
+            <a:avLst/>
+          </a:prstGeom>
+          <a:solidFill>
+            <a:srgbClr val="0068B7"/>
+          </a:solidFill>
+          <a:ln w="12700">
+            <a:solidFill>
+              <a:srgbClr val="0068B7"/>
+            </a:solidFill>
+            <a:prstDash val="solid"/>
+          </a:ln>
+        </p:spPr>
+      </p:sp>
+      <p:sp>
+        <p:nvSpPr>
+          <p:cNvPr id="8" name="Text 6"/>
+          <p:cNvSpPr/>
+          <p:nvPr/>
+        </p:nvSpPr>
+        <p:spPr>
+          <a:xfrm>
+            <a:off x="640080" y="731520"/>
+            <a:ext cx="420624" cy="164592"/>
+          </a:xfrm>
+          <a:prstGeom prst="rect">
+            <a:avLst/>
+          </a:prstGeom>
+          <a:noFill/>
+          <a:ln/>
+        </p:spPr>
+        <p:txBody>
+          <a:bodyPr wrap="square" lIns="0" tIns="0" rIns="0" bIns="0" rtlCol="0" anchor="ctr"/>
+          <a:lstStyle/>
+          <a:p>
+            <a:pPr algn="ctr" indent="0" marL="0">
+              <a:buNone/>
+            </a:pPr>
+            <a:r>
+              <a:rPr lang="en-US" sz="1100" b="1" dirty="0">
+                <a:solidFill>
+                  <a:srgbClr val="FFFFFF"/>
+                </a:solidFill>
+                <a:latin typeface="Aptos" pitchFamily="34" charset="0"/>
+                <a:ea typeface="Aptos" pitchFamily="34" charset="-122"/>
+                <a:cs typeface="Aptos" pitchFamily="34" charset="-120"/>
+              </a:rPr>
+              <a:t>14</a:t>
+            </a:r>
+            <a:endParaRPr lang="en-US" sz="1100" dirty="0"/>
+          </a:p>
+        </p:txBody>
+      </p:sp>
+      <p:sp>
+        <p:nvSpPr>
+          <p:cNvPr id="9" name="Text 7"/>
+          <p:cNvSpPr/>
+          <p:nvPr/>
+        </p:nvSpPr>
+        <p:spPr>
+          <a:xfrm>
+            <a:off x="640080" y="621792"/>
             <a:ext cx="10881360" cy="566928"/>
           </a:xfrm>
           <a:prstGeom prst="rect">
@@ -5998,7 +9606,7 @@
                 <a:ea typeface="Aptos Display" pitchFamily="34" charset="-122"/>
                 <a:cs typeface="Aptos Display" pitchFamily="34" charset="-120"/>
               </a:rPr>
-              <a:t>References and Resources Continued</a:t>
+              <a:t>Knowledge Check</a:t>
             </a:r>
             <a:endParaRPr lang="en-US" sz="2700" dirty="0"/>
           </a:p>
@@ -6006,14 +9614,14 @@
       </p:sp>
       <p:sp>
         <p:nvSpPr>
-          <p:cNvPr id="7" name="Text 5"/>
-          <p:cNvSpPr/>
-          <p:nvPr/>
-        </p:nvSpPr>
-        <p:spPr>
-          <a:xfrm>
-            <a:off x="822960" y="1325880"/>
-            <a:ext cx="10378440" cy="4800600"/>
+          <p:cNvPr id="10" name="Text 8"/>
+          <p:cNvSpPr/>
+          <p:nvPr/>
+        </p:nvSpPr>
+        <p:spPr>
+          <a:xfrm>
+            <a:off x="868680" y="1417320"/>
+            <a:ext cx="6675120" cy="4434840"/>
           </a:xfrm>
           <a:prstGeom prst="rect">
             <a:avLst/>
@@ -6028,7 +9636,7 @@
           <a:lstStyle/>
           <a:p>
             <a:r>
-              <a:rPr lang="en-US" sz="1450" dirty="0">
+              <a:rPr lang="en-US" sz="1700" dirty="0">
                 <a:solidFill>
                   <a:srgbClr val="17364A"/>
                 </a:solidFill>
@@ -6036,9 +9644,1355 @@
                 <a:ea typeface="Aptos" pitchFamily="34" charset="-122"/>
                 <a:cs typeface="Aptos" pitchFamily="34" charset="-120"/>
               </a:rPr>
+              <a:t>1. What is the best reason to address requirements writing for ai procurement and implementation before deployment?</a:t>
+            </a:r>
+            <a:endParaRPr lang="en-US" sz="1700" dirty="0"/>
+          </a:p>
+          <a:p>
+            <a:r>
+              <a:rPr lang="en-US" sz="1700" dirty="0">
+                <a:solidFill>
+                  <a:srgbClr val="17364A"/>
+                </a:solidFill>
+                <a:latin typeface="Aptos" pitchFamily="34" charset="0"/>
+                <a:ea typeface="Aptos" pitchFamily="34" charset="-122"/>
+                <a:cs typeface="Aptos" pitchFamily="34" charset="-120"/>
+              </a:rPr>
+              <a:t>2. Which practice best supports responsible implementation?</a:t>
+            </a:r>
+            <a:endParaRPr lang="en-US" sz="1700" dirty="0"/>
+          </a:p>
+          <a:p>
+            <a:r>
+              <a:rPr lang="en-US" sz="1700" dirty="0">
+                <a:solidFill>
+                  <a:srgbClr val="17364A"/>
+                </a:solidFill>
+                <a:latin typeface="Aptos" pitchFamily="34" charset="0"/>
+                <a:ea typeface="Aptos" pitchFamily="34" charset="-122"/>
+                <a:cs typeface="Aptos" pitchFamily="34" charset="-120"/>
+              </a:rPr>
+              <a:t>3. Which statement best describes a common failure mode?</a:t>
+            </a:r>
+            <a:endParaRPr lang="en-US" sz="1700" dirty="0"/>
+          </a:p>
+          <a:p>
+            <a:r>
+              <a:rPr lang="en-US" sz="1700" dirty="0">
+                <a:solidFill>
+                  <a:srgbClr val="17364A"/>
+                </a:solidFill>
+                <a:latin typeface="Aptos" pitchFamily="34" charset="0"/>
+                <a:ea typeface="Aptos" pitchFamily="34" charset="-122"/>
+                <a:cs typeface="Aptos" pitchFamily="34" charset="-120"/>
+              </a:rPr>
+              <a:t>4. What should be included in the practical artifact for this module?</a:t>
+            </a:r>
+            <a:endParaRPr lang="en-US" sz="1700" dirty="0"/>
+          </a:p>
+        </p:txBody>
+      </p:sp>
+      <p:sp>
+        <p:nvSpPr>
+          <p:cNvPr id="11" name="Shape 9"/>
+          <p:cNvSpPr/>
+          <p:nvPr/>
+        </p:nvSpPr>
+        <p:spPr>
+          <a:xfrm>
+            <a:off x="7909560" y="1417320"/>
+            <a:ext cx="3154680" cy="1828800"/>
+          </a:xfrm>
+          <a:prstGeom prst="roundRect">
+            <a:avLst>
+              <a:gd name="adj" fmla="val 6000"/>
+            </a:avLst>
+          </a:prstGeom>
+          <a:solidFill>
+            <a:srgbClr val="EEF8ED"/>
+          </a:solidFill>
+          <a:ln w="12700">
+            <a:solidFill>
+              <a:srgbClr val="B9D7E6"/>
+            </a:solidFill>
+            <a:prstDash val="solid"/>
+          </a:ln>
+        </p:spPr>
+      </p:sp>
+      <p:sp>
+        <p:nvSpPr>
+          <p:cNvPr id="12" name="Text 10"/>
+          <p:cNvSpPr/>
+          <p:nvPr/>
+        </p:nvSpPr>
+        <p:spPr>
+          <a:xfrm>
+            <a:off x="8074152" y="1563624"/>
+            <a:ext cx="2825496" cy="201168"/>
+          </a:xfrm>
+          <a:prstGeom prst="rect">
+            <a:avLst/>
+          </a:prstGeom>
+          <a:noFill/>
+          <a:ln/>
+        </p:spPr>
+        <p:txBody>
+          <a:bodyPr wrap="square" lIns="0" tIns="0" rIns="0" bIns="0" rtlCol="0" anchor="ctr"/>
+          <a:lstStyle/>
+          <a:p>
+            <a:pPr indent="0" marL="0">
+              <a:buNone/>
+            </a:pPr>
+            <a:r>
+              <a:rPr lang="en-US" sz="950" b="1" dirty="0">
+                <a:solidFill>
+                  <a:srgbClr val="0068B7"/>
+                </a:solidFill>
+                <a:latin typeface="Aptos" pitchFamily="34" charset="0"/>
+                <a:ea typeface="Aptos" pitchFamily="34" charset="-122"/>
+                <a:cs typeface="Aptos" pitchFamily="34" charset="-120"/>
+              </a:rPr>
+              <a:t>Key idea</a:t>
+            </a:r>
+            <a:endParaRPr lang="en-US" sz="950" dirty="0"/>
+          </a:p>
+        </p:txBody>
+      </p:sp>
+      <p:sp>
+        <p:nvSpPr>
+          <p:cNvPr id="13" name="Text 11"/>
+          <p:cNvSpPr/>
+          <p:nvPr/>
+        </p:nvSpPr>
+        <p:spPr>
+          <a:xfrm>
+            <a:off x="8074152" y="1856232"/>
+            <a:ext cx="2825496" cy="1261872"/>
+          </a:xfrm>
+          <a:prstGeom prst="rect">
+            <a:avLst/>
+          </a:prstGeom>
+          <a:noFill/>
+          <a:ln/>
+        </p:spPr>
+        <p:txBody>
+          <a:bodyPr wrap="square" lIns="0" tIns="0" rIns="0" bIns="0" rtlCol="0" anchor="t">
+            <a:normAutofit/>
+          </a:bodyPr>
+          <a:lstStyle/>
+          <a:p>
+            <a:pPr indent="0" marL="0">
+              <a:buNone/>
+            </a:pPr>
+            <a:r>
+              <a:rPr lang="en-US" sz="1250" dirty="0">
+                <a:solidFill>
+                  <a:srgbClr val="17364A"/>
+                </a:solidFill>
+                <a:latin typeface="Aptos" pitchFamily="34" charset="0"/>
+                <a:ea typeface="Aptos" pitchFamily="34" charset="-122"/>
+                <a:cs typeface="Aptos" pitchFamily="34" charset="-120"/>
+              </a:rPr>
+              <a:t>1. What is the best reason to address requirements writing for ai procurement and implementation before deployment?</a:t>
+            </a:r>
+            <a:endParaRPr lang="en-US" sz="1250" dirty="0"/>
+          </a:p>
+        </p:txBody>
+      </p:sp>
+      <p:sp>
+        <p:nvSpPr>
+          <p:cNvPr id="14" name="Shape 12"/>
+          <p:cNvSpPr/>
+          <p:nvPr/>
+        </p:nvSpPr>
+        <p:spPr>
+          <a:xfrm>
+            <a:off x="7909560" y="3520440"/>
+            <a:ext cx="3154680" cy="1737360"/>
+          </a:xfrm>
+          <a:prstGeom prst="roundRect">
+            <a:avLst>
+              <a:gd name="adj" fmla="val 6316"/>
+            </a:avLst>
+          </a:prstGeom>
+          <a:solidFill>
+            <a:srgbClr val="EAF6F8"/>
+          </a:solidFill>
+          <a:ln w="12700">
+            <a:solidFill>
+              <a:srgbClr val="B9D7E6"/>
+            </a:solidFill>
+            <a:prstDash val="solid"/>
+          </a:ln>
+        </p:spPr>
+      </p:sp>
+      <p:sp>
+        <p:nvSpPr>
+          <p:cNvPr id="15" name="Text 13"/>
+          <p:cNvSpPr/>
+          <p:nvPr/>
+        </p:nvSpPr>
+        <p:spPr>
+          <a:xfrm>
+            <a:off x="8074152" y="3666744"/>
+            <a:ext cx="2825496" cy="201168"/>
+          </a:xfrm>
+          <a:prstGeom prst="rect">
+            <a:avLst/>
+          </a:prstGeom>
+          <a:noFill/>
+          <a:ln/>
+        </p:spPr>
+        <p:txBody>
+          <a:bodyPr wrap="square" lIns="0" tIns="0" rIns="0" bIns="0" rtlCol="0" anchor="ctr"/>
+          <a:lstStyle/>
+          <a:p>
+            <a:pPr indent="0" marL="0">
+              <a:buNone/>
+            </a:pPr>
+            <a:r>
+              <a:rPr lang="en-US" sz="950" b="1" dirty="0">
+                <a:solidFill>
+                  <a:srgbClr val="0068B7"/>
+                </a:solidFill>
+                <a:latin typeface="Aptos" pitchFamily="34" charset="0"/>
+                <a:ea typeface="Aptos" pitchFamily="34" charset="-122"/>
+                <a:cs typeface="Aptos" pitchFamily="34" charset="-120"/>
+              </a:rPr>
+              <a:t>Use this for</a:t>
+            </a:r>
+            <a:endParaRPr lang="en-US" sz="950" dirty="0"/>
+          </a:p>
+        </p:txBody>
+      </p:sp>
+      <p:sp>
+        <p:nvSpPr>
+          <p:cNvPr id="16" name="Text 14"/>
+          <p:cNvSpPr/>
+          <p:nvPr/>
+        </p:nvSpPr>
+        <p:spPr>
+          <a:xfrm>
+            <a:off x="8074152" y="3959352"/>
+            <a:ext cx="2825496" cy="1170432"/>
+          </a:xfrm>
+          <a:prstGeom prst="rect">
+            <a:avLst/>
+          </a:prstGeom>
+          <a:noFill/>
+          <a:ln/>
+        </p:spPr>
+        <p:txBody>
+          <a:bodyPr wrap="square" lIns="0" tIns="0" rIns="0" bIns="0" rtlCol="0" anchor="t">
+            <a:normAutofit/>
+          </a:bodyPr>
+          <a:lstStyle/>
+          <a:p>
+            <a:pPr indent="0" marL="0">
+              <a:buNone/>
+            </a:pPr>
+            <a:r>
+              <a:rPr lang="en-US" sz="1250" dirty="0">
+                <a:solidFill>
+                  <a:srgbClr val="17364A"/>
+                </a:solidFill>
+                <a:latin typeface="Aptos" pitchFamily="34" charset="0"/>
+                <a:ea typeface="Aptos" pitchFamily="34" charset="-122"/>
+                <a:cs typeface="Aptos" pitchFamily="34" charset="-120"/>
+              </a:rPr>
+              <a:t>Connect the concept to public health decisions, safeguards, documentation, or implementation work.</a:t>
+            </a:r>
+            <a:endParaRPr lang="en-US" sz="1250" dirty="0"/>
+          </a:p>
+        </p:txBody>
+      </p:sp>
+    </p:spTree>
+  </p:cSld>
+  <p:clrMapOvr>
+    <a:masterClrMapping/>
+  </p:clrMapOvr>
+</p:sld>
+</file>
+
+<file path=ppt/slides/slide21.xml><?xml version="1.0" encoding="utf-8"?>
+<p:sld xmlns:a="http://schemas.openxmlformats.org/drawingml/2006/main" xmlns:r="http://schemas.openxmlformats.org/officeDocument/2006/relationships" xmlns:p="http://schemas.openxmlformats.org/presentationml/2006/main">
+  <p:cSld name="Slide 21">
+    <p:bg>
+      <p:bgPr>
+        <a:solidFill>
+          <a:srgbClr val="F7FBFD"/>
+        </a:solidFill>
+      </p:bgPr>
+    </p:bg>
+    <p:spTree>
+      <p:nvGrpSpPr>
+        <p:cNvPr id="1" name=""/>
+        <p:cNvGrpSpPr/>
+        <p:nvPr/>
+      </p:nvGrpSpPr>
+      <p:grpSpPr>
+        <a:xfrm>
+          <a:off x="0" y="0"/>
+          <a:ext cx="0" cy="0"/>
+          <a:chOff x="0" y="0"/>
+          <a:chExt cx="0" cy="0"/>
+        </a:xfrm>
+      </p:grpSpPr>
+      <p:sp>
+        <p:nvSpPr>
+          <p:cNvPr id="2" name="Shape 0"/>
+          <p:cNvSpPr/>
+          <p:nvPr/>
+        </p:nvSpPr>
+        <p:spPr>
+          <a:xfrm>
+            <a:off x="0" y="0"/>
+            <a:ext cx="12191695" cy="164592"/>
+          </a:xfrm>
+          <a:prstGeom prst="rect">
+            <a:avLst/>
+          </a:prstGeom>
+          <a:solidFill>
+            <a:srgbClr val="0068B7"/>
+          </a:solidFill>
+          <a:ln w="12700">
+            <a:solidFill>
+              <a:srgbClr val="0068B7"/>
+            </a:solidFill>
+            <a:prstDash val="solid"/>
+          </a:ln>
+        </p:spPr>
+      </p:sp>
+      <p:sp>
+        <p:nvSpPr>
+          <p:cNvPr id="3" name="Shape 1"/>
+          <p:cNvSpPr/>
+          <p:nvPr/>
+        </p:nvSpPr>
+        <p:spPr>
+          <a:xfrm>
+            <a:off x="0" y="164592"/>
+            <a:ext cx="146304" cy="6693408"/>
+          </a:xfrm>
+          <a:prstGeom prst="rect">
+            <a:avLst/>
+          </a:prstGeom>
+          <a:solidFill>
+            <a:srgbClr val="2F8A28"/>
+          </a:solidFill>
+          <a:ln w="12700">
+            <a:solidFill>
+              <a:srgbClr val="2F8A28"/>
+            </a:solidFill>
+            <a:prstDash val="solid"/>
+          </a:ln>
+        </p:spPr>
+      </p:sp>
+      <p:sp>
+        <p:nvSpPr>
+          <p:cNvPr id="4" name="Text 2"/>
+          <p:cNvSpPr/>
+          <p:nvPr/>
+        </p:nvSpPr>
+        <p:spPr>
+          <a:xfrm>
+            <a:off x="502920" y="292608"/>
+            <a:ext cx="10149840" cy="256032"/>
+          </a:xfrm>
+          <a:prstGeom prst="rect">
+            <a:avLst/>
+          </a:prstGeom>
+          <a:noFill/>
+          <a:ln/>
+        </p:spPr>
+        <p:txBody>
+          <a:bodyPr wrap="square" lIns="0" tIns="0" rIns="0" bIns="0" rtlCol="0" anchor="ctr"/>
+          <a:lstStyle/>
+          <a:p>
+            <a:pPr indent="0" marL="0">
+              <a:buNone/>
+            </a:pPr>
+            <a:r>
+              <a:rPr lang="en-US" sz="900" b="1" dirty="0">
+                <a:solidFill>
+                  <a:srgbClr val="5F7181"/>
+                </a:solidFill>
+                <a:latin typeface="Aptos" pitchFamily="34" charset="0"/>
+                <a:ea typeface="Aptos" pitchFamily="34" charset="-122"/>
+                <a:cs typeface="Aptos" pitchFamily="34" charset="-120"/>
+              </a:rPr>
+              <a:t>Requirements Writing for AI Procurement and Implementation</a:t>
+            </a:r>
+            <a:endParaRPr lang="en-US" sz="900" dirty="0"/>
+          </a:p>
+        </p:txBody>
+      </p:sp>
+      <p:sp>
+        <p:nvSpPr>
+          <p:cNvPr id="5" name="Text 3"/>
+          <p:cNvSpPr/>
+          <p:nvPr/>
+        </p:nvSpPr>
+        <p:spPr>
+          <a:xfrm>
+            <a:off x="502920" y="6537960"/>
+            <a:ext cx="7772400" cy="201168"/>
+          </a:xfrm>
+          <a:prstGeom prst="rect">
+            <a:avLst/>
+          </a:prstGeom>
+          <a:noFill/>
+          <a:ln/>
+        </p:spPr>
+        <p:txBody>
+          <a:bodyPr wrap="square" lIns="0" tIns="0" rIns="0" bIns="0" rtlCol="0" anchor="ctr"/>
+          <a:lstStyle/>
+          <a:p>
+            <a:pPr indent="0" marL="0">
+              <a:buNone/>
+            </a:pPr>
+            <a:r>
+              <a:rPr lang="en-US" sz="800" dirty="0">
+                <a:solidFill>
+                  <a:srgbClr val="5F7181"/>
+                </a:solidFill>
+                <a:latin typeface="Aptos" pitchFamily="34" charset="0"/>
+                <a:ea typeface="Aptos" pitchFamily="34" charset="-122"/>
+                <a:cs typeface="Aptos" pitchFamily="34" charset="-120"/>
+              </a:rPr>
+              <a:t>AI Playbook and Toolkit for Public Health Departments</a:t>
+            </a:r>
+            <a:endParaRPr lang="en-US" sz="800" dirty="0"/>
+          </a:p>
+        </p:txBody>
+      </p:sp>
+      <p:sp>
+        <p:nvSpPr>
+          <p:cNvPr id="6" name="Text 4"/>
+          <p:cNvSpPr/>
+          <p:nvPr/>
+        </p:nvSpPr>
+        <p:spPr>
+          <a:xfrm>
+            <a:off x="9966960" y="6537960"/>
+            <a:ext cx="1645920" cy="201168"/>
+          </a:xfrm>
+          <a:prstGeom prst="rect">
+            <a:avLst/>
+          </a:prstGeom>
+          <a:noFill/>
+          <a:ln/>
+        </p:spPr>
+        <p:txBody>
+          <a:bodyPr wrap="square" lIns="0" tIns="0" rIns="0" bIns="0" rtlCol="0" anchor="ctr"/>
+          <a:lstStyle/>
+          <a:p>
+            <a:pPr algn="r" indent="0" marL="0">
+              <a:buNone/>
+            </a:pPr>
+            <a:r>
+              <a:rPr lang="en-US" sz="800" dirty="0">
+                <a:solidFill>
+                  <a:srgbClr val="5F7181"/>
+                </a:solidFill>
+                <a:latin typeface="Aptos" pitchFamily="34" charset="0"/>
+                <a:ea typeface="Aptos" pitchFamily="34" charset="-122"/>
+                <a:cs typeface="Aptos" pitchFamily="34" charset="-120"/>
+              </a:rPr>
+              <a:t>© Paula Soper</a:t>
+            </a:r>
+            <a:endParaRPr lang="en-US" sz="800" dirty="0"/>
+          </a:p>
+        </p:txBody>
+      </p:sp>
+      <p:sp>
+        <p:nvSpPr>
+          <p:cNvPr id="7" name="Shape 5"/>
+          <p:cNvSpPr/>
+          <p:nvPr/>
+        </p:nvSpPr>
+        <p:spPr>
+          <a:xfrm>
+            <a:off x="640080" y="658368"/>
+            <a:ext cx="420624" cy="420624"/>
+          </a:xfrm>
+          <a:prstGeom prst="ellipse">
+            <a:avLst/>
+          </a:prstGeom>
+          <a:solidFill>
+            <a:srgbClr val="0068B7"/>
+          </a:solidFill>
+          <a:ln w="12700">
+            <a:solidFill>
+              <a:srgbClr val="0068B7"/>
+            </a:solidFill>
+            <a:prstDash val="solid"/>
+          </a:ln>
+        </p:spPr>
+      </p:sp>
+      <p:sp>
+        <p:nvSpPr>
+          <p:cNvPr id="8" name="Text 6"/>
+          <p:cNvSpPr/>
+          <p:nvPr/>
+        </p:nvSpPr>
+        <p:spPr>
+          <a:xfrm>
+            <a:off x="640080" y="731520"/>
+            <a:ext cx="420624" cy="164592"/>
+          </a:xfrm>
+          <a:prstGeom prst="rect">
+            <a:avLst/>
+          </a:prstGeom>
+          <a:noFill/>
+          <a:ln/>
+        </p:spPr>
+        <p:txBody>
+          <a:bodyPr wrap="square" lIns="0" tIns="0" rIns="0" bIns="0" rtlCol="0" anchor="ctr"/>
+          <a:lstStyle/>
+          <a:p>
+            <a:pPr algn="ctr" indent="0" marL="0">
+              <a:buNone/>
+            </a:pPr>
+            <a:r>
+              <a:rPr lang="en-US" sz="1100" b="1" dirty="0">
+                <a:solidFill>
+                  <a:srgbClr val="FFFFFF"/>
+                </a:solidFill>
+                <a:latin typeface="Aptos" pitchFamily="34" charset="0"/>
+                <a:ea typeface="Aptos" pitchFamily="34" charset="-122"/>
+                <a:cs typeface="Aptos" pitchFamily="34" charset="-120"/>
+              </a:rPr>
+              <a:t>15</a:t>
+            </a:r>
+            <a:endParaRPr lang="en-US" sz="1100" dirty="0"/>
+          </a:p>
+        </p:txBody>
+      </p:sp>
+      <p:sp>
+        <p:nvSpPr>
+          <p:cNvPr id="9" name="Text 7"/>
+          <p:cNvSpPr/>
+          <p:nvPr/>
+        </p:nvSpPr>
+        <p:spPr>
+          <a:xfrm>
+            <a:off x="640080" y="621792"/>
+            <a:ext cx="10881360" cy="566928"/>
+          </a:xfrm>
+          <a:prstGeom prst="rect">
+            <a:avLst/>
+          </a:prstGeom>
+          <a:noFill/>
+          <a:ln/>
+        </p:spPr>
+        <p:txBody>
+          <a:bodyPr wrap="square" lIns="0" tIns="0" rIns="0" bIns="0" rtlCol="0" anchor="ctr">
+            <a:normAutofit/>
+          </a:bodyPr>
+          <a:lstStyle/>
+          <a:p>
+            <a:pPr indent="0" marL="0">
+              <a:buNone/>
+            </a:pPr>
+            <a:r>
+              <a:rPr lang="en-US" sz="2700" b="1" dirty="0">
+                <a:solidFill>
+                  <a:srgbClr val="003A63"/>
+                </a:solidFill>
+                <a:latin typeface="Aptos Display" pitchFamily="34" charset="0"/>
+                <a:ea typeface="Aptos Display" pitchFamily="34" charset="-122"/>
+                <a:cs typeface="Aptos Display" pitchFamily="34" charset="-120"/>
+              </a:rPr>
+              <a:t>References and Resources</a:t>
+            </a:r>
+            <a:endParaRPr lang="en-US" sz="2700" dirty="0"/>
+          </a:p>
+        </p:txBody>
+      </p:sp>
+      <p:sp>
+        <p:nvSpPr>
+          <p:cNvPr id="10" name="Text 8"/>
+          <p:cNvSpPr/>
+          <p:nvPr/>
+        </p:nvSpPr>
+        <p:spPr>
+          <a:xfrm>
+            <a:off x="868680" y="1417320"/>
+            <a:ext cx="6675120" cy="4434840"/>
+          </a:xfrm>
+          <a:prstGeom prst="rect">
+            <a:avLst/>
+          </a:prstGeom>
+          <a:noFill/>
+          <a:ln/>
+        </p:spPr>
+        <p:txBody>
+          <a:bodyPr wrap="square" lIns="635" tIns="635" rIns="635" bIns="635" rtlCol="0" anchor="t">
+            <a:normAutofit/>
+          </a:bodyPr>
+          <a:lstStyle/>
+          <a:p>
+            <a:r>
+              <a:rPr lang="en-US" sz="1700" dirty="0">
+                <a:solidFill>
+                  <a:srgbClr val="17364A"/>
+                </a:solidFill>
+                <a:latin typeface="Aptos" pitchFamily="34" charset="0"/>
+                <a:ea typeface="Aptos" pitchFamily="34" charset="-122"/>
+                <a:cs typeface="Aptos" pitchFamily="34" charset="-120"/>
+              </a:rPr>
+              <a:t>NIST AI Risk Management Framework: https://www.nist.gov/itl/ai-risk-management-framework</a:t>
+            </a:r>
+            <a:endParaRPr lang="en-US" sz="1700" dirty="0"/>
+          </a:p>
+          <a:p>
+            <a:r>
+              <a:rPr lang="en-US" sz="1700" dirty="0">
+                <a:solidFill>
+                  <a:srgbClr val="17364A"/>
+                </a:solidFill>
+                <a:latin typeface="Aptos" pitchFamily="34" charset="0"/>
+                <a:ea typeface="Aptos" pitchFamily="34" charset="-122"/>
+                <a:cs typeface="Aptos" pitchFamily="34" charset="-120"/>
+              </a:rPr>
+              <a:t>ONC interoperability resources and agency procurement templates</a:t>
+            </a:r>
+            <a:endParaRPr lang="en-US" sz="1700" dirty="0"/>
+          </a:p>
+          <a:p>
+            <a:r>
+              <a:rPr lang="en-US" sz="1700" dirty="0">
+                <a:solidFill>
+                  <a:srgbClr val="17364A"/>
+                </a:solidFill>
+                <a:latin typeface="Aptos" pitchFamily="34" charset="0"/>
+                <a:ea typeface="Aptos" pitchFamily="34" charset="-122"/>
+                <a:cs typeface="Aptos" pitchFamily="34" charset="-120"/>
+              </a:rPr>
+              <a:t>NIST Generative AI Profile:.</a:t>
+            </a:r>
+            <a:endParaRPr lang="en-US" sz="1700" dirty="0"/>
+          </a:p>
+          <a:p>
+            <a:r>
+              <a:rPr lang="en-US" sz="1700" dirty="0">
+                <a:solidFill>
+                  <a:srgbClr val="17364A"/>
+                </a:solidFill>
+                <a:latin typeface="Aptos" pitchFamily="34" charset="0"/>
+                <a:ea typeface="Aptos" pitchFamily="34" charset="-122"/>
+                <a:cs typeface="Aptos" pitchFamily="34" charset="-120"/>
+              </a:rPr>
+              <a:t>CDC Public Health Data Strategy and Data Modernization resources:.</a:t>
+            </a:r>
+            <a:endParaRPr lang="en-US" sz="1700" dirty="0"/>
+          </a:p>
+        </p:txBody>
+      </p:sp>
+      <p:sp>
+        <p:nvSpPr>
+          <p:cNvPr id="11" name="Shape 9"/>
+          <p:cNvSpPr/>
+          <p:nvPr/>
+        </p:nvSpPr>
+        <p:spPr>
+          <a:xfrm>
+            <a:off x="7909560" y="1417320"/>
+            <a:ext cx="3154680" cy="1828800"/>
+          </a:xfrm>
+          <a:prstGeom prst="roundRect">
+            <a:avLst>
+              <a:gd name="adj" fmla="val 6000"/>
+            </a:avLst>
+          </a:prstGeom>
+          <a:solidFill>
+            <a:srgbClr val="EEF8ED"/>
+          </a:solidFill>
+          <a:ln w="12700">
+            <a:solidFill>
+              <a:srgbClr val="B9D7E6"/>
+            </a:solidFill>
+            <a:prstDash val="solid"/>
+          </a:ln>
+        </p:spPr>
+      </p:sp>
+      <p:sp>
+        <p:nvSpPr>
+          <p:cNvPr id="12" name="Text 10"/>
+          <p:cNvSpPr/>
+          <p:nvPr/>
+        </p:nvSpPr>
+        <p:spPr>
+          <a:xfrm>
+            <a:off x="8074152" y="1563624"/>
+            <a:ext cx="2825496" cy="201168"/>
+          </a:xfrm>
+          <a:prstGeom prst="rect">
+            <a:avLst/>
+          </a:prstGeom>
+          <a:noFill/>
+          <a:ln/>
+        </p:spPr>
+        <p:txBody>
+          <a:bodyPr wrap="square" lIns="0" tIns="0" rIns="0" bIns="0" rtlCol="0" anchor="ctr"/>
+          <a:lstStyle/>
+          <a:p>
+            <a:pPr indent="0" marL="0">
+              <a:buNone/>
+            </a:pPr>
+            <a:r>
+              <a:rPr lang="en-US" sz="950" b="1" dirty="0">
+                <a:solidFill>
+                  <a:srgbClr val="0068B7"/>
+                </a:solidFill>
+                <a:latin typeface="Aptos" pitchFamily="34" charset="0"/>
+                <a:ea typeface="Aptos" pitchFamily="34" charset="-122"/>
+                <a:cs typeface="Aptos" pitchFamily="34" charset="-120"/>
+              </a:rPr>
+              <a:t>Key idea</a:t>
+            </a:r>
+            <a:endParaRPr lang="en-US" sz="950" dirty="0"/>
+          </a:p>
+        </p:txBody>
+      </p:sp>
+      <p:sp>
+        <p:nvSpPr>
+          <p:cNvPr id="13" name="Text 11"/>
+          <p:cNvSpPr/>
+          <p:nvPr/>
+        </p:nvSpPr>
+        <p:spPr>
+          <a:xfrm>
+            <a:off x="8074152" y="1856232"/>
+            <a:ext cx="2825496" cy="1261872"/>
+          </a:xfrm>
+          <a:prstGeom prst="rect">
+            <a:avLst/>
+          </a:prstGeom>
+          <a:noFill/>
+          <a:ln/>
+        </p:spPr>
+        <p:txBody>
+          <a:bodyPr wrap="square" lIns="0" tIns="0" rIns="0" bIns="0" rtlCol="0" anchor="t">
+            <a:normAutofit/>
+          </a:bodyPr>
+          <a:lstStyle/>
+          <a:p>
+            <a:pPr indent="0" marL="0">
+              <a:buNone/>
+            </a:pPr>
+            <a:r>
+              <a:rPr lang="en-US" sz="1250" dirty="0">
+                <a:solidFill>
+                  <a:srgbClr val="17364A"/>
+                </a:solidFill>
+                <a:latin typeface="Aptos" pitchFamily="34" charset="0"/>
+                <a:ea typeface="Aptos" pitchFamily="34" charset="-122"/>
+                <a:cs typeface="Aptos" pitchFamily="34" charset="-120"/>
+              </a:rPr>
+              <a:t>NIST AI Risk Management Framework: https://www.nist.gov/itl/ai-risk-management-framework</a:t>
+            </a:r>
+            <a:endParaRPr lang="en-US" sz="1250" dirty="0"/>
+          </a:p>
+        </p:txBody>
+      </p:sp>
+      <p:sp>
+        <p:nvSpPr>
+          <p:cNvPr id="14" name="Shape 12"/>
+          <p:cNvSpPr/>
+          <p:nvPr/>
+        </p:nvSpPr>
+        <p:spPr>
+          <a:xfrm>
+            <a:off x="7909560" y="3520440"/>
+            <a:ext cx="3154680" cy="1737360"/>
+          </a:xfrm>
+          <a:prstGeom prst="roundRect">
+            <a:avLst>
+              <a:gd name="adj" fmla="val 6316"/>
+            </a:avLst>
+          </a:prstGeom>
+          <a:solidFill>
+            <a:srgbClr val="EAF6F8"/>
+          </a:solidFill>
+          <a:ln w="12700">
+            <a:solidFill>
+              <a:srgbClr val="B9D7E6"/>
+            </a:solidFill>
+            <a:prstDash val="solid"/>
+          </a:ln>
+        </p:spPr>
+      </p:sp>
+      <p:sp>
+        <p:nvSpPr>
+          <p:cNvPr id="15" name="Text 13"/>
+          <p:cNvSpPr/>
+          <p:nvPr/>
+        </p:nvSpPr>
+        <p:spPr>
+          <a:xfrm>
+            <a:off x="8074152" y="3666744"/>
+            <a:ext cx="2825496" cy="201168"/>
+          </a:xfrm>
+          <a:prstGeom prst="rect">
+            <a:avLst/>
+          </a:prstGeom>
+          <a:noFill/>
+          <a:ln/>
+        </p:spPr>
+        <p:txBody>
+          <a:bodyPr wrap="square" lIns="0" tIns="0" rIns="0" bIns="0" rtlCol="0" anchor="ctr"/>
+          <a:lstStyle/>
+          <a:p>
+            <a:pPr indent="0" marL="0">
+              <a:buNone/>
+            </a:pPr>
+            <a:r>
+              <a:rPr lang="en-US" sz="950" b="1" dirty="0">
+                <a:solidFill>
+                  <a:srgbClr val="0068B7"/>
+                </a:solidFill>
+                <a:latin typeface="Aptos" pitchFamily="34" charset="0"/>
+                <a:ea typeface="Aptos" pitchFamily="34" charset="-122"/>
+                <a:cs typeface="Aptos" pitchFamily="34" charset="-120"/>
+              </a:rPr>
+              <a:t>Use this for</a:t>
+            </a:r>
+            <a:endParaRPr lang="en-US" sz="950" dirty="0"/>
+          </a:p>
+        </p:txBody>
+      </p:sp>
+      <p:sp>
+        <p:nvSpPr>
+          <p:cNvPr id="16" name="Text 14"/>
+          <p:cNvSpPr/>
+          <p:nvPr/>
+        </p:nvSpPr>
+        <p:spPr>
+          <a:xfrm>
+            <a:off x="8074152" y="3959352"/>
+            <a:ext cx="2825496" cy="1170432"/>
+          </a:xfrm>
+          <a:prstGeom prst="rect">
+            <a:avLst/>
+          </a:prstGeom>
+          <a:noFill/>
+          <a:ln/>
+        </p:spPr>
+        <p:txBody>
+          <a:bodyPr wrap="square" lIns="0" tIns="0" rIns="0" bIns="0" rtlCol="0" anchor="t">
+            <a:normAutofit/>
+          </a:bodyPr>
+          <a:lstStyle/>
+          <a:p>
+            <a:pPr indent="0" marL="0">
+              <a:buNone/>
+            </a:pPr>
+            <a:r>
+              <a:rPr lang="en-US" sz="1250" dirty="0">
+                <a:solidFill>
+                  <a:srgbClr val="17364A"/>
+                </a:solidFill>
+                <a:latin typeface="Aptos" pitchFamily="34" charset="0"/>
+                <a:ea typeface="Aptos" pitchFamily="34" charset="-122"/>
+                <a:cs typeface="Aptos" pitchFamily="34" charset="-120"/>
+              </a:rPr>
+              <a:t>Connect the concept to public health decisions, safeguards, documentation, or implementation work.</a:t>
+            </a:r>
+            <a:endParaRPr lang="en-US" sz="1250" dirty="0"/>
+          </a:p>
+        </p:txBody>
+      </p:sp>
+    </p:spTree>
+  </p:cSld>
+  <p:clrMapOvr>
+    <a:masterClrMapping/>
+  </p:clrMapOvr>
+</p:sld>
+</file>
+
+<file path=ppt/slides/slide22.xml><?xml version="1.0" encoding="utf-8"?>
+<p:sld xmlns:a="http://schemas.openxmlformats.org/drawingml/2006/main" xmlns:r="http://schemas.openxmlformats.org/officeDocument/2006/relationships" xmlns:p="http://schemas.openxmlformats.org/presentationml/2006/main">
+  <p:cSld name="Slide 22">
+    <p:bg>
+      <p:bgPr>
+        <a:solidFill>
+          <a:srgbClr val="F7FBFD"/>
+        </a:solidFill>
+      </p:bgPr>
+    </p:bg>
+    <p:spTree>
+      <p:nvGrpSpPr>
+        <p:cNvPr id="1" name=""/>
+        <p:cNvGrpSpPr/>
+        <p:nvPr/>
+      </p:nvGrpSpPr>
+      <p:grpSpPr>
+        <a:xfrm>
+          <a:off x="0" y="0"/>
+          <a:ext cx="0" cy="0"/>
+          <a:chOff x="0" y="0"/>
+          <a:chExt cx="0" cy="0"/>
+        </a:xfrm>
+      </p:grpSpPr>
+      <p:sp>
+        <p:nvSpPr>
+          <p:cNvPr id="2" name="Shape 0"/>
+          <p:cNvSpPr/>
+          <p:nvPr/>
+        </p:nvSpPr>
+        <p:spPr>
+          <a:xfrm>
+            <a:off x="0" y="0"/>
+            <a:ext cx="12191695" cy="164592"/>
+          </a:xfrm>
+          <a:prstGeom prst="rect">
+            <a:avLst/>
+          </a:prstGeom>
+          <a:solidFill>
+            <a:srgbClr val="0068B7"/>
+          </a:solidFill>
+          <a:ln w="12700">
+            <a:solidFill>
+              <a:srgbClr val="0068B7"/>
+            </a:solidFill>
+            <a:prstDash val="solid"/>
+          </a:ln>
+        </p:spPr>
+      </p:sp>
+      <p:sp>
+        <p:nvSpPr>
+          <p:cNvPr id="3" name="Shape 1"/>
+          <p:cNvSpPr/>
+          <p:nvPr/>
+        </p:nvSpPr>
+        <p:spPr>
+          <a:xfrm>
+            <a:off x="0" y="164592"/>
+            <a:ext cx="146304" cy="6693408"/>
+          </a:xfrm>
+          <a:prstGeom prst="rect">
+            <a:avLst/>
+          </a:prstGeom>
+          <a:solidFill>
+            <a:srgbClr val="2F8A28"/>
+          </a:solidFill>
+          <a:ln w="12700">
+            <a:solidFill>
+              <a:srgbClr val="2F8A28"/>
+            </a:solidFill>
+            <a:prstDash val="solid"/>
+          </a:ln>
+        </p:spPr>
+      </p:sp>
+      <p:sp>
+        <p:nvSpPr>
+          <p:cNvPr id="4" name="Text 2"/>
+          <p:cNvSpPr/>
+          <p:nvPr/>
+        </p:nvSpPr>
+        <p:spPr>
+          <a:xfrm>
+            <a:off x="502920" y="292608"/>
+            <a:ext cx="10149840" cy="256032"/>
+          </a:xfrm>
+          <a:prstGeom prst="rect">
+            <a:avLst/>
+          </a:prstGeom>
+          <a:noFill/>
+          <a:ln/>
+        </p:spPr>
+        <p:txBody>
+          <a:bodyPr wrap="square" lIns="0" tIns="0" rIns="0" bIns="0" rtlCol="0" anchor="ctr"/>
+          <a:lstStyle/>
+          <a:p>
+            <a:pPr indent="0" marL="0">
+              <a:buNone/>
+            </a:pPr>
+            <a:r>
+              <a:rPr lang="en-US" sz="900" b="1" dirty="0">
+                <a:solidFill>
+                  <a:srgbClr val="5F7181"/>
+                </a:solidFill>
+                <a:latin typeface="Aptos" pitchFamily="34" charset="0"/>
+                <a:ea typeface="Aptos" pitchFamily="34" charset="-122"/>
+                <a:cs typeface="Aptos" pitchFamily="34" charset="-120"/>
+              </a:rPr>
+              <a:t>Requirements Writing for AI Procurement and Implementation</a:t>
+            </a:r>
+            <a:endParaRPr lang="en-US" sz="900" dirty="0"/>
+          </a:p>
+        </p:txBody>
+      </p:sp>
+      <p:sp>
+        <p:nvSpPr>
+          <p:cNvPr id="5" name="Text 3"/>
+          <p:cNvSpPr/>
+          <p:nvPr/>
+        </p:nvSpPr>
+        <p:spPr>
+          <a:xfrm>
+            <a:off x="502920" y="6537960"/>
+            <a:ext cx="7772400" cy="201168"/>
+          </a:xfrm>
+          <a:prstGeom prst="rect">
+            <a:avLst/>
+          </a:prstGeom>
+          <a:noFill/>
+          <a:ln/>
+        </p:spPr>
+        <p:txBody>
+          <a:bodyPr wrap="square" lIns="0" tIns="0" rIns="0" bIns="0" rtlCol="0" anchor="ctr"/>
+          <a:lstStyle/>
+          <a:p>
+            <a:pPr indent="0" marL="0">
+              <a:buNone/>
+            </a:pPr>
+            <a:r>
+              <a:rPr lang="en-US" sz="800" dirty="0">
+                <a:solidFill>
+                  <a:srgbClr val="5F7181"/>
+                </a:solidFill>
+                <a:latin typeface="Aptos" pitchFamily="34" charset="0"/>
+                <a:ea typeface="Aptos" pitchFamily="34" charset="-122"/>
+                <a:cs typeface="Aptos" pitchFamily="34" charset="-120"/>
+              </a:rPr>
+              <a:t>AI Playbook and Toolkit for Public Health Departments</a:t>
+            </a:r>
+            <a:endParaRPr lang="en-US" sz="800" dirty="0"/>
+          </a:p>
+        </p:txBody>
+      </p:sp>
+      <p:sp>
+        <p:nvSpPr>
+          <p:cNvPr id="6" name="Text 4"/>
+          <p:cNvSpPr/>
+          <p:nvPr/>
+        </p:nvSpPr>
+        <p:spPr>
+          <a:xfrm>
+            <a:off x="9966960" y="6537960"/>
+            <a:ext cx="1645920" cy="201168"/>
+          </a:xfrm>
+          <a:prstGeom prst="rect">
+            <a:avLst/>
+          </a:prstGeom>
+          <a:noFill/>
+          <a:ln/>
+        </p:spPr>
+        <p:txBody>
+          <a:bodyPr wrap="square" lIns="0" tIns="0" rIns="0" bIns="0" rtlCol="0" anchor="ctr"/>
+          <a:lstStyle/>
+          <a:p>
+            <a:pPr algn="r" indent="0" marL="0">
+              <a:buNone/>
+            </a:pPr>
+            <a:r>
+              <a:rPr lang="en-US" sz="800" dirty="0">
+                <a:solidFill>
+                  <a:srgbClr val="5F7181"/>
+                </a:solidFill>
+                <a:latin typeface="Aptos" pitchFamily="34" charset="0"/>
+                <a:ea typeface="Aptos" pitchFamily="34" charset="-122"/>
+                <a:cs typeface="Aptos" pitchFamily="34" charset="-120"/>
+              </a:rPr>
+              <a:t>© Paula Soper</a:t>
+            </a:r>
+            <a:endParaRPr lang="en-US" sz="800" dirty="0"/>
+          </a:p>
+        </p:txBody>
+      </p:sp>
+      <p:sp>
+        <p:nvSpPr>
+          <p:cNvPr id="7" name="Text 5"/>
+          <p:cNvSpPr/>
+          <p:nvPr/>
+        </p:nvSpPr>
+        <p:spPr>
+          <a:xfrm>
+            <a:off x="640080" y="658368"/>
+            <a:ext cx="10881360" cy="566928"/>
+          </a:xfrm>
+          <a:prstGeom prst="rect">
+            <a:avLst/>
+          </a:prstGeom>
+          <a:noFill/>
+          <a:ln/>
+        </p:spPr>
+        <p:txBody>
+          <a:bodyPr wrap="square" lIns="0" tIns="0" rIns="0" bIns="0" rtlCol="0" anchor="ctr">
+            <a:normAutofit/>
+          </a:bodyPr>
+          <a:lstStyle/>
+          <a:p>
+            <a:pPr indent="0" marL="0">
+              <a:buNone/>
+            </a:pPr>
+            <a:r>
+              <a:rPr lang="en-US" sz="2700" b="1" dirty="0">
+                <a:solidFill>
+                  <a:srgbClr val="003A63"/>
+                </a:solidFill>
+                <a:latin typeface="Aptos Display" pitchFamily="34" charset="0"/>
+                <a:ea typeface="Aptos Display" pitchFamily="34" charset="-122"/>
+                <a:cs typeface="Aptos Display" pitchFamily="34" charset="-120"/>
+              </a:rPr>
+              <a:t>References and Resources Continued</a:t>
+            </a:r>
+            <a:endParaRPr lang="en-US" sz="2700" dirty="0"/>
+          </a:p>
+        </p:txBody>
+      </p:sp>
+      <p:sp>
+        <p:nvSpPr>
+          <p:cNvPr id="8" name="Text 6"/>
+          <p:cNvSpPr/>
+          <p:nvPr/>
+        </p:nvSpPr>
+        <p:spPr>
+          <a:xfrm>
+            <a:off x="868680" y="1417320"/>
+            <a:ext cx="6675120" cy="4434840"/>
+          </a:xfrm>
+          <a:prstGeom prst="rect">
+            <a:avLst/>
+          </a:prstGeom>
+          <a:noFill/>
+          <a:ln/>
+        </p:spPr>
+        <p:txBody>
+          <a:bodyPr wrap="square" lIns="635" tIns="635" rIns="635" bIns="635" rtlCol="0" anchor="t">
+            <a:normAutofit/>
+          </a:bodyPr>
+          <a:lstStyle/>
+          <a:p>
+            <a:r>
+              <a:rPr lang="en-US" sz="1700" dirty="0">
+                <a:solidFill>
+                  <a:srgbClr val="17364A"/>
+                </a:solidFill>
+                <a:latin typeface="Aptos" pitchFamily="34" charset="0"/>
+                <a:ea typeface="Aptos" pitchFamily="34" charset="-122"/>
+                <a:cs typeface="Aptos" pitchFamily="34" charset="-120"/>
+              </a:rPr>
               <a:t>Agency privacy, cybersecurity, data governance, procurement, and records management policies</a:t>
             </a:r>
-            <a:endParaRPr lang="en-US" sz="1450" dirty="0"/>
+            <a:endParaRPr lang="en-US" sz="1700" dirty="0"/>
+          </a:p>
+        </p:txBody>
+      </p:sp>
+      <p:sp>
+        <p:nvSpPr>
+          <p:cNvPr id="9" name="Shape 7"/>
+          <p:cNvSpPr/>
+          <p:nvPr/>
+        </p:nvSpPr>
+        <p:spPr>
+          <a:xfrm>
+            <a:off x="7909560" y="1417320"/>
+            <a:ext cx="3154680" cy="1828800"/>
+          </a:xfrm>
+          <a:prstGeom prst="roundRect">
+            <a:avLst>
+              <a:gd name="adj" fmla="val 6000"/>
+            </a:avLst>
+          </a:prstGeom>
+          <a:solidFill>
+            <a:srgbClr val="EEF8ED"/>
+          </a:solidFill>
+          <a:ln w="12700">
+            <a:solidFill>
+              <a:srgbClr val="B9D7E6"/>
+            </a:solidFill>
+            <a:prstDash val="solid"/>
+          </a:ln>
+        </p:spPr>
+      </p:sp>
+      <p:sp>
+        <p:nvSpPr>
+          <p:cNvPr id="10" name="Text 8"/>
+          <p:cNvSpPr/>
+          <p:nvPr/>
+        </p:nvSpPr>
+        <p:spPr>
+          <a:xfrm>
+            <a:off x="8074152" y="1563624"/>
+            <a:ext cx="2825496" cy="201168"/>
+          </a:xfrm>
+          <a:prstGeom prst="rect">
+            <a:avLst/>
+          </a:prstGeom>
+          <a:noFill/>
+          <a:ln/>
+        </p:spPr>
+        <p:txBody>
+          <a:bodyPr wrap="square" lIns="0" tIns="0" rIns="0" bIns="0" rtlCol="0" anchor="ctr"/>
+          <a:lstStyle/>
+          <a:p>
+            <a:pPr indent="0" marL="0">
+              <a:buNone/>
+            </a:pPr>
+            <a:r>
+              <a:rPr lang="en-US" sz="950" b="1" dirty="0">
+                <a:solidFill>
+                  <a:srgbClr val="0068B7"/>
+                </a:solidFill>
+                <a:latin typeface="Aptos" pitchFamily="34" charset="0"/>
+                <a:ea typeface="Aptos" pitchFamily="34" charset="-122"/>
+                <a:cs typeface="Aptos" pitchFamily="34" charset="-120"/>
+              </a:rPr>
+              <a:t>Key idea</a:t>
+            </a:r>
+            <a:endParaRPr lang="en-US" sz="950" dirty="0"/>
+          </a:p>
+        </p:txBody>
+      </p:sp>
+      <p:sp>
+        <p:nvSpPr>
+          <p:cNvPr id="11" name="Text 9"/>
+          <p:cNvSpPr/>
+          <p:nvPr/>
+        </p:nvSpPr>
+        <p:spPr>
+          <a:xfrm>
+            <a:off x="8074152" y="1856232"/>
+            <a:ext cx="2825496" cy="1261872"/>
+          </a:xfrm>
+          <a:prstGeom prst="rect">
+            <a:avLst/>
+          </a:prstGeom>
+          <a:noFill/>
+          <a:ln/>
+        </p:spPr>
+        <p:txBody>
+          <a:bodyPr wrap="square" lIns="0" tIns="0" rIns="0" bIns="0" rtlCol="0" anchor="t">
+            <a:normAutofit/>
+          </a:bodyPr>
+          <a:lstStyle/>
+          <a:p>
+            <a:pPr indent="0" marL="0">
+              <a:buNone/>
+            </a:pPr>
+            <a:r>
+              <a:rPr lang="en-US" sz="1250" dirty="0">
+                <a:solidFill>
+                  <a:srgbClr val="17364A"/>
+                </a:solidFill>
+                <a:latin typeface="Aptos" pitchFamily="34" charset="0"/>
+                <a:ea typeface="Aptos" pitchFamily="34" charset="-122"/>
+                <a:cs typeface="Aptos" pitchFamily="34" charset="-120"/>
+              </a:rPr>
+              <a:t>Agency privacy, cybersecurity, data governance, procurement, and records management policies</a:t>
+            </a:r>
+            <a:endParaRPr lang="en-US" sz="1250" dirty="0"/>
+          </a:p>
+        </p:txBody>
+      </p:sp>
+      <p:sp>
+        <p:nvSpPr>
+          <p:cNvPr id="12" name="Shape 10"/>
+          <p:cNvSpPr/>
+          <p:nvPr/>
+        </p:nvSpPr>
+        <p:spPr>
+          <a:xfrm>
+            <a:off x="7909560" y="3520440"/>
+            <a:ext cx="3154680" cy="1737360"/>
+          </a:xfrm>
+          <a:prstGeom prst="roundRect">
+            <a:avLst>
+              <a:gd name="adj" fmla="val 6316"/>
+            </a:avLst>
+          </a:prstGeom>
+          <a:solidFill>
+            <a:srgbClr val="EAF6F8"/>
+          </a:solidFill>
+          <a:ln w="12700">
+            <a:solidFill>
+              <a:srgbClr val="B9D7E6"/>
+            </a:solidFill>
+            <a:prstDash val="solid"/>
+          </a:ln>
+        </p:spPr>
+      </p:sp>
+      <p:sp>
+        <p:nvSpPr>
+          <p:cNvPr id="13" name="Text 11"/>
+          <p:cNvSpPr/>
+          <p:nvPr/>
+        </p:nvSpPr>
+        <p:spPr>
+          <a:xfrm>
+            <a:off x="8074152" y="3666744"/>
+            <a:ext cx="2825496" cy="201168"/>
+          </a:xfrm>
+          <a:prstGeom prst="rect">
+            <a:avLst/>
+          </a:prstGeom>
+          <a:noFill/>
+          <a:ln/>
+        </p:spPr>
+        <p:txBody>
+          <a:bodyPr wrap="square" lIns="0" tIns="0" rIns="0" bIns="0" rtlCol="0" anchor="ctr"/>
+          <a:lstStyle/>
+          <a:p>
+            <a:pPr indent="0" marL="0">
+              <a:buNone/>
+            </a:pPr>
+            <a:r>
+              <a:rPr lang="en-US" sz="950" b="1" dirty="0">
+                <a:solidFill>
+                  <a:srgbClr val="0068B7"/>
+                </a:solidFill>
+                <a:latin typeface="Aptos" pitchFamily="34" charset="0"/>
+                <a:ea typeface="Aptos" pitchFamily="34" charset="-122"/>
+                <a:cs typeface="Aptos" pitchFamily="34" charset="-120"/>
+              </a:rPr>
+              <a:t>Use this for</a:t>
+            </a:r>
+            <a:endParaRPr lang="en-US" sz="950" dirty="0"/>
+          </a:p>
+        </p:txBody>
+      </p:sp>
+      <p:sp>
+        <p:nvSpPr>
+          <p:cNvPr id="14" name="Text 12"/>
+          <p:cNvSpPr/>
+          <p:nvPr/>
+        </p:nvSpPr>
+        <p:spPr>
+          <a:xfrm>
+            <a:off x="8074152" y="3959352"/>
+            <a:ext cx="2825496" cy="1170432"/>
+          </a:xfrm>
+          <a:prstGeom prst="rect">
+            <a:avLst/>
+          </a:prstGeom>
+          <a:noFill/>
+          <a:ln/>
+        </p:spPr>
+        <p:txBody>
+          <a:bodyPr wrap="square" lIns="0" tIns="0" rIns="0" bIns="0" rtlCol="0" anchor="t">
+            <a:normAutofit/>
+          </a:bodyPr>
+          <a:lstStyle/>
+          <a:p>
+            <a:pPr indent="0" marL="0">
+              <a:buNone/>
+            </a:pPr>
+            <a:r>
+              <a:rPr lang="en-US" sz="1250" dirty="0">
+                <a:solidFill>
+                  <a:srgbClr val="17364A"/>
+                </a:solidFill>
+                <a:latin typeface="Aptos" pitchFamily="34" charset="0"/>
+                <a:ea typeface="Aptos" pitchFamily="34" charset="-122"/>
+                <a:cs typeface="Aptos" pitchFamily="34" charset="-120"/>
+              </a:rPr>
+              <a:t>Connect the concept to public health decisions, safeguards, documentation, or implementation work.</a:t>
+            </a:r>
+            <a:endParaRPr lang="en-US" sz="1250" dirty="0"/>
           </a:p>
         </p:txBody>
       </p:sp>
@@ -6101,7 +11055,32 @@
       </p:sp>
       <p:sp>
         <p:nvSpPr>
-          <p:cNvPr id="3" name="Text 1"/>
+          <p:cNvPr id="3" name="Shape 1"/>
+          <p:cNvSpPr/>
+          <p:nvPr/>
+        </p:nvSpPr>
+        <p:spPr>
+          <a:xfrm>
+            <a:off x="0" y="164592"/>
+            <a:ext cx="146304" cy="6693408"/>
+          </a:xfrm>
+          <a:prstGeom prst="rect">
+            <a:avLst/>
+          </a:prstGeom>
+          <a:solidFill>
+            <a:srgbClr val="2F8A28"/>
+          </a:solidFill>
+          <a:ln w="12700">
+            <a:solidFill>
+              <a:srgbClr val="2F8A28"/>
+            </a:solidFill>
+            <a:prstDash val="solid"/>
+          </a:ln>
+        </p:spPr>
+      </p:sp>
+      <p:sp>
+        <p:nvSpPr>
+          <p:cNvPr id="4" name="Text 2"/>
           <p:cNvSpPr/>
           <p:nvPr/>
         </p:nvSpPr>
@@ -6140,7 +11119,7 @@
       </p:sp>
       <p:sp>
         <p:nvSpPr>
-          <p:cNvPr id="4" name="Text 2"/>
+          <p:cNvPr id="5" name="Text 3"/>
           <p:cNvSpPr/>
           <p:nvPr/>
         </p:nvSpPr>
@@ -6179,7 +11158,7 @@
       </p:sp>
       <p:sp>
         <p:nvSpPr>
-          <p:cNvPr id="5" name="Text 3"/>
+          <p:cNvPr id="6" name="Text 4"/>
           <p:cNvSpPr/>
           <p:nvPr/>
         </p:nvSpPr>
@@ -6218,7 +11197,7 @@
       </p:sp>
       <p:sp>
         <p:nvSpPr>
-          <p:cNvPr id="6" name="Text 4"/>
+          <p:cNvPr id="7" name="Text 5"/>
           <p:cNvSpPr/>
           <p:nvPr/>
         </p:nvSpPr>
@@ -6251,7 +11230,7 @@
                 <a:ea typeface="Aptos Display" pitchFamily="34" charset="-122"/>
                 <a:cs typeface="Aptos Display" pitchFamily="34" charset="-120"/>
               </a:rPr>
-              <a:t>Learning Objectives</a:t>
+              <a:t>How this module connects to the playbook</a:t>
             </a:r>
             <a:endParaRPr lang="en-US" sz="2700" dirty="0"/>
           </a:p>
@@ -6259,14 +11238,14 @@
       </p:sp>
       <p:sp>
         <p:nvSpPr>
-          <p:cNvPr id="7" name="Text 5"/>
-          <p:cNvSpPr/>
-          <p:nvPr/>
-        </p:nvSpPr>
-        <p:spPr>
-          <a:xfrm>
-            <a:off x="822960" y="1325880"/>
-            <a:ext cx="10378440" cy="4800600"/>
+          <p:cNvPr id="8" name="Text 6"/>
+          <p:cNvSpPr/>
+          <p:nvPr/>
+        </p:nvSpPr>
+        <p:spPr>
+          <a:xfrm>
+            <a:off x="868680" y="1417320"/>
+            <a:ext cx="6903720" cy="4480560"/>
           </a:xfrm>
           <a:prstGeom prst="rect">
             <a:avLst/>
@@ -6281,7 +11260,7 @@
           <a:lstStyle/>
           <a:p>
             <a:r>
-              <a:rPr lang="en-US" sz="1450" dirty="0">
+              <a:rPr lang="en-US" sz="1540" dirty="0">
                 <a:solidFill>
                   <a:srgbClr val="17364A"/>
                 </a:solidFill>
@@ -6289,13 +11268,13 @@
                 <a:ea typeface="Aptos" pitchFamily="34" charset="-122"/>
                 <a:cs typeface="Aptos" pitchFamily="34" charset="-120"/>
               </a:rPr>
-              <a:t>Explain the purpose of requirements writing for ai procurement and implementation in public health AI work.</a:t>
-            </a:r>
-            <a:endParaRPr lang="en-US" sz="1450" dirty="0"/>
-          </a:p>
-          <a:p>
-            <a:r>
-              <a:rPr lang="en-US" sz="1450" dirty="0">
+              <a:t>Play 11: Build and Deploy AI Solutions - This lesson informs Play 11 by helping learners connect the lesson topic to build and deploy.</a:t>
+            </a:r>
+            <a:endParaRPr lang="en-US" sz="1540" dirty="0"/>
+          </a:p>
+          <a:p>
+            <a:r>
+              <a:rPr lang="en-US" sz="1540" dirty="0">
                 <a:solidFill>
                   <a:srgbClr val="17364A"/>
                 </a:solidFill>
@@ -6303,13 +11282,13 @@
                 <a:ea typeface="Aptos" pitchFamily="34" charset="-122"/>
                 <a:cs typeface="Aptos" pitchFamily="34" charset="-120"/>
               </a:rPr>
-              <a:t>Identify the technical, operational, privacy, security, equity, and governance issues associated with the topic.</a:t>
-            </a:r>
-            <a:endParaRPr lang="en-US" sz="1450" dirty="0"/>
-          </a:p>
-          <a:p>
-            <a:r>
-              <a:rPr lang="en-US" sz="1450" dirty="0">
+              <a:t>Play 2: Readiness Assessment - This lesson informs Play 2 by helping learners connect the lesson topic to readiness assessment work.</a:t>
+            </a:r>
+            <a:endParaRPr lang="en-US" sz="1540" dirty="0"/>
+          </a:p>
+          <a:p>
+            <a:r>
+              <a:rPr lang="en-US" sz="1540" dirty="0">
                 <a:solidFill>
                   <a:srgbClr val="17364A"/>
                 </a:solidFill>
@@ -6317,13 +11296,13 @@
                 <a:ea typeface="Aptos" pitchFamily="34" charset="-122"/>
                 <a:cs typeface="Aptos" pitchFamily="34" charset="-120"/>
               </a:rPr>
-              <a:t>Apply the topic to a real or realistic public health workflow, system, or implementation scenario.</a:t>
-            </a:r>
-            <a:endParaRPr lang="en-US" sz="1450" dirty="0"/>
-          </a:p>
-          <a:p>
-            <a:r>
-              <a:rPr lang="en-US" sz="1450" dirty="0">
+              <a:t>Play 7: Prioritize Use Cases - This lesson informs Play 7 by helping learners connect the lesson topic to prioritize use cases work.</a:t>
+            </a:r>
+            <a:endParaRPr lang="en-US" sz="1540" dirty="0"/>
+          </a:p>
+          <a:p>
+            <a:r>
+              <a:rPr lang="en-US" sz="1540" dirty="0">
                 <a:solidFill>
                   <a:srgbClr val="17364A"/>
                 </a:solidFill>
@@ -6331,13 +11310,106 @@
                 <a:ea typeface="Aptos" pitchFamily="34" charset="-122"/>
                 <a:cs typeface="Aptos" pitchFamily="34" charset="-120"/>
               </a:rPr>
-              <a:t>Recognize common failure modes that can affect safety, accuracy, trust, workflow fit, or sustainability.</a:t>
-            </a:r>
-            <a:endParaRPr lang="en-US" sz="1450" dirty="0"/>
-          </a:p>
-          <a:p>
-            <a:r>
-              <a:rPr lang="en-US" sz="1450" dirty="0">
+              <a:t>Play 3: Establish AI Governance - This lesson informs Play 3 by helping learners connect the lesson topic to establish ai governance.</a:t>
+            </a:r>
+            <a:endParaRPr lang="en-US" sz="1540" dirty="0"/>
+          </a:p>
+        </p:txBody>
+      </p:sp>
+      <p:sp>
+        <p:nvSpPr>
+          <p:cNvPr id="9" name="Shape 7"/>
+          <p:cNvSpPr/>
+          <p:nvPr/>
+        </p:nvSpPr>
+        <p:spPr>
+          <a:xfrm>
+            <a:off x="8046720" y="1417320"/>
+            <a:ext cx="3063240" cy="2103120"/>
+          </a:xfrm>
+          <a:prstGeom prst="roundRect">
+            <a:avLst>
+              <a:gd name="adj" fmla="val 5217"/>
+            </a:avLst>
+          </a:prstGeom>
+          <a:solidFill>
+            <a:srgbClr val="EEF8ED"/>
+          </a:solidFill>
+          <a:ln w="12700">
+            <a:solidFill>
+              <a:srgbClr val="B9D7E6"/>
+            </a:solidFill>
+            <a:prstDash val="solid"/>
+          </a:ln>
+        </p:spPr>
+      </p:sp>
+      <p:sp>
+        <p:nvSpPr>
+          <p:cNvPr id="10" name="Text 8"/>
+          <p:cNvSpPr/>
+          <p:nvPr/>
+        </p:nvSpPr>
+        <p:spPr>
+          <a:xfrm>
+            <a:off x="8211312" y="1563624"/>
+            <a:ext cx="2734056" cy="201168"/>
+          </a:xfrm>
+          <a:prstGeom prst="rect">
+            <a:avLst/>
+          </a:prstGeom>
+          <a:noFill/>
+          <a:ln/>
+        </p:spPr>
+        <p:txBody>
+          <a:bodyPr wrap="square" lIns="0" tIns="0" rIns="0" bIns="0" rtlCol="0" anchor="ctr"/>
+          <a:lstStyle/>
+          <a:p>
+            <a:pPr indent="0" marL="0">
+              <a:buNone/>
+            </a:pPr>
+            <a:r>
+              <a:rPr lang="en-US" sz="950" b="1" dirty="0">
+                <a:solidFill>
+                  <a:srgbClr val="0068B7"/>
+                </a:solidFill>
+                <a:latin typeface="Aptos" pitchFamily="34" charset="0"/>
+                <a:ea typeface="Aptos" pitchFamily="34" charset="-122"/>
+                <a:cs typeface="Aptos" pitchFamily="34" charset="-120"/>
+              </a:rPr>
+              <a:t>Apply the lesson</a:t>
+            </a:r>
+            <a:endParaRPr lang="en-US" sz="950" dirty="0"/>
+          </a:p>
+        </p:txBody>
+      </p:sp>
+      <p:sp>
+        <p:nvSpPr>
+          <p:cNvPr id="11" name="Text 9"/>
+          <p:cNvSpPr/>
+          <p:nvPr/>
+        </p:nvSpPr>
+        <p:spPr>
+          <a:xfrm>
+            <a:off x="8211312" y="1856232"/>
+            <a:ext cx="2734056" cy="1536192"/>
+          </a:xfrm>
+          <a:prstGeom prst="rect">
+            <a:avLst/>
+          </a:prstGeom>
+          <a:noFill/>
+          <a:ln/>
+        </p:spPr>
+        <p:txBody>
+          <a:bodyPr wrap="square" lIns="0" tIns="0" rIns="0" bIns="0" rtlCol="0" anchor="t">
+            <a:normAutofit/>
+          </a:bodyPr>
+          <a:lstStyle/>
+          <a:p>
+            <a:pPr indent="0" marL="0">
+              <a:buNone/>
+            </a:pPr>
+            <a:r>
+              <a:rPr lang="en-US" sz="1250" dirty="0">
                 <a:solidFill>
                   <a:srgbClr val="17364A"/>
                 </a:solidFill>
@@ -6345,9 +11417,116 @@
                 <a:ea typeface="Aptos" pitchFamily="34" charset="-122"/>
                 <a:cs typeface="Aptos" pitchFamily="34" charset="-120"/>
               </a:rPr>
-              <a:t>Identify practical guardrails that should be documented before implementation.</a:t>
-            </a:r>
-            <a:endParaRPr lang="en-US" sz="1450" dirty="0"/>
+              <a:t>Use the related plays to identify decisions, participants, timing, approvals, and documentation needed for responsible implementation.</a:t>
+            </a:r>
+            <a:endParaRPr lang="en-US" sz="1250" dirty="0"/>
+          </a:p>
+        </p:txBody>
+      </p:sp>
+      <p:sp>
+        <p:nvSpPr>
+          <p:cNvPr id="12" name="Shape 10"/>
+          <p:cNvSpPr/>
+          <p:nvPr/>
+        </p:nvSpPr>
+        <p:spPr>
+          <a:xfrm>
+            <a:off x="8046720" y="3794760"/>
+            <a:ext cx="3063240" cy="1508760"/>
+          </a:xfrm>
+          <a:prstGeom prst="roundRect">
+            <a:avLst>
+              <a:gd name="adj" fmla="val 7273"/>
+            </a:avLst>
+          </a:prstGeom>
+          <a:solidFill>
+            <a:srgbClr val="FFF4D9"/>
+          </a:solidFill>
+          <a:ln w="12700">
+            <a:solidFill>
+              <a:srgbClr val="B9D7E6"/>
+            </a:solidFill>
+            <a:prstDash val="solid"/>
+          </a:ln>
+        </p:spPr>
+      </p:sp>
+      <p:sp>
+        <p:nvSpPr>
+          <p:cNvPr id="13" name="Text 11"/>
+          <p:cNvSpPr/>
+          <p:nvPr/>
+        </p:nvSpPr>
+        <p:spPr>
+          <a:xfrm>
+            <a:off x="8211312" y="3941064"/>
+            <a:ext cx="2734056" cy="201168"/>
+          </a:xfrm>
+          <a:prstGeom prst="rect">
+            <a:avLst/>
+          </a:prstGeom>
+          <a:noFill/>
+          <a:ln/>
+        </p:spPr>
+        <p:txBody>
+          <a:bodyPr wrap="square" lIns="0" tIns="0" rIns="0" bIns="0" rtlCol="0" anchor="ctr"/>
+          <a:lstStyle/>
+          <a:p>
+            <a:pPr indent="0" marL="0">
+              <a:buNone/>
+            </a:pPr>
+            <a:r>
+              <a:rPr lang="en-US" sz="950" b="1" dirty="0">
+                <a:solidFill>
+                  <a:srgbClr val="0068B7"/>
+                </a:solidFill>
+                <a:latin typeface="Aptos" pitchFamily="34" charset="0"/>
+                <a:ea typeface="Aptos" pitchFamily="34" charset="-122"/>
+                <a:cs typeface="Aptos" pitchFamily="34" charset="-120"/>
+              </a:rPr>
+              <a:t>Keep in mind</a:t>
+            </a:r>
+            <a:endParaRPr lang="en-US" sz="950" dirty="0"/>
+          </a:p>
+        </p:txBody>
+      </p:sp>
+      <p:sp>
+        <p:nvSpPr>
+          <p:cNvPr id="14" name="Text 12"/>
+          <p:cNvSpPr/>
+          <p:nvPr/>
+        </p:nvSpPr>
+        <p:spPr>
+          <a:xfrm>
+            <a:off x="8211312" y="4233672"/>
+            <a:ext cx="2734056" cy="941832"/>
+          </a:xfrm>
+          <a:prstGeom prst="rect">
+            <a:avLst/>
+          </a:prstGeom>
+          <a:noFill/>
+          <a:ln/>
+        </p:spPr>
+        <p:txBody>
+          <a:bodyPr wrap="square" lIns="0" tIns="0" rIns="0" bIns="0" rtlCol="0" anchor="t">
+            <a:normAutofit/>
+          </a:bodyPr>
+          <a:lstStyle/>
+          <a:p>
+            <a:pPr indent="0" marL="0">
+              <a:buNone/>
+            </a:pPr>
+            <a:r>
+              <a:rPr lang="en-US" sz="1250" dirty="0">
+                <a:solidFill>
+                  <a:srgbClr val="17364A"/>
+                </a:solidFill>
+                <a:latin typeface="Aptos" pitchFamily="34" charset="0"/>
+                <a:ea typeface="Aptos" pitchFamily="34" charset="-122"/>
+                <a:cs typeface="Aptos" pitchFamily="34" charset="-120"/>
+              </a:rPr>
+              <a:t>The playbook connection helps turn training into agency work, not just individual knowledge.</a:t>
+            </a:r>
+            <a:endParaRPr lang="en-US" sz="1250" dirty="0"/>
           </a:p>
         </p:txBody>
       </p:sp>
@@ -6410,7 +11589,32 @@
       </p:sp>
       <p:sp>
         <p:nvSpPr>
-          <p:cNvPr id="3" name="Text 1"/>
+          <p:cNvPr id="3" name="Shape 1"/>
+          <p:cNvSpPr/>
+          <p:nvPr/>
+        </p:nvSpPr>
+        <p:spPr>
+          <a:xfrm>
+            <a:off x="0" y="164592"/>
+            <a:ext cx="146304" cy="6693408"/>
+          </a:xfrm>
+          <a:prstGeom prst="rect">
+            <a:avLst/>
+          </a:prstGeom>
+          <a:solidFill>
+            <a:srgbClr val="2F8A28"/>
+          </a:solidFill>
+          <a:ln w="12700">
+            <a:solidFill>
+              <a:srgbClr val="2F8A28"/>
+            </a:solidFill>
+            <a:prstDash val="solid"/>
+          </a:ln>
+        </p:spPr>
+      </p:sp>
+      <p:sp>
+        <p:nvSpPr>
+          <p:cNvPr id="4" name="Text 2"/>
           <p:cNvSpPr/>
           <p:nvPr/>
         </p:nvSpPr>
@@ -6449,7 +11653,7 @@
       </p:sp>
       <p:sp>
         <p:nvSpPr>
-          <p:cNvPr id="4" name="Text 2"/>
+          <p:cNvPr id="5" name="Text 3"/>
           <p:cNvSpPr/>
           <p:nvPr/>
         </p:nvSpPr>
@@ -6488,7 +11692,7 @@
       </p:sp>
       <p:sp>
         <p:nvSpPr>
-          <p:cNvPr id="5" name="Text 3"/>
+          <p:cNvPr id="6" name="Text 4"/>
           <p:cNvSpPr/>
           <p:nvPr/>
         </p:nvSpPr>
@@ -6527,7 +11731,7 @@
       </p:sp>
       <p:sp>
         <p:nvSpPr>
-          <p:cNvPr id="6" name="Text 4"/>
+          <p:cNvPr id="7" name="Text 5"/>
           <p:cNvSpPr/>
           <p:nvPr/>
         </p:nvSpPr>
@@ -6560,7 +11764,7 @@
                 <a:ea typeface="Aptos Display" pitchFamily="34" charset="-122"/>
                 <a:cs typeface="Aptos Display" pitchFamily="34" charset="-120"/>
               </a:rPr>
-              <a:t>Learning Objectives Continued</a:t>
+              <a:t>Related toolkit resources</a:t>
             </a:r>
             <a:endParaRPr lang="en-US" sz="2700" dirty="0"/>
           </a:p>
@@ -6568,14 +11772,14 @@
       </p:sp>
       <p:sp>
         <p:nvSpPr>
-          <p:cNvPr id="7" name="Text 5"/>
-          <p:cNvSpPr/>
-          <p:nvPr/>
-        </p:nvSpPr>
-        <p:spPr>
-          <a:xfrm>
-            <a:off x="822960" y="1325880"/>
-            <a:ext cx="10378440" cy="4800600"/>
+          <p:cNvPr id="8" name="Text 6"/>
+          <p:cNvSpPr/>
+          <p:nvPr/>
+        </p:nvSpPr>
+        <p:spPr>
+          <a:xfrm>
+            <a:off x="868680" y="1417320"/>
+            <a:ext cx="6903720" cy="4480560"/>
           </a:xfrm>
           <a:prstGeom prst="rect">
             <a:avLst/>
@@ -6590,7 +11794,7 @@
           <a:lstStyle/>
           <a:p>
             <a:r>
-              <a:rPr lang="en-US" sz="1450" dirty="0">
+              <a:rPr lang="en-US" sz="1460" dirty="0">
                 <a:solidFill>
                   <a:srgbClr val="17364A"/>
                 </a:solidFill>
@@ -6598,9 +11802,279 @@
                 <a:ea typeface="Aptos" pitchFamily="34" charset="-122"/>
                 <a:cs typeface="Aptos" pitchFamily="34" charset="-120"/>
               </a:rPr>
-              <a:t>Produce a AI requirements matrix that can support readiness assessment, governance review, procurement, implementation, or monitoring.</a:t>
-            </a:r>
-            <a:endParaRPr lang="en-US" sz="1450" dirty="0"/>
+              <a:t>Tool 4: AI Policy Landscape Scan (Worksheet) - Use AI Policy Landscape Scan to translate this lesson into a documented public health.</a:t>
+            </a:r>
+            <a:endParaRPr lang="en-US" sz="1460" dirty="0"/>
+          </a:p>
+          <a:p>
+            <a:r>
+              <a:rPr lang="en-US" sz="1460" dirty="0">
+                <a:solidFill>
+                  <a:srgbClr val="17364A"/>
+                </a:solidFill>
+                <a:latin typeface="Aptos" pitchFamily="34" charset="0"/>
+                <a:ea typeface="Aptos" pitchFamily="34" charset="-122"/>
+                <a:cs typeface="Aptos" pitchFamily="34" charset="-120"/>
+              </a:rPr>
+              <a:t>Tool 5: AI Environmental and Resource Impact Review (Checklist) - Use this tool to complete or strengthen the practical exercise for.</a:t>
+            </a:r>
+            <a:endParaRPr lang="en-US" sz="1460" dirty="0"/>
+          </a:p>
+          <a:p>
+            <a:r>
+              <a:rPr lang="en-US" sz="1460" dirty="0">
+                <a:solidFill>
+                  <a:srgbClr val="17364A"/>
+                </a:solidFill>
+                <a:latin typeface="Aptos" pitchFamily="34" charset="0"/>
+                <a:ea typeface="Aptos" pitchFamily="34" charset="-122"/>
+                <a:cs typeface="Aptos" pitchFamily="34" charset="-120"/>
+              </a:rPr>
+              <a:t>Tool 6: Human-Centered AI Decision Rule Checklist (Checklist) - Use Human-Centered AI Decision Rule Checklist to translate this.</a:t>
+            </a:r>
+            <a:endParaRPr lang="en-US" sz="1460" dirty="0"/>
+          </a:p>
+          <a:p>
+            <a:r>
+              <a:rPr lang="en-US" sz="1460" dirty="0">
+                <a:solidFill>
+                  <a:srgbClr val="17364A"/>
+                </a:solidFill>
+                <a:latin typeface="Aptos" pitchFamily="34" charset="0"/>
+                <a:ea typeface="Aptos" pitchFamily="34" charset="-122"/>
+                <a:cs typeface="Aptos" pitchFamily="34" charset="-120"/>
+              </a:rPr>
+              <a:t>Tool 8: AI Project Charter (Planning) - Use AI Project Charter to translate this lesson into a documented public health AI planning,.</a:t>
+            </a:r>
+            <a:endParaRPr lang="en-US" sz="1460" dirty="0"/>
+          </a:p>
+          <a:p>
+            <a:r>
+              <a:rPr lang="en-US" sz="1460" dirty="0">
+                <a:solidFill>
+                  <a:srgbClr val="17364A"/>
+                </a:solidFill>
+                <a:latin typeface="Aptos" pitchFamily="34" charset="0"/>
+                <a:ea typeface="Aptos" pitchFamily="34" charset="-122"/>
+                <a:cs typeface="Aptos" pitchFamily="34" charset="-120"/>
+              </a:rPr>
+              <a:t>Tool 9: Data Quality Assessment Checklist (Checklist) - Use this tool to complete or strengthen the practical exercise for the module.</a:t>
+            </a:r>
+            <a:endParaRPr lang="en-US" sz="1460" dirty="0"/>
+          </a:p>
+        </p:txBody>
+      </p:sp>
+      <p:sp>
+        <p:nvSpPr>
+          <p:cNvPr id="9" name="Shape 7"/>
+          <p:cNvSpPr/>
+          <p:nvPr/>
+        </p:nvSpPr>
+        <p:spPr>
+          <a:xfrm>
+            <a:off x="8046720" y="1417320"/>
+            <a:ext cx="3063240" cy="2103120"/>
+          </a:xfrm>
+          <a:prstGeom prst="roundRect">
+            <a:avLst>
+              <a:gd name="adj" fmla="val 5217"/>
+            </a:avLst>
+          </a:prstGeom>
+          <a:solidFill>
+            <a:srgbClr val="EAF6F8"/>
+          </a:solidFill>
+          <a:ln w="12700">
+            <a:solidFill>
+              <a:srgbClr val="B9D7E6"/>
+            </a:solidFill>
+            <a:prstDash val="solid"/>
+          </a:ln>
+        </p:spPr>
+      </p:sp>
+      <p:sp>
+        <p:nvSpPr>
+          <p:cNvPr id="10" name="Text 8"/>
+          <p:cNvSpPr/>
+          <p:nvPr/>
+        </p:nvSpPr>
+        <p:spPr>
+          <a:xfrm>
+            <a:off x="8211312" y="1563624"/>
+            <a:ext cx="2734056" cy="201168"/>
+          </a:xfrm>
+          <a:prstGeom prst="rect">
+            <a:avLst/>
+          </a:prstGeom>
+          <a:noFill/>
+          <a:ln/>
+        </p:spPr>
+        <p:txBody>
+          <a:bodyPr wrap="square" lIns="0" tIns="0" rIns="0" bIns="0" rtlCol="0" anchor="ctr"/>
+          <a:lstStyle/>
+          <a:p>
+            <a:pPr indent="0" marL="0">
+              <a:buNone/>
+            </a:pPr>
+            <a:r>
+              <a:rPr lang="en-US" sz="950" b="1" dirty="0">
+                <a:solidFill>
+                  <a:srgbClr val="0068B7"/>
+                </a:solidFill>
+                <a:latin typeface="Aptos" pitchFamily="34" charset="0"/>
+                <a:ea typeface="Aptos" pitchFamily="34" charset="-122"/>
+                <a:cs typeface="Aptos" pitchFamily="34" charset="-120"/>
+              </a:rPr>
+              <a:t>Use the tools</a:t>
+            </a:r>
+            <a:endParaRPr lang="en-US" sz="950" dirty="0"/>
+          </a:p>
+        </p:txBody>
+      </p:sp>
+      <p:sp>
+        <p:nvSpPr>
+          <p:cNvPr id="11" name="Text 9"/>
+          <p:cNvSpPr/>
+          <p:nvPr/>
+        </p:nvSpPr>
+        <p:spPr>
+          <a:xfrm>
+            <a:off x="8211312" y="1856232"/>
+            <a:ext cx="2734056" cy="1536192"/>
+          </a:xfrm>
+          <a:prstGeom prst="rect">
+            <a:avLst/>
+          </a:prstGeom>
+          <a:noFill/>
+          <a:ln/>
+        </p:spPr>
+        <p:txBody>
+          <a:bodyPr wrap="square" lIns="0" tIns="0" rIns="0" bIns="0" rtlCol="0" anchor="t">
+            <a:normAutofit/>
+          </a:bodyPr>
+          <a:lstStyle/>
+          <a:p>
+            <a:pPr indent="0" marL="0">
+              <a:buNone/>
+            </a:pPr>
+            <a:r>
+              <a:rPr lang="en-US" sz="1250" dirty="0">
+                <a:solidFill>
+                  <a:srgbClr val="17364A"/>
+                </a:solidFill>
+                <a:latin typeface="Aptos" pitchFamily="34" charset="0"/>
+                <a:ea typeface="Aptos" pitchFamily="34" charset="-122"/>
+                <a:cs typeface="Aptos" pitchFamily="34" charset="-120"/>
+              </a:rPr>
+              <a:t>Use linked tools when your department needs a structured worksheet, template, checklist, review process, or documentation artifact.</a:t>
+            </a:r>
+            <a:endParaRPr lang="en-US" sz="1250" dirty="0"/>
+          </a:p>
+        </p:txBody>
+      </p:sp>
+      <p:sp>
+        <p:nvSpPr>
+          <p:cNvPr id="12" name="Shape 10"/>
+          <p:cNvSpPr/>
+          <p:nvPr/>
+        </p:nvSpPr>
+        <p:spPr>
+          <a:xfrm>
+            <a:off x="8046720" y="3794760"/>
+            <a:ext cx="3063240" cy="1508760"/>
+          </a:xfrm>
+          <a:prstGeom prst="roundRect">
+            <a:avLst>
+              <a:gd name="adj" fmla="val 7273"/>
+            </a:avLst>
+          </a:prstGeom>
+          <a:solidFill>
+            <a:srgbClr val="EEF8ED"/>
+          </a:solidFill>
+          <a:ln w="12700">
+            <a:solidFill>
+              <a:srgbClr val="B9D7E6"/>
+            </a:solidFill>
+            <a:prstDash val="solid"/>
+          </a:ln>
+        </p:spPr>
+      </p:sp>
+      <p:sp>
+        <p:nvSpPr>
+          <p:cNvPr id="13" name="Text 11"/>
+          <p:cNvSpPr/>
+          <p:nvPr/>
+        </p:nvSpPr>
+        <p:spPr>
+          <a:xfrm>
+            <a:off x="8211312" y="3941064"/>
+            <a:ext cx="2734056" cy="201168"/>
+          </a:xfrm>
+          <a:prstGeom prst="rect">
+            <a:avLst/>
+          </a:prstGeom>
+          <a:noFill/>
+          <a:ln/>
+        </p:spPr>
+        <p:txBody>
+          <a:bodyPr wrap="square" lIns="0" tIns="0" rIns="0" bIns="0" rtlCol="0" anchor="ctr"/>
+          <a:lstStyle/>
+          <a:p>
+            <a:pPr indent="0" marL="0">
+              <a:buNone/>
+            </a:pPr>
+            <a:r>
+              <a:rPr lang="en-US" sz="950" b="1" dirty="0">
+                <a:solidFill>
+                  <a:srgbClr val="0068B7"/>
+                </a:solidFill>
+                <a:latin typeface="Aptos" pitchFamily="34" charset="0"/>
+                <a:ea typeface="Aptos" pitchFamily="34" charset="-122"/>
+                <a:cs typeface="Aptos" pitchFamily="34" charset="-120"/>
+              </a:rPr>
+              <a:t>Avoid duplication</a:t>
+            </a:r>
+            <a:endParaRPr lang="en-US" sz="950" dirty="0"/>
+          </a:p>
+        </p:txBody>
+      </p:sp>
+      <p:sp>
+        <p:nvSpPr>
+          <p:cNvPr id="14" name="Text 12"/>
+          <p:cNvSpPr/>
+          <p:nvPr/>
+        </p:nvSpPr>
+        <p:spPr>
+          <a:xfrm>
+            <a:off x="8211312" y="4233672"/>
+            <a:ext cx="2734056" cy="941832"/>
+          </a:xfrm>
+          <a:prstGeom prst="rect">
+            <a:avLst/>
+          </a:prstGeom>
+          <a:noFill/>
+          <a:ln/>
+        </p:spPr>
+        <p:txBody>
+          <a:bodyPr wrap="square" lIns="0" tIns="0" rIns="0" bIns="0" rtlCol="0" anchor="t">
+            <a:normAutofit/>
+          </a:bodyPr>
+          <a:lstStyle/>
+          <a:p>
+            <a:pPr indent="0" marL="0">
+              <a:buNone/>
+            </a:pPr>
+            <a:r>
+              <a:rPr lang="en-US" sz="1250" dirty="0">
+                <a:solidFill>
+                  <a:srgbClr val="17364A"/>
+                </a:solidFill>
+                <a:latin typeface="Aptos" pitchFamily="34" charset="0"/>
+                <a:ea typeface="Aptos" pitchFamily="34" charset="-122"/>
+                <a:cs typeface="Aptos" pitchFamily="34" charset="-120"/>
+              </a:rPr>
+              <a:t>If your department already has a strong equivalent tool, adapt or use the existing process instead of recreating it.</a:t>
+            </a:r>
+            <a:endParaRPr lang="en-US" sz="1250" dirty="0"/>
           </a:p>
         </p:txBody>
       </p:sp>
@@ -6663,7 +12137,32 @@
       </p:sp>
       <p:sp>
         <p:nvSpPr>
-          <p:cNvPr id="3" name="Text 1"/>
+          <p:cNvPr id="3" name="Shape 1"/>
+          <p:cNvSpPr/>
+          <p:nvPr/>
+        </p:nvSpPr>
+        <p:spPr>
+          <a:xfrm>
+            <a:off x="0" y="164592"/>
+            <a:ext cx="146304" cy="6693408"/>
+          </a:xfrm>
+          <a:prstGeom prst="rect">
+            <a:avLst/>
+          </a:prstGeom>
+          <a:solidFill>
+            <a:srgbClr val="2F8A28"/>
+          </a:solidFill>
+          <a:ln w="12700">
+            <a:solidFill>
+              <a:srgbClr val="2F8A28"/>
+            </a:solidFill>
+            <a:prstDash val="solid"/>
+          </a:ln>
+        </p:spPr>
+      </p:sp>
+      <p:sp>
+        <p:nvSpPr>
+          <p:cNvPr id="4" name="Text 2"/>
           <p:cNvSpPr/>
           <p:nvPr/>
         </p:nvSpPr>
@@ -6702,7 +12201,7 @@
       </p:sp>
       <p:sp>
         <p:nvSpPr>
-          <p:cNvPr id="4" name="Text 2"/>
+          <p:cNvPr id="5" name="Text 3"/>
           <p:cNvSpPr/>
           <p:nvPr/>
         </p:nvSpPr>
@@ -6741,7 +12240,7 @@
       </p:sp>
       <p:sp>
         <p:nvSpPr>
-          <p:cNvPr id="5" name="Text 3"/>
+          <p:cNvPr id="6" name="Text 4"/>
           <p:cNvSpPr/>
           <p:nvPr/>
         </p:nvSpPr>
@@ -6780,13 +12279,77 @@
       </p:sp>
       <p:sp>
         <p:nvSpPr>
-          <p:cNvPr id="6" name="Text 4"/>
+          <p:cNvPr id="7" name="Shape 5"/>
           <p:cNvSpPr/>
           <p:nvPr/>
         </p:nvSpPr>
         <p:spPr>
           <a:xfrm>
             <a:off x="640080" y="658368"/>
+            <a:ext cx="420624" cy="420624"/>
+          </a:xfrm>
+          <a:prstGeom prst="ellipse">
+            <a:avLst/>
+          </a:prstGeom>
+          <a:solidFill>
+            <a:srgbClr val="0068B7"/>
+          </a:solidFill>
+          <a:ln w="12700">
+            <a:solidFill>
+              <a:srgbClr val="0068B7"/>
+            </a:solidFill>
+            <a:prstDash val="solid"/>
+          </a:ln>
+        </p:spPr>
+      </p:sp>
+      <p:sp>
+        <p:nvSpPr>
+          <p:cNvPr id="8" name="Text 6"/>
+          <p:cNvSpPr/>
+          <p:nvPr/>
+        </p:nvSpPr>
+        <p:spPr>
+          <a:xfrm>
+            <a:off x="640080" y="731520"/>
+            <a:ext cx="420624" cy="164592"/>
+          </a:xfrm>
+          <a:prstGeom prst="rect">
+            <a:avLst/>
+          </a:prstGeom>
+          <a:noFill/>
+          <a:ln/>
+        </p:spPr>
+        <p:txBody>
+          <a:bodyPr wrap="square" lIns="0" tIns="0" rIns="0" bIns="0" rtlCol="0" anchor="ctr"/>
+          <a:lstStyle/>
+          <a:p>
+            <a:pPr algn="ctr" indent="0" marL="0">
+              <a:buNone/>
+            </a:pPr>
+            <a:r>
+              <a:rPr lang="en-US" sz="1100" b="1" dirty="0">
+                <a:solidFill>
+                  <a:srgbClr val="FFFFFF"/>
+                </a:solidFill>
+                <a:latin typeface="Aptos" pitchFamily="34" charset="0"/>
+                <a:ea typeface="Aptos" pitchFamily="34" charset="-122"/>
+                <a:cs typeface="Aptos" pitchFamily="34" charset="-120"/>
+              </a:rPr>
+              <a:t>1</a:t>
+            </a:r>
+            <a:endParaRPr lang="en-US" sz="1100" dirty="0"/>
+          </a:p>
+        </p:txBody>
+      </p:sp>
+      <p:sp>
+        <p:nvSpPr>
+          <p:cNvPr id="9" name="Text 7"/>
+          <p:cNvSpPr/>
+          <p:nvPr/>
+        </p:nvSpPr>
+        <p:spPr>
+          <a:xfrm>
+            <a:off x="640080" y="621792"/>
             <a:ext cx="10881360" cy="566928"/>
           </a:xfrm>
           <a:prstGeom prst="rect">
@@ -6813,7 +12376,7 @@
                 <a:ea typeface="Aptos Display" pitchFamily="34" charset="-122"/>
                 <a:cs typeface="Aptos Display" pitchFamily="34" charset="-120"/>
               </a:rPr>
-              <a:t>Module Overview</a:t>
+              <a:t>Learning Objectives</a:t>
             </a:r>
             <a:endParaRPr lang="en-US" sz="2700" dirty="0"/>
           </a:p>
@@ -6821,32 +12384,178 @@
       </p:sp>
       <p:sp>
         <p:nvSpPr>
-          <p:cNvPr id="7" name="Text 5"/>
-          <p:cNvSpPr/>
-          <p:nvPr/>
-        </p:nvSpPr>
-        <p:spPr>
-          <a:xfrm>
-            <a:off x="822960" y="1325880"/>
-            <a:ext cx="10378440" cy="4800600"/>
-          </a:xfrm>
-          <a:prstGeom prst="rect">
-            <a:avLst/>
-          </a:prstGeom>
-          <a:noFill/>
-          <a:ln/>
-        </p:spPr>
-        <p:txBody>
-          <a:bodyPr wrap="square" lIns="1016" tIns="1016" rIns="1016" bIns="1016" rtlCol="0" anchor="t">
+          <p:cNvPr id="10" name="Text 8"/>
+          <p:cNvSpPr/>
+          <p:nvPr/>
+        </p:nvSpPr>
+        <p:spPr>
+          <a:xfrm>
+            <a:off x="868680" y="1417320"/>
+            <a:ext cx="6675120" cy="4434840"/>
+          </a:xfrm>
+          <a:prstGeom prst="rect">
+            <a:avLst/>
+          </a:prstGeom>
+          <a:noFill/>
+          <a:ln/>
+        </p:spPr>
+        <p:txBody>
+          <a:bodyPr wrap="square" lIns="635" tIns="635" rIns="635" bIns="635" rtlCol="0" anchor="t">
             <a:normAutofit/>
           </a:bodyPr>
           <a:lstStyle/>
           <a:p>
+            <a:r>
+              <a:rPr lang="en-US" sz="1700" dirty="0">
+                <a:solidFill>
+                  <a:srgbClr val="17364A"/>
+                </a:solidFill>
+                <a:latin typeface="Aptos" pitchFamily="34" charset="0"/>
+                <a:ea typeface="Aptos" pitchFamily="34" charset="-122"/>
+                <a:cs typeface="Aptos" pitchFamily="34" charset="-120"/>
+              </a:rPr>
+              <a:t>Explain the purpose of requirements writing for ai procurement and implementation in public health AI work.</a:t>
+            </a:r>
+            <a:endParaRPr lang="en-US" sz="1700" dirty="0"/>
+          </a:p>
+          <a:p>
+            <a:r>
+              <a:rPr lang="en-US" sz="1700" dirty="0">
+                <a:solidFill>
+                  <a:srgbClr val="17364A"/>
+                </a:solidFill>
+                <a:latin typeface="Aptos" pitchFamily="34" charset="0"/>
+                <a:ea typeface="Aptos" pitchFamily="34" charset="-122"/>
+                <a:cs typeface="Aptos" pitchFamily="34" charset="-120"/>
+              </a:rPr>
+              <a:t>Identify the technical, operational, privacy, security, equity, and governance issues associated with the topic.</a:t>
+            </a:r>
+            <a:endParaRPr lang="en-US" sz="1700" dirty="0"/>
+          </a:p>
+          <a:p>
+            <a:r>
+              <a:rPr lang="en-US" sz="1700" dirty="0">
+                <a:solidFill>
+                  <a:srgbClr val="17364A"/>
+                </a:solidFill>
+                <a:latin typeface="Aptos" pitchFamily="34" charset="0"/>
+                <a:ea typeface="Aptos" pitchFamily="34" charset="-122"/>
+                <a:cs typeface="Aptos" pitchFamily="34" charset="-120"/>
+              </a:rPr>
+              <a:t>Apply the topic to a real or realistic public health workflow, system, or implementation scenario.</a:t>
+            </a:r>
+            <a:endParaRPr lang="en-US" sz="1700" dirty="0"/>
+          </a:p>
+          <a:p>
+            <a:r>
+              <a:rPr lang="en-US" sz="1700" dirty="0">
+                <a:solidFill>
+                  <a:srgbClr val="17364A"/>
+                </a:solidFill>
+                <a:latin typeface="Aptos" pitchFamily="34" charset="0"/>
+                <a:ea typeface="Aptos" pitchFamily="34" charset="-122"/>
+                <a:cs typeface="Aptos" pitchFamily="34" charset="-120"/>
+              </a:rPr>
+              <a:t>Recognize common failure modes that can affect safety, accuracy, trust, workflow fit, or sustainability.</a:t>
+            </a:r>
+            <a:endParaRPr lang="en-US" sz="1700" dirty="0"/>
+          </a:p>
+        </p:txBody>
+      </p:sp>
+      <p:sp>
+        <p:nvSpPr>
+          <p:cNvPr id="11" name="Shape 9"/>
+          <p:cNvSpPr/>
+          <p:nvPr/>
+        </p:nvSpPr>
+        <p:spPr>
+          <a:xfrm>
+            <a:off x="7909560" y="1417320"/>
+            <a:ext cx="3154680" cy="1828800"/>
+          </a:xfrm>
+          <a:prstGeom prst="roundRect">
+            <a:avLst>
+              <a:gd name="adj" fmla="val 6000"/>
+            </a:avLst>
+          </a:prstGeom>
+          <a:solidFill>
+            <a:srgbClr val="EEF8ED"/>
+          </a:solidFill>
+          <a:ln w="12700">
+            <a:solidFill>
+              <a:srgbClr val="B9D7E6"/>
+            </a:solidFill>
+            <a:prstDash val="solid"/>
+          </a:ln>
+        </p:spPr>
+      </p:sp>
+      <p:sp>
+        <p:nvSpPr>
+          <p:cNvPr id="12" name="Text 10"/>
+          <p:cNvSpPr/>
+          <p:nvPr/>
+        </p:nvSpPr>
+        <p:spPr>
+          <a:xfrm>
+            <a:off x="8074152" y="1563624"/>
+            <a:ext cx="2825496" cy="201168"/>
+          </a:xfrm>
+          <a:prstGeom prst="rect">
+            <a:avLst/>
+          </a:prstGeom>
+          <a:noFill/>
+          <a:ln/>
+        </p:spPr>
+        <p:txBody>
+          <a:bodyPr wrap="square" lIns="0" tIns="0" rIns="0" bIns="0" rtlCol="0" anchor="ctr"/>
+          <a:lstStyle/>
+          <a:p>
             <a:pPr indent="0" marL="0">
               <a:buNone/>
             </a:pPr>
             <a:r>
-              <a:rPr lang="en-US" sz="1420" dirty="0">
+              <a:rPr lang="en-US" sz="950" b="1" dirty="0">
+                <a:solidFill>
+                  <a:srgbClr val="0068B7"/>
+                </a:solidFill>
+                <a:latin typeface="Aptos" pitchFamily="34" charset="0"/>
+                <a:ea typeface="Aptos" pitchFamily="34" charset="-122"/>
+                <a:cs typeface="Aptos" pitchFamily="34" charset="-120"/>
+              </a:rPr>
+              <a:t>Key idea</a:t>
+            </a:r>
+            <a:endParaRPr lang="en-US" sz="950" dirty="0"/>
+          </a:p>
+        </p:txBody>
+      </p:sp>
+      <p:sp>
+        <p:nvSpPr>
+          <p:cNvPr id="13" name="Text 11"/>
+          <p:cNvSpPr/>
+          <p:nvPr/>
+        </p:nvSpPr>
+        <p:spPr>
+          <a:xfrm>
+            <a:off x="8074152" y="1856232"/>
+            <a:ext cx="2825496" cy="1261872"/>
+          </a:xfrm>
+          <a:prstGeom prst="rect">
+            <a:avLst/>
+          </a:prstGeom>
+          <a:noFill/>
+          <a:ln/>
+        </p:spPr>
+        <p:txBody>
+          <a:bodyPr wrap="square" lIns="0" tIns="0" rIns="0" bIns="0" rtlCol="0" anchor="t">
+            <a:normAutofit/>
+          </a:bodyPr>
+          <a:lstStyle/>
+          <a:p>
+            <a:pPr indent="0" marL="0">
+              <a:buNone/>
+            </a:pPr>
+            <a:r>
+              <a:rPr lang="en-US" sz="1250" dirty="0">
                 <a:solidFill>
                   <a:srgbClr val="17364A"/>
                 </a:solidFill>
@@ -6854,9 +12563,116 @@
                 <a:ea typeface="Aptos" pitchFamily="34" charset="-122"/>
                 <a:cs typeface="Aptos" pitchFamily="34" charset="-120"/>
               </a:rPr>
-              <a:t>AI procurement requires stronger requirements than ordinary software purchasing because agencies must define not only features, but also data rights, validation, interoperability, security, privacy, monitoring, documentation, accessibility, and exit strategy. This module teaches learners how to write requirements that can be evaluated, tested, enforced, and monitored throughout implementation.</a:t>
-            </a:r>
-            <a:endParaRPr lang="en-US" sz="1420" dirty="0"/>
+              <a:t>Explain the purpose of requirements writing for ai procurement and implementation in public health AI work.</a:t>
+            </a:r>
+            <a:endParaRPr lang="en-US" sz="1250" dirty="0"/>
+          </a:p>
+        </p:txBody>
+      </p:sp>
+      <p:sp>
+        <p:nvSpPr>
+          <p:cNvPr id="14" name="Shape 12"/>
+          <p:cNvSpPr/>
+          <p:nvPr/>
+        </p:nvSpPr>
+        <p:spPr>
+          <a:xfrm>
+            <a:off x="7909560" y="3520440"/>
+            <a:ext cx="3154680" cy="1737360"/>
+          </a:xfrm>
+          <a:prstGeom prst="roundRect">
+            <a:avLst>
+              <a:gd name="adj" fmla="val 6316"/>
+            </a:avLst>
+          </a:prstGeom>
+          <a:solidFill>
+            <a:srgbClr val="EAF6F8"/>
+          </a:solidFill>
+          <a:ln w="12700">
+            <a:solidFill>
+              <a:srgbClr val="B9D7E6"/>
+            </a:solidFill>
+            <a:prstDash val="solid"/>
+          </a:ln>
+        </p:spPr>
+      </p:sp>
+      <p:sp>
+        <p:nvSpPr>
+          <p:cNvPr id="15" name="Text 13"/>
+          <p:cNvSpPr/>
+          <p:nvPr/>
+        </p:nvSpPr>
+        <p:spPr>
+          <a:xfrm>
+            <a:off x="8074152" y="3666744"/>
+            <a:ext cx="2825496" cy="201168"/>
+          </a:xfrm>
+          <a:prstGeom prst="rect">
+            <a:avLst/>
+          </a:prstGeom>
+          <a:noFill/>
+          <a:ln/>
+        </p:spPr>
+        <p:txBody>
+          <a:bodyPr wrap="square" lIns="0" tIns="0" rIns="0" bIns="0" rtlCol="0" anchor="ctr"/>
+          <a:lstStyle/>
+          <a:p>
+            <a:pPr indent="0" marL="0">
+              <a:buNone/>
+            </a:pPr>
+            <a:r>
+              <a:rPr lang="en-US" sz="950" b="1" dirty="0">
+                <a:solidFill>
+                  <a:srgbClr val="0068B7"/>
+                </a:solidFill>
+                <a:latin typeface="Aptos" pitchFamily="34" charset="0"/>
+                <a:ea typeface="Aptos" pitchFamily="34" charset="-122"/>
+                <a:cs typeface="Aptos" pitchFamily="34" charset="-120"/>
+              </a:rPr>
+              <a:t>Use this for</a:t>
+            </a:r>
+            <a:endParaRPr lang="en-US" sz="950" dirty="0"/>
+          </a:p>
+        </p:txBody>
+      </p:sp>
+      <p:sp>
+        <p:nvSpPr>
+          <p:cNvPr id="16" name="Text 14"/>
+          <p:cNvSpPr/>
+          <p:nvPr/>
+        </p:nvSpPr>
+        <p:spPr>
+          <a:xfrm>
+            <a:off x="8074152" y="3959352"/>
+            <a:ext cx="2825496" cy="1170432"/>
+          </a:xfrm>
+          <a:prstGeom prst="rect">
+            <a:avLst/>
+          </a:prstGeom>
+          <a:noFill/>
+          <a:ln/>
+        </p:spPr>
+        <p:txBody>
+          <a:bodyPr wrap="square" lIns="0" tIns="0" rIns="0" bIns="0" rtlCol="0" anchor="t">
+            <a:normAutofit/>
+          </a:bodyPr>
+          <a:lstStyle/>
+          <a:p>
+            <a:pPr indent="0" marL="0">
+              <a:buNone/>
+            </a:pPr>
+            <a:r>
+              <a:rPr lang="en-US" sz="1250" dirty="0">
+                <a:solidFill>
+                  <a:srgbClr val="17364A"/>
+                </a:solidFill>
+                <a:latin typeface="Aptos" pitchFamily="34" charset="0"/>
+                <a:ea typeface="Aptos" pitchFamily="34" charset="-122"/>
+                <a:cs typeface="Aptos" pitchFamily="34" charset="-120"/>
+              </a:rPr>
+              <a:t>Connect the concept to public health decisions, safeguards, documentation, or implementation work.</a:t>
+            </a:r>
+            <a:endParaRPr lang="en-US" sz="1250" dirty="0"/>
           </a:p>
         </p:txBody>
       </p:sp>
@@ -6919,7 +12735,32 @@
       </p:sp>
       <p:sp>
         <p:nvSpPr>
-          <p:cNvPr id="3" name="Text 1"/>
+          <p:cNvPr id="3" name="Shape 1"/>
+          <p:cNvSpPr/>
+          <p:nvPr/>
+        </p:nvSpPr>
+        <p:spPr>
+          <a:xfrm>
+            <a:off x="0" y="164592"/>
+            <a:ext cx="146304" cy="6693408"/>
+          </a:xfrm>
+          <a:prstGeom prst="rect">
+            <a:avLst/>
+          </a:prstGeom>
+          <a:solidFill>
+            <a:srgbClr val="2F8A28"/>
+          </a:solidFill>
+          <a:ln w="12700">
+            <a:solidFill>
+              <a:srgbClr val="2F8A28"/>
+            </a:solidFill>
+            <a:prstDash val="solid"/>
+          </a:ln>
+        </p:spPr>
+      </p:sp>
+      <p:sp>
+        <p:nvSpPr>
+          <p:cNvPr id="4" name="Text 2"/>
           <p:cNvSpPr/>
           <p:nvPr/>
         </p:nvSpPr>
@@ -6958,7 +12799,7 @@
       </p:sp>
       <p:sp>
         <p:nvSpPr>
-          <p:cNvPr id="4" name="Text 2"/>
+          <p:cNvPr id="5" name="Text 3"/>
           <p:cNvSpPr/>
           <p:nvPr/>
         </p:nvSpPr>
@@ -6997,7 +12838,7 @@
       </p:sp>
       <p:sp>
         <p:nvSpPr>
-          <p:cNvPr id="5" name="Text 3"/>
+          <p:cNvPr id="6" name="Text 4"/>
           <p:cNvSpPr/>
           <p:nvPr/>
         </p:nvSpPr>
@@ -7036,7 +12877,7 @@
       </p:sp>
       <p:sp>
         <p:nvSpPr>
-          <p:cNvPr id="6" name="Text 4"/>
+          <p:cNvPr id="7" name="Text 5"/>
           <p:cNvSpPr/>
           <p:nvPr/>
         </p:nvSpPr>
@@ -7069,7 +12910,7 @@
                 <a:ea typeface="Aptos Display" pitchFamily="34" charset="-122"/>
                 <a:cs typeface="Aptos Display" pitchFamily="34" charset="-120"/>
               </a:rPr>
-              <a:t>Jurisdiction and Agency Policy Note</a:t>
+              <a:t>Learning Objectives Continued</a:t>
             </a:r>
             <a:endParaRPr lang="en-US" sz="2700" dirty="0"/>
           </a:p>
@@ -7077,32 +12918,136 @@
       </p:sp>
       <p:sp>
         <p:nvSpPr>
-          <p:cNvPr id="7" name="Text 5"/>
-          <p:cNvSpPr/>
-          <p:nvPr/>
-        </p:nvSpPr>
-        <p:spPr>
-          <a:xfrm>
-            <a:off x="822960" y="1325880"/>
-            <a:ext cx="10378440" cy="4800600"/>
-          </a:xfrm>
-          <a:prstGeom prst="rect">
-            <a:avLst/>
-          </a:prstGeom>
-          <a:noFill/>
-          <a:ln/>
-        </p:spPr>
-        <p:txBody>
-          <a:bodyPr wrap="square" lIns="1016" tIns="1016" rIns="1016" bIns="1016" rtlCol="0" anchor="t">
+          <p:cNvPr id="8" name="Text 6"/>
+          <p:cNvSpPr/>
+          <p:nvPr/>
+        </p:nvSpPr>
+        <p:spPr>
+          <a:xfrm>
+            <a:off x="868680" y="1417320"/>
+            <a:ext cx="6675120" cy="4434840"/>
+          </a:xfrm>
+          <a:prstGeom prst="rect">
+            <a:avLst/>
+          </a:prstGeom>
+          <a:noFill/>
+          <a:ln/>
+        </p:spPr>
+        <p:txBody>
+          <a:bodyPr wrap="square" lIns="635" tIns="635" rIns="635" bIns="635" rtlCol="0" anchor="t">
             <a:normAutofit/>
           </a:bodyPr>
           <a:lstStyle/>
           <a:p>
+            <a:r>
+              <a:rPr lang="en-US" sz="1700" dirty="0">
+                <a:solidFill>
+                  <a:srgbClr val="17364A"/>
+                </a:solidFill>
+                <a:latin typeface="Aptos" pitchFamily="34" charset="0"/>
+                <a:ea typeface="Aptos" pitchFamily="34" charset="-122"/>
+                <a:cs typeface="Aptos" pitchFamily="34" charset="-120"/>
+              </a:rPr>
+              <a:t>Produce a AI requirements matrix that can support readiness assessment, governance review, procurement, implementation, or.</a:t>
+            </a:r>
+            <a:endParaRPr lang="en-US" sz="1700" dirty="0"/>
+          </a:p>
+        </p:txBody>
+      </p:sp>
+      <p:sp>
+        <p:nvSpPr>
+          <p:cNvPr id="9" name="Shape 7"/>
+          <p:cNvSpPr/>
+          <p:nvPr/>
+        </p:nvSpPr>
+        <p:spPr>
+          <a:xfrm>
+            <a:off x="7909560" y="1417320"/>
+            <a:ext cx="3154680" cy="1828800"/>
+          </a:xfrm>
+          <a:prstGeom prst="roundRect">
+            <a:avLst>
+              <a:gd name="adj" fmla="val 6000"/>
+            </a:avLst>
+          </a:prstGeom>
+          <a:solidFill>
+            <a:srgbClr val="EEF8ED"/>
+          </a:solidFill>
+          <a:ln w="12700">
+            <a:solidFill>
+              <a:srgbClr val="B9D7E6"/>
+            </a:solidFill>
+            <a:prstDash val="solid"/>
+          </a:ln>
+        </p:spPr>
+      </p:sp>
+      <p:sp>
+        <p:nvSpPr>
+          <p:cNvPr id="10" name="Text 8"/>
+          <p:cNvSpPr/>
+          <p:nvPr/>
+        </p:nvSpPr>
+        <p:spPr>
+          <a:xfrm>
+            <a:off x="8074152" y="1563624"/>
+            <a:ext cx="2825496" cy="201168"/>
+          </a:xfrm>
+          <a:prstGeom prst="rect">
+            <a:avLst/>
+          </a:prstGeom>
+          <a:noFill/>
+          <a:ln/>
+        </p:spPr>
+        <p:txBody>
+          <a:bodyPr wrap="square" lIns="0" tIns="0" rIns="0" bIns="0" rtlCol="0" anchor="ctr"/>
+          <a:lstStyle/>
+          <a:p>
             <a:pPr indent="0" marL="0">
               <a:buNone/>
             </a:pPr>
             <a:r>
-              <a:rPr lang="en-US" sz="1420" dirty="0">
+              <a:rPr lang="en-US" sz="950" b="1" dirty="0">
+                <a:solidFill>
+                  <a:srgbClr val="0068B7"/>
+                </a:solidFill>
+                <a:latin typeface="Aptos" pitchFamily="34" charset="0"/>
+                <a:ea typeface="Aptos" pitchFamily="34" charset="-122"/>
+                <a:cs typeface="Aptos" pitchFamily="34" charset="-120"/>
+              </a:rPr>
+              <a:t>Key idea</a:t>
+            </a:r>
+            <a:endParaRPr lang="en-US" sz="950" dirty="0"/>
+          </a:p>
+        </p:txBody>
+      </p:sp>
+      <p:sp>
+        <p:nvSpPr>
+          <p:cNvPr id="11" name="Text 9"/>
+          <p:cNvSpPr/>
+          <p:nvPr/>
+        </p:nvSpPr>
+        <p:spPr>
+          <a:xfrm>
+            <a:off x="8074152" y="1856232"/>
+            <a:ext cx="2825496" cy="1261872"/>
+          </a:xfrm>
+          <a:prstGeom prst="rect">
+            <a:avLst/>
+          </a:prstGeom>
+          <a:noFill/>
+          <a:ln/>
+        </p:spPr>
+        <p:txBody>
+          <a:bodyPr wrap="square" lIns="0" tIns="0" rIns="0" bIns="0" rtlCol="0" anchor="t">
+            <a:normAutofit/>
+          </a:bodyPr>
+          <a:lstStyle/>
+          <a:p>
+            <a:pPr indent="0" marL="0">
+              <a:buNone/>
+            </a:pPr>
+            <a:r>
+              <a:rPr lang="en-US" sz="1250" dirty="0">
                 <a:solidFill>
                   <a:srgbClr val="17364A"/>
                 </a:solidFill>
@@ -7110,9 +13055,116 @@
                 <a:ea typeface="Aptos" pitchFamily="34" charset="-122"/>
                 <a:cs typeface="Aptos" pitchFamily="34" charset="-120"/>
               </a:rPr>
-              <a:t>This module provides national-level training guidance for public health agencies and partners. It is not legal advice and does not replace review by agency legal counsel, privacy officers, procurement officials, civil rights staff, records officers, or other authorized decision-makers. Requirements may vary by state, locality, territory, Tribe, agency, funding source, data-sharing agreement, emergency authority, and organizational policy. Learners should use this module to identify the issues that require review and should confirm applicable requirements before approving, procuring, deploying, or publicly communicating about AI-supported work.</a:t>
-            </a:r>
-            <a:endParaRPr lang="en-US" sz="1420" dirty="0"/>
+              <a:t>Produce a AI requirements matrix that can support readiness assessment, governance review, procurement, implementation, or.</a:t>
+            </a:r>
+            <a:endParaRPr lang="en-US" sz="1250" dirty="0"/>
+          </a:p>
+        </p:txBody>
+      </p:sp>
+      <p:sp>
+        <p:nvSpPr>
+          <p:cNvPr id="12" name="Shape 10"/>
+          <p:cNvSpPr/>
+          <p:nvPr/>
+        </p:nvSpPr>
+        <p:spPr>
+          <a:xfrm>
+            <a:off x="7909560" y="3520440"/>
+            <a:ext cx="3154680" cy="1737360"/>
+          </a:xfrm>
+          <a:prstGeom prst="roundRect">
+            <a:avLst>
+              <a:gd name="adj" fmla="val 6316"/>
+            </a:avLst>
+          </a:prstGeom>
+          <a:solidFill>
+            <a:srgbClr val="EAF6F8"/>
+          </a:solidFill>
+          <a:ln w="12700">
+            <a:solidFill>
+              <a:srgbClr val="B9D7E6"/>
+            </a:solidFill>
+            <a:prstDash val="solid"/>
+          </a:ln>
+        </p:spPr>
+      </p:sp>
+      <p:sp>
+        <p:nvSpPr>
+          <p:cNvPr id="13" name="Text 11"/>
+          <p:cNvSpPr/>
+          <p:nvPr/>
+        </p:nvSpPr>
+        <p:spPr>
+          <a:xfrm>
+            <a:off x="8074152" y="3666744"/>
+            <a:ext cx="2825496" cy="201168"/>
+          </a:xfrm>
+          <a:prstGeom prst="rect">
+            <a:avLst/>
+          </a:prstGeom>
+          <a:noFill/>
+          <a:ln/>
+        </p:spPr>
+        <p:txBody>
+          <a:bodyPr wrap="square" lIns="0" tIns="0" rIns="0" bIns="0" rtlCol="0" anchor="ctr"/>
+          <a:lstStyle/>
+          <a:p>
+            <a:pPr indent="0" marL="0">
+              <a:buNone/>
+            </a:pPr>
+            <a:r>
+              <a:rPr lang="en-US" sz="950" b="1" dirty="0">
+                <a:solidFill>
+                  <a:srgbClr val="0068B7"/>
+                </a:solidFill>
+                <a:latin typeface="Aptos" pitchFamily="34" charset="0"/>
+                <a:ea typeface="Aptos" pitchFamily="34" charset="-122"/>
+                <a:cs typeface="Aptos" pitchFamily="34" charset="-120"/>
+              </a:rPr>
+              <a:t>Use this for</a:t>
+            </a:r>
+            <a:endParaRPr lang="en-US" sz="950" dirty="0"/>
+          </a:p>
+        </p:txBody>
+      </p:sp>
+      <p:sp>
+        <p:nvSpPr>
+          <p:cNvPr id="14" name="Text 12"/>
+          <p:cNvSpPr/>
+          <p:nvPr/>
+        </p:nvSpPr>
+        <p:spPr>
+          <a:xfrm>
+            <a:off x="8074152" y="3959352"/>
+            <a:ext cx="2825496" cy="1170432"/>
+          </a:xfrm>
+          <a:prstGeom prst="rect">
+            <a:avLst/>
+          </a:prstGeom>
+          <a:noFill/>
+          <a:ln/>
+        </p:spPr>
+        <p:txBody>
+          <a:bodyPr wrap="square" lIns="0" tIns="0" rIns="0" bIns="0" rtlCol="0" anchor="t">
+            <a:normAutofit/>
+          </a:bodyPr>
+          <a:lstStyle/>
+          <a:p>
+            <a:pPr indent="0" marL="0">
+              <a:buNone/>
+            </a:pPr>
+            <a:r>
+              <a:rPr lang="en-US" sz="1250" dirty="0">
+                <a:solidFill>
+                  <a:srgbClr val="17364A"/>
+                </a:solidFill>
+                <a:latin typeface="Aptos" pitchFamily="34" charset="0"/>
+                <a:ea typeface="Aptos" pitchFamily="34" charset="-122"/>
+                <a:cs typeface="Aptos" pitchFamily="34" charset="-120"/>
+              </a:rPr>
+              <a:t>Connect the concept to public health decisions, safeguards, documentation, or implementation work.</a:t>
+            </a:r>
+            <a:endParaRPr lang="en-US" sz="1250" dirty="0"/>
           </a:p>
         </p:txBody>
       </p:sp>
@@ -7175,7 +13227,32 @@
       </p:sp>
       <p:sp>
         <p:nvSpPr>
-          <p:cNvPr id="3" name="Text 1"/>
+          <p:cNvPr id="3" name="Shape 1"/>
+          <p:cNvSpPr/>
+          <p:nvPr/>
+        </p:nvSpPr>
+        <p:spPr>
+          <a:xfrm>
+            <a:off x="0" y="164592"/>
+            <a:ext cx="146304" cy="6693408"/>
+          </a:xfrm>
+          <a:prstGeom prst="rect">
+            <a:avLst/>
+          </a:prstGeom>
+          <a:solidFill>
+            <a:srgbClr val="2F8A28"/>
+          </a:solidFill>
+          <a:ln w="12700">
+            <a:solidFill>
+              <a:srgbClr val="2F8A28"/>
+            </a:solidFill>
+            <a:prstDash val="solid"/>
+          </a:ln>
+        </p:spPr>
+      </p:sp>
+      <p:sp>
+        <p:nvSpPr>
+          <p:cNvPr id="4" name="Text 2"/>
           <p:cNvSpPr/>
           <p:nvPr/>
         </p:nvSpPr>
@@ -7214,7 +13291,7 @@
       </p:sp>
       <p:sp>
         <p:nvSpPr>
-          <p:cNvPr id="4" name="Text 2"/>
+          <p:cNvPr id="5" name="Text 3"/>
           <p:cNvSpPr/>
           <p:nvPr/>
         </p:nvSpPr>
@@ -7253,7 +13330,7 @@
       </p:sp>
       <p:sp>
         <p:nvSpPr>
-          <p:cNvPr id="5" name="Text 3"/>
+          <p:cNvPr id="6" name="Text 4"/>
           <p:cNvSpPr/>
           <p:nvPr/>
         </p:nvSpPr>
@@ -7292,13 +13369,77 @@
       </p:sp>
       <p:sp>
         <p:nvSpPr>
-          <p:cNvPr id="6" name="Text 4"/>
+          <p:cNvPr id="7" name="Shape 5"/>
           <p:cNvSpPr/>
           <p:nvPr/>
         </p:nvSpPr>
         <p:spPr>
           <a:xfrm>
             <a:off x="640080" y="658368"/>
+            <a:ext cx="420624" cy="420624"/>
+          </a:xfrm>
+          <a:prstGeom prst="ellipse">
+            <a:avLst/>
+          </a:prstGeom>
+          <a:solidFill>
+            <a:srgbClr val="0068B7"/>
+          </a:solidFill>
+          <a:ln w="12700">
+            <a:solidFill>
+              <a:srgbClr val="0068B7"/>
+            </a:solidFill>
+            <a:prstDash val="solid"/>
+          </a:ln>
+        </p:spPr>
+      </p:sp>
+      <p:sp>
+        <p:nvSpPr>
+          <p:cNvPr id="8" name="Text 6"/>
+          <p:cNvSpPr/>
+          <p:nvPr/>
+        </p:nvSpPr>
+        <p:spPr>
+          <a:xfrm>
+            <a:off x="640080" y="731520"/>
+            <a:ext cx="420624" cy="164592"/>
+          </a:xfrm>
+          <a:prstGeom prst="rect">
+            <a:avLst/>
+          </a:prstGeom>
+          <a:noFill/>
+          <a:ln/>
+        </p:spPr>
+        <p:txBody>
+          <a:bodyPr wrap="square" lIns="0" tIns="0" rIns="0" bIns="0" rtlCol="0" anchor="ctr"/>
+          <a:lstStyle/>
+          <a:p>
+            <a:pPr algn="ctr" indent="0" marL="0">
+              <a:buNone/>
+            </a:pPr>
+            <a:r>
+              <a:rPr lang="en-US" sz="1100" b="1" dirty="0">
+                <a:solidFill>
+                  <a:srgbClr val="FFFFFF"/>
+                </a:solidFill>
+                <a:latin typeface="Aptos" pitchFamily="34" charset="0"/>
+                <a:ea typeface="Aptos" pitchFamily="34" charset="-122"/>
+                <a:cs typeface="Aptos" pitchFamily="34" charset="-120"/>
+              </a:rPr>
+              <a:t>2</a:t>
+            </a:r>
+            <a:endParaRPr lang="en-US" sz="1100" dirty="0"/>
+          </a:p>
+        </p:txBody>
+      </p:sp>
+      <p:sp>
+        <p:nvSpPr>
+          <p:cNvPr id="9" name="Text 7"/>
+          <p:cNvSpPr/>
+          <p:nvPr/>
+        </p:nvSpPr>
+        <p:spPr>
+          <a:xfrm>
+            <a:off x="640080" y="621792"/>
             <a:ext cx="10881360" cy="566928"/>
           </a:xfrm>
           <a:prstGeom prst="rect">
@@ -7325,7 +13466,7 @@
                 <a:ea typeface="Aptos Display" pitchFamily="34" charset="-122"/>
                 <a:cs typeface="Aptos Display" pitchFamily="34" charset="-120"/>
               </a:rPr>
-              <a:t>Why This Topic Matters for Public Health AI</a:t>
+              <a:t>Module Overview</a:t>
             </a:r>
             <a:endParaRPr lang="en-US" sz="2700" dirty="0"/>
           </a:p>
@@ -7333,32 +13474,150 @@
       </p:sp>
       <p:sp>
         <p:nvSpPr>
-          <p:cNvPr id="7" name="Text 5"/>
-          <p:cNvSpPr/>
-          <p:nvPr/>
-        </p:nvSpPr>
-        <p:spPr>
-          <a:xfrm>
-            <a:off x="822960" y="1325880"/>
-            <a:ext cx="10378440" cy="4800600"/>
-          </a:xfrm>
-          <a:prstGeom prst="rect">
-            <a:avLst/>
-          </a:prstGeom>
-          <a:noFill/>
-          <a:ln/>
-        </p:spPr>
-        <p:txBody>
-          <a:bodyPr wrap="square" lIns="1016" tIns="1016" rIns="1016" bIns="1016" rtlCol="0" anchor="t">
+          <p:cNvPr id="10" name="Text 8"/>
+          <p:cNvSpPr/>
+          <p:nvPr/>
+        </p:nvSpPr>
+        <p:spPr>
+          <a:xfrm>
+            <a:off x="868680" y="1417320"/>
+            <a:ext cx="6675120" cy="4434840"/>
+          </a:xfrm>
+          <a:prstGeom prst="rect">
+            <a:avLst/>
+          </a:prstGeom>
+          <a:noFill/>
+          <a:ln/>
+        </p:spPr>
+        <p:txBody>
+          <a:bodyPr wrap="square" lIns="635" tIns="635" rIns="635" bIns="635" rtlCol="0" anchor="t">
             <a:normAutofit/>
           </a:bodyPr>
           <a:lstStyle/>
           <a:p>
+            <a:r>
+              <a:rPr lang="en-US" sz="1700" dirty="0">
+                <a:solidFill>
+                  <a:srgbClr val="17364A"/>
+                </a:solidFill>
+                <a:latin typeface="Aptos" pitchFamily="34" charset="0"/>
+                <a:ea typeface="Aptos" pitchFamily="34" charset="-122"/>
+                <a:cs typeface="Aptos" pitchFamily="34" charset="-120"/>
+              </a:rPr>
+              <a:t>AI procurement requires stronger requirements than ordinary software purchasing because agencies must define not only.</a:t>
+            </a:r>
+            <a:endParaRPr lang="en-US" sz="1700" dirty="0"/>
+          </a:p>
+          <a:p>
+            <a:r>
+              <a:rPr lang="en-US" sz="1700" dirty="0">
+                <a:solidFill>
+                  <a:srgbClr val="17364A"/>
+                </a:solidFill>
+                <a:latin typeface="Aptos" pitchFamily="34" charset="0"/>
+                <a:ea typeface="Aptos" pitchFamily="34" charset="-122"/>
+                <a:cs typeface="Aptos" pitchFamily="34" charset="-120"/>
+              </a:rPr>
+              <a:t>This module teaches learners how to write requirements that can be evaluated, tested, enforced, and monitored throughout.</a:t>
+            </a:r>
+            <a:endParaRPr lang="en-US" sz="1700" dirty="0"/>
+          </a:p>
+        </p:txBody>
+      </p:sp>
+      <p:sp>
+        <p:nvSpPr>
+          <p:cNvPr id="11" name="Shape 9"/>
+          <p:cNvSpPr/>
+          <p:nvPr/>
+        </p:nvSpPr>
+        <p:spPr>
+          <a:xfrm>
+            <a:off x="7909560" y="1417320"/>
+            <a:ext cx="3154680" cy="1828800"/>
+          </a:xfrm>
+          <a:prstGeom prst="roundRect">
+            <a:avLst>
+              <a:gd name="adj" fmla="val 6000"/>
+            </a:avLst>
+          </a:prstGeom>
+          <a:solidFill>
+            <a:srgbClr val="EEF8ED"/>
+          </a:solidFill>
+          <a:ln w="12700">
+            <a:solidFill>
+              <a:srgbClr val="B9D7E6"/>
+            </a:solidFill>
+            <a:prstDash val="solid"/>
+          </a:ln>
+        </p:spPr>
+      </p:sp>
+      <p:sp>
+        <p:nvSpPr>
+          <p:cNvPr id="12" name="Text 10"/>
+          <p:cNvSpPr/>
+          <p:nvPr/>
+        </p:nvSpPr>
+        <p:spPr>
+          <a:xfrm>
+            <a:off x="8074152" y="1563624"/>
+            <a:ext cx="2825496" cy="201168"/>
+          </a:xfrm>
+          <a:prstGeom prst="rect">
+            <a:avLst/>
+          </a:prstGeom>
+          <a:noFill/>
+          <a:ln/>
+        </p:spPr>
+        <p:txBody>
+          <a:bodyPr wrap="square" lIns="0" tIns="0" rIns="0" bIns="0" rtlCol="0" anchor="ctr"/>
+          <a:lstStyle/>
+          <a:p>
             <a:pPr indent="0" marL="0">
               <a:buNone/>
             </a:pPr>
             <a:r>
-              <a:rPr lang="en-US" sz="1420" dirty="0">
+              <a:rPr lang="en-US" sz="950" b="1" dirty="0">
+                <a:solidFill>
+                  <a:srgbClr val="0068B7"/>
+                </a:solidFill>
+                <a:latin typeface="Aptos" pitchFamily="34" charset="0"/>
+                <a:ea typeface="Aptos" pitchFamily="34" charset="-122"/>
+                <a:cs typeface="Aptos" pitchFamily="34" charset="-120"/>
+              </a:rPr>
+              <a:t>Key idea</a:t>
+            </a:r>
+            <a:endParaRPr lang="en-US" sz="950" dirty="0"/>
+          </a:p>
+        </p:txBody>
+      </p:sp>
+      <p:sp>
+        <p:nvSpPr>
+          <p:cNvPr id="13" name="Text 11"/>
+          <p:cNvSpPr/>
+          <p:nvPr/>
+        </p:nvSpPr>
+        <p:spPr>
+          <a:xfrm>
+            <a:off x="8074152" y="1856232"/>
+            <a:ext cx="2825496" cy="1261872"/>
+          </a:xfrm>
+          <a:prstGeom prst="rect">
+            <a:avLst/>
+          </a:prstGeom>
+          <a:noFill/>
+          <a:ln/>
+        </p:spPr>
+        <p:txBody>
+          <a:bodyPr wrap="square" lIns="0" tIns="0" rIns="0" bIns="0" rtlCol="0" anchor="t">
+            <a:normAutofit/>
+          </a:bodyPr>
+          <a:lstStyle/>
+          <a:p>
+            <a:pPr indent="0" marL="0">
+              <a:buNone/>
+            </a:pPr>
+            <a:r>
+              <a:rPr lang="en-US" sz="1250" dirty="0">
                 <a:solidFill>
                   <a:srgbClr val="17364A"/>
                 </a:solidFill>
@@ -7366,9 +13625,116 @@
                 <a:ea typeface="Aptos" pitchFamily="34" charset="-122"/>
                 <a:cs typeface="Aptos" pitchFamily="34" charset="-120"/>
               </a:rPr>
-              <a:t>Requirements Writing for AI Procurement and Implementation matters because AI systems are embedded in public health programs, data systems, and decision processes rather than operating in isolation. The topic affects whether AI outputs are accurate, explainable, safe, equitable, secure, and sustainable. Agencies that ignore this area may create tools that work in a demonstration but fail in actual practice. The topic also affects accountability. Public health agencies must be able to explain how data are used, why a tool was approved, what evidence supports the workflow, who reviews outputs, and what happens when the system fails. These responsibilities become more important as AI tools move from experimentation into operational use.</a:t>
-            </a:r>
-            <a:endParaRPr lang="en-US" sz="1420" dirty="0"/>
+              <a:t>AI procurement requires stronger requirements than ordinary software purchasing because agencies must define not only.</a:t>
+            </a:r>
+            <a:endParaRPr lang="en-US" sz="1250" dirty="0"/>
+          </a:p>
+        </p:txBody>
+      </p:sp>
+      <p:sp>
+        <p:nvSpPr>
+          <p:cNvPr id="14" name="Shape 12"/>
+          <p:cNvSpPr/>
+          <p:nvPr/>
+        </p:nvSpPr>
+        <p:spPr>
+          <a:xfrm>
+            <a:off x="7909560" y="3520440"/>
+            <a:ext cx="3154680" cy="1737360"/>
+          </a:xfrm>
+          <a:prstGeom prst="roundRect">
+            <a:avLst>
+              <a:gd name="adj" fmla="val 6316"/>
+            </a:avLst>
+          </a:prstGeom>
+          <a:solidFill>
+            <a:srgbClr val="EAF6F8"/>
+          </a:solidFill>
+          <a:ln w="12700">
+            <a:solidFill>
+              <a:srgbClr val="B9D7E6"/>
+            </a:solidFill>
+            <a:prstDash val="solid"/>
+          </a:ln>
+        </p:spPr>
+      </p:sp>
+      <p:sp>
+        <p:nvSpPr>
+          <p:cNvPr id="15" name="Text 13"/>
+          <p:cNvSpPr/>
+          <p:nvPr/>
+        </p:nvSpPr>
+        <p:spPr>
+          <a:xfrm>
+            <a:off x="8074152" y="3666744"/>
+            <a:ext cx="2825496" cy="201168"/>
+          </a:xfrm>
+          <a:prstGeom prst="rect">
+            <a:avLst/>
+          </a:prstGeom>
+          <a:noFill/>
+          <a:ln/>
+        </p:spPr>
+        <p:txBody>
+          <a:bodyPr wrap="square" lIns="0" tIns="0" rIns="0" bIns="0" rtlCol="0" anchor="ctr"/>
+          <a:lstStyle/>
+          <a:p>
+            <a:pPr indent="0" marL="0">
+              <a:buNone/>
+            </a:pPr>
+            <a:r>
+              <a:rPr lang="en-US" sz="950" b="1" dirty="0">
+                <a:solidFill>
+                  <a:srgbClr val="0068B7"/>
+                </a:solidFill>
+                <a:latin typeface="Aptos" pitchFamily="34" charset="0"/>
+                <a:ea typeface="Aptos" pitchFamily="34" charset="-122"/>
+                <a:cs typeface="Aptos" pitchFamily="34" charset="-120"/>
+              </a:rPr>
+              <a:t>Use this for</a:t>
+            </a:r>
+            <a:endParaRPr lang="en-US" sz="950" dirty="0"/>
+          </a:p>
+        </p:txBody>
+      </p:sp>
+      <p:sp>
+        <p:nvSpPr>
+          <p:cNvPr id="16" name="Text 14"/>
+          <p:cNvSpPr/>
+          <p:nvPr/>
+        </p:nvSpPr>
+        <p:spPr>
+          <a:xfrm>
+            <a:off x="8074152" y="3959352"/>
+            <a:ext cx="2825496" cy="1170432"/>
+          </a:xfrm>
+          <a:prstGeom prst="rect">
+            <a:avLst/>
+          </a:prstGeom>
+          <a:noFill/>
+          <a:ln/>
+        </p:spPr>
+        <p:txBody>
+          <a:bodyPr wrap="square" lIns="0" tIns="0" rIns="0" bIns="0" rtlCol="0" anchor="t">
+            <a:normAutofit/>
+          </a:bodyPr>
+          <a:lstStyle/>
+          <a:p>
+            <a:pPr indent="0" marL="0">
+              <a:buNone/>
+            </a:pPr>
+            <a:r>
+              <a:rPr lang="en-US" sz="1250" dirty="0">
+                <a:solidFill>
+                  <a:srgbClr val="17364A"/>
+                </a:solidFill>
+                <a:latin typeface="Aptos" pitchFamily="34" charset="0"/>
+                <a:ea typeface="Aptos" pitchFamily="34" charset="-122"/>
+                <a:cs typeface="Aptos" pitchFamily="34" charset="-120"/>
+              </a:rPr>
+              <a:t>Connect the concept to public health decisions, safeguards, documentation, or implementation work.</a:t>
+            </a:r>
+            <a:endParaRPr lang="en-US" sz="1250" dirty="0"/>
           </a:p>
         </p:txBody>
       </p:sp>
@@ -7431,7 +13797,32 @@
       </p:sp>
       <p:sp>
         <p:nvSpPr>
-          <p:cNvPr id="3" name="Text 1"/>
+          <p:cNvPr id="3" name="Shape 1"/>
+          <p:cNvSpPr/>
+          <p:nvPr/>
+        </p:nvSpPr>
+        <p:spPr>
+          <a:xfrm>
+            <a:off x="0" y="164592"/>
+            <a:ext cx="146304" cy="6693408"/>
+          </a:xfrm>
+          <a:prstGeom prst="rect">
+            <a:avLst/>
+          </a:prstGeom>
+          <a:solidFill>
+            <a:srgbClr val="2F8A28"/>
+          </a:solidFill>
+          <a:ln w="12700">
+            <a:solidFill>
+              <a:srgbClr val="2F8A28"/>
+            </a:solidFill>
+            <a:prstDash val="solid"/>
+          </a:ln>
+        </p:spPr>
+      </p:sp>
+      <p:sp>
+        <p:nvSpPr>
+          <p:cNvPr id="4" name="Text 2"/>
           <p:cNvSpPr/>
           <p:nvPr/>
         </p:nvSpPr>
@@ -7470,7 +13861,7 @@
       </p:sp>
       <p:sp>
         <p:nvSpPr>
-          <p:cNvPr id="4" name="Text 2"/>
+          <p:cNvPr id="5" name="Text 3"/>
           <p:cNvSpPr/>
           <p:nvPr/>
         </p:nvSpPr>
@@ -7509,7 +13900,7 @@
       </p:sp>
       <p:sp>
         <p:nvSpPr>
-          <p:cNvPr id="5" name="Text 3"/>
+          <p:cNvPr id="6" name="Text 4"/>
           <p:cNvSpPr/>
           <p:nvPr/>
         </p:nvSpPr>
@@ -7548,13 +13939,77 @@
       </p:sp>
       <p:sp>
         <p:nvSpPr>
-          <p:cNvPr id="6" name="Text 4"/>
+          <p:cNvPr id="7" name="Shape 5"/>
           <p:cNvSpPr/>
           <p:nvPr/>
         </p:nvSpPr>
         <p:spPr>
           <a:xfrm>
             <a:off x="640080" y="658368"/>
+            <a:ext cx="420624" cy="420624"/>
+          </a:xfrm>
+          <a:prstGeom prst="ellipse">
+            <a:avLst/>
+          </a:prstGeom>
+          <a:solidFill>
+            <a:srgbClr val="0068B7"/>
+          </a:solidFill>
+          <a:ln w="12700">
+            <a:solidFill>
+              <a:srgbClr val="0068B7"/>
+            </a:solidFill>
+            <a:prstDash val="solid"/>
+          </a:ln>
+        </p:spPr>
+      </p:sp>
+      <p:sp>
+        <p:nvSpPr>
+          <p:cNvPr id="8" name="Text 6"/>
+          <p:cNvSpPr/>
+          <p:nvPr/>
+        </p:nvSpPr>
+        <p:spPr>
+          <a:xfrm>
+            <a:off x="640080" y="731520"/>
+            <a:ext cx="420624" cy="164592"/>
+          </a:xfrm>
+          <a:prstGeom prst="rect">
+            <a:avLst/>
+          </a:prstGeom>
+          <a:noFill/>
+          <a:ln/>
+        </p:spPr>
+        <p:txBody>
+          <a:bodyPr wrap="square" lIns="0" tIns="0" rIns="0" bIns="0" rtlCol="0" anchor="ctr"/>
+          <a:lstStyle/>
+          <a:p>
+            <a:pPr algn="ctr" indent="0" marL="0">
+              <a:buNone/>
+            </a:pPr>
+            <a:r>
+              <a:rPr lang="en-US" sz="1100" b="1" dirty="0">
+                <a:solidFill>
+                  <a:srgbClr val="FFFFFF"/>
+                </a:solidFill>
+                <a:latin typeface="Aptos" pitchFamily="34" charset="0"/>
+                <a:ea typeface="Aptos" pitchFamily="34" charset="-122"/>
+                <a:cs typeface="Aptos" pitchFamily="34" charset="-120"/>
+              </a:rPr>
+              <a:t>3</a:t>
+            </a:r>
+            <a:endParaRPr lang="en-US" sz="1100" dirty="0"/>
+          </a:p>
+        </p:txBody>
+      </p:sp>
+      <p:sp>
+        <p:nvSpPr>
+          <p:cNvPr id="9" name="Text 7"/>
+          <p:cNvSpPr/>
+          <p:nvPr/>
+        </p:nvSpPr>
+        <p:spPr>
+          <a:xfrm>
+            <a:off x="640080" y="621792"/>
             <a:ext cx="10881360" cy="566928"/>
           </a:xfrm>
           <a:prstGeom prst="rect">
@@ -7581,7 +14036,7 @@
                 <a:ea typeface="Aptos Display" pitchFamily="34" charset="-122"/>
                 <a:cs typeface="Aptos Display" pitchFamily="34" charset="-120"/>
               </a:rPr>
-              <a:t>Core Concepts</a:t>
+              <a:t>Jurisdiction and Agency Policy Note</a:t>
             </a:r>
             <a:endParaRPr lang="en-US" sz="2700" dirty="0"/>
           </a:p>
@@ -7589,32 +14044,178 @@
       </p:sp>
       <p:sp>
         <p:nvSpPr>
-          <p:cNvPr id="7" name="Text 5"/>
-          <p:cNvSpPr/>
-          <p:nvPr/>
-        </p:nvSpPr>
-        <p:spPr>
-          <a:xfrm>
-            <a:off x="822960" y="1325880"/>
-            <a:ext cx="10378440" cy="4800600"/>
-          </a:xfrm>
-          <a:prstGeom prst="rect">
-            <a:avLst/>
-          </a:prstGeom>
-          <a:noFill/>
-          <a:ln/>
-        </p:spPr>
-        <p:txBody>
-          <a:bodyPr wrap="square" lIns="1016" tIns="1016" rIns="1016" bIns="1016" rtlCol="0" anchor="t">
+          <p:cNvPr id="10" name="Text 8"/>
+          <p:cNvSpPr/>
+          <p:nvPr/>
+        </p:nvSpPr>
+        <p:spPr>
+          <a:xfrm>
+            <a:off x="868680" y="1417320"/>
+            <a:ext cx="6675120" cy="4434840"/>
+          </a:xfrm>
+          <a:prstGeom prst="rect">
+            <a:avLst/>
+          </a:prstGeom>
+          <a:noFill/>
+          <a:ln/>
+        </p:spPr>
+        <p:txBody>
+          <a:bodyPr wrap="square" lIns="635" tIns="635" rIns="635" bIns="635" rtlCol="0" anchor="t">
             <a:normAutofit/>
           </a:bodyPr>
           <a:lstStyle/>
           <a:p>
+            <a:r>
+              <a:rPr lang="en-US" sz="1700" dirty="0">
+                <a:solidFill>
+                  <a:srgbClr val="17364A"/>
+                </a:solidFill>
+                <a:latin typeface="Aptos" pitchFamily="34" charset="0"/>
+                <a:ea typeface="Aptos" pitchFamily="34" charset="-122"/>
+                <a:cs typeface="Aptos" pitchFamily="34" charset="-120"/>
+              </a:rPr>
+              <a:t>This module provides national-level training guidance for public health agencies and partners.</a:t>
+            </a:r>
+            <a:endParaRPr lang="en-US" sz="1700" dirty="0"/>
+          </a:p>
+          <a:p>
+            <a:r>
+              <a:rPr lang="en-US" sz="1700" dirty="0">
+                <a:solidFill>
+                  <a:srgbClr val="17364A"/>
+                </a:solidFill>
+                <a:latin typeface="Aptos" pitchFamily="34" charset="0"/>
+                <a:ea typeface="Aptos" pitchFamily="34" charset="-122"/>
+                <a:cs typeface="Aptos" pitchFamily="34" charset="-120"/>
+              </a:rPr>
+              <a:t>It is not legal advice and does not replace review by agency legal counsel, privacy officers, procurement officials, civil.</a:t>
+            </a:r>
+            <a:endParaRPr lang="en-US" sz="1700" dirty="0"/>
+          </a:p>
+          <a:p>
+            <a:r>
+              <a:rPr lang="en-US" sz="1700" dirty="0">
+                <a:solidFill>
+                  <a:srgbClr val="17364A"/>
+                </a:solidFill>
+                <a:latin typeface="Aptos" pitchFamily="34" charset="0"/>
+                <a:ea typeface="Aptos" pitchFamily="34" charset="-122"/>
+                <a:cs typeface="Aptos" pitchFamily="34" charset="-120"/>
+              </a:rPr>
+              <a:t>Requirements may vary by state, locality, territory, Tribe, agency, funding source, data-sharing agreement, emergency.</a:t>
+            </a:r>
+            <a:endParaRPr lang="en-US" sz="1700" dirty="0"/>
+          </a:p>
+          <a:p>
+            <a:r>
+              <a:rPr lang="en-US" sz="1700" dirty="0">
+                <a:solidFill>
+                  <a:srgbClr val="17364A"/>
+                </a:solidFill>
+                <a:latin typeface="Aptos" pitchFamily="34" charset="0"/>
+                <a:ea typeface="Aptos" pitchFamily="34" charset="-122"/>
+                <a:cs typeface="Aptos" pitchFamily="34" charset="-120"/>
+              </a:rPr>
+              <a:t>Learners should use this module to identify the issues that require review and should confirm applicable requirements.</a:t>
+            </a:r>
+            <a:endParaRPr lang="en-US" sz="1700" dirty="0"/>
+          </a:p>
+        </p:txBody>
+      </p:sp>
+      <p:sp>
+        <p:nvSpPr>
+          <p:cNvPr id="11" name="Shape 9"/>
+          <p:cNvSpPr/>
+          <p:nvPr/>
+        </p:nvSpPr>
+        <p:spPr>
+          <a:xfrm>
+            <a:off x="7909560" y="1417320"/>
+            <a:ext cx="3154680" cy="1828800"/>
+          </a:xfrm>
+          <a:prstGeom prst="roundRect">
+            <a:avLst>
+              <a:gd name="adj" fmla="val 6000"/>
+            </a:avLst>
+          </a:prstGeom>
+          <a:solidFill>
+            <a:srgbClr val="EEF8ED"/>
+          </a:solidFill>
+          <a:ln w="12700">
+            <a:solidFill>
+              <a:srgbClr val="B9D7E6"/>
+            </a:solidFill>
+            <a:prstDash val="solid"/>
+          </a:ln>
+        </p:spPr>
+      </p:sp>
+      <p:sp>
+        <p:nvSpPr>
+          <p:cNvPr id="12" name="Text 10"/>
+          <p:cNvSpPr/>
+          <p:nvPr/>
+        </p:nvSpPr>
+        <p:spPr>
+          <a:xfrm>
+            <a:off x="8074152" y="1563624"/>
+            <a:ext cx="2825496" cy="201168"/>
+          </a:xfrm>
+          <a:prstGeom prst="rect">
+            <a:avLst/>
+          </a:prstGeom>
+          <a:noFill/>
+          <a:ln/>
+        </p:spPr>
+        <p:txBody>
+          <a:bodyPr wrap="square" lIns="0" tIns="0" rIns="0" bIns="0" rtlCol="0" anchor="ctr"/>
+          <a:lstStyle/>
+          <a:p>
             <a:pPr indent="0" marL="0">
               <a:buNone/>
             </a:pPr>
             <a:r>
-              <a:rPr lang="en-US" sz="1420" dirty="0">
+              <a:rPr lang="en-US" sz="950" b="1" dirty="0">
+                <a:solidFill>
+                  <a:srgbClr val="0068B7"/>
+                </a:solidFill>
+                <a:latin typeface="Aptos" pitchFamily="34" charset="0"/>
+                <a:ea typeface="Aptos" pitchFamily="34" charset="-122"/>
+                <a:cs typeface="Aptos" pitchFamily="34" charset="-120"/>
+              </a:rPr>
+              <a:t>Key idea</a:t>
+            </a:r>
+            <a:endParaRPr lang="en-US" sz="950" dirty="0"/>
+          </a:p>
+        </p:txBody>
+      </p:sp>
+      <p:sp>
+        <p:nvSpPr>
+          <p:cNvPr id="13" name="Text 11"/>
+          <p:cNvSpPr/>
+          <p:nvPr/>
+        </p:nvSpPr>
+        <p:spPr>
+          <a:xfrm>
+            <a:off x="8074152" y="1856232"/>
+            <a:ext cx="2825496" cy="1261872"/>
+          </a:xfrm>
+          <a:prstGeom prst="rect">
+            <a:avLst/>
+          </a:prstGeom>
+          <a:noFill/>
+          <a:ln/>
+        </p:spPr>
+        <p:txBody>
+          <a:bodyPr wrap="square" lIns="0" tIns="0" rIns="0" bIns="0" rtlCol="0" anchor="t">
+            <a:normAutofit/>
+          </a:bodyPr>
+          <a:lstStyle/>
+          <a:p>
+            <a:pPr indent="0" marL="0">
+              <a:buNone/>
+            </a:pPr>
+            <a:r>
+              <a:rPr lang="en-US" sz="1250" dirty="0">
                 <a:solidFill>
                   <a:srgbClr val="17364A"/>
                 </a:solidFill>
@@ -7622,9 +14223,116 @@
                 <a:ea typeface="Aptos" pitchFamily="34" charset="-122"/>
                 <a:cs typeface="Aptos" pitchFamily="34" charset="-120"/>
               </a:rPr>
-              <a:t>A requirement is a clear statement of what a system must do or how it must perform. AI requirements must cover functional capabilities, nonfunctional expectations, data handling, validation, transparency, monitoring, security, accessibility, interoperability, and support. Functional requirements describe what the tool must do, such as summarize a case report, classify a complaint, or generate a draft message. Nonfunctional requirements describe how the tool must perform, such as uptime, response time, security, auditability, explainability, and accessibility. Procurement requirements must be testable. If a requirement cannot be evaluated during proposal review, implementation, or acceptance testing, it is unlikely to protect the agency. Requirements should avoid vague claims such as “uses responsible AI” unless they are translated into evidence, controls, and deliverables.</a:t>
-            </a:r>
-            <a:endParaRPr lang="en-US" sz="1420" dirty="0"/>
+              <a:t>This module provides national-level training guidance for public health agencies and partners.</a:t>
+            </a:r>
+            <a:endParaRPr lang="en-US" sz="1250" dirty="0"/>
+          </a:p>
+        </p:txBody>
+      </p:sp>
+      <p:sp>
+        <p:nvSpPr>
+          <p:cNvPr id="14" name="Shape 12"/>
+          <p:cNvSpPr/>
+          <p:nvPr/>
+        </p:nvSpPr>
+        <p:spPr>
+          <a:xfrm>
+            <a:off x="7909560" y="3520440"/>
+            <a:ext cx="3154680" cy="1737360"/>
+          </a:xfrm>
+          <a:prstGeom prst="roundRect">
+            <a:avLst>
+              <a:gd name="adj" fmla="val 6316"/>
+            </a:avLst>
+          </a:prstGeom>
+          <a:solidFill>
+            <a:srgbClr val="EAF6F8"/>
+          </a:solidFill>
+          <a:ln w="12700">
+            <a:solidFill>
+              <a:srgbClr val="B9D7E6"/>
+            </a:solidFill>
+            <a:prstDash val="solid"/>
+          </a:ln>
+        </p:spPr>
+      </p:sp>
+      <p:sp>
+        <p:nvSpPr>
+          <p:cNvPr id="15" name="Text 13"/>
+          <p:cNvSpPr/>
+          <p:nvPr/>
+        </p:nvSpPr>
+        <p:spPr>
+          <a:xfrm>
+            <a:off x="8074152" y="3666744"/>
+            <a:ext cx="2825496" cy="201168"/>
+          </a:xfrm>
+          <a:prstGeom prst="rect">
+            <a:avLst/>
+          </a:prstGeom>
+          <a:noFill/>
+          <a:ln/>
+        </p:spPr>
+        <p:txBody>
+          <a:bodyPr wrap="square" lIns="0" tIns="0" rIns="0" bIns="0" rtlCol="0" anchor="ctr"/>
+          <a:lstStyle/>
+          <a:p>
+            <a:pPr indent="0" marL="0">
+              <a:buNone/>
+            </a:pPr>
+            <a:r>
+              <a:rPr lang="en-US" sz="950" b="1" dirty="0">
+                <a:solidFill>
+                  <a:srgbClr val="0068B7"/>
+                </a:solidFill>
+                <a:latin typeface="Aptos" pitchFamily="34" charset="0"/>
+                <a:ea typeface="Aptos" pitchFamily="34" charset="-122"/>
+                <a:cs typeface="Aptos" pitchFamily="34" charset="-120"/>
+              </a:rPr>
+              <a:t>Use this for</a:t>
+            </a:r>
+            <a:endParaRPr lang="en-US" sz="950" dirty="0"/>
+          </a:p>
+        </p:txBody>
+      </p:sp>
+      <p:sp>
+        <p:nvSpPr>
+          <p:cNvPr id="16" name="Text 14"/>
+          <p:cNvSpPr/>
+          <p:nvPr/>
+        </p:nvSpPr>
+        <p:spPr>
+          <a:xfrm>
+            <a:off x="8074152" y="3959352"/>
+            <a:ext cx="2825496" cy="1170432"/>
+          </a:xfrm>
+          <a:prstGeom prst="rect">
+            <a:avLst/>
+          </a:prstGeom>
+          <a:noFill/>
+          <a:ln/>
+        </p:spPr>
+        <p:txBody>
+          <a:bodyPr wrap="square" lIns="0" tIns="0" rIns="0" bIns="0" rtlCol="0" anchor="t">
+            <a:normAutofit/>
+          </a:bodyPr>
+          <a:lstStyle/>
+          <a:p>
+            <a:pPr indent="0" marL="0">
+              <a:buNone/>
+            </a:pPr>
+            <a:r>
+              <a:rPr lang="en-US" sz="1250" dirty="0">
+                <a:solidFill>
+                  <a:srgbClr val="17364A"/>
+                </a:solidFill>
+                <a:latin typeface="Aptos" pitchFamily="34" charset="0"/>
+                <a:ea typeface="Aptos" pitchFamily="34" charset="-122"/>
+                <a:cs typeface="Aptos" pitchFamily="34" charset="-120"/>
+              </a:rPr>
+              <a:t>Connect the concept to public health decisions, safeguards, documentation, or implementation work.</a:t>
+            </a:r>
+            <a:endParaRPr lang="en-US" sz="1250" dirty="0"/>
           </a:p>
         </p:txBody>
       </p:sp>
@@ -7687,7 +14395,32 @@
       </p:sp>
       <p:sp>
         <p:nvSpPr>
-          <p:cNvPr id="3" name="Text 1"/>
+          <p:cNvPr id="3" name="Shape 1"/>
+          <p:cNvSpPr/>
+          <p:nvPr/>
+        </p:nvSpPr>
+        <p:spPr>
+          <a:xfrm>
+            <a:off x="0" y="164592"/>
+            <a:ext cx="146304" cy="6693408"/>
+          </a:xfrm>
+          <a:prstGeom prst="rect">
+            <a:avLst/>
+          </a:prstGeom>
+          <a:solidFill>
+            <a:srgbClr val="2F8A28"/>
+          </a:solidFill>
+          <a:ln w="12700">
+            <a:solidFill>
+              <a:srgbClr val="2F8A28"/>
+            </a:solidFill>
+            <a:prstDash val="solid"/>
+          </a:ln>
+        </p:spPr>
+      </p:sp>
+      <p:sp>
+        <p:nvSpPr>
+          <p:cNvPr id="4" name="Text 2"/>
           <p:cNvSpPr/>
           <p:nvPr/>
         </p:nvSpPr>
@@ -7726,7 +14459,7 @@
       </p:sp>
       <p:sp>
         <p:nvSpPr>
-          <p:cNvPr id="4" name="Text 2"/>
+          <p:cNvPr id="5" name="Text 3"/>
           <p:cNvSpPr/>
           <p:nvPr/>
         </p:nvSpPr>
@@ -7765,7 +14498,7 @@
       </p:sp>
       <p:sp>
         <p:nvSpPr>
-          <p:cNvPr id="5" name="Text 3"/>
+          <p:cNvPr id="6" name="Text 4"/>
           <p:cNvSpPr/>
           <p:nvPr/>
         </p:nvSpPr>
@@ -7804,13 +14537,77 @@
       </p:sp>
       <p:sp>
         <p:nvSpPr>
-          <p:cNvPr id="6" name="Text 4"/>
+          <p:cNvPr id="7" name="Shape 5"/>
           <p:cNvSpPr/>
           <p:nvPr/>
         </p:nvSpPr>
         <p:spPr>
           <a:xfrm>
             <a:off x="640080" y="658368"/>
+            <a:ext cx="420624" cy="420624"/>
+          </a:xfrm>
+          <a:prstGeom prst="ellipse">
+            <a:avLst/>
+          </a:prstGeom>
+          <a:solidFill>
+            <a:srgbClr val="0068B7"/>
+          </a:solidFill>
+          <a:ln w="12700">
+            <a:solidFill>
+              <a:srgbClr val="0068B7"/>
+            </a:solidFill>
+            <a:prstDash val="solid"/>
+          </a:ln>
+        </p:spPr>
+      </p:sp>
+      <p:sp>
+        <p:nvSpPr>
+          <p:cNvPr id="8" name="Text 6"/>
+          <p:cNvSpPr/>
+          <p:nvPr/>
+        </p:nvSpPr>
+        <p:spPr>
+          <a:xfrm>
+            <a:off x="640080" y="731520"/>
+            <a:ext cx="420624" cy="164592"/>
+          </a:xfrm>
+          <a:prstGeom prst="rect">
+            <a:avLst/>
+          </a:prstGeom>
+          <a:noFill/>
+          <a:ln/>
+        </p:spPr>
+        <p:txBody>
+          <a:bodyPr wrap="square" lIns="0" tIns="0" rIns="0" bIns="0" rtlCol="0" anchor="ctr"/>
+          <a:lstStyle/>
+          <a:p>
+            <a:pPr algn="ctr" indent="0" marL="0">
+              <a:buNone/>
+            </a:pPr>
+            <a:r>
+              <a:rPr lang="en-US" sz="1100" b="1" dirty="0">
+                <a:solidFill>
+                  <a:srgbClr val="FFFFFF"/>
+                </a:solidFill>
+                <a:latin typeface="Aptos" pitchFamily="34" charset="0"/>
+                <a:ea typeface="Aptos" pitchFamily="34" charset="-122"/>
+                <a:cs typeface="Aptos" pitchFamily="34" charset="-120"/>
+              </a:rPr>
+              <a:t>4</a:t>
+            </a:r>
+            <a:endParaRPr lang="en-US" sz="1100" dirty="0"/>
+          </a:p>
+        </p:txBody>
+      </p:sp>
+      <p:sp>
+        <p:nvSpPr>
+          <p:cNvPr id="9" name="Text 7"/>
+          <p:cNvSpPr/>
+          <p:nvPr/>
+        </p:nvSpPr>
+        <p:spPr>
+          <a:xfrm>
+            <a:off x="640080" y="621792"/>
             <a:ext cx="10881360" cy="566928"/>
           </a:xfrm>
           <a:prstGeom prst="rect">
@@ -7837,7 +14634,7 @@
                 <a:ea typeface="Aptos Display" pitchFamily="34" charset="-122"/>
                 <a:cs typeface="Aptos Display" pitchFamily="34" charset="-120"/>
               </a:rPr>
-              <a:t>Public Health Example</a:t>
+              <a:t>Why This Topic Matters for Public Health AI</a:t>
             </a:r>
             <a:endParaRPr lang="en-US" sz="2700" dirty="0"/>
           </a:p>
@@ -7845,32 +14642,178 @@
       </p:sp>
       <p:sp>
         <p:nvSpPr>
-          <p:cNvPr id="7" name="Text 5"/>
-          <p:cNvSpPr/>
-          <p:nvPr/>
-        </p:nvSpPr>
-        <p:spPr>
-          <a:xfrm>
-            <a:off x="822960" y="1325880"/>
-            <a:ext cx="10378440" cy="4800600"/>
-          </a:xfrm>
-          <a:prstGeom prst="rect">
-            <a:avLst/>
-          </a:prstGeom>
-          <a:noFill/>
-          <a:ln/>
-        </p:spPr>
-        <p:txBody>
-          <a:bodyPr wrap="square" lIns="1016" tIns="1016" rIns="1016" bIns="1016" rtlCol="0" anchor="t">
+          <p:cNvPr id="10" name="Text 8"/>
+          <p:cNvSpPr/>
+          <p:nvPr/>
+        </p:nvSpPr>
+        <p:spPr>
+          <a:xfrm>
+            <a:off x="868680" y="1417320"/>
+            <a:ext cx="6675120" cy="4434840"/>
+          </a:xfrm>
+          <a:prstGeom prst="rect">
+            <a:avLst/>
+          </a:prstGeom>
+          <a:noFill/>
+          <a:ln/>
+        </p:spPr>
+        <p:txBody>
+          <a:bodyPr wrap="square" lIns="635" tIns="635" rIns="635" bIns="635" rtlCol="0" anchor="t">
             <a:normAutofit/>
           </a:bodyPr>
           <a:lstStyle/>
           <a:p>
+            <a:r>
+              <a:rPr lang="en-US" sz="1700" dirty="0">
+                <a:solidFill>
+                  <a:srgbClr val="17364A"/>
+                </a:solidFill>
+                <a:latin typeface="Aptos" pitchFamily="34" charset="0"/>
+                <a:ea typeface="Aptos" pitchFamily="34" charset="-122"/>
+                <a:cs typeface="Aptos" pitchFamily="34" charset="-120"/>
+              </a:rPr>
+              <a:t>Requirements Writing for AI Procurement and Implementation matters because AI systems are embedded in public health.</a:t>
+            </a:r>
+            <a:endParaRPr lang="en-US" sz="1700" dirty="0"/>
+          </a:p>
+          <a:p>
+            <a:r>
+              <a:rPr lang="en-US" sz="1700" dirty="0">
+                <a:solidFill>
+                  <a:srgbClr val="17364A"/>
+                </a:solidFill>
+                <a:latin typeface="Aptos" pitchFamily="34" charset="0"/>
+                <a:ea typeface="Aptos" pitchFamily="34" charset="-122"/>
+                <a:cs typeface="Aptos" pitchFamily="34" charset="-120"/>
+              </a:rPr>
+              <a:t>The topic affects whether AI outputs are accurate, explainable, safe, equitable, secure, and sustainable.</a:t>
+            </a:r>
+            <a:endParaRPr lang="en-US" sz="1700" dirty="0"/>
+          </a:p>
+          <a:p>
+            <a:r>
+              <a:rPr lang="en-US" sz="1700" dirty="0">
+                <a:solidFill>
+                  <a:srgbClr val="17364A"/>
+                </a:solidFill>
+                <a:latin typeface="Aptos" pitchFamily="34" charset="0"/>
+                <a:ea typeface="Aptos" pitchFamily="34" charset="-122"/>
+                <a:cs typeface="Aptos" pitchFamily="34" charset="-120"/>
+              </a:rPr>
+              <a:t>Agencies that ignore this area may create tools that work in a demonstration but fail in actual practice.</a:t>
+            </a:r>
+            <a:endParaRPr lang="en-US" sz="1700" dirty="0"/>
+          </a:p>
+          <a:p>
+            <a:r>
+              <a:rPr lang="en-US" sz="1700" dirty="0">
+                <a:solidFill>
+                  <a:srgbClr val="17364A"/>
+                </a:solidFill>
+                <a:latin typeface="Aptos" pitchFamily="34" charset="0"/>
+                <a:ea typeface="Aptos" pitchFamily="34" charset="-122"/>
+                <a:cs typeface="Aptos" pitchFamily="34" charset="-120"/>
+              </a:rPr>
+              <a:t>The topic also affects accountability.</a:t>
+            </a:r>
+            <a:endParaRPr lang="en-US" sz="1700" dirty="0"/>
+          </a:p>
+        </p:txBody>
+      </p:sp>
+      <p:sp>
+        <p:nvSpPr>
+          <p:cNvPr id="11" name="Shape 9"/>
+          <p:cNvSpPr/>
+          <p:nvPr/>
+        </p:nvSpPr>
+        <p:spPr>
+          <a:xfrm>
+            <a:off x="7909560" y="1417320"/>
+            <a:ext cx="3154680" cy="1828800"/>
+          </a:xfrm>
+          <a:prstGeom prst="roundRect">
+            <a:avLst>
+              <a:gd name="adj" fmla="val 6000"/>
+            </a:avLst>
+          </a:prstGeom>
+          <a:solidFill>
+            <a:srgbClr val="EEF8ED"/>
+          </a:solidFill>
+          <a:ln w="12700">
+            <a:solidFill>
+              <a:srgbClr val="B9D7E6"/>
+            </a:solidFill>
+            <a:prstDash val="solid"/>
+          </a:ln>
+        </p:spPr>
+      </p:sp>
+      <p:sp>
+        <p:nvSpPr>
+          <p:cNvPr id="12" name="Text 10"/>
+          <p:cNvSpPr/>
+          <p:nvPr/>
+        </p:nvSpPr>
+        <p:spPr>
+          <a:xfrm>
+            <a:off x="8074152" y="1563624"/>
+            <a:ext cx="2825496" cy="201168"/>
+          </a:xfrm>
+          <a:prstGeom prst="rect">
+            <a:avLst/>
+          </a:prstGeom>
+          <a:noFill/>
+          <a:ln/>
+        </p:spPr>
+        <p:txBody>
+          <a:bodyPr wrap="square" lIns="0" tIns="0" rIns="0" bIns="0" rtlCol="0" anchor="ctr"/>
+          <a:lstStyle/>
+          <a:p>
             <a:pPr indent="0" marL="0">
               <a:buNone/>
             </a:pPr>
             <a:r>
-              <a:rPr lang="en-US" sz="1420" dirty="0">
+              <a:rPr lang="en-US" sz="950" b="1" dirty="0">
+                <a:solidFill>
+                  <a:srgbClr val="0068B7"/>
+                </a:solidFill>
+                <a:latin typeface="Aptos" pitchFamily="34" charset="0"/>
+                <a:ea typeface="Aptos" pitchFamily="34" charset="-122"/>
+                <a:cs typeface="Aptos" pitchFamily="34" charset="-120"/>
+              </a:rPr>
+              <a:t>Key idea</a:t>
+            </a:r>
+            <a:endParaRPr lang="en-US" sz="950" dirty="0"/>
+          </a:p>
+        </p:txBody>
+      </p:sp>
+      <p:sp>
+        <p:nvSpPr>
+          <p:cNvPr id="13" name="Text 11"/>
+          <p:cNvSpPr/>
+          <p:nvPr/>
+        </p:nvSpPr>
+        <p:spPr>
+          <a:xfrm>
+            <a:off x="8074152" y="1856232"/>
+            <a:ext cx="2825496" cy="1261872"/>
+          </a:xfrm>
+          <a:prstGeom prst="rect">
+            <a:avLst/>
+          </a:prstGeom>
+          <a:noFill/>
+          <a:ln/>
+        </p:spPr>
+        <p:txBody>
+          <a:bodyPr wrap="square" lIns="0" tIns="0" rIns="0" bIns="0" rtlCol="0" anchor="t">
+            <a:normAutofit/>
+          </a:bodyPr>
+          <a:lstStyle/>
+          <a:p>
+            <a:pPr indent="0" marL="0">
+              <a:buNone/>
+            </a:pPr>
+            <a:r>
+              <a:rPr lang="en-US" sz="1250" dirty="0">
                 <a:solidFill>
                   <a:srgbClr val="17364A"/>
                 </a:solidFill>
@@ -7878,9 +14821,116 @@
                 <a:ea typeface="Aptos" pitchFamily="34" charset="-122"/>
                 <a:cs typeface="Aptos" pitchFamily="34" charset="-120"/>
               </a:rPr>
-              <a:t>A state health agency procuring an AI-supported case triage tool should require interoperability with the surveillance system, role-based access, source traceability, validation results, subgroup performance reporting, audit logs, human review controls, incident reporting, documentation, and data deletion at contract end. These requirements make vendor claims testable and enforceable.</a:t>
-            </a:r>
-            <a:endParaRPr lang="en-US" sz="1420" dirty="0"/>
+              <a:t>Requirements Writing for AI Procurement and Implementation matters because AI systems are embedded in public health.</a:t>
+            </a:r>
+            <a:endParaRPr lang="en-US" sz="1250" dirty="0"/>
+          </a:p>
+        </p:txBody>
+      </p:sp>
+      <p:sp>
+        <p:nvSpPr>
+          <p:cNvPr id="14" name="Shape 12"/>
+          <p:cNvSpPr/>
+          <p:nvPr/>
+        </p:nvSpPr>
+        <p:spPr>
+          <a:xfrm>
+            <a:off x="7909560" y="3520440"/>
+            <a:ext cx="3154680" cy="1737360"/>
+          </a:xfrm>
+          <a:prstGeom prst="roundRect">
+            <a:avLst>
+              <a:gd name="adj" fmla="val 6316"/>
+            </a:avLst>
+          </a:prstGeom>
+          <a:solidFill>
+            <a:srgbClr val="EAF6F8"/>
+          </a:solidFill>
+          <a:ln w="12700">
+            <a:solidFill>
+              <a:srgbClr val="B9D7E6"/>
+            </a:solidFill>
+            <a:prstDash val="solid"/>
+          </a:ln>
+        </p:spPr>
+      </p:sp>
+      <p:sp>
+        <p:nvSpPr>
+          <p:cNvPr id="15" name="Text 13"/>
+          <p:cNvSpPr/>
+          <p:nvPr/>
+        </p:nvSpPr>
+        <p:spPr>
+          <a:xfrm>
+            <a:off x="8074152" y="3666744"/>
+            <a:ext cx="2825496" cy="201168"/>
+          </a:xfrm>
+          <a:prstGeom prst="rect">
+            <a:avLst/>
+          </a:prstGeom>
+          <a:noFill/>
+          <a:ln/>
+        </p:spPr>
+        <p:txBody>
+          <a:bodyPr wrap="square" lIns="0" tIns="0" rIns="0" bIns="0" rtlCol="0" anchor="ctr"/>
+          <a:lstStyle/>
+          <a:p>
+            <a:pPr indent="0" marL="0">
+              <a:buNone/>
+            </a:pPr>
+            <a:r>
+              <a:rPr lang="en-US" sz="950" b="1" dirty="0">
+                <a:solidFill>
+                  <a:srgbClr val="0068B7"/>
+                </a:solidFill>
+                <a:latin typeface="Aptos" pitchFamily="34" charset="0"/>
+                <a:ea typeface="Aptos" pitchFamily="34" charset="-122"/>
+                <a:cs typeface="Aptos" pitchFamily="34" charset="-120"/>
+              </a:rPr>
+              <a:t>Use this for</a:t>
+            </a:r>
+            <a:endParaRPr lang="en-US" sz="950" dirty="0"/>
+          </a:p>
+        </p:txBody>
+      </p:sp>
+      <p:sp>
+        <p:nvSpPr>
+          <p:cNvPr id="16" name="Text 14"/>
+          <p:cNvSpPr/>
+          <p:nvPr/>
+        </p:nvSpPr>
+        <p:spPr>
+          <a:xfrm>
+            <a:off x="8074152" y="3959352"/>
+            <a:ext cx="2825496" cy="1170432"/>
+          </a:xfrm>
+          <a:prstGeom prst="rect">
+            <a:avLst/>
+          </a:prstGeom>
+          <a:noFill/>
+          <a:ln/>
+        </p:spPr>
+        <p:txBody>
+          <a:bodyPr wrap="square" lIns="0" tIns="0" rIns="0" bIns="0" rtlCol="0" anchor="t">
+            <a:normAutofit/>
+          </a:bodyPr>
+          <a:lstStyle/>
+          <a:p>
+            <a:pPr indent="0" marL="0">
+              <a:buNone/>
+            </a:pPr>
+            <a:r>
+              <a:rPr lang="en-US" sz="1250" dirty="0">
+                <a:solidFill>
+                  <a:srgbClr val="17364A"/>
+                </a:solidFill>
+                <a:latin typeface="Aptos" pitchFamily="34" charset="0"/>
+                <a:ea typeface="Aptos" pitchFamily="34" charset="-122"/>
+                <a:cs typeface="Aptos" pitchFamily="34" charset="-120"/>
+              </a:rPr>
+              <a:t>Connect the concept to public health decisions, safeguards, documentation, or implementation work.</a:t>
+            </a:r>
+            <a:endParaRPr lang="en-US" sz="1250" dirty="0"/>
           </a:p>
         </p:txBody>
       </p:sp>

--- a/downloads/presentations/modules/lesson-62-requirements-writing-for-ai-procurement-and-implementation.pptx
+++ b/downloads/presentations/modules/lesson-62-requirements-writing-for-ai-procurement-and-implementation.pptx
@@ -2992,6 +2992,45 @@
           </a:p>
         </p:txBody>
       </p:sp>
+      <p:sp>
+        <p:nvSpPr>
+          <p:cNvPr id="8" name="Text 5"/>
+          <p:cNvSpPr/>
+          <p:nvPr/>
+        </p:nvSpPr>
+        <p:spPr>
+          <a:xfrm>
+            <a:off x="11137392" y="6510528"/>
+            <a:ext cx="411480" cy="201168"/>
+          </a:xfrm>
+          <a:prstGeom prst="rect">
+            <a:avLst/>
+          </a:prstGeom>
+          <a:noFill/>
+          <a:ln/>
+        </p:spPr>
+        <p:txBody>
+          <a:bodyPr wrap="square" lIns="0" tIns="0" rIns="0" bIns="0" rtlCol="0" anchor="ctr"/>
+          <a:lstStyle/>
+          <a:p>
+            <a:pPr algn="r" indent="0" marL="0">
+              <a:buNone/>
+            </a:pPr>
+            <a:r>
+              <a:rPr lang="en-US" sz="900" dirty="0">
+                <a:solidFill>
+                  <a:srgbClr val="5F7181"/>
+                </a:solidFill>
+                <a:latin typeface="Aptos" pitchFamily="34" charset="0"/>
+                <a:ea typeface="Aptos" pitchFamily="34" charset="-122"/>
+                <a:cs typeface="Aptos" pitchFamily="34" charset="-120"/>
+              </a:rPr>
+              <a:t>1</a:t>
+            </a:r>
+            <a:endParaRPr lang="en-US" sz="900" dirty="0"/>
+          </a:p>
+        </p:txBody>
+      </p:sp>
     </p:spTree>
   </p:cSld>
   <p:clrMapOvr>
@@ -3185,7 +3224,7 @@
                 <a:ea typeface="Aptos" pitchFamily="34" charset="-122"/>
                 <a:cs typeface="Aptos" pitchFamily="34" charset="-120"/>
               </a:rPr>
-              <a:t>© Paula Soper</a:t>
+              <a:t>Â© Paula Soper</a:t>
             </a:r>
             <a:endParaRPr lang="en-US" sz="800" dirty="0"/>
           </a:p>
@@ -3193,7 +3232,46 @@
       </p:sp>
       <p:sp>
         <p:nvSpPr>
-          <p:cNvPr id="7" name="Shape 5"/>
+          <p:cNvPr id="7" name="Text 5"/>
+          <p:cNvSpPr/>
+          <p:nvPr/>
+        </p:nvSpPr>
+        <p:spPr>
+          <a:xfrm>
+            <a:off x="11137392" y="6510528"/>
+            <a:ext cx="411480" cy="201168"/>
+          </a:xfrm>
+          <a:prstGeom prst="rect">
+            <a:avLst/>
+          </a:prstGeom>
+          <a:noFill/>
+          <a:ln/>
+        </p:spPr>
+        <p:txBody>
+          <a:bodyPr wrap="square" lIns="0" tIns="0" rIns="0" bIns="0" rtlCol="0" anchor="ctr"/>
+          <a:lstStyle/>
+          <a:p>
+            <a:pPr algn="r" indent="0" marL="0">
+              <a:buNone/>
+            </a:pPr>
+            <a:r>
+              <a:rPr lang="en-US" sz="900" dirty="0">
+                <a:solidFill>
+                  <a:srgbClr val="5F7181"/>
+                </a:solidFill>
+                <a:latin typeface="Aptos" pitchFamily="34" charset="0"/>
+                <a:ea typeface="Aptos" pitchFamily="34" charset="-122"/>
+                <a:cs typeface="Aptos" pitchFamily="34" charset="-120"/>
+              </a:rPr>
+              <a:t>10</a:t>
+            </a:r>
+            <a:endParaRPr lang="en-US" sz="900" dirty="0"/>
+          </a:p>
+        </p:txBody>
+      </p:sp>
+      <p:sp>
+        <p:nvSpPr>
+          <p:cNvPr id="8" name="Shape 6"/>
           <p:cNvSpPr/>
           <p:nvPr/>
         </p:nvSpPr>
@@ -3218,7 +3296,7 @@
       </p:sp>
       <p:sp>
         <p:nvSpPr>
-          <p:cNvPr id="8" name="Text 6"/>
+          <p:cNvPr id="9" name="Text 7"/>
           <p:cNvSpPr/>
           <p:nvPr/>
         </p:nvSpPr>
@@ -3257,14 +3335,14 @@
       </p:sp>
       <p:sp>
         <p:nvSpPr>
-          <p:cNvPr id="9" name="Text 7"/>
+          <p:cNvPr id="10" name="Text 8"/>
           <p:cNvSpPr/>
           <p:nvPr/>
         </p:nvSpPr>
         <p:spPr>
           <a:xfrm>
             <a:off x="640080" y="621792"/>
-            <a:ext cx="10881360" cy="566928"/>
+            <a:ext cx="10881360" cy="713232"/>
           </a:xfrm>
           <a:prstGeom prst="rect">
             <a:avLst/>
@@ -3282,7 +3360,7 @@
               <a:buNone/>
             </a:pPr>
             <a:r>
-              <a:rPr lang="en-US" sz="2700" b="1" dirty="0">
+              <a:rPr lang="en-US" sz="3400" b="1" dirty="0">
                 <a:solidFill>
                   <a:srgbClr val="003A63"/>
                 </a:solidFill>
@@ -3292,20 +3370,20 @@
               </a:rPr>
               <a:t>Core Concepts</a:t>
             </a:r>
-            <a:endParaRPr lang="en-US" sz="2700" dirty="0"/>
-          </a:p>
-        </p:txBody>
-      </p:sp>
-      <p:sp>
-        <p:nvSpPr>
-          <p:cNvPr id="10" name="Text 8"/>
-          <p:cNvSpPr/>
-          <p:nvPr/>
-        </p:nvSpPr>
-        <p:spPr>
-          <a:xfrm>
-            <a:off x="868680" y="1417320"/>
-            <a:ext cx="6675120" cy="4434840"/>
+            <a:endParaRPr lang="en-US" sz="3400" dirty="0"/>
+          </a:p>
+        </p:txBody>
+      </p:sp>
+      <p:sp>
+        <p:nvSpPr>
+          <p:cNvPr id="11" name="Text 9"/>
+          <p:cNvSpPr/>
+          <p:nvPr/>
+        </p:nvSpPr>
+        <p:spPr>
+          <a:xfrm>
+            <a:off x="868680" y="1508760"/>
+            <a:ext cx="6537960" cy="4160520"/>
           </a:xfrm>
           <a:prstGeom prst="rect">
             <a:avLst/>
@@ -3320,7 +3398,7 @@
           <a:lstStyle/>
           <a:p>
             <a:r>
-              <a:rPr lang="en-US" sz="1700" dirty="0">
+              <a:rPr lang="en-US" sz="2100" dirty="0">
                 <a:solidFill>
                   <a:srgbClr val="17364A"/>
                 </a:solidFill>
@@ -3330,11 +3408,11 @@
               </a:rPr>
               <a:t>A requirement is a clear statement of what a system must do or how it must perform.</a:t>
             </a:r>
-            <a:endParaRPr lang="en-US" sz="1700" dirty="0"/>
-          </a:p>
-          <a:p>
-            <a:r>
-              <a:rPr lang="en-US" sz="1700" dirty="0">
+            <a:endParaRPr lang="en-US" sz="2100" dirty="0"/>
+          </a:p>
+          <a:p>
+            <a:r>
+              <a:rPr lang="en-US" sz="2100" dirty="0">
                 <a:solidFill>
                   <a:srgbClr val="17364A"/>
                 </a:solidFill>
@@ -3342,13 +3420,13 @@
                 <a:ea typeface="Aptos" pitchFamily="34" charset="-122"/>
                 <a:cs typeface="Aptos" pitchFamily="34" charset="-120"/>
               </a:rPr>
-              <a:t>AI requirements must cover functional capabilities, nonfunctional expectations, data handling, validation, transparency,.</a:t>
-            </a:r>
-            <a:endParaRPr lang="en-US" sz="1700" dirty="0"/>
-          </a:p>
-          <a:p>
-            <a:r>
-              <a:rPr lang="en-US" sz="1700" dirty="0">
+              <a:t>AI requirements must cover functional capabilities, nonfunctional expectations, data handling,.</a:t>
+            </a:r>
+            <a:endParaRPr lang="en-US" sz="2100" dirty="0"/>
+          </a:p>
+          <a:p>
+            <a:r>
+              <a:rPr lang="en-US" sz="2100" dirty="0">
                 <a:solidFill>
                   <a:srgbClr val="17364A"/>
                 </a:solidFill>
@@ -3356,29 +3434,15 @@
                 <a:ea typeface="Aptos" pitchFamily="34" charset="-122"/>
                 <a:cs typeface="Aptos" pitchFamily="34" charset="-120"/>
               </a:rPr>
-              <a:t>Functional requirements describe what the tool must do, such as summarize a case report, classify a complaint, or generate.</a:t>
-            </a:r>
-            <a:endParaRPr lang="en-US" sz="1700" dirty="0"/>
-          </a:p>
-          <a:p>
-            <a:r>
-              <a:rPr lang="en-US" sz="1700" dirty="0">
-                <a:solidFill>
-                  <a:srgbClr val="17364A"/>
-                </a:solidFill>
-                <a:latin typeface="Aptos" pitchFamily="34" charset="0"/>
-                <a:ea typeface="Aptos" pitchFamily="34" charset="-122"/>
-                <a:cs typeface="Aptos" pitchFamily="34" charset="-120"/>
-              </a:rPr>
-              <a:t>Nonfunctional requirements describe how the tool must perform, such as uptime, response time, security, auditability,.</a:t>
-            </a:r>
-            <a:endParaRPr lang="en-US" sz="1700" dirty="0"/>
-          </a:p>
-        </p:txBody>
-      </p:sp>
-      <p:sp>
-        <p:nvSpPr>
-          <p:cNvPr id="11" name="Shape 9"/>
+              <a:t>Functional requirements describe what the tool must do, such as summarize a case report, classify a.</a:t>
+            </a:r>
+            <a:endParaRPr lang="en-US" sz="2100" dirty="0"/>
+          </a:p>
+        </p:txBody>
+      </p:sp>
+      <p:sp>
+        <p:nvSpPr>
+          <p:cNvPr id="12" name="Shape 10"/>
           <p:cNvSpPr/>
           <p:nvPr/>
         </p:nvSpPr>
@@ -3405,14 +3469,14 @@
       </p:sp>
       <p:sp>
         <p:nvSpPr>
-          <p:cNvPr id="12" name="Text 10"/>
+          <p:cNvPr id="13" name="Text 11"/>
           <p:cNvSpPr/>
           <p:nvPr/>
         </p:nvSpPr>
         <p:spPr>
           <a:xfrm>
             <a:off x="8074152" y="1563624"/>
-            <a:ext cx="2825496" cy="201168"/>
+            <a:ext cx="2825496" cy="256032"/>
           </a:xfrm>
           <a:prstGeom prst="rect">
             <a:avLst/>
@@ -3428,7 +3492,7 @@
               <a:buNone/>
             </a:pPr>
             <a:r>
-              <a:rPr lang="en-US" sz="950" b="1" dirty="0">
+              <a:rPr lang="en-US" sz="1300" b="1" dirty="0">
                 <a:solidFill>
                   <a:srgbClr val="0068B7"/>
                 </a:solidFill>
@@ -3438,20 +3502,20 @@
               </a:rPr>
               <a:t>Key idea</a:t>
             </a:r>
-            <a:endParaRPr lang="en-US" sz="950" dirty="0"/>
-          </a:p>
-        </p:txBody>
-      </p:sp>
-      <p:sp>
-        <p:nvSpPr>
-          <p:cNvPr id="13" name="Text 11"/>
-          <p:cNvSpPr/>
-          <p:nvPr/>
-        </p:nvSpPr>
-        <p:spPr>
-          <a:xfrm>
-            <a:off x="8074152" y="1856232"/>
-            <a:ext cx="2825496" cy="1261872"/>
+            <a:endParaRPr lang="en-US" sz="1300" dirty="0"/>
+          </a:p>
+        </p:txBody>
+      </p:sp>
+      <p:sp>
+        <p:nvSpPr>
+          <p:cNvPr id="14" name="Text 12"/>
+          <p:cNvSpPr/>
+          <p:nvPr/>
+        </p:nvSpPr>
+        <p:spPr>
+          <a:xfrm>
+            <a:off x="8074152" y="1920240"/>
+            <a:ext cx="2825496" cy="1188720"/>
           </a:xfrm>
           <a:prstGeom prst="rect">
             <a:avLst/>
@@ -3469,7 +3533,7 @@
               <a:buNone/>
             </a:pPr>
             <a:r>
-              <a:rPr lang="en-US" sz="1250" dirty="0">
+              <a:rPr lang="en-US" sz="1550" dirty="0">
                 <a:solidFill>
                   <a:srgbClr val="17364A"/>
                 </a:solidFill>
@@ -3479,13 +3543,13 @@
               </a:rPr>
               <a:t>A requirement is a clear statement of what a system must do or how it must perform.</a:t>
             </a:r>
-            <a:endParaRPr lang="en-US" sz="1250" dirty="0"/>
-          </a:p>
-        </p:txBody>
-      </p:sp>
-      <p:sp>
-        <p:nvSpPr>
-          <p:cNvPr id="14" name="Shape 12"/>
+            <a:endParaRPr lang="en-US" sz="1550" dirty="0"/>
+          </a:p>
+        </p:txBody>
+      </p:sp>
+      <p:sp>
+        <p:nvSpPr>
+          <p:cNvPr id="15" name="Shape 13"/>
           <p:cNvSpPr/>
           <p:nvPr/>
         </p:nvSpPr>
@@ -3512,14 +3576,14 @@
       </p:sp>
       <p:sp>
         <p:nvSpPr>
-          <p:cNvPr id="15" name="Text 13"/>
+          <p:cNvPr id="16" name="Text 14"/>
           <p:cNvSpPr/>
           <p:nvPr/>
         </p:nvSpPr>
         <p:spPr>
           <a:xfrm>
             <a:off x="8074152" y="3666744"/>
-            <a:ext cx="2825496" cy="201168"/>
+            <a:ext cx="2825496" cy="256032"/>
           </a:xfrm>
           <a:prstGeom prst="rect">
             <a:avLst/>
@@ -3535,7 +3599,7 @@
               <a:buNone/>
             </a:pPr>
             <a:r>
-              <a:rPr lang="en-US" sz="950" b="1" dirty="0">
+              <a:rPr lang="en-US" sz="1300" b="1" dirty="0">
                 <a:solidFill>
                   <a:srgbClr val="0068B7"/>
                 </a:solidFill>
@@ -3545,20 +3609,20 @@
               </a:rPr>
               <a:t>Use this for</a:t>
             </a:r>
-            <a:endParaRPr lang="en-US" sz="950" dirty="0"/>
-          </a:p>
-        </p:txBody>
-      </p:sp>
-      <p:sp>
-        <p:nvSpPr>
-          <p:cNvPr id="16" name="Text 14"/>
-          <p:cNvSpPr/>
-          <p:nvPr/>
-        </p:nvSpPr>
-        <p:spPr>
-          <a:xfrm>
-            <a:off x="8074152" y="3959352"/>
-            <a:ext cx="2825496" cy="1170432"/>
+            <a:endParaRPr lang="en-US" sz="1300" dirty="0"/>
+          </a:p>
+        </p:txBody>
+      </p:sp>
+      <p:sp>
+        <p:nvSpPr>
+          <p:cNvPr id="17" name="Text 15"/>
+          <p:cNvSpPr/>
+          <p:nvPr/>
+        </p:nvSpPr>
+        <p:spPr>
+          <a:xfrm>
+            <a:off x="8074152" y="4023360"/>
+            <a:ext cx="2825496" cy="1097280"/>
           </a:xfrm>
           <a:prstGeom prst="rect">
             <a:avLst/>
@@ -3576,7 +3640,7 @@
               <a:buNone/>
             </a:pPr>
             <a:r>
-              <a:rPr lang="en-US" sz="1250" dirty="0">
+              <a:rPr lang="en-US" sz="1550" dirty="0">
                 <a:solidFill>
                   <a:srgbClr val="17364A"/>
                 </a:solidFill>
@@ -3586,7 +3650,7 @@
               </a:rPr>
               <a:t>Connect the concept to public health decisions, safeguards, documentation, or implementation work.</a:t>
             </a:r>
-            <a:endParaRPr lang="en-US" sz="1250" dirty="0"/>
+            <a:endParaRPr lang="en-US" sz="1550" dirty="0"/>
           </a:p>
         </p:txBody>
       </p:sp>
@@ -3783,7 +3847,7 @@
                 <a:ea typeface="Aptos" pitchFamily="34" charset="-122"/>
                 <a:cs typeface="Aptos" pitchFamily="34" charset="-120"/>
               </a:rPr>
-              <a:t>© Paula Soper</a:t>
+              <a:t>Â© Paula Soper</a:t>
             </a:r>
             <a:endParaRPr lang="en-US" sz="800" dirty="0"/>
           </a:p>
@@ -3791,7 +3855,46 @@
       </p:sp>
       <p:sp>
         <p:nvSpPr>
-          <p:cNvPr id="7" name="Shape 5"/>
+          <p:cNvPr id="7" name="Text 5"/>
+          <p:cNvSpPr/>
+          <p:nvPr/>
+        </p:nvSpPr>
+        <p:spPr>
+          <a:xfrm>
+            <a:off x="11137392" y="6510528"/>
+            <a:ext cx="411480" cy="201168"/>
+          </a:xfrm>
+          <a:prstGeom prst="rect">
+            <a:avLst/>
+          </a:prstGeom>
+          <a:noFill/>
+          <a:ln/>
+        </p:spPr>
+        <p:txBody>
+          <a:bodyPr wrap="square" lIns="0" tIns="0" rIns="0" bIns="0" rtlCol="0" anchor="ctr"/>
+          <a:lstStyle/>
+          <a:p>
+            <a:pPr algn="r" indent="0" marL="0">
+              <a:buNone/>
+            </a:pPr>
+            <a:r>
+              <a:rPr lang="en-US" sz="900" dirty="0">
+                <a:solidFill>
+                  <a:srgbClr val="5F7181"/>
+                </a:solidFill>
+                <a:latin typeface="Aptos" pitchFamily="34" charset="0"/>
+                <a:ea typeface="Aptos" pitchFamily="34" charset="-122"/>
+                <a:cs typeface="Aptos" pitchFamily="34" charset="-120"/>
+              </a:rPr>
+              <a:t>11</a:t>
+            </a:r>
+            <a:endParaRPr lang="en-US" sz="900" dirty="0"/>
+          </a:p>
+        </p:txBody>
+      </p:sp>
+      <p:sp>
+        <p:nvSpPr>
+          <p:cNvPr id="8" name="Shape 6"/>
           <p:cNvSpPr/>
           <p:nvPr/>
         </p:nvSpPr>
@@ -3816,7 +3919,7 @@
       </p:sp>
       <p:sp>
         <p:nvSpPr>
-          <p:cNvPr id="8" name="Text 6"/>
+          <p:cNvPr id="9" name="Text 7"/>
           <p:cNvSpPr/>
           <p:nvPr/>
         </p:nvSpPr>
@@ -3855,14 +3958,14 @@
       </p:sp>
       <p:sp>
         <p:nvSpPr>
-          <p:cNvPr id="9" name="Text 7"/>
+          <p:cNvPr id="10" name="Text 8"/>
           <p:cNvSpPr/>
           <p:nvPr/>
         </p:nvSpPr>
         <p:spPr>
           <a:xfrm>
             <a:off x="640080" y="621792"/>
-            <a:ext cx="10881360" cy="566928"/>
+            <a:ext cx="10881360" cy="713232"/>
           </a:xfrm>
           <a:prstGeom prst="rect">
             <a:avLst/>
@@ -3880,7 +3983,7 @@
               <a:buNone/>
             </a:pPr>
             <a:r>
-              <a:rPr lang="en-US" sz="2700" b="1" dirty="0">
+              <a:rPr lang="en-US" sz="3400" b="1" dirty="0">
                 <a:solidFill>
                   <a:srgbClr val="003A63"/>
                 </a:solidFill>
@@ -3890,20 +3993,20 @@
               </a:rPr>
               <a:t>Public Health Example</a:t>
             </a:r>
-            <a:endParaRPr lang="en-US" sz="2700" dirty="0"/>
-          </a:p>
-        </p:txBody>
-      </p:sp>
-      <p:sp>
-        <p:nvSpPr>
-          <p:cNvPr id="10" name="Text 8"/>
-          <p:cNvSpPr/>
-          <p:nvPr/>
-        </p:nvSpPr>
-        <p:spPr>
-          <a:xfrm>
-            <a:off x="868680" y="1417320"/>
-            <a:ext cx="6675120" cy="4434840"/>
+            <a:endParaRPr lang="en-US" sz="3400" dirty="0"/>
+          </a:p>
+        </p:txBody>
+      </p:sp>
+      <p:sp>
+        <p:nvSpPr>
+          <p:cNvPr id="11" name="Text 9"/>
+          <p:cNvSpPr/>
+          <p:nvPr/>
+        </p:nvSpPr>
+        <p:spPr>
+          <a:xfrm>
+            <a:off x="868680" y="1508760"/>
+            <a:ext cx="6537960" cy="4160520"/>
           </a:xfrm>
           <a:prstGeom prst="rect">
             <a:avLst/>
@@ -3918,7 +4021,7 @@
           <a:lstStyle/>
           <a:p>
             <a:r>
-              <a:rPr lang="en-US" sz="1700" dirty="0">
+              <a:rPr lang="en-US" sz="2100" dirty="0">
                 <a:solidFill>
                   <a:srgbClr val="17364A"/>
                 </a:solidFill>
@@ -3926,13 +4029,13 @@
                 <a:ea typeface="Aptos" pitchFamily="34" charset="-122"/>
                 <a:cs typeface="Aptos" pitchFamily="34" charset="-120"/>
               </a:rPr>
-              <a:t>A state health agency procuring an AI-supported case triage tool should require interoperability with the surveillance.</a:t>
-            </a:r>
-            <a:endParaRPr lang="en-US" sz="1700" dirty="0"/>
-          </a:p>
-          <a:p>
-            <a:r>
-              <a:rPr lang="en-US" sz="1700" dirty="0">
+              <a:t>A state health agency procuring an AI-supported case triage tool should require interoperability with.</a:t>
+            </a:r>
+            <a:endParaRPr lang="en-US" sz="2100" dirty="0"/>
+          </a:p>
+          <a:p>
+            <a:r>
+              <a:rPr lang="en-US" sz="2100" dirty="0">
                 <a:solidFill>
                   <a:srgbClr val="17364A"/>
                 </a:solidFill>
@@ -3942,13 +4045,13 @@
               </a:rPr>
               <a:t>These requirements make vendor claims testable and enforceable.</a:t>
             </a:r>
-            <a:endParaRPr lang="en-US" sz="1700" dirty="0"/>
-          </a:p>
-        </p:txBody>
-      </p:sp>
-      <p:sp>
-        <p:nvSpPr>
-          <p:cNvPr id="11" name="Shape 9"/>
+            <a:endParaRPr lang="en-US" sz="2100" dirty="0"/>
+          </a:p>
+        </p:txBody>
+      </p:sp>
+      <p:sp>
+        <p:nvSpPr>
+          <p:cNvPr id="12" name="Shape 10"/>
           <p:cNvSpPr/>
           <p:nvPr/>
         </p:nvSpPr>
@@ -3975,14 +4078,14 @@
       </p:sp>
       <p:sp>
         <p:nvSpPr>
-          <p:cNvPr id="12" name="Text 10"/>
+          <p:cNvPr id="13" name="Text 11"/>
           <p:cNvSpPr/>
           <p:nvPr/>
         </p:nvSpPr>
         <p:spPr>
           <a:xfrm>
             <a:off x="8074152" y="1563624"/>
-            <a:ext cx="2825496" cy="201168"/>
+            <a:ext cx="2825496" cy="256032"/>
           </a:xfrm>
           <a:prstGeom prst="rect">
             <a:avLst/>
@@ -3998,7 +4101,7 @@
               <a:buNone/>
             </a:pPr>
             <a:r>
-              <a:rPr lang="en-US" sz="950" b="1" dirty="0">
+              <a:rPr lang="en-US" sz="1300" b="1" dirty="0">
                 <a:solidFill>
                   <a:srgbClr val="0068B7"/>
                 </a:solidFill>
@@ -4008,20 +4111,20 @@
               </a:rPr>
               <a:t>Key idea</a:t>
             </a:r>
-            <a:endParaRPr lang="en-US" sz="950" dirty="0"/>
-          </a:p>
-        </p:txBody>
-      </p:sp>
-      <p:sp>
-        <p:nvSpPr>
-          <p:cNvPr id="13" name="Text 11"/>
-          <p:cNvSpPr/>
-          <p:nvPr/>
-        </p:nvSpPr>
-        <p:spPr>
-          <a:xfrm>
-            <a:off x="8074152" y="1856232"/>
-            <a:ext cx="2825496" cy="1261872"/>
+            <a:endParaRPr lang="en-US" sz="1300" dirty="0"/>
+          </a:p>
+        </p:txBody>
+      </p:sp>
+      <p:sp>
+        <p:nvSpPr>
+          <p:cNvPr id="14" name="Text 12"/>
+          <p:cNvSpPr/>
+          <p:nvPr/>
+        </p:nvSpPr>
+        <p:spPr>
+          <a:xfrm>
+            <a:off x="8074152" y="1920240"/>
+            <a:ext cx="2825496" cy="1188720"/>
           </a:xfrm>
           <a:prstGeom prst="rect">
             <a:avLst/>
@@ -4039,7 +4142,7 @@
               <a:buNone/>
             </a:pPr>
             <a:r>
-              <a:rPr lang="en-US" sz="1250" dirty="0">
+              <a:rPr lang="en-US" sz="1550" dirty="0">
                 <a:solidFill>
                   <a:srgbClr val="17364A"/>
                 </a:solidFill>
@@ -4047,15 +4150,15 @@
                 <a:ea typeface="Aptos" pitchFamily="34" charset="-122"/>
                 <a:cs typeface="Aptos" pitchFamily="34" charset="-120"/>
               </a:rPr>
-              <a:t>A state health agency procuring an AI-supported case triage tool should require interoperability with the surveillance.</a:t>
-            </a:r>
-            <a:endParaRPr lang="en-US" sz="1250" dirty="0"/>
-          </a:p>
-        </p:txBody>
-      </p:sp>
-      <p:sp>
-        <p:nvSpPr>
-          <p:cNvPr id="14" name="Shape 12"/>
+              <a:t>A state health agency procuring an AI-supported case triage tool should require interoperability with.</a:t>
+            </a:r>
+            <a:endParaRPr lang="en-US" sz="1550" dirty="0"/>
+          </a:p>
+        </p:txBody>
+      </p:sp>
+      <p:sp>
+        <p:nvSpPr>
+          <p:cNvPr id="15" name="Shape 13"/>
           <p:cNvSpPr/>
           <p:nvPr/>
         </p:nvSpPr>
@@ -4082,14 +4185,14 @@
       </p:sp>
       <p:sp>
         <p:nvSpPr>
-          <p:cNvPr id="15" name="Text 13"/>
+          <p:cNvPr id="16" name="Text 14"/>
           <p:cNvSpPr/>
           <p:nvPr/>
         </p:nvSpPr>
         <p:spPr>
           <a:xfrm>
             <a:off x="8074152" y="3666744"/>
-            <a:ext cx="2825496" cy="201168"/>
+            <a:ext cx="2825496" cy="256032"/>
           </a:xfrm>
           <a:prstGeom prst="rect">
             <a:avLst/>
@@ -4105,7 +4208,7 @@
               <a:buNone/>
             </a:pPr>
             <a:r>
-              <a:rPr lang="en-US" sz="950" b="1" dirty="0">
+              <a:rPr lang="en-US" sz="1300" b="1" dirty="0">
                 <a:solidFill>
                   <a:srgbClr val="0068B7"/>
                 </a:solidFill>
@@ -4115,20 +4218,20 @@
               </a:rPr>
               <a:t>Use this for</a:t>
             </a:r>
-            <a:endParaRPr lang="en-US" sz="950" dirty="0"/>
-          </a:p>
-        </p:txBody>
-      </p:sp>
-      <p:sp>
-        <p:nvSpPr>
-          <p:cNvPr id="16" name="Text 14"/>
-          <p:cNvSpPr/>
-          <p:nvPr/>
-        </p:nvSpPr>
-        <p:spPr>
-          <a:xfrm>
-            <a:off x="8074152" y="3959352"/>
-            <a:ext cx="2825496" cy="1170432"/>
+            <a:endParaRPr lang="en-US" sz="1300" dirty="0"/>
+          </a:p>
+        </p:txBody>
+      </p:sp>
+      <p:sp>
+        <p:nvSpPr>
+          <p:cNvPr id="17" name="Text 15"/>
+          <p:cNvSpPr/>
+          <p:nvPr/>
+        </p:nvSpPr>
+        <p:spPr>
+          <a:xfrm>
+            <a:off x="8074152" y="4023360"/>
+            <a:ext cx="2825496" cy="1097280"/>
           </a:xfrm>
           <a:prstGeom prst="rect">
             <a:avLst/>
@@ -4146,7 +4249,7 @@
               <a:buNone/>
             </a:pPr>
             <a:r>
-              <a:rPr lang="en-US" sz="1250" dirty="0">
+              <a:rPr lang="en-US" sz="1550" dirty="0">
                 <a:solidFill>
                   <a:srgbClr val="17364A"/>
                 </a:solidFill>
@@ -4156,7 +4259,7 @@
               </a:rPr>
               <a:t>Connect the concept to public health decisions, safeguards, documentation, or implementation work.</a:t>
             </a:r>
-            <a:endParaRPr lang="en-US" sz="1250" dirty="0"/>
+            <a:endParaRPr lang="en-US" sz="1550" dirty="0"/>
           </a:p>
         </p:txBody>
       </p:sp>
@@ -4353,7 +4456,7 @@
                 <a:ea typeface="Aptos" pitchFamily="34" charset="-122"/>
                 <a:cs typeface="Aptos" pitchFamily="34" charset="-120"/>
               </a:rPr>
-              <a:t>© Paula Soper</a:t>
+              <a:t>Â© Paula Soper</a:t>
             </a:r>
             <a:endParaRPr lang="en-US" sz="800" dirty="0"/>
           </a:p>
@@ -4361,7 +4464,46 @@
       </p:sp>
       <p:sp>
         <p:nvSpPr>
-          <p:cNvPr id="7" name="Shape 5"/>
+          <p:cNvPr id="7" name="Text 5"/>
+          <p:cNvSpPr/>
+          <p:nvPr/>
+        </p:nvSpPr>
+        <p:spPr>
+          <a:xfrm>
+            <a:off x="11137392" y="6510528"/>
+            <a:ext cx="411480" cy="201168"/>
+          </a:xfrm>
+          <a:prstGeom prst="rect">
+            <a:avLst/>
+          </a:prstGeom>
+          <a:noFill/>
+          <a:ln/>
+        </p:spPr>
+        <p:txBody>
+          <a:bodyPr wrap="square" lIns="0" tIns="0" rIns="0" bIns="0" rtlCol="0" anchor="ctr"/>
+          <a:lstStyle/>
+          <a:p>
+            <a:pPr algn="r" indent="0" marL="0">
+              <a:buNone/>
+            </a:pPr>
+            <a:r>
+              <a:rPr lang="en-US" sz="900" dirty="0">
+                <a:solidFill>
+                  <a:srgbClr val="5F7181"/>
+                </a:solidFill>
+                <a:latin typeface="Aptos" pitchFamily="34" charset="0"/>
+                <a:ea typeface="Aptos" pitchFamily="34" charset="-122"/>
+                <a:cs typeface="Aptos" pitchFamily="34" charset="-120"/>
+              </a:rPr>
+              <a:t>12</a:t>
+            </a:r>
+            <a:endParaRPr lang="en-US" sz="900" dirty="0"/>
+          </a:p>
+        </p:txBody>
+      </p:sp>
+      <p:sp>
+        <p:nvSpPr>
+          <p:cNvPr id="8" name="Shape 6"/>
           <p:cNvSpPr/>
           <p:nvPr/>
         </p:nvSpPr>
@@ -4386,7 +4528,7 @@
       </p:sp>
       <p:sp>
         <p:nvSpPr>
-          <p:cNvPr id="8" name="Text 6"/>
+          <p:cNvPr id="9" name="Text 7"/>
           <p:cNvSpPr/>
           <p:nvPr/>
         </p:nvSpPr>
@@ -4425,14 +4567,14 @@
       </p:sp>
       <p:sp>
         <p:nvSpPr>
-          <p:cNvPr id="9" name="Text 7"/>
+          <p:cNvPr id="10" name="Text 8"/>
           <p:cNvSpPr/>
           <p:nvPr/>
         </p:nvSpPr>
         <p:spPr>
           <a:xfrm>
             <a:off x="640080" y="621792"/>
-            <a:ext cx="10881360" cy="566928"/>
+            <a:ext cx="10881360" cy="713232"/>
           </a:xfrm>
           <a:prstGeom prst="rect">
             <a:avLst/>
@@ -4450,7 +4592,7 @@
               <a:buNone/>
             </a:pPr>
             <a:r>
-              <a:rPr lang="en-US" sz="2700" b="1" dirty="0">
+              <a:rPr lang="en-US" sz="3400" b="1" dirty="0">
                 <a:solidFill>
                   <a:srgbClr val="003A63"/>
                 </a:solidFill>
@@ -4460,20 +4602,20 @@
               </a:rPr>
               <a:t>Topic Deep Dive</a:t>
             </a:r>
-            <a:endParaRPr lang="en-US" sz="2700" dirty="0"/>
-          </a:p>
-        </p:txBody>
-      </p:sp>
-      <p:sp>
-        <p:nvSpPr>
-          <p:cNvPr id="10" name="Text 8"/>
-          <p:cNvSpPr/>
-          <p:nvPr/>
-        </p:nvSpPr>
-        <p:spPr>
-          <a:xfrm>
-            <a:off x="868680" y="1417320"/>
-            <a:ext cx="6675120" cy="4434840"/>
+            <a:endParaRPr lang="en-US" sz="3400" dirty="0"/>
+          </a:p>
+        </p:txBody>
+      </p:sp>
+      <p:sp>
+        <p:nvSpPr>
+          <p:cNvPr id="11" name="Text 9"/>
+          <p:cNvSpPr/>
+          <p:nvPr/>
+        </p:nvSpPr>
+        <p:spPr>
+          <a:xfrm>
+            <a:off x="868680" y="1508760"/>
+            <a:ext cx="6537960" cy="4160520"/>
           </a:xfrm>
           <a:prstGeom prst="rect">
             <a:avLst/>
@@ -4488,7 +4630,7 @@
           <a:lstStyle/>
           <a:p>
             <a:r>
-              <a:rPr lang="en-US" sz="1700" dirty="0">
+              <a:rPr lang="en-US" sz="2100" dirty="0">
                 <a:solidFill>
                   <a:srgbClr val="17364A"/>
                 </a:solidFill>
@@ -4498,11 +4640,11 @@
               </a:rPr>
               <a:t>Strong AI requirements begin with intended use.</a:t>
             </a:r>
-            <a:endParaRPr lang="en-US" sz="1700" dirty="0"/>
-          </a:p>
-          <a:p>
-            <a:r>
-              <a:rPr lang="en-US" sz="1700" dirty="0">
+            <a:endParaRPr lang="en-US" sz="2100" dirty="0"/>
+          </a:p>
+          <a:p>
+            <a:r>
+              <a:rPr lang="en-US" sz="2100" dirty="0">
                 <a:solidFill>
                   <a:srgbClr val="17364A"/>
                 </a:solidFill>
@@ -4510,13 +4652,13 @@
                 <a:ea typeface="Aptos" pitchFamily="34" charset="-122"/>
                 <a:cs typeface="Aptos" pitchFamily="34" charset="-120"/>
               </a:rPr>
-              <a:t>The agency should state the specific workflow, users, data sources, outputs, and decisions the system may support.</a:t>
-            </a:r>
-            <a:endParaRPr lang="en-US" sz="1700" dirty="0"/>
-          </a:p>
-          <a:p>
-            <a:r>
-              <a:rPr lang="en-US" sz="1700" dirty="0">
+              <a:t>The agency should state the specific workflow, users, data sources, outputs, and decisions the system.</a:t>
+            </a:r>
+            <a:endParaRPr lang="en-US" sz="2100" dirty="0"/>
+          </a:p>
+          <a:p>
+            <a:r>
+              <a:rPr lang="en-US" sz="2100" dirty="0">
                 <a:solidFill>
                   <a:srgbClr val="17364A"/>
                 </a:solidFill>
@@ -4526,27 +4668,13 @@
               </a:rPr>
               <a:t>It should also state prohibited uses.</a:t>
             </a:r>
-            <a:endParaRPr lang="en-US" sz="1700" dirty="0"/>
-          </a:p>
-          <a:p>
-            <a:r>
-              <a:rPr lang="en-US" sz="1700" dirty="0">
-                <a:solidFill>
-                  <a:srgbClr val="17364A"/>
-                </a:solidFill>
-                <a:latin typeface="Aptos" pitchFamily="34" charset="0"/>
-                <a:ea typeface="Aptos" pitchFamily="34" charset="-122"/>
-                <a:cs typeface="Aptos" pitchFamily="34" charset="-120"/>
-              </a:rPr>
-              <a:t>This prevents scope creep and reduces the chance that a tool will be used for decisions it was not designed or approved to.</a:t>
-            </a:r>
-            <a:endParaRPr lang="en-US" sz="1700" dirty="0"/>
-          </a:p>
-        </p:txBody>
-      </p:sp>
-      <p:sp>
-        <p:nvSpPr>
-          <p:cNvPr id="11" name="Shape 9"/>
+            <a:endParaRPr lang="en-US" sz="2100" dirty="0"/>
+          </a:p>
+        </p:txBody>
+      </p:sp>
+      <p:sp>
+        <p:nvSpPr>
+          <p:cNvPr id="12" name="Shape 10"/>
           <p:cNvSpPr/>
           <p:nvPr/>
         </p:nvSpPr>
@@ -4573,14 +4701,14 @@
       </p:sp>
       <p:sp>
         <p:nvSpPr>
-          <p:cNvPr id="12" name="Text 10"/>
+          <p:cNvPr id="13" name="Text 11"/>
           <p:cNvSpPr/>
           <p:nvPr/>
         </p:nvSpPr>
         <p:spPr>
           <a:xfrm>
             <a:off x="8074152" y="1563624"/>
-            <a:ext cx="2825496" cy="201168"/>
+            <a:ext cx="2825496" cy="256032"/>
           </a:xfrm>
           <a:prstGeom prst="rect">
             <a:avLst/>
@@ -4596,7 +4724,7 @@
               <a:buNone/>
             </a:pPr>
             <a:r>
-              <a:rPr lang="en-US" sz="950" b="1" dirty="0">
+              <a:rPr lang="en-US" sz="1300" b="1" dirty="0">
                 <a:solidFill>
                   <a:srgbClr val="0068B7"/>
                 </a:solidFill>
@@ -4606,20 +4734,20 @@
               </a:rPr>
               <a:t>Key idea</a:t>
             </a:r>
-            <a:endParaRPr lang="en-US" sz="950" dirty="0"/>
-          </a:p>
-        </p:txBody>
-      </p:sp>
-      <p:sp>
-        <p:nvSpPr>
-          <p:cNvPr id="13" name="Text 11"/>
-          <p:cNvSpPr/>
-          <p:nvPr/>
-        </p:nvSpPr>
-        <p:spPr>
-          <a:xfrm>
-            <a:off x="8074152" y="1856232"/>
-            <a:ext cx="2825496" cy="1261872"/>
+            <a:endParaRPr lang="en-US" sz="1300" dirty="0"/>
+          </a:p>
+        </p:txBody>
+      </p:sp>
+      <p:sp>
+        <p:nvSpPr>
+          <p:cNvPr id="14" name="Text 12"/>
+          <p:cNvSpPr/>
+          <p:nvPr/>
+        </p:nvSpPr>
+        <p:spPr>
+          <a:xfrm>
+            <a:off x="8074152" y="1920240"/>
+            <a:ext cx="2825496" cy="1188720"/>
           </a:xfrm>
           <a:prstGeom prst="rect">
             <a:avLst/>
@@ -4637,7 +4765,7 @@
               <a:buNone/>
             </a:pPr>
             <a:r>
-              <a:rPr lang="en-US" sz="1250" dirty="0">
+              <a:rPr lang="en-US" sz="1550" dirty="0">
                 <a:solidFill>
                   <a:srgbClr val="17364A"/>
                 </a:solidFill>
@@ -4647,13 +4775,13 @@
               </a:rPr>
               <a:t>Strong AI requirements begin with intended use.</a:t>
             </a:r>
-            <a:endParaRPr lang="en-US" sz="1250" dirty="0"/>
-          </a:p>
-        </p:txBody>
-      </p:sp>
-      <p:sp>
-        <p:nvSpPr>
-          <p:cNvPr id="14" name="Shape 12"/>
+            <a:endParaRPr lang="en-US" sz="1550" dirty="0"/>
+          </a:p>
+        </p:txBody>
+      </p:sp>
+      <p:sp>
+        <p:nvSpPr>
+          <p:cNvPr id="15" name="Shape 13"/>
           <p:cNvSpPr/>
           <p:nvPr/>
         </p:nvSpPr>
@@ -4680,14 +4808,14 @@
       </p:sp>
       <p:sp>
         <p:nvSpPr>
-          <p:cNvPr id="15" name="Text 13"/>
+          <p:cNvPr id="16" name="Text 14"/>
           <p:cNvSpPr/>
           <p:nvPr/>
         </p:nvSpPr>
         <p:spPr>
           <a:xfrm>
             <a:off x="8074152" y="3666744"/>
-            <a:ext cx="2825496" cy="201168"/>
+            <a:ext cx="2825496" cy="256032"/>
           </a:xfrm>
           <a:prstGeom prst="rect">
             <a:avLst/>
@@ -4703,7 +4831,7 @@
               <a:buNone/>
             </a:pPr>
             <a:r>
-              <a:rPr lang="en-US" sz="950" b="1" dirty="0">
+              <a:rPr lang="en-US" sz="1300" b="1" dirty="0">
                 <a:solidFill>
                   <a:srgbClr val="0068B7"/>
                 </a:solidFill>
@@ -4713,20 +4841,20 @@
               </a:rPr>
               <a:t>Use this for</a:t>
             </a:r>
-            <a:endParaRPr lang="en-US" sz="950" dirty="0"/>
-          </a:p>
-        </p:txBody>
-      </p:sp>
-      <p:sp>
-        <p:nvSpPr>
-          <p:cNvPr id="16" name="Text 14"/>
-          <p:cNvSpPr/>
-          <p:nvPr/>
-        </p:nvSpPr>
-        <p:spPr>
-          <a:xfrm>
-            <a:off x="8074152" y="3959352"/>
-            <a:ext cx="2825496" cy="1170432"/>
+            <a:endParaRPr lang="en-US" sz="1300" dirty="0"/>
+          </a:p>
+        </p:txBody>
+      </p:sp>
+      <p:sp>
+        <p:nvSpPr>
+          <p:cNvPr id="17" name="Text 15"/>
+          <p:cNvSpPr/>
+          <p:nvPr/>
+        </p:nvSpPr>
+        <p:spPr>
+          <a:xfrm>
+            <a:off x="8074152" y="4023360"/>
+            <a:ext cx="2825496" cy="1097280"/>
           </a:xfrm>
           <a:prstGeom prst="rect">
             <a:avLst/>
@@ -4744,7 +4872,7 @@
               <a:buNone/>
             </a:pPr>
             <a:r>
-              <a:rPr lang="en-US" sz="1250" dirty="0">
+              <a:rPr lang="en-US" sz="1550" dirty="0">
                 <a:solidFill>
                   <a:srgbClr val="17364A"/>
                 </a:solidFill>
@@ -4754,7 +4882,7 @@
               </a:rPr>
               <a:t>Connect the concept to public health decisions, safeguards, documentation, or implementation work.</a:t>
             </a:r>
-            <a:endParaRPr lang="en-US" sz="1250" dirty="0"/>
+            <a:endParaRPr lang="en-US" sz="1550" dirty="0"/>
           </a:p>
         </p:txBody>
       </p:sp>
@@ -4951,7 +5079,7 @@
                 <a:ea typeface="Aptos" pitchFamily="34" charset="-122"/>
                 <a:cs typeface="Aptos" pitchFamily="34" charset="-120"/>
               </a:rPr>
-              <a:t>© Paula Soper</a:t>
+              <a:t>Â© Paula Soper</a:t>
             </a:r>
             <a:endParaRPr lang="en-US" sz="800" dirty="0"/>
           </a:p>
@@ -4959,7 +5087,46 @@
       </p:sp>
       <p:sp>
         <p:nvSpPr>
-          <p:cNvPr id="7" name="Shape 5"/>
+          <p:cNvPr id="7" name="Text 5"/>
+          <p:cNvSpPr/>
+          <p:nvPr/>
+        </p:nvSpPr>
+        <p:spPr>
+          <a:xfrm>
+            <a:off x="11137392" y="6510528"/>
+            <a:ext cx="411480" cy="201168"/>
+          </a:xfrm>
+          <a:prstGeom prst="rect">
+            <a:avLst/>
+          </a:prstGeom>
+          <a:noFill/>
+          <a:ln/>
+        </p:spPr>
+        <p:txBody>
+          <a:bodyPr wrap="square" lIns="0" tIns="0" rIns="0" bIns="0" rtlCol="0" anchor="ctr"/>
+          <a:lstStyle/>
+          <a:p>
+            <a:pPr algn="r" indent="0" marL="0">
+              <a:buNone/>
+            </a:pPr>
+            <a:r>
+              <a:rPr lang="en-US" sz="900" dirty="0">
+                <a:solidFill>
+                  <a:srgbClr val="5F7181"/>
+                </a:solidFill>
+                <a:latin typeface="Aptos" pitchFamily="34" charset="0"/>
+                <a:ea typeface="Aptos" pitchFamily="34" charset="-122"/>
+                <a:cs typeface="Aptos" pitchFamily="34" charset="-120"/>
+              </a:rPr>
+              <a:t>13</a:t>
+            </a:r>
+            <a:endParaRPr lang="en-US" sz="900" dirty="0"/>
+          </a:p>
+        </p:txBody>
+      </p:sp>
+      <p:sp>
+        <p:nvSpPr>
+          <p:cNvPr id="8" name="Shape 6"/>
           <p:cNvSpPr/>
           <p:nvPr/>
         </p:nvSpPr>
@@ -4984,7 +5151,7 @@
       </p:sp>
       <p:sp>
         <p:nvSpPr>
-          <p:cNvPr id="8" name="Text 6"/>
+          <p:cNvPr id="9" name="Text 7"/>
           <p:cNvSpPr/>
           <p:nvPr/>
         </p:nvSpPr>
@@ -5023,14 +5190,14 @@
       </p:sp>
       <p:sp>
         <p:nvSpPr>
-          <p:cNvPr id="9" name="Text 7"/>
+          <p:cNvPr id="10" name="Text 8"/>
           <p:cNvSpPr/>
           <p:nvPr/>
         </p:nvSpPr>
         <p:spPr>
           <a:xfrm>
             <a:off x="640080" y="621792"/>
-            <a:ext cx="10881360" cy="566928"/>
+            <a:ext cx="10881360" cy="713232"/>
           </a:xfrm>
           <a:prstGeom prst="rect">
             <a:avLst/>
@@ -5048,7 +5215,7 @@
               <a:buNone/>
             </a:pPr>
             <a:r>
-              <a:rPr lang="en-US" sz="2700" b="1" dirty="0">
+              <a:rPr lang="en-US" sz="3400" b="1" dirty="0">
                 <a:solidFill>
                   <a:srgbClr val="003A63"/>
                 </a:solidFill>
@@ -5058,20 +5225,20 @@
               </a:rPr>
               <a:t>Risks, Failure Modes, and Guardrails</a:t>
             </a:r>
-            <a:endParaRPr lang="en-US" sz="2700" dirty="0"/>
-          </a:p>
-        </p:txBody>
-      </p:sp>
-      <p:sp>
-        <p:nvSpPr>
-          <p:cNvPr id="10" name="Text 8"/>
-          <p:cNvSpPr/>
-          <p:nvPr/>
-        </p:nvSpPr>
-        <p:spPr>
-          <a:xfrm>
-            <a:off x="868680" y="1417320"/>
-            <a:ext cx="6675120" cy="4434840"/>
+            <a:endParaRPr lang="en-US" sz="3400" dirty="0"/>
+          </a:p>
+        </p:txBody>
+      </p:sp>
+      <p:sp>
+        <p:nvSpPr>
+          <p:cNvPr id="11" name="Text 9"/>
+          <p:cNvSpPr/>
+          <p:nvPr/>
+        </p:nvSpPr>
+        <p:spPr>
+          <a:xfrm>
+            <a:off x="868680" y="1508760"/>
+            <a:ext cx="6537960" cy="4160520"/>
           </a:xfrm>
           <a:prstGeom prst="rect">
             <a:avLst/>
@@ -5086,7 +5253,7 @@
           <a:lstStyle/>
           <a:p>
             <a:r>
-              <a:rPr lang="en-US" sz="1700" dirty="0">
+              <a:rPr lang="en-US" sz="2100" dirty="0">
                 <a:solidFill>
                   <a:srgbClr val="17364A"/>
                 </a:solidFill>
@@ -5096,11 +5263,11 @@
               </a:rPr>
               <a:t>A common failure mode is treating the topic as a technical detail rather than a public health control.</a:t>
             </a:r>
-            <a:endParaRPr lang="en-US" sz="1700" dirty="0"/>
-          </a:p>
-          <a:p>
-            <a:r>
-              <a:rPr lang="en-US" sz="1700" dirty="0">
+            <a:endParaRPr lang="en-US" sz="2100" dirty="0"/>
+          </a:p>
+          <a:p>
+            <a:r>
+              <a:rPr lang="en-US" sz="2100" dirty="0">
                 <a:solidFill>
                   <a:srgbClr val="17364A"/>
                 </a:solidFill>
@@ -5108,13 +5275,13 @@
                 <a:ea typeface="Aptos" pitchFamily="34" charset="-122"/>
                 <a:cs typeface="Aptos" pitchFamily="34" charset="-120"/>
               </a:rPr>
-              <a:t>When staff do not connect technical decisions to authority, workflow, equity, privacy, security, and accountability, the.</a:t>
-            </a:r>
-            <a:endParaRPr lang="en-US" sz="1700" dirty="0"/>
-          </a:p>
-          <a:p>
-            <a:r>
-              <a:rPr lang="en-US" sz="1700" dirty="0">
+              <a:t>When staff do not connect technical decisions to authority, workflow, equity, privacy, security, and.</a:t>
+            </a:r>
+            <a:endParaRPr lang="en-US" sz="2100" dirty="0"/>
+          </a:p>
+          <a:p>
+            <a:r>
+              <a:rPr lang="en-US" sz="2100" dirty="0">
                 <a:solidFill>
                   <a:srgbClr val="17364A"/>
                 </a:solidFill>
@@ -5124,27 +5291,13 @@
               </a:rPr>
               <a:t>Another risk is relying on vendor claims without agency-defined evidence.</a:t>
             </a:r>
-            <a:endParaRPr lang="en-US" sz="1700" dirty="0"/>
-          </a:p>
-          <a:p>
-            <a:r>
-              <a:rPr lang="en-US" sz="1700" dirty="0">
-                <a:solidFill>
-                  <a:srgbClr val="17364A"/>
-                </a:solidFill>
-                <a:latin typeface="Aptos" pitchFamily="34" charset="0"/>
-                <a:ea typeface="Aptos" pitchFamily="34" charset="-122"/>
-                <a:cs typeface="Aptos" pitchFamily="34" charset="-120"/>
-              </a:rPr>
-              <a:t>Vendors may provide demonstrations, dashboards, or summary metrics that do not match the agency workflow or data environment.</a:t>
-            </a:r>
-            <a:endParaRPr lang="en-US" sz="1700" dirty="0"/>
-          </a:p>
-        </p:txBody>
-      </p:sp>
-      <p:sp>
-        <p:nvSpPr>
-          <p:cNvPr id="11" name="Shape 9"/>
+            <a:endParaRPr lang="en-US" sz="2100" dirty="0"/>
+          </a:p>
+        </p:txBody>
+      </p:sp>
+      <p:sp>
+        <p:nvSpPr>
+          <p:cNvPr id="12" name="Shape 10"/>
           <p:cNvSpPr/>
           <p:nvPr/>
         </p:nvSpPr>
@@ -5171,14 +5324,14 @@
       </p:sp>
       <p:sp>
         <p:nvSpPr>
-          <p:cNvPr id="12" name="Text 10"/>
+          <p:cNvPr id="13" name="Text 11"/>
           <p:cNvSpPr/>
           <p:nvPr/>
         </p:nvSpPr>
         <p:spPr>
           <a:xfrm>
             <a:off x="8074152" y="1563624"/>
-            <a:ext cx="2825496" cy="201168"/>
+            <a:ext cx="2825496" cy="256032"/>
           </a:xfrm>
           <a:prstGeom prst="rect">
             <a:avLst/>
@@ -5194,7 +5347,7 @@
               <a:buNone/>
             </a:pPr>
             <a:r>
-              <a:rPr lang="en-US" sz="950" b="1" dirty="0">
+              <a:rPr lang="en-US" sz="1300" b="1" dirty="0">
                 <a:solidFill>
                   <a:srgbClr val="0068B7"/>
                 </a:solidFill>
@@ -5204,20 +5357,20 @@
               </a:rPr>
               <a:t>Key idea</a:t>
             </a:r>
-            <a:endParaRPr lang="en-US" sz="950" dirty="0"/>
-          </a:p>
-        </p:txBody>
-      </p:sp>
-      <p:sp>
-        <p:nvSpPr>
-          <p:cNvPr id="13" name="Text 11"/>
-          <p:cNvSpPr/>
-          <p:nvPr/>
-        </p:nvSpPr>
-        <p:spPr>
-          <a:xfrm>
-            <a:off x="8074152" y="1856232"/>
-            <a:ext cx="2825496" cy="1261872"/>
+            <a:endParaRPr lang="en-US" sz="1300" dirty="0"/>
+          </a:p>
+        </p:txBody>
+      </p:sp>
+      <p:sp>
+        <p:nvSpPr>
+          <p:cNvPr id="14" name="Text 12"/>
+          <p:cNvSpPr/>
+          <p:nvPr/>
+        </p:nvSpPr>
+        <p:spPr>
+          <a:xfrm>
+            <a:off x="8074152" y="1920240"/>
+            <a:ext cx="2825496" cy="1188720"/>
           </a:xfrm>
           <a:prstGeom prst="rect">
             <a:avLst/>
@@ -5235,7 +5388,7 @@
               <a:buNone/>
             </a:pPr>
             <a:r>
-              <a:rPr lang="en-US" sz="1250" dirty="0">
+              <a:rPr lang="en-US" sz="1550" dirty="0">
                 <a:solidFill>
                   <a:srgbClr val="17364A"/>
                 </a:solidFill>
@@ -5245,13 +5398,13 @@
               </a:rPr>
               <a:t>A common failure mode is treating the topic as a technical detail rather than a public health control.</a:t>
             </a:r>
-            <a:endParaRPr lang="en-US" sz="1250" dirty="0"/>
-          </a:p>
-        </p:txBody>
-      </p:sp>
-      <p:sp>
-        <p:nvSpPr>
-          <p:cNvPr id="14" name="Shape 12"/>
+            <a:endParaRPr lang="en-US" sz="1550" dirty="0"/>
+          </a:p>
+        </p:txBody>
+      </p:sp>
+      <p:sp>
+        <p:nvSpPr>
+          <p:cNvPr id="15" name="Shape 13"/>
           <p:cNvSpPr/>
           <p:nvPr/>
         </p:nvSpPr>
@@ -5278,14 +5431,14 @@
       </p:sp>
       <p:sp>
         <p:nvSpPr>
-          <p:cNvPr id="15" name="Text 13"/>
+          <p:cNvPr id="16" name="Text 14"/>
           <p:cNvSpPr/>
           <p:nvPr/>
         </p:nvSpPr>
         <p:spPr>
           <a:xfrm>
             <a:off x="8074152" y="3666744"/>
-            <a:ext cx="2825496" cy="201168"/>
+            <a:ext cx="2825496" cy="256032"/>
           </a:xfrm>
           <a:prstGeom prst="rect">
             <a:avLst/>
@@ -5301,7 +5454,7 @@
               <a:buNone/>
             </a:pPr>
             <a:r>
-              <a:rPr lang="en-US" sz="950" b="1" dirty="0">
+              <a:rPr lang="en-US" sz="1300" b="1" dirty="0">
                 <a:solidFill>
                   <a:srgbClr val="0068B7"/>
                 </a:solidFill>
@@ -5311,20 +5464,20 @@
               </a:rPr>
               <a:t>Use this for</a:t>
             </a:r>
-            <a:endParaRPr lang="en-US" sz="950" dirty="0"/>
-          </a:p>
-        </p:txBody>
-      </p:sp>
-      <p:sp>
-        <p:nvSpPr>
-          <p:cNvPr id="16" name="Text 14"/>
-          <p:cNvSpPr/>
-          <p:nvPr/>
-        </p:nvSpPr>
-        <p:spPr>
-          <a:xfrm>
-            <a:off x="8074152" y="3959352"/>
-            <a:ext cx="2825496" cy="1170432"/>
+            <a:endParaRPr lang="en-US" sz="1300" dirty="0"/>
+          </a:p>
+        </p:txBody>
+      </p:sp>
+      <p:sp>
+        <p:nvSpPr>
+          <p:cNvPr id="17" name="Text 15"/>
+          <p:cNvSpPr/>
+          <p:nvPr/>
+        </p:nvSpPr>
+        <p:spPr>
+          <a:xfrm>
+            <a:off x="8074152" y="4023360"/>
+            <a:ext cx="2825496" cy="1097280"/>
           </a:xfrm>
           <a:prstGeom prst="rect">
             <a:avLst/>
@@ -5342,7 +5495,7 @@
               <a:buNone/>
             </a:pPr>
             <a:r>
-              <a:rPr lang="en-US" sz="1250" dirty="0">
+              <a:rPr lang="en-US" sz="1550" dirty="0">
                 <a:solidFill>
                   <a:srgbClr val="17364A"/>
                 </a:solidFill>
@@ -5352,7 +5505,7 @@
               </a:rPr>
               <a:t>Connect the concept to public health decisions, safeguards, documentation, or implementation work.</a:t>
             </a:r>
-            <a:endParaRPr lang="en-US" sz="1250" dirty="0"/>
+            <a:endParaRPr lang="en-US" sz="1550" dirty="0"/>
           </a:p>
         </p:txBody>
       </p:sp>
@@ -5549,7 +5702,7 @@
                 <a:ea typeface="Aptos" pitchFamily="34" charset="-122"/>
                 <a:cs typeface="Aptos" pitchFamily="34" charset="-120"/>
               </a:rPr>
-              <a:t>© Paula Soper</a:t>
+              <a:t>Â© Paula Soper</a:t>
             </a:r>
             <a:endParaRPr lang="en-US" sz="800" dirty="0"/>
           </a:p>
@@ -5557,7 +5710,46 @@
       </p:sp>
       <p:sp>
         <p:nvSpPr>
-          <p:cNvPr id="7" name="Shape 5"/>
+          <p:cNvPr id="7" name="Text 5"/>
+          <p:cNvSpPr/>
+          <p:nvPr/>
+        </p:nvSpPr>
+        <p:spPr>
+          <a:xfrm>
+            <a:off x="11137392" y="6510528"/>
+            <a:ext cx="411480" cy="201168"/>
+          </a:xfrm>
+          <a:prstGeom prst="rect">
+            <a:avLst/>
+          </a:prstGeom>
+          <a:noFill/>
+          <a:ln/>
+        </p:spPr>
+        <p:txBody>
+          <a:bodyPr wrap="square" lIns="0" tIns="0" rIns="0" bIns="0" rtlCol="0" anchor="ctr"/>
+          <a:lstStyle/>
+          <a:p>
+            <a:pPr algn="r" indent="0" marL="0">
+              <a:buNone/>
+            </a:pPr>
+            <a:r>
+              <a:rPr lang="en-US" sz="900" dirty="0">
+                <a:solidFill>
+                  <a:srgbClr val="5F7181"/>
+                </a:solidFill>
+                <a:latin typeface="Aptos" pitchFamily="34" charset="0"/>
+                <a:ea typeface="Aptos" pitchFamily="34" charset="-122"/>
+                <a:cs typeface="Aptos" pitchFamily="34" charset="-120"/>
+              </a:rPr>
+              <a:t>14</a:t>
+            </a:r>
+            <a:endParaRPr lang="en-US" sz="900" dirty="0"/>
+          </a:p>
+        </p:txBody>
+      </p:sp>
+      <p:sp>
+        <p:nvSpPr>
+          <p:cNvPr id="8" name="Shape 6"/>
           <p:cNvSpPr/>
           <p:nvPr/>
         </p:nvSpPr>
@@ -5582,7 +5774,7 @@
       </p:sp>
       <p:sp>
         <p:nvSpPr>
-          <p:cNvPr id="8" name="Text 6"/>
+          <p:cNvPr id="9" name="Text 7"/>
           <p:cNvSpPr/>
           <p:nvPr/>
         </p:nvSpPr>
@@ -5621,14 +5813,14 @@
       </p:sp>
       <p:sp>
         <p:nvSpPr>
-          <p:cNvPr id="9" name="Text 7"/>
+          <p:cNvPr id="10" name="Text 8"/>
           <p:cNvSpPr/>
           <p:nvPr/>
         </p:nvSpPr>
         <p:spPr>
           <a:xfrm>
             <a:off x="640080" y="621792"/>
-            <a:ext cx="10881360" cy="566928"/>
+            <a:ext cx="10881360" cy="713232"/>
           </a:xfrm>
           <a:prstGeom prst="rect">
             <a:avLst/>
@@ -5646,7 +5838,7 @@
               <a:buNone/>
             </a:pPr>
             <a:r>
-              <a:rPr lang="en-US" sz="2700" b="1" dirty="0">
+              <a:rPr lang="en-US" sz="3400" b="1" dirty="0">
                 <a:solidFill>
                   <a:srgbClr val="003A63"/>
                 </a:solidFill>
@@ -5656,20 +5848,20 @@
               </a:rPr>
               <a:t>Application to AI-Supported Workflows</a:t>
             </a:r>
-            <a:endParaRPr lang="en-US" sz="2700" dirty="0"/>
-          </a:p>
-        </p:txBody>
-      </p:sp>
-      <p:sp>
-        <p:nvSpPr>
-          <p:cNvPr id="10" name="Text 8"/>
-          <p:cNvSpPr/>
-          <p:nvPr/>
-        </p:nvSpPr>
-        <p:spPr>
-          <a:xfrm>
-            <a:off x="868680" y="1417320"/>
-            <a:ext cx="6675120" cy="4434840"/>
+            <a:endParaRPr lang="en-US" sz="3400" dirty="0"/>
+          </a:p>
+        </p:txBody>
+      </p:sp>
+      <p:sp>
+        <p:nvSpPr>
+          <p:cNvPr id="11" name="Text 9"/>
+          <p:cNvSpPr/>
+          <p:nvPr/>
+        </p:nvSpPr>
+        <p:spPr>
+          <a:xfrm>
+            <a:off x="868680" y="1508760"/>
+            <a:ext cx="6537960" cy="4160520"/>
           </a:xfrm>
           <a:prstGeom prst="rect">
             <a:avLst/>
@@ -5684,7 +5876,7 @@
           <a:lstStyle/>
           <a:p>
             <a:r>
-              <a:rPr lang="en-US" sz="1700" dirty="0">
+              <a:rPr lang="en-US" sz="2100" dirty="0">
                 <a:solidFill>
                   <a:srgbClr val="17364A"/>
                 </a:solidFill>
@@ -5692,13 +5884,13 @@
                 <a:ea typeface="Aptos" pitchFamily="34" charset="-122"/>
                 <a:cs typeface="Aptos" pitchFamily="34" charset="-120"/>
               </a:rPr>
-              <a:t>Generative AI, predictive analytics, RAG, automation, and agentic workflows all depend on the controls described in this.</a:t>
-            </a:r>
-            <a:endParaRPr lang="en-US" sz="1700" dirty="0"/>
-          </a:p>
-          <a:p>
-            <a:r>
-              <a:rPr lang="en-US" sz="1700" dirty="0">
+              <a:t>Generative AI, predictive analytics, RAG, automation, and agentic workflows all depend on the controls.</a:t>
+            </a:r>
+            <a:endParaRPr lang="en-US" sz="2100" dirty="0"/>
+          </a:p>
+          <a:p>
+            <a:r>
+              <a:rPr lang="en-US" sz="2100" dirty="0">
                 <a:solidFill>
                   <a:srgbClr val="17364A"/>
                 </a:solidFill>
@@ -5708,11 +5900,11 @@
               </a:rPr>
               <a:t>The controls should be scaled to the risk of the use case.</a:t>
             </a:r>
-            <a:endParaRPr lang="en-US" sz="1700" dirty="0"/>
-          </a:p>
-          <a:p>
-            <a:r>
-              <a:rPr lang="en-US" sz="1700" dirty="0">
+            <a:endParaRPr lang="en-US" sz="2100" dirty="0"/>
+          </a:p>
+          <a:p>
+            <a:r>
+              <a:rPr lang="en-US" sz="2100" dirty="0">
                 <a:solidFill>
                   <a:srgbClr val="17364A"/>
                 </a:solidFill>
@@ -5720,29 +5912,15 @@
                 <a:ea typeface="Aptos" pitchFamily="34" charset="-122"/>
                 <a:cs typeface="Aptos" pitchFamily="34" charset="-120"/>
               </a:rPr>
-              <a:t>A tool that drafts internal training text may require lighter review than a tool that updates case records, prioritizes.</a:t>
-            </a:r>
-            <a:endParaRPr lang="en-US" sz="1700" dirty="0"/>
-          </a:p>
-          <a:p>
-            <a:r>
-              <a:rPr lang="en-US" sz="1700" dirty="0">
-                <a:solidFill>
-                  <a:srgbClr val="17364A"/>
-                </a:solidFill>
-                <a:latin typeface="Aptos" pitchFamily="34" charset="0"/>
-                <a:ea typeface="Aptos" pitchFamily="34" charset="-122"/>
-                <a:cs typeface="Aptos" pitchFamily="34" charset="-120"/>
-              </a:rPr>
-              <a:t>The module should be applied during readiness assessment, procurement, implementation planning, pilot testing, and.</a:t>
-            </a:r>
-            <a:endParaRPr lang="en-US" sz="1700" dirty="0"/>
-          </a:p>
-        </p:txBody>
-      </p:sp>
-      <p:sp>
-        <p:nvSpPr>
-          <p:cNvPr id="11" name="Shape 9"/>
+              <a:t>A tool that drafts internal training text may require lighter review than a tool that updates case.</a:t>
+            </a:r>
+            <a:endParaRPr lang="en-US" sz="2100" dirty="0"/>
+          </a:p>
+        </p:txBody>
+      </p:sp>
+      <p:sp>
+        <p:nvSpPr>
+          <p:cNvPr id="12" name="Shape 10"/>
           <p:cNvSpPr/>
           <p:nvPr/>
         </p:nvSpPr>
@@ -5769,14 +5947,14 @@
       </p:sp>
       <p:sp>
         <p:nvSpPr>
-          <p:cNvPr id="12" name="Text 10"/>
+          <p:cNvPr id="13" name="Text 11"/>
           <p:cNvSpPr/>
           <p:nvPr/>
         </p:nvSpPr>
         <p:spPr>
           <a:xfrm>
             <a:off x="8074152" y="1563624"/>
-            <a:ext cx="2825496" cy="201168"/>
+            <a:ext cx="2825496" cy="256032"/>
           </a:xfrm>
           <a:prstGeom prst="rect">
             <a:avLst/>
@@ -5792,7 +5970,7 @@
               <a:buNone/>
             </a:pPr>
             <a:r>
-              <a:rPr lang="en-US" sz="950" b="1" dirty="0">
+              <a:rPr lang="en-US" sz="1300" b="1" dirty="0">
                 <a:solidFill>
                   <a:srgbClr val="0068B7"/>
                 </a:solidFill>
@@ -5802,20 +5980,20 @@
               </a:rPr>
               <a:t>Key idea</a:t>
             </a:r>
-            <a:endParaRPr lang="en-US" sz="950" dirty="0"/>
-          </a:p>
-        </p:txBody>
-      </p:sp>
-      <p:sp>
-        <p:nvSpPr>
-          <p:cNvPr id="13" name="Text 11"/>
-          <p:cNvSpPr/>
-          <p:nvPr/>
-        </p:nvSpPr>
-        <p:spPr>
-          <a:xfrm>
-            <a:off x="8074152" y="1856232"/>
-            <a:ext cx="2825496" cy="1261872"/>
+            <a:endParaRPr lang="en-US" sz="1300" dirty="0"/>
+          </a:p>
+        </p:txBody>
+      </p:sp>
+      <p:sp>
+        <p:nvSpPr>
+          <p:cNvPr id="14" name="Text 12"/>
+          <p:cNvSpPr/>
+          <p:nvPr/>
+        </p:nvSpPr>
+        <p:spPr>
+          <a:xfrm>
+            <a:off x="8074152" y="1920240"/>
+            <a:ext cx="2825496" cy="1188720"/>
           </a:xfrm>
           <a:prstGeom prst="rect">
             <a:avLst/>
@@ -5833,7 +6011,7 @@
               <a:buNone/>
             </a:pPr>
             <a:r>
-              <a:rPr lang="en-US" sz="1250" dirty="0">
+              <a:rPr lang="en-US" sz="1550" dirty="0">
                 <a:solidFill>
                   <a:srgbClr val="17364A"/>
                 </a:solidFill>
@@ -5841,15 +6019,15 @@
                 <a:ea typeface="Aptos" pitchFamily="34" charset="-122"/>
                 <a:cs typeface="Aptos" pitchFamily="34" charset="-120"/>
               </a:rPr>
-              <a:t>Generative AI, predictive analytics, RAG, automation, and agentic workflows all depend on the controls described in this.</a:t>
-            </a:r>
-            <a:endParaRPr lang="en-US" sz="1250" dirty="0"/>
-          </a:p>
-        </p:txBody>
-      </p:sp>
-      <p:sp>
-        <p:nvSpPr>
-          <p:cNvPr id="14" name="Shape 12"/>
+              <a:t>Generative AI, predictive analytics, RAG, automation, and agentic workflows all depend on the controls.</a:t>
+            </a:r>
+            <a:endParaRPr lang="en-US" sz="1550" dirty="0"/>
+          </a:p>
+        </p:txBody>
+      </p:sp>
+      <p:sp>
+        <p:nvSpPr>
+          <p:cNvPr id="15" name="Shape 13"/>
           <p:cNvSpPr/>
           <p:nvPr/>
         </p:nvSpPr>
@@ -5876,14 +6054,14 @@
       </p:sp>
       <p:sp>
         <p:nvSpPr>
-          <p:cNvPr id="15" name="Text 13"/>
+          <p:cNvPr id="16" name="Text 14"/>
           <p:cNvSpPr/>
           <p:nvPr/>
         </p:nvSpPr>
         <p:spPr>
           <a:xfrm>
             <a:off x="8074152" y="3666744"/>
-            <a:ext cx="2825496" cy="201168"/>
+            <a:ext cx="2825496" cy="256032"/>
           </a:xfrm>
           <a:prstGeom prst="rect">
             <a:avLst/>
@@ -5899,7 +6077,7 @@
               <a:buNone/>
             </a:pPr>
             <a:r>
-              <a:rPr lang="en-US" sz="950" b="1" dirty="0">
+              <a:rPr lang="en-US" sz="1300" b="1" dirty="0">
                 <a:solidFill>
                   <a:srgbClr val="0068B7"/>
                 </a:solidFill>
@@ -5909,20 +6087,20 @@
               </a:rPr>
               <a:t>Use this for</a:t>
             </a:r>
-            <a:endParaRPr lang="en-US" sz="950" dirty="0"/>
-          </a:p>
-        </p:txBody>
-      </p:sp>
-      <p:sp>
-        <p:nvSpPr>
-          <p:cNvPr id="16" name="Text 14"/>
-          <p:cNvSpPr/>
-          <p:nvPr/>
-        </p:nvSpPr>
-        <p:spPr>
-          <a:xfrm>
-            <a:off x="8074152" y="3959352"/>
-            <a:ext cx="2825496" cy="1170432"/>
+            <a:endParaRPr lang="en-US" sz="1300" dirty="0"/>
+          </a:p>
+        </p:txBody>
+      </p:sp>
+      <p:sp>
+        <p:nvSpPr>
+          <p:cNvPr id="17" name="Text 15"/>
+          <p:cNvSpPr/>
+          <p:nvPr/>
+        </p:nvSpPr>
+        <p:spPr>
+          <a:xfrm>
+            <a:off x="8074152" y="4023360"/>
+            <a:ext cx="2825496" cy="1097280"/>
           </a:xfrm>
           <a:prstGeom prst="rect">
             <a:avLst/>
@@ -5940,7 +6118,7 @@
               <a:buNone/>
             </a:pPr>
             <a:r>
-              <a:rPr lang="en-US" sz="1250" dirty="0">
+              <a:rPr lang="en-US" sz="1550" dirty="0">
                 <a:solidFill>
                   <a:srgbClr val="17364A"/>
                 </a:solidFill>
@@ -5950,7 +6128,7 @@
               </a:rPr>
               <a:t>Connect the concept to public health decisions, safeguards, documentation, or implementation work.</a:t>
             </a:r>
-            <a:endParaRPr lang="en-US" sz="1250" dirty="0"/>
+            <a:endParaRPr lang="en-US" sz="1550" dirty="0"/>
           </a:p>
         </p:txBody>
       </p:sp>
@@ -6147,7 +6325,7 @@
                 <a:ea typeface="Aptos" pitchFamily="34" charset="-122"/>
                 <a:cs typeface="Aptos" pitchFamily="34" charset="-120"/>
               </a:rPr>
-              <a:t>© Paula Soper</a:t>
+              <a:t>Â© Paula Soper</a:t>
             </a:r>
             <a:endParaRPr lang="en-US" sz="800" dirty="0"/>
           </a:p>
@@ -6155,7 +6333,46 @@
       </p:sp>
       <p:sp>
         <p:nvSpPr>
-          <p:cNvPr id="7" name="Shape 5"/>
+          <p:cNvPr id="7" name="Text 5"/>
+          <p:cNvSpPr/>
+          <p:nvPr/>
+        </p:nvSpPr>
+        <p:spPr>
+          <a:xfrm>
+            <a:off x="11137392" y="6510528"/>
+            <a:ext cx="411480" cy="201168"/>
+          </a:xfrm>
+          <a:prstGeom prst="rect">
+            <a:avLst/>
+          </a:prstGeom>
+          <a:noFill/>
+          <a:ln/>
+        </p:spPr>
+        <p:txBody>
+          <a:bodyPr wrap="square" lIns="0" tIns="0" rIns="0" bIns="0" rtlCol="0" anchor="ctr"/>
+          <a:lstStyle/>
+          <a:p>
+            <a:pPr algn="r" indent="0" marL="0">
+              <a:buNone/>
+            </a:pPr>
+            <a:r>
+              <a:rPr lang="en-US" sz="900" dirty="0">
+                <a:solidFill>
+                  <a:srgbClr val="5F7181"/>
+                </a:solidFill>
+                <a:latin typeface="Aptos" pitchFamily="34" charset="0"/>
+                <a:ea typeface="Aptos" pitchFamily="34" charset="-122"/>
+                <a:cs typeface="Aptos" pitchFamily="34" charset="-120"/>
+              </a:rPr>
+              <a:t>15</a:t>
+            </a:r>
+            <a:endParaRPr lang="en-US" sz="900" dirty="0"/>
+          </a:p>
+        </p:txBody>
+      </p:sp>
+      <p:sp>
+        <p:nvSpPr>
+          <p:cNvPr id="8" name="Shape 6"/>
           <p:cNvSpPr/>
           <p:nvPr/>
         </p:nvSpPr>
@@ -6180,7 +6397,7 @@
       </p:sp>
       <p:sp>
         <p:nvSpPr>
-          <p:cNvPr id="8" name="Text 6"/>
+          <p:cNvPr id="9" name="Text 7"/>
           <p:cNvSpPr/>
           <p:nvPr/>
         </p:nvSpPr>
@@ -6219,14 +6436,14 @@
       </p:sp>
       <p:sp>
         <p:nvSpPr>
-          <p:cNvPr id="9" name="Text 7"/>
+          <p:cNvPr id="10" name="Text 8"/>
           <p:cNvSpPr/>
           <p:nvPr/>
         </p:nvSpPr>
         <p:spPr>
           <a:xfrm>
             <a:off x="640080" y="621792"/>
-            <a:ext cx="10881360" cy="566928"/>
+            <a:ext cx="10881360" cy="713232"/>
           </a:xfrm>
           <a:prstGeom prst="rect">
             <a:avLst/>
@@ -6244,7 +6461,7 @@
               <a:buNone/>
             </a:pPr>
             <a:r>
-              <a:rPr lang="en-US" sz="2700" b="1" dirty="0">
+              <a:rPr lang="en-US" sz="3400" b="1" dirty="0">
                 <a:solidFill>
                   <a:srgbClr val="003A63"/>
                 </a:solidFill>
@@ -6254,20 +6471,20 @@
               </a:rPr>
               <a:t>Reflection Questions</a:t>
             </a:r>
-            <a:endParaRPr lang="en-US" sz="2700" dirty="0"/>
-          </a:p>
-        </p:txBody>
-      </p:sp>
-      <p:sp>
-        <p:nvSpPr>
-          <p:cNvPr id="10" name="Text 8"/>
-          <p:cNvSpPr/>
-          <p:nvPr/>
-        </p:nvSpPr>
-        <p:spPr>
-          <a:xfrm>
-            <a:off x="868680" y="1417320"/>
-            <a:ext cx="6675120" cy="4434840"/>
+            <a:endParaRPr lang="en-US" sz="3400" dirty="0"/>
+          </a:p>
+        </p:txBody>
+      </p:sp>
+      <p:sp>
+        <p:nvSpPr>
+          <p:cNvPr id="11" name="Text 9"/>
+          <p:cNvSpPr/>
+          <p:nvPr/>
+        </p:nvSpPr>
+        <p:spPr>
+          <a:xfrm>
+            <a:off x="868680" y="1508760"/>
+            <a:ext cx="6537960" cy="4160520"/>
           </a:xfrm>
           <a:prstGeom prst="rect">
             <a:avLst/>
@@ -6282,7 +6499,7 @@
           <a:lstStyle/>
           <a:p>
             <a:r>
-              <a:rPr lang="en-US" sz="1700" dirty="0">
+              <a:rPr lang="en-US" sz="2100" dirty="0">
                 <a:solidFill>
                   <a:srgbClr val="17364A"/>
                 </a:solidFill>
@@ -6292,11 +6509,11 @@
               </a:rPr>
               <a:t>Where does this topic appear in one current or proposed AI workflow in your agency?</a:t>
             </a:r>
-            <a:endParaRPr lang="en-US" sz="1700" dirty="0"/>
-          </a:p>
-          <a:p>
-            <a:r>
-              <a:rPr lang="en-US" sz="1700" dirty="0">
+            <a:endParaRPr lang="en-US" sz="2100" dirty="0"/>
+          </a:p>
+          <a:p>
+            <a:r>
+              <a:rPr lang="en-US" sz="2100" dirty="0">
                 <a:solidFill>
                   <a:srgbClr val="17364A"/>
                 </a:solidFill>
@@ -6306,11 +6523,11 @@
               </a:rPr>
               <a:t>What decisions, data sources, users, or partners would be affected if this area is poorly designed?</a:t>
             </a:r>
-            <a:endParaRPr lang="en-US" sz="1700" dirty="0"/>
-          </a:p>
-          <a:p>
-            <a:r>
-              <a:rPr lang="en-US" sz="1700" dirty="0">
+            <a:endParaRPr lang="en-US" sz="2100" dirty="0"/>
+          </a:p>
+          <a:p>
+            <a:r>
+              <a:rPr lang="en-US" sz="2100" dirty="0">
                 <a:solidFill>
                   <a:srgbClr val="17364A"/>
                 </a:solidFill>
@@ -6320,13 +6537,13 @@
               </a:rPr>
               <a:t>What evidence would governance reviewers need before approving the workflow?</a:t>
             </a:r>
-            <a:endParaRPr lang="en-US" sz="1700" dirty="0"/>
-          </a:p>
-        </p:txBody>
-      </p:sp>
-      <p:sp>
-        <p:nvSpPr>
-          <p:cNvPr id="11" name="Shape 9"/>
+            <a:endParaRPr lang="en-US" sz="2100" dirty="0"/>
+          </a:p>
+        </p:txBody>
+      </p:sp>
+      <p:sp>
+        <p:nvSpPr>
+          <p:cNvPr id="12" name="Shape 10"/>
           <p:cNvSpPr/>
           <p:nvPr/>
         </p:nvSpPr>
@@ -6353,14 +6570,14 @@
       </p:sp>
       <p:sp>
         <p:nvSpPr>
-          <p:cNvPr id="12" name="Text 10"/>
+          <p:cNvPr id="13" name="Text 11"/>
           <p:cNvSpPr/>
           <p:nvPr/>
         </p:nvSpPr>
         <p:spPr>
           <a:xfrm>
             <a:off x="8074152" y="1563624"/>
-            <a:ext cx="2825496" cy="201168"/>
+            <a:ext cx="2825496" cy="256032"/>
           </a:xfrm>
           <a:prstGeom prst="rect">
             <a:avLst/>
@@ -6376,7 +6593,7 @@
               <a:buNone/>
             </a:pPr>
             <a:r>
-              <a:rPr lang="en-US" sz="950" b="1" dirty="0">
+              <a:rPr lang="en-US" sz="1300" b="1" dirty="0">
                 <a:solidFill>
                   <a:srgbClr val="0068B7"/>
                 </a:solidFill>
@@ -6386,20 +6603,20 @@
               </a:rPr>
               <a:t>Key idea</a:t>
             </a:r>
-            <a:endParaRPr lang="en-US" sz="950" dirty="0"/>
-          </a:p>
-        </p:txBody>
-      </p:sp>
-      <p:sp>
-        <p:nvSpPr>
-          <p:cNvPr id="13" name="Text 11"/>
-          <p:cNvSpPr/>
-          <p:nvPr/>
-        </p:nvSpPr>
-        <p:spPr>
-          <a:xfrm>
-            <a:off x="8074152" y="1856232"/>
-            <a:ext cx="2825496" cy="1261872"/>
+            <a:endParaRPr lang="en-US" sz="1300" dirty="0"/>
+          </a:p>
+        </p:txBody>
+      </p:sp>
+      <p:sp>
+        <p:nvSpPr>
+          <p:cNvPr id="14" name="Text 12"/>
+          <p:cNvSpPr/>
+          <p:nvPr/>
+        </p:nvSpPr>
+        <p:spPr>
+          <a:xfrm>
+            <a:off x="8074152" y="1920240"/>
+            <a:ext cx="2825496" cy="1188720"/>
           </a:xfrm>
           <a:prstGeom prst="rect">
             <a:avLst/>
@@ -6417,7 +6634,7 @@
               <a:buNone/>
             </a:pPr>
             <a:r>
-              <a:rPr lang="en-US" sz="1250" dirty="0">
+              <a:rPr lang="en-US" sz="1550" dirty="0">
                 <a:solidFill>
                   <a:srgbClr val="17364A"/>
                 </a:solidFill>
@@ -6427,13 +6644,13 @@
               </a:rPr>
               <a:t>Where does this topic appear in one current or proposed AI workflow in your agency?</a:t>
             </a:r>
-            <a:endParaRPr lang="en-US" sz="1250" dirty="0"/>
-          </a:p>
-        </p:txBody>
-      </p:sp>
-      <p:sp>
-        <p:nvSpPr>
-          <p:cNvPr id="14" name="Shape 12"/>
+            <a:endParaRPr lang="en-US" sz="1550" dirty="0"/>
+          </a:p>
+        </p:txBody>
+      </p:sp>
+      <p:sp>
+        <p:nvSpPr>
+          <p:cNvPr id="15" name="Shape 13"/>
           <p:cNvSpPr/>
           <p:nvPr/>
         </p:nvSpPr>
@@ -6460,14 +6677,14 @@
       </p:sp>
       <p:sp>
         <p:nvSpPr>
-          <p:cNvPr id="15" name="Text 13"/>
+          <p:cNvPr id="16" name="Text 14"/>
           <p:cNvSpPr/>
           <p:nvPr/>
         </p:nvSpPr>
         <p:spPr>
           <a:xfrm>
             <a:off x="8074152" y="3666744"/>
-            <a:ext cx="2825496" cy="201168"/>
+            <a:ext cx="2825496" cy="256032"/>
           </a:xfrm>
           <a:prstGeom prst="rect">
             <a:avLst/>
@@ -6483,7 +6700,7 @@
               <a:buNone/>
             </a:pPr>
             <a:r>
-              <a:rPr lang="en-US" sz="950" b="1" dirty="0">
+              <a:rPr lang="en-US" sz="1300" b="1" dirty="0">
                 <a:solidFill>
                   <a:srgbClr val="0068B7"/>
                 </a:solidFill>
@@ -6493,20 +6710,20 @@
               </a:rPr>
               <a:t>Use this for</a:t>
             </a:r>
-            <a:endParaRPr lang="en-US" sz="950" dirty="0"/>
-          </a:p>
-        </p:txBody>
-      </p:sp>
-      <p:sp>
-        <p:nvSpPr>
-          <p:cNvPr id="16" name="Text 14"/>
-          <p:cNvSpPr/>
-          <p:nvPr/>
-        </p:nvSpPr>
-        <p:spPr>
-          <a:xfrm>
-            <a:off x="8074152" y="3959352"/>
-            <a:ext cx="2825496" cy="1170432"/>
+            <a:endParaRPr lang="en-US" sz="1300" dirty="0"/>
+          </a:p>
+        </p:txBody>
+      </p:sp>
+      <p:sp>
+        <p:nvSpPr>
+          <p:cNvPr id="17" name="Text 15"/>
+          <p:cNvSpPr/>
+          <p:nvPr/>
+        </p:nvSpPr>
+        <p:spPr>
+          <a:xfrm>
+            <a:off x="8074152" y="4023360"/>
+            <a:ext cx="2825496" cy="1097280"/>
           </a:xfrm>
           <a:prstGeom prst="rect">
             <a:avLst/>
@@ -6524,7 +6741,7 @@
               <a:buNone/>
             </a:pPr>
             <a:r>
-              <a:rPr lang="en-US" sz="1250" dirty="0">
+              <a:rPr lang="en-US" sz="1550" dirty="0">
                 <a:solidFill>
                   <a:srgbClr val="17364A"/>
                 </a:solidFill>
@@ -6534,7 +6751,7 @@
               </a:rPr>
               <a:t>Connect the concept to public health decisions, safeguards, documentation, or implementation work.</a:t>
             </a:r>
-            <a:endParaRPr lang="en-US" sz="1250" dirty="0"/>
+            <a:endParaRPr lang="en-US" sz="1550" dirty="0"/>
           </a:p>
         </p:txBody>
       </p:sp>
@@ -6731,7 +6948,7 @@
                 <a:ea typeface="Aptos" pitchFamily="34" charset="-122"/>
                 <a:cs typeface="Aptos" pitchFamily="34" charset="-120"/>
               </a:rPr>
-              <a:t>© Paula Soper</a:t>
+              <a:t>Â© Paula Soper</a:t>
             </a:r>
             <a:endParaRPr lang="en-US" sz="800" dirty="0"/>
           </a:p>
@@ -6745,8 +6962,47 @@
         </p:nvSpPr>
         <p:spPr>
           <a:xfrm>
+            <a:off x="11137392" y="6510528"/>
+            <a:ext cx="411480" cy="201168"/>
+          </a:xfrm>
+          <a:prstGeom prst="rect">
+            <a:avLst/>
+          </a:prstGeom>
+          <a:noFill/>
+          <a:ln/>
+        </p:spPr>
+        <p:txBody>
+          <a:bodyPr wrap="square" lIns="0" tIns="0" rIns="0" bIns="0" rtlCol="0" anchor="ctr"/>
+          <a:lstStyle/>
+          <a:p>
+            <a:pPr algn="r" indent="0" marL="0">
+              <a:buNone/>
+            </a:pPr>
+            <a:r>
+              <a:rPr lang="en-US" sz="900" dirty="0">
+                <a:solidFill>
+                  <a:srgbClr val="5F7181"/>
+                </a:solidFill>
+                <a:latin typeface="Aptos" pitchFamily="34" charset="0"/>
+                <a:ea typeface="Aptos" pitchFamily="34" charset="-122"/>
+                <a:cs typeface="Aptos" pitchFamily="34" charset="-120"/>
+              </a:rPr>
+              <a:t>16</a:t>
+            </a:r>
+            <a:endParaRPr lang="en-US" sz="900" dirty="0"/>
+          </a:p>
+        </p:txBody>
+      </p:sp>
+      <p:sp>
+        <p:nvSpPr>
+          <p:cNvPr id="8" name="Text 6"/>
+          <p:cNvSpPr/>
+          <p:nvPr/>
+        </p:nvSpPr>
+        <p:spPr>
+          <a:xfrm>
             <a:off x="640080" y="658368"/>
-            <a:ext cx="10881360" cy="566928"/>
+            <a:ext cx="10881360" cy="713232"/>
           </a:xfrm>
           <a:prstGeom prst="rect">
             <a:avLst/>
@@ -6764,7 +7020,7 @@
               <a:buNone/>
             </a:pPr>
             <a:r>
-              <a:rPr lang="en-US" sz="2700" b="1" dirty="0">
+              <a:rPr lang="en-US" sz="3400" b="1" dirty="0">
                 <a:solidFill>
                   <a:srgbClr val="003A63"/>
                 </a:solidFill>
@@ -6774,20 +7030,20 @@
               </a:rPr>
               <a:t>Reflection Questions Continued</a:t>
             </a:r>
-            <a:endParaRPr lang="en-US" sz="2700" dirty="0"/>
-          </a:p>
-        </p:txBody>
-      </p:sp>
-      <p:sp>
-        <p:nvSpPr>
-          <p:cNvPr id="8" name="Text 6"/>
-          <p:cNvSpPr/>
-          <p:nvPr/>
-        </p:nvSpPr>
-        <p:spPr>
-          <a:xfrm>
-            <a:off x="868680" y="1417320"/>
-            <a:ext cx="6675120" cy="4434840"/>
+            <a:endParaRPr lang="en-US" sz="3400" dirty="0"/>
+          </a:p>
+        </p:txBody>
+      </p:sp>
+      <p:sp>
+        <p:nvSpPr>
+          <p:cNvPr id="9" name="Text 7"/>
+          <p:cNvSpPr/>
+          <p:nvPr/>
+        </p:nvSpPr>
+        <p:spPr>
+          <a:xfrm>
+            <a:off x="868680" y="1508760"/>
+            <a:ext cx="6537960" cy="4160520"/>
           </a:xfrm>
           <a:prstGeom prst="rect">
             <a:avLst/>
@@ -6802,7 +7058,7 @@
           <a:lstStyle/>
           <a:p>
             <a:r>
-              <a:rPr lang="en-US" sz="1700" dirty="0">
+              <a:rPr lang="en-US" sz="2100" dirty="0">
                 <a:solidFill>
                   <a:srgbClr val="17364A"/>
                 </a:solidFill>
@@ -6812,11 +7068,11 @@
               </a:rPr>
               <a:t>Which safeguards should be required before pilot testing?</a:t>
             </a:r>
-            <a:endParaRPr lang="en-US" sz="1700" dirty="0"/>
-          </a:p>
-          <a:p>
-            <a:r>
-              <a:rPr lang="en-US" sz="1700" dirty="0">
+            <a:endParaRPr lang="en-US" sz="2100" dirty="0"/>
+          </a:p>
+          <a:p>
+            <a:r>
+              <a:rPr lang="en-US" sz="2100" dirty="0">
                 <a:solidFill>
                   <a:srgbClr val="17364A"/>
                 </a:solidFill>
@@ -6826,13 +7082,13 @@
               </a:rPr>
               <a:t>Who owns ongoing monitoring and review?</a:t>
             </a:r>
-            <a:endParaRPr lang="en-US" sz="1700" dirty="0"/>
-          </a:p>
-        </p:txBody>
-      </p:sp>
-      <p:sp>
-        <p:nvSpPr>
-          <p:cNvPr id="9" name="Shape 7"/>
+            <a:endParaRPr lang="en-US" sz="2100" dirty="0"/>
+          </a:p>
+        </p:txBody>
+      </p:sp>
+      <p:sp>
+        <p:nvSpPr>
+          <p:cNvPr id="10" name="Shape 8"/>
           <p:cNvSpPr/>
           <p:nvPr/>
         </p:nvSpPr>
@@ -6859,14 +7115,14 @@
       </p:sp>
       <p:sp>
         <p:nvSpPr>
-          <p:cNvPr id="10" name="Text 8"/>
+          <p:cNvPr id="11" name="Text 9"/>
           <p:cNvSpPr/>
           <p:nvPr/>
         </p:nvSpPr>
         <p:spPr>
           <a:xfrm>
             <a:off x="8074152" y="1563624"/>
-            <a:ext cx="2825496" cy="201168"/>
+            <a:ext cx="2825496" cy="256032"/>
           </a:xfrm>
           <a:prstGeom prst="rect">
             <a:avLst/>
@@ -6882,7 +7138,7 @@
               <a:buNone/>
             </a:pPr>
             <a:r>
-              <a:rPr lang="en-US" sz="950" b="1" dirty="0">
+              <a:rPr lang="en-US" sz="1300" b="1" dirty="0">
                 <a:solidFill>
                   <a:srgbClr val="0068B7"/>
                 </a:solidFill>
@@ -6892,20 +7148,20 @@
               </a:rPr>
               <a:t>Key idea</a:t>
             </a:r>
-            <a:endParaRPr lang="en-US" sz="950" dirty="0"/>
-          </a:p>
-        </p:txBody>
-      </p:sp>
-      <p:sp>
-        <p:nvSpPr>
-          <p:cNvPr id="11" name="Text 9"/>
-          <p:cNvSpPr/>
-          <p:nvPr/>
-        </p:nvSpPr>
-        <p:spPr>
-          <a:xfrm>
-            <a:off x="8074152" y="1856232"/>
-            <a:ext cx="2825496" cy="1261872"/>
+            <a:endParaRPr lang="en-US" sz="1300" dirty="0"/>
+          </a:p>
+        </p:txBody>
+      </p:sp>
+      <p:sp>
+        <p:nvSpPr>
+          <p:cNvPr id="12" name="Text 10"/>
+          <p:cNvSpPr/>
+          <p:nvPr/>
+        </p:nvSpPr>
+        <p:spPr>
+          <a:xfrm>
+            <a:off x="8074152" y="1920240"/>
+            <a:ext cx="2825496" cy="1188720"/>
           </a:xfrm>
           <a:prstGeom prst="rect">
             <a:avLst/>
@@ -6923,7 +7179,7 @@
               <a:buNone/>
             </a:pPr>
             <a:r>
-              <a:rPr lang="en-US" sz="1250" dirty="0">
+              <a:rPr lang="en-US" sz="1550" dirty="0">
                 <a:solidFill>
                   <a:srgbClr val="17364A"/>
                 </a:solidFill>
@@ -6933,13 +7189,13 @@
               </a:rPr>
               <a:t>Which safeguards should be required before pilot testing?</a:t>
             </a:r>
-            <a:endParaRPr lang="en-US" sz="1250" dirty="0"/>
-          </a:p>
-        </p:txBody>
-      </p:sp>
-      <p:sp>
-        <p:nvSpPr>
-          <p:cNvPr id="12" name="Shape 10"/>
+            <a:endParaRPr lang="en-US" sz="1550" dirty="0"/>
+          </a:p>
+        </p:txBody>
+      </p:sp>
+      <p:sp>
+        <p:nvSpPr>
+          <p:cNvPr id="13" name="Shape 11"/>
           <p:cNvSpPr/>
           <p:nvPr/>
         </p:nvSpPr>
@@ -6966,14 +7222,14 @@
       </p:sp>
       <p:sp>
         <p:nvSpPr>
-          <p:cNvPr id="13" name="Text 11"/>
+          <p:cNvPr id="14" name="Text 12"/>
           <p:cNvSpPr/>
           <p:nvPr/>
         </p:nvSpPr>
         <p:spPr>
           <a:xfrm>
             <a:off x="8074152" y="3666744"/>
-            <a:ext cx="2825496" cy="201168"/>
+            <a:ext cx="2825496" cy="256032"/>
           </a:xfrm>
           <a:prstGeom prst="rect">
             <a:avLst/>
@@ -6989,7 +7245,7 @@
               <a:buNone/>
             </a:pPr>
             <a:r>
-              <a:rPr lang="en-US" sz="950" b="1" dirty="0">
+              <a:rPr lang="en-US" sz="1300" b="1" dirty="0">
                 <a:solidFill>
                   <a:srgbClr val="0068B7"/>
                 </a:solidFill>
@@ -6999,20 +7255,20 @@
               </a:rPr>
               <a:t>Use this for</a:t>
             </a:r>
-            <a:endParaRPr lang="en-US" sz="950" dirty="0"/>
-          </a:p>
-        </p:txBody>
-      </p:sp>
-      <p:sp>
-        <p:nvSpPr>
-          <p:cNvPr id="14" name="Text 12"/>
-          <p:cNvSpPr/>
-          <p:nvPr/>
-        </p:nvSpPr>
-        <p:spPr>
-          <a:xfrm>
-            <a:off x="8074152" y="3959352"/>
-            <a:ext cx="2825496" cy="1170432"/>
+            <a:endParaRPr lang="en-US" sz="1300" dirty="0"/>
+          </a:p>
+        </p:txBody>
+      </p:sp>
+      <p:sp>
+        <p:nvSpPr>
+          <p:cNvPr id="15" name="Text 13"/>
+          <p:cNvSpPr/>
+          <p:nvPr/>
+        </p:nvSpPr>
+        <p:spPr>
+          <a:xfrm>
+            <a:off x="8074152" y="4023360"/>
+            <a:ext cx="2825496" cy="1097280"/>
           </a:xfrm>
           <a:prstGeom prst="rect">
             <a:avLst/>
@@ -7030,7 +7286,7 @@
               <a:buNone/>
             </a:pPr>
             <a:r>
-              <a:rPr lang="en-US" sz="1250" dirty="0">
+              <a:rPr lang="en-US" sz="1550" dirty="0">
                 <a:solidFill>
                   <a:srgbClr val="17364A"/>
                 </a:solidFill>
@@ -7040,7 +7296,7 @@
               </a:rPr>
               <a:t>Connect the concept to public health decisions, safeguards, documentation, or implementation work.</a:t>
             </a:r>
-            <a:endParaRPr lang="en-US" sz="1250" dirty="0"/>
+            <a:endParaRPr lang="en-US" sz="1550" dirty="0"/>
           </a:p>
         </p:txBody>
       </p:sp>
@@ -7237,7 +7493,7 @@
                 <a:ea typeface="Aptos" pitchFamily="34" charset="-122"/>
                 <a:cs typeface="Aptos" pitchFamily="34" charset="-120"/>
               </a:rPr>
-              <a:t>© Paula Soper</a:t>
+              <a:t>Â© Paula Soper</a:t>
             </a:r>
             <a:endParaRPr lang="en-US" sz="800" dirty="0"/>
           </a:p>
@@ -7245,7 +7501,46 @@
       </p:sp>
       <p:sp>
         <p:nvSpPr>
-          <p:cNvPr id="7" name="Shape 5"/>
+          <p:cNvPr id="7" name="Text 5"/>
+          <p:cNvSpPr/>
+          <p:nvPr/>
+        </p:nvSpPr>
+        <p:spPr>
+          <a:xfrm>
+            <a:off x="11137392" y="6510528"/>
+            <a:ext cx="411480" cy="201168"/>
+          </a:xfrm>
+          <a:prstGeom prst="rect">
+            <a:avLst/>
+          </a:prstGeom>
+          <a:noFill/>
+          <a:ln/>
+        </p:spPr>
+        <p:txBody>
+          <a:bodyPr wrap="square" lIns="0" tIns="0" rIns="0" bIns="0" rtlCol="0" anchor="ctr"/>
+          <a:lstStyle/>
+          <a:p>
+            <a:pPr algn="r" indent="0" marL="0">
+              <a:buNone/>
+            </a:pPr>
+            <a:r>
+              <a:rPr lang="en-US" sz="900" dirty="0">
+                <a:solidFill>
+                  <a:srgbClr val="5F7181"/>
+                </a:solidFill>
+                <a:latin typeface="Aptos" pitchFamily="34" charset="0"/>
+                <a:ea typeface="Aptos" pitchFamily="34" charset="-122"/>
+                <a:cs typeface="Aptos" pitchFamily="34" charset="-120"/>
+              </a:rPr>
+              <a:t>17</a:t>
+            </a:r>
+            <a:endParaRPr lang="en-US" sz="900" dirty="0"/>
+          </a:p>
+        </p:txBody>
+      </p:sp>
+      <p:sp>
+        <p:nvSpPr>
+          <p:cNvPr id="8" name="Shape 6"/>
           <p:cNvSpPr/>
           <p:nvPr/>
         </p:nvSpPr>
@@ -7270,7 +7565,7 @@
       </p:sp>
       <p:sp>
         <p:nvSpPr>
-          <p:cNvPr id="8" name="Text 6"/>
+          <p:cNvPr id="9" name="Text 7"/>
           <p:cNvSpPr/>
           <p:nvPr/>
         </p:nvSpPr>
@@ -7309,14 +7604,14 @@
       </p:sp>
       <p:sp>
         <p:nvSpPr>
-          <p:cNvPr id="9" name="Text 7"/>
+          <p:cNvPr id="10" name="Text 8"/>
           <p:cNvSpPr/>
           <p:nvPr/>
         </p:nvSpPr>
         <p:spPr>
           <a:xfrm>
             <a:off x="640080" y="621792"/>
-            <a:ext cx="10881360" cy="566928"/>
+            <a:ext cx="10881360" cy="713232"/>
           </a:xfrm>
           <a:prstGeom prst="rect">
             <a:avLst/>
@@ -7334,7 +7629,7 @@
               <a:buNone/>
             </a:pPr>
             <a:r>
-              <a:rPr lang="en-US" sz="2700" b="1" dirty="0">
+              <a:rPr lang="en-US" sz="3400" b="1" dirty="0">
                 <a:solidFill>
                   <a:srgbClr val="003A63"/>
                 </a:solidFill>
@@ -7344,20 +7639,20 @@
               </a:rPr>
               <a:t>Practical Exercise</a:t>
             </a:r>
-            <a:endParaRPr lang="en-US" sz="2700" dirty="0"/>
-          </a:p>
-        </p:txBody>
-      </p:sp>
-      <p:sp>
-        <p:nvSpPr>
-          <p:cNvPr id="10" name="Text 8"/>
-          <p:cNvSpPr/>
-          <p:nvPr/>
-        </p:nvSpPr>
-        <p:spPr>
-          <a:xfrm>
-            <a:off x="868680" y="1417320"/>
-            <a:ext cx="6675120" cy="4434840"/>
+            <a:endParaRPr lang="en-US" sz="3400" dirty="0"/>
+          </a:p>
+        </p:txBody>
+      </p:sp>
+      <p:sp>
+        <p:nvSpPr>
+          <p:cNvPr id="11" name="Text 9"/>
+          <p:cNvSpPr/>
+          <p:nvPr/>
+        </p:nvSpPr>
+        <p:spPr>
+          <a:xfrm>
+            <a:off x="868680" y="1508760"/>
+            <a:ext cx="6537960" cy="4160520"/>
           </a:xfrm>
           <a:prstGeom prst="rect">
             <a:avLst/>
@@ -7372,7 +7667,7 @@
           <a:lstStyle/>
           <a:p>
             <a:r>
-              <a:rPr lang="en-US" sz="1700" dirty="0">
+              <a:rPr lang="en-US" sz="2100" dirty="0">
                 <a:solidFill>
                   <a:srgbClr val="17364A"/>
                 </a:solidFill>
@@ -7382,11 +7677,11 @@
               </a:rPr>
               <a:t>Create a AI requirements matrix for one real or realistic public health AI workflow.</a:t>
             </a:r>
-            <a:endParaRPr lang="en-US" sz="1700" dirty="0"/>
-          </a:p>
-          <a:p>
-            <a:r>
-              <a:rPr lang="en-US" sz="1700" dirty="0">
+            <a:endParaRPr lang="en-US" sz="2100" dirty="0"/>
+          </a:p>
+          <a:p>
+            <a:r>
+              <a:rPr lang="en-US" sz="2100" dirty="0">
                 <a:solidFill>
                   <a:srgbClr val="17364A"/>
                 </a:solidFill>
@@ -7394,13 +7689,13 @@
                 <a:ea typeface="Aptos" pitchFamily="34" charset="-122"/>
                 <a:cs typeface="Aptos" pitchFamily="34" charset="-120"/>
               </a:rPr>
-              <a:t>The artifact should describe the use case, affected users, data sources, system dependencies, risks, guardrails, review.</a:t>
-            </a:r>
-            <a:endParaRPr lang="en-US" sz="1700" dirty="0"/>
-          </a:p>
-          <a:p>
-            <a:r>
-              <a:rPr lang="en-US" sz="1700" dirty="0">
+              <a:t>The artifact should describe the use case, affected users, data sources, system dependencies, risks,.</a:t>
+            </a:r>
+            <a:endParaRPr lang="en-US" sz="2100" dirty="0"/>
+          </a:p>
+          <a:p>
+            <a:r>
+              <a:rPr lang="en-US" sz="2100" dirty="0">
                 <a:solidFill>
                   <a:srgbClr val="17364A"/>
                 </a:solidFill>
@@ -7408,29 +7703,15 @@
                 <a:ea typeface="Aptos" pitchFamily="34" charset="-122"/>
                 <a:cs typeface="Aptos" pitchFamily="34" charset="-120"/>
               </a:rPr>
-              <a:t>The exercise should produce a work product that could be used in a governance meeting, procurement review, implementation.</a:t>
-            </a:r>
-            <a:endParaRPr lang="en-US" sz="1700" dirty="0"/>
-          </a:p>
-          <a:p>
-            <a:r>
-              <a:rPr lang="en-US" sz="1700" dirty="0">
-                <a:solidFill>
-                  <a:srgbClr val="17364A"/>
-                </a:solidFill>
-                <a:latin typeface="Aptos" pitchFamily="34" charset="0"/>
-                <a:ea typeface="Aptos" pitchFamily="34" charset="-122"/>
-                <a:cs typeface="Aptos" pitchFamily="34" charset="-120"/>
-              </a:rPr>
-              <a:t>Learners should document assumptions and identify which staff or partners need to be consulted.</a:t>
-            </a:r>
-            <a:endParaRPr lang="en-US" sz="1700" dirty="0"/>
-          </a:p>
-        </p:txBody>
-      </p:sp>
-      <p:sp>
-        <p:nvSpPr>
-          <p:cNvPr id="11" name="Shape 9"/>
+              <a:t>The exercise should produce a work product that could be used in a governance meeting, procurement.</a:t>
+            </a:r>
+            <a:endParaRPr lang="en-US" sz="2100" dirty="0"/>
+          </a:p>
+        </p:txBody>
+      </p:sp>
+      <p:sp>
+        <p:nvSpPr>
+          <p:cNvPr id="12" name="Shape 10"/>
           <p:cNvSpPr/>
           <p:nvPr/>
         </p:nvSpPr>
@@ -7457,14 +7738,14 @@
       </p:sp>
       <p:sp>
         <p:nvSpPr>
-          <p:cNvPr id="12" name="Text 10"/>
+          <p:cNvPr id="13" name="Text 11"/>
           <p:cNvSpPr/>
           <p:nvPr/>
         </p:nvSpPr>
         <p:spPr>
           <a:xfrm>
             <a:off x="8074152" y="1563624"/>
-            <a:ext cx="2825496" cy="201168"/>
+            <a:ext cx="2825496" cy="256032"/>
           </a:xfrm>
           <a:prstGeom prst="rect">
             <a:avLst/>
@@ -7480,7 +7761,7 @@
               <a:buNone/>
             </a:pPr>
             <a:r>
-              <a:rPr lang="en-US" sz="950" b="1" dirty="0">
+              <a:rPr lang="en-US" sz="1300" b="1" dirty="0">
                 <a:solidFill>
                   <a:srgbClr val="0068B7"/>
                 </a:solidFill>
@@ -7490,20 +7771,20 @@
               </a:rPr>
               <a:t>Key idea</a:t>
             </a:r>
-            <a:endParaRPr lang="en-US" sz="950" dirty="0"/>
-          </a:p>
-        </p:txBody>
-      </p:sp>
-      <p:sp>
-        <p:nvSpPr>
-          <p:cNvPr id="13" name="Text 11"/>
-          <p:cNvSpPr/>
-          <p:nvPr/>
-        </p:nvSpPr>
-        <p:spPr>
-          <a:xfrm>
-            <a:off x="8074152" y="1856232"/>
-            <a:ext cx="2825496" cy="1261872"/>
+            <a:endParaRPr lang="en-US" sz="1300" dirty="0"/>
+          </a:p>
+        </p:txBody>
+      </p:sp>
+      <p:sp>
+        <p:nvSpPr>
+          <p:cNvPr id="14" name="Text 12"/>
+          <p:cNvSpPr/>
+          <p:nvPr/>
+        </p:nvSpPr>
+        <p:spPr>
+          <a:xfrm>
+            <a:off x="8074152" y="1920240"/>
+            <a:ext cx="2825496" cy="1188720"/>
           </a:xfrm>
           <a:prstGeom prst="rect">
             <a:avLst/>
@@ -7521,7 +7802,7 @@
               <a:buNone/>
             </a:pPr>
             <a:r>
-              <a:rPr lang="en-US" sz="1250" dirty="0">
+              <a:rPr lang="en-US" sz="1550" dirty="0">
                 <a:solidFill>
                   <a:srgbClr val="17364A"/>
                 </a:solidFill>
@@ -7531,13 +7812,13 @@
               </a:rPr>
               <a:t>Create a AI requirements matrix for one real or realistic public health AI workflow.</a:t>
             </a:r>
-            <a:endParaRPr lang="en-US" sz="1250" dirty="0"/>
-          </a:p>
-        </p:txBody>
-      </p:sp>
-      <p:sp>
-        <p:nvSpPr>
-          <p:cNvPr id="14" name="Shape 12"/>
+            <a:endParaRPr lang="en-US" sz="1550" dirty="0"/>
+          </a:p>
+        </p:txBody>
+      </p:sp>
+      <p:sp>
+        <p:nvSpPr>
+          <p:cNvPr id="15" name="Shape 13"/>
           <p:cNvSpPr/>
           <p:nvPr/>
         </p:nvSpPr>
@@ -7564,14 +7845,14 @@
       </p:sp>
       <p:sp>
         <p:nvSpPr>
-          <p:cNvPr id="15" name="Text 13"/>
+          <p:cNvPr id="16" name="Text 14"/>
           <p:cNvSpPr/>
           <p:nvPr/>
         </p:nvSpPr>
         <p:spPr>
           <a:xfrm>
             <a:off x="8074152" y="3666744"/>
-            <a:ext cx="2825496" cy="201168"/>
+            <a:ext cx="2825496" cy="256032"/>
           </a:xfrm>
           <a:prstGeom prst="rect">
             <a:avLst/>
@@ -7587,7 +7868,7 @@
               <a:buNone/>
             </a:pPr>
             <a:r>
-              <a:rPr lang="en-US" sz="950" b="1" dirty="0">
+              <a:rPr lang="en-US" sz="1300" b="1" dirty="0">
                 <a:solidFill>
                   <a:srgbClr val="0068B7"/>
                 </a:solidFill>
@@ -7597,20 +7878,20 @@
               </a:rPr>
               <a:t>Use this for</a:t>
             </a:r>
-            <a:endParaRPr lang="en-US" sz="950" dirty="0"/>
-          </a:p>
-        </p:txBody>
-      </p:sp>
-      <p:sp>
-        <p:nvSpPr>
-          <p:cNvPr id="16" name="Text 14"/>
-          <p:cNvSpPr/>
-          <p:nvPr/>
-        </p:nvSpPr>
-        <p:spPr>
-          <a:xfrm>
-            <a:off x="8074152" y="3959352"/>
-            <a:ext cx="2825496" cy="1170432"/>
+            <a:endParaRPr lang="en-US" sz="1300" dirty="0"/>
+          </a:p>
+        </p:txBody>
+      </p:sp>
+      <p:sp>
+        <p:nvSpPr>
+          <p:cNvPr id="17" name="Text 15"/>
+          <p:cNvSpPr/>
+          <p:nvPr/>
+        </p:nvSpPr>
+        <p:spPr>
+          <a:xfrm>
+            <a:off x="8074152" y="4023360"/>
+            <a:ext cx="2825496" cy="1097280"/>
           </a:xfrm>
           <a:prstGeom prst="rect">
             <a:avLst/>
@@ -7628,7 +7909,7 @@
               <a:buNone/>
             </a:pPr>
             <a:r>
-              <a:rPr lang="en-US" sz="1250" dirty="0">
+              <a:rPr lang="en-US" sz="1550" dirty="0">
                 <a:solidFill>
                   <a:srgbClr val="17364A"/>
                 </a:solidFill>
@@ -7638,7 +7919,7 @@
               </a:rPr>
               <a:t>Connect the concept to public health decisions, safeguards, documentation, or implementation work.</a:t>
             </a:r>
-            <a:endParaRPr lang="en-US" sz="1250" dirty="0"/>
+            <a:endParaRPr lang="en-US" sz="1550" dirty="0"/>
           </a:p>
         </p:txBody>
       </p:sp>
@@ -7835,7 +8116,7 @@
                 <a:ea typeface="Aptos" pitchFamily="34" charset="-122"/>
                 <a:cs typeface="Aptos" pitchFamily="34" charset="-120"/>
               </a:rPr>
-              <a:t>© Paula Soper</a:t>
+              <a:t>Â© Paula Soper</a:t>
             </a:r>
             <a:endParaRPr lang="en-US" sz="800" dirty="0"/>
           </a:p>
@@ -7843,7 +8124,46 @@
       </p:sp>
       <p:sp>
         <p:nvSpPr>
-          <p:cNvPr id="7" name="Shape 5"/>
+          <p:cNvPr id="7" name="Text 5"/>
+          <p:cNvSpPr/>
+          <p:nvPr/>
+        </p:nvSpPr>
+        <p:spPr>
+          <a:xfrm>
+            <a:off x="11137392" y="6510528"/>
+            <a:ext cx="411480" cy="201168"/>
+          </a:xfrm>
+          <a:prstGeom prst="rect">
+            <a:avLst/>
+          </a:prstGeom>
+          <a:noFill/>
+          <a:ln/>
+        </p:spPr>
+        <p:txBody>
+          <a:bodyPr wrap="square" lIns="0" tIns="0" rIns="0" bIns="0" rtlCol="0" anchor="ctr"/>
+          <a:lstStyle/>
+          <a:p>
+            <a:pPr algn="r" indent="0" marL="0">
+              <a:buNone/>
+            </a:pPr>
+            <a:r>
+              <a:rPr lang="en-US" sz="900" dirty="0">
+                <a:solidFill>
+                  <a:srgbClr val="5F7181"/>
+                </a:solidFill>
+                <a:latin typeface="Aptos" pitchFamily="34" charset="0"/>
+                <a:ea typeface="Aptos" pitchFamily="34" charset="-122"/>
+                <a:cs typeface="Aptos" pitchFamily="34" charset="-120"/>
+              </a:rPr>
+              <a:t>18</a:t>
+            </a:r>
+            <a:endParaRPr lang="en-US" sz="900" dirty="0"/>
+          </a:p>
+        </p:txBody>
+      </p:sp>
+      <p:sp>
+        <p:nvSpPr>
+          <p:cNvPr id="8" name="Shape 6"/>
           <p:cNvSpPr/>
           <p:nvPr/>
         </p:nvSpPr>
@@ -7868,7 +8188,7 @@
       </p:sp>
       <p:sp>
         <p:nvSpPr>
-          <p:cNvPr id="8" name="Text 6"/>
+          <p:cNvPr id="9" name="Text 7"/>
           <p:cNvSpPr/>
           <p:nvPr/>
         </p:nvSpPr>
@@ -7907,14 +8227,14 @@
       </p:sp>
       <p:sp>
         <p:nvSpPr>
-          <p:cNvPr id="9" name="Text 7"/>
+          <p:cNvPr id="10" name="Text 8"/>
           <p:cNvSpPr/>
           <p:nvPr/>
         </p:nvSpPr>
         <p:spPr>
           <a:xfrm>
             <a:off x="640080" y="621792"/>
-            <a:ext cx="10881360" cy="566928"/>
+            <a:ext cx="10881360" cy="713232"/>
           </a:xfrm>
           <a:prstGeom prst="rect">
             <a:avLst/>
@@ -7932,7 +8252,7 @@
               <a:buNone/>
             </a:pPr>
             <a:r>
-              <a:rPr lang="en-US" sz="2700" b="1" dirty="0">
+              <a:rPr lang="en-US" sz="3400" b="1" dirty="0">
                 <a:solidFill>
                   <a:srgbClr val="003A63"/>
                 </a:solidFill>
@@ -7942,20 +8262,20 @@
               </a:rPr>
               <a:t>Expected Artifact or Evidence</a:t>
             </a:r>
-            <a:endParaRPr lang="en-US" sz="2700" dirty="0"/>
-          </a:p>
-        </p:txBody>
-      </p:sp>
-      <p:sp>
-        <p:nvSpPr>
-          <p:cNvPr id="10" name="Text 8"/>
-          <p:cNvSpPr/>
-          <p:nvPr/>
-        </p:nvSpPr>
-        <p:spPr>
-          <a:xfrm>
-            <a:off x="868680" y="1417320"/>
-            <a:ext cx="6675120" cy="4434840"/>
+            <a:endParaRPr lang="en-US" sz="3400" dirty="0"/>
+          </a:p>
+        </p:txBody>
+      </p:sp>
+      <p:sp>
+        <p:nvSpPr>
+          <p:cNvPr id="11" name="Text 9"/>
+          <p:cNvSpPr/>
+          <p:nvPr/>
+        </p:nvSpPr>
+        <p:spPr>
+          <a:xfrm>
+            <a:off x="868680" y="1508760"/>
+            <a:ext cx="6537960" cy="4160520"/>
           </a:xfrm>
           <a:prstGeom prst="rect">
             <a:avLst/>
@@ -7970,7 +8290,7 @@
           <a:lstStyle/>
           <a:p>
             <a:r>
-              <a:rPr lang="en-US" sz="1700" dirty="0">
+              <a:rPr lang="en-US" sz="2100" dirty="0">
                 <a:solidFill>
                   <a:srgbClr val="17364A"/>
                 </a:solidFill>
@@ -7980,11 +8300,11 @@
               </a:rPr>
               <a:t>The expected artifact is a completed AI requirements matrix.</a:t>
             </a:r>
-            <a:endParaRPr lang="en-US" sz="1700" dirty="0"/>
-          </a:p>
-          <a:p>
-            <a:r>
-              <a:rPr lang="en-US" sz="1700" dirty="0">
+            <a:endParaRPr lang="en-US" sz="2100" dirty="0"/>
+          </a:p>
+          <a:p>
+            <a:r>
+              <a:rPr lang="en-US" sz="2100" dirty="0">
                 <a:solidFill>
                   <a:srgbClr val="17364A"/>
                 </a:solidFill>
@@ -7992,15 +8312,15 @@
                 <a:ea typeface="Aptos" pitchFamily="34" charset="-122"/>
                 <a:cs typeface="Aptos" pitchFamily="34" charset="-120"/>
               </a:rPr>
-              <a:t>It should be specific to a public health workflow and should include technical dependencies, governance questions, human.</a:t>
-            </a:r>
-            <a:endParaRPr lang="en-US" sz="1700" dirty="0"/>
-          </a:p>
-        </p:txBody>
-      </p:sp>
-      <p:sp>
-        <p:nvSpPr>
-          <p:cNvPr id="11" name="Shape 9"/>
+              <a:t>It should be specific to a public health workflow and should include technical dependencies, governance.</a:t>
+            </a:r>
+            <a:endParaRPr lang="en-US" sz="2100" dirty="0"/>
+          </a:p>
+        </p:txBody>
+      </p:sp>
+      <p:sp>
+        <p:nvSpPr>
+          <p:cNvPr id="12" name="Shape 10"/>
           <p:cNvSpPr/>
           <p:nvPr/>
         </p:nvSpPr>
@@ -8027,14 +8347,14 @@
       </p:sp>
       <p:sp>
         <p:nvSpPr>
-          <p:cNvPr id="12" name="Text 10"/>
+          <p:cNvPr id="13" name="Text 11"/>
           <p:cNvSpPr/>
           <p:nvPr/>
         </p:nvSpPr>
         <p:spPr>
           <a:xfrm>
             <a:off x="8074152" y="1563624"/>
-            <a:ext cx="2825496" cy="201168"/>
+            <a:ext cx="2825496" cy="256032"/>
           </a:xfrm>
           <a:prstGeom prst="rect">
             <a:avLst/>
@@ -8050,7 +8370,7 @@
               <a:buNone/>
             </a:pPr>
             <a:r>
-              <a:rPr lang="en-US" sz="950" b="1" dirty="0">
+              <a:rPr lang="en-US" sz="1300" b="1" dirty="0">
                 <a:solidFill>
                   <a:srgbClr val="0068B7"/>
                 </a:solidFill>
@@ -8060,20 +8380,20 @@
               </a:rPr>
               <a:t>Key idea</a:t>
             </a:r>
-            <a:endParaRPr lang="en-US" sz="950" dirty="0"/>
-          </a:p>
-        </p:txBody>
-      </p:sp>
-      <p:sp>
-        <p:nvSpPr>
-          <p:cNvPr id="13" name="Text 11"/>
-          <p:cNvSpPr/>
-          <p:nvPr/>
-        </p:nvSpPr>
-        <p:spPr>
-          <a:xfrm>
-            <a:off x="8074152" y="1856232"/>
-            <a:ext cx="2825496" cy="1261872"/>
+            <a:endParaRPr lang="en-US" sz="1300" dirty="0"/>
+          </a:p>
+        </p:txBody>
+      </p:sp>
+      <p:sp>
+        <p:nvSpPr>
+          <p:cNvPr id="14" name="Text 12"/>
+          <p:cNvSpPr/>
+          <p:nvPr/>
+        </p:nvSpPr>
+        <p:spPr>
+          <a:xfrm>
+            <a:off x="8074152" y="1920240"/>
+            <a:ext cx="2825496" cy="1188720"/>
           </a:xfrm>
           <a:prstGeom prst="rect">
             <a:avLst/>
@@ -8091,7 +8411,7 @@
               <a:buNone/>
             </a:pPr>
             <a:r>
-              <a:rPr lang="en-US" sz="1250" dirty="0">
+              <a:rPr lang="en-US" sz="1550" dirty="0">
                 <a:solidFill>
                   <a:srgbClr val="17364A"/>
                 </a:solidFill>
@@ -8101,13 +8421,13 @@
               </a:rPr>
               <a:t>The expected artifact is a completed AI requirements matrix.</a:t>
             </a:r>
-            <a:endParaRPr lang="en-US" sz="1250" dirty="0"/>
-          </a:p>
-        </p:txBody>
-      </p:sp>
-      <p:sp>
-        <p:nvSpPr>
-          <p:cNvPr id="14" name="Shape 12"/>
+            <a:endParaRPr lang="en-US" sz="1550" dirty="0"/>
+          </a:p>
+        </p:txBody>
+      </p:sp>
+      <p:sp>
+        <p:nvSpPr>
+          <p:cNvPr id="15" name="Shape 13"/>
           <p:cNvSpPr/>
           <p:nvPr/>
         </p:nvSpPr>
@@ -8134,14 +8454,14 @@
       </p:sp>
       <p:sp>
         <p:nvSpPr>
-          <p:cNvPr id="15" name="Text 13"/>
+          <p:cNvPr id="16" name="Text 14"/>
           <p:cNvSpPr/>
           <p:nvPr/>
         </p:nvSpPr>
         <p:spPr>
           <a:xfrm>
             <a:off x="8074152" y="3666744"/>
-            <a:ext cx="2825496" cy="201168"/>
+            <a:ext cx="2825496" cy="256032"/>
           </a:xfrm>
           <a:prstGeom prst="rect">
             <a:avLst/>
@@ -8157,7 +8477,7 @@
               <a:buNone/>
             </a:pPr>
             <a:r>
-              <a:rPr lang="en-US" sz="950" b="1" dirty="0">
+              <a:rPr lang="en-US" sz="1300" b="1" dirty="0">
                 <a:solidFill>
                   <a:srgbClr val="0068B7"/>
                 </a:solidFill>
@@ -8167,20 +8487,20 @@
               </a:rPr>
               <a:t>Use this for</a:t>
             </a:r>
-            <a:endParaRPr lang="en-US" sz="950" dirty="0"/>
-          </a:p>
-        </p:txBody>
-      </p:sp>
-      <p:sp>
-        <p:nvSpPr>
-          <p:cNvPr id="16" name="Text 14"/>
-          <p:cNvSpPr/>
-          <p:nvPr/>
-        </p:nvSpPr>
-        <p:spPr>
-          <a:xfrm>
-            <a:off x="8074152" y="3959352"/>
-            <a:ext cx="2825496" cy="1170432"/>
+            <a:endParaRPr lang="en-US" sz="1300" dirty="0"/>
+          </a:p>
+        </p:txBody>
+      </p:sp>
+      <p:sp>
+        <p:nvSpPr>
+          <p:cNvPr id="17" name="Text 15"/>
+          <p:cNvSpPr/>
+          <p:nvPr/>
+        </p:nvSpPr>
+        <p:spPr>
+          <a:xfrm>
+            <a:off x="8074152" y="4023360"/>
+            <a:ext cx="2825496" cy="1097280"/>
           </a:xfrm>
           <a:prstGeom prst="rect">
             <a:avLst/>
@@ -8198,7 +8518,7 @@
               <a:buNone/>
             </a:pPr>
             <a:r>
-              <a:rPr lang="en-US" sz="1250" dirty="0">
+              <a:rPr lang="en-US" sz="1550" dirty="0">
                 <a:solidFill>
                   <a:srgbClr val="17364A"/>
                 </a:solidFill>
@@ -8208,7 +8528,7 @@
               </a:rPr>
               <a:t>Connect the concept to public health decisions, safeguards, documentation, or implementation work.</a:t>
             </a:r>
-            <a:endParaRPr lang="en-US" sz="1250" dirty="0"/>
+            <a:endParaRPr lang="en-US" sz="1550" dirty="0"/>
           </a:p>
         </p:txBody>
       </p:sp>
@@ -8405,7 +8725,7 @@
                 <a:ea typeface="Aptos" pitchFamily="34" charset="-122"/>
                 <a:cs typeface="Aptos" pitchFamily="34" charset="-120"/>
               </a:rPr>
-              <a:t>© Paula Soper</a:t>
+              <a:t>Â© Paula Soper</a:t>
             </a:r>
             <a:endParaRPr lang="en-US" sz="800" dirty="0"/>
           </a:p>
@@ -8413,7 +8733,46 @@
       </p:sp>
       <p:sp>
         <p:nvSpPr>
-          <p:cNvPr id="7" name="Shape 5"/>
+          <p:cNvPr id="7" name="Text 5"/>
+          <p:cNvSpPr/>
+          <p:nvPr/>
+        </p:nvSpPr>
+        <p:spPr>
+          <a:xfrm>
+            <a:off x="11137392" y="6510528"/>
+            <a:ext cx="411480" cy="201168"/>
+          </a:xfrm>
+          <a:prstGeom prst="rect">
+            <a:avLst/>
+          </a:prstGeom>
+          <a:noFill/>
+          <a:ln/>
+        </p:spPr>
+        <p:txBody>
+          <a:bodyPr wrap="square" lIns="0" tIns="0" rIns="0" bIns="0" rtlCol="0" anchor="ctr"/>
+          <a:lstStyle/>
+          <a:p>
+            <a:pPr algn="r" indent="0" marL="0">
+              <a:buNone/>
+            </a:pPr>
+            <a:r>
+              <a:rPr lang="en-US" sz="900" dirty="0">
+                <a:solidFill>
+                  <a:srgbClr val="5F7181"/>
+                </a:solidFill>
+                <a:latin typeface="Aptos" pitchFamily="34" charset="0"/>
+                <a:ea typeface="Aptos" pitchFamily="34" charset="-122"/>
+                <a:cs typeface="Aptos" pitchFamily="34" charset="-120"/>
+              </a:rPr>
+              <a:t>19</a:t>
+            </a:r>
+            <a:endParaRPr lang="en-US" sz="900" dirty="0"/>
+          </a:p>
+        </p:txBody>
+      </p:sp>
+      <p:sp>
+        <p:nvSpPr>
+          <p:cNvPr id="8" name="Shape 6"/>
           <p:cNvSpPr/>
           <p:nvPr/>
         </p:nvSpPr>
@@ -8438,7 +8797,7 @@
       </p:sp>
       <p:sp>
         <p:nvSpPr>
-          <p:cNvPr id="8" name="Text 6"/>
+          <p:cNvPr id="9" name="Text 7"/>
           <p:cNvSpPr/>
           <p:nvPr/>
         </p:nvSpPr>
@@ -8477,14 +8836,14 @@
       </p:sp>
       <p:sp>
         <p:nvSpPr>
-          <p:cNvPr id="9" name="Text 7"/>
+          <p:cNvPr id="10" name="Text 8"/>
           <p:cNvSpPr/>
           <p:nvPr/>
         </p:nvSpPr>
         <p:spPr>
           <a:xfrm>
             <a:off x="640080" y="621792"/>
-            <a:ext cx="10881360" cy="566928"/>
+            <a:ext cx="10881360" cy="713232"/>
           </a:xfrm>
           <a:prstGeom prst="rect">
             <a:avLst/>
@@ -8502,7 +8861,7 @@
               <a:buNone/>
             </a:pPr>
             <a:r>
-              <a:rPr lang="en-US" sz="2700" b="1" dirty="0">
+              <a:rPr lang="en-US" sz="3400" b="1" dirty="0">
                 <a:solidFill>
                   <a:srgbClr val="003A63"/>
                 </a:solidFill>
@@ -8512,20 +8871,20 @@
               </a:rPr>
               <a:t>Expected Assignment</a:t>
             </a:r>
-            <a:endParaRPr lang="en-US" sz="2700" dirty="0"/>
-          </a:p>
-        </p:txBody>
-      </p:sp>
-      <p:sp>
-        <p:nvSpPr>
-          <p:cNvPr id="10" name="Text 8"/>
-          <p:cNvSpPr/>
-          <p:nvPr/>
-        </p:nvSpPr>
-        <p:spPr>
-          <a:xfrm>
-            <a:off x="868680" y="1417320"/>
-            <a:ext cx="6675120" cy="4434840"/>
+            <a:endParaRPr lang="en-US" sz="3400" dirty="0"/>
+          </a:p>
+        </p:txBody>
+      </p:sp>
+      <p:sp>
+        <p:nvSpPr>
+          <p:cNvPr id="11" name="Text 9"/>
+          <p:cNvSpPr/>
+          <p:nvPr/>
+        </p:nvSpPr>
+        <p:spPr>
+          <a:xfrm>
+            <a:off x="868680" y="1508760"/>
+            <a:ext cx="6537960" cy="4160520"/>
           </a:xfrm>
           <a:prstGeom prst="rect">
             <a:avLst/>
@@ -8540,7 +8899,7 @@
           <a:lstStyle/>
           <a:p>
             <a:r>
-              <a:rPr lang="en-US" sz="1700" dirty="0">
+              <a:rPr lang="en-US" sz="2100" dirty="0">
                 <a:solidFill>
                   <a:srgbClr val="17364A"/>
                 </a:solidFill>
@@ -8548,15 +8907,15 @@
                 <a:ea typeface="Aptos" pitchFamily="34" charset="-122"/>
                 <a:cs typeface="Aptos" pitchFamily="34" charset="-120"/>
               </a:rPr>
-              <a:t>The expected artifact is a completed AI requirements matrix. It should be specific to a public health workflow and should.</a:t>
-            </a:r>
-            <a:endParaRPr lang="en-US" sz="1700" dirty="0"/>
-          </a:p>
-        </p:txBody>
-      </p:sp>
-      <p:sp>
-        <p:nvSpPr>
-          <p:cNvPr id="11" name="Shape 9"/>
+              <a:t>The expected artifact is a completed AI requirements matrix. It should be specific to a public health.</a:t>
+            </a:r>
+            <a:endParaRPr lang="en-US" sz="2100" dirty="0"/>
+          </a:p>
+        </p:txBody>
+      </p:sp>
+      <p:sp>
+        <p:nvSpPr>
+          <p:cNvPr id="12" name="Shape 10"/>
           <p:cNvSpPr/>
           <p:nvPr/>
         </p:nvSpPr>
@@ -8583,14 +8942,14 @@
       </p:sp>
       <p:sp>
         <p:nvSpPr>
-          <p:cNvPr id="12" name="Text 10"/>
+          <p:cNvPr id="13" name="Text 11"/>
           <p:cNvSpPr/>
           <p:nvPr/>
         </p:nvSpPr>
         <p:spPr>
           <a:xfrm>
             <a:off x="8074152" y="1563624"/>
-            <a:ext cx="2825496" cy="201168"/>
+            <a:ext cx="2825496" cy="256032"/>
           </a:xfrm>
           <a:prstGeom prst="rect">
             <a:avLst/>
@@ -8606,7 +8965,7 @@
               <a:buNone/>
             </a:pPr>
             <a:r>
-              <a:rPr lang="en-US" sz="950" b="1" dirty="0">
+              <a:rPr lang="en-US" sz="1300" b="1" dirty="0">
                 <a:solidFill>
                   <a:srgbClr val="0068B7"/>
                 </a:solidFill>
@@ -8616,20 +8975,20 @@
               </a:rPr>
               <a:t>Key idea</a:t>
             </a:r>
-            <a:endParaRPr lang="en-US" sz="950" dirty="0"/>
-          </a:p>
-        </p:txBody>
-      </p:sp>
-      <p:sp>
-        <p:nvSpPr>
-          <p:cNvPr id="13" name="Text 11"/>
-          <p:cNvSpPr/>
-          <p:nvPr/>
-        </p:nvSpPr>
-        <p:spPr>
-          <a:xfrm>
-            <a:off x="8074152" y="1856232"/>
-            <a:ext cx="2825496" cy="1261872"/>
+            <a:endParaRPr lang="en-US" sz="1300" dirty="0"/>
+          </a:p>
+        </p:txBody>
+      </p:sp>
+      <p:sp>
+        <p:nvSpPr>
+          <p:cNvPr id="14" name="Text 12"/>
+          <p:cNvSpPr/>
+          <p:nvPr/>
+        </p:nvSpPr>
+        <p:spPr>
+          <a:xfrm>
+            <a:off x="8074152" y="1920240"/>
+            <a:ext cx="2825496" cy="1188720"/>
           </a:xfrm>
           <a:prstGeom prst="rect">
             <a:avLst/>
@@ -8647,7 +9006,7 @@
               <a:buNone/>
             </a:pPr>
             <a:r>
-              <a:rPr lang="en-US" sz="1250" dirty="0">
+              <a:rPr lang="en-US" sz="1550" dirty="0">
                 <a:solidFill>
                   <a:srgbClr val="17364A"/>
                 </a:solidFill>
@@ -8655,15 +9014,15 @@
                 <a:ea typeface="Aptos" pitchFamily="34" charset="-122"/>
                 <a:cs typeface="Aptos" pitchFamily="34" charset="-120"/>
               </a:rPr>
-              <a:t>The expected artifact is a completed AI requirements matrix. It should be specific to a public health workflow and should.</a:t>
-            </a:r>
-            <a:endParaRPr lang="en-US" sz="1250" dirty="0"/>
-          </a:p>
-        </p:txBody>
-      </p:sp>
-      <p:sp>
-        <p:nvSpPr>
-          <p:cNvPr id="14" name="Shape 12"/>
+              <a:t>The expected artifact is a completed AI requirements matrix. It should be specific to a public health.</a:t>
+            </a:r>
+            <a:endParaRPr lang="en-US" sz="1550" dirty="0"/>
+          </a:p>
+        </p:txBody>
+      </p:sp>
+      <p:sp>
+        <p:nvSpPr>
+          <p:cNvPr id="15" name="Shape 13"/>
           <p:cNvSpPr/>
           <p:nvPr/>
         </p:nvSpPr>
@@ -8690,14 +9049,14 @@
       </p:sp>
       <p:sp>
         <p:nvSpPr>
-          <p:cNvPr id="15" name="Text 13"/>
+          <p:cNvPr id="16" name="Text 14"/>
           <p:cNvSpPr/>
           <p:nvPr/>
         </p:nvSpPr>
         <p:spPr>
           <a:xfrm>
             <a:off x="8074152" y="3666744"/>
-            <a:ext cx="2825496" cy="201168"/>
+            <a:ext cx="2825496" cy="256032"/>
           </a:xfrm>
           <a:prstGeom prst="rect">
             <a:avLst/>
@@ -8713,7 +9072,7 @@
               <a:buNone/>
             </a:pPr>
             <a:r>
-              <a:rPr lang="en-US" sz="950" b="1" dirty="0">
+              <a:rPr lang="en-US" sz="1300" b="1" dirty="0">
                 <a:solidFill>
                   <a:srgbClr val="0068B7"/>
                 </a:solidFill>
@@ -8723,20 +9082,20 @@
               </a:rPr>
               <a:t>Use this for</a:t>
             </a:r>
-            <a:endParaRPr lang="en-US" sz="950" dirty="0"/>
-          </a:p>
-        </p:txBody>
-      </p:sp>
-      <p:sp>
-        <p:nvSpPr>
-          <p:cNvPr id="16" name="Text 14"/>
-          <p:cNvSpPr/>
-          <p:nvPr/>
-        </p:nvSpPr>
-        <p:spPr>
-          <a:xfrm>
-            <a:off x="8074152" y="3959352"/>
-            <a:ext cx="2825496" cy="1170432"/>
+            <a:endParaRPr lang="en-US" sz="1300" dirty="0"/>
+          </a:p>
+        </p:txBody>
+      </p:sp>
+      <p:sp>
+        <p:nvSpPr>
+          <p:cNvPr id="17" name="Text 15"/>
+          <p:cNvSpPr/>
+          <p:nvPr/>
+        </p:nvSpPr>
+        <p:spPr>
+          <a:xfrm>
+            <a:off x="8074152" y="4023360"/>
+            <a:ext cx="2825496" cy="1097280"/>
           </a:xfrm>
           <a:prstGeom prst="rect">
             <a:avLst/>
@@ -8754,7 +9113,7 @@
               <a:buNone/>
             </a:pPr>
             <a:r>
-              <a:rPr lang="en-US" sz="1250" dirty="0">
+              <a:rPr lang="en-US" sz="1550" dirty="0">
                 <a:solidFill>
                   <a:srgbClr val="17364A"/>
                 </a:solidFill>
@@ -8764,7 +9123,7 @@
               </a:rPr>
               <a:t>Connect the concept to public health decisions, safeguards, documentation, or implementation work.</a:t>
             </a:r>
-            <a:endParaRPr lang="en-US" sz="1250" dirty="0"/>
+            <a:endParaRPr lang="en-US" sz="1550" dirty="0"/>
           </a:p>
         </p:txBody>
       </p:sp>
@@ -8961,7 +9320,7 @@
                 <a:ea typeface="Aptos" pitchFamily="34" charset="-122"/>
                 <a:cs typeface="Aptos" pitchFamily="34" charset="-120"/>
               </a:rPr>
-              <a:t>© Paula Soper</a:t>
+              <a:t>Â© Paula Soper</a:t>
             </a:r>
             <a:endParaRPr lang="en-US" sz="800" dirty="0"/>
           </a:p>
@@ -8975,8 +9334,47 @@
         </p:nvSpPr>
         <p:spPr>
           <a:xfrm>
+            <a:off x="11137392" y="6510528"/>
+            <a:ext cx="411480" cy="201168"/>
+          </a:xfrm>
+          <a:prstGeom prst="rect">
+            <a:avLst/>
+          </a:prstGeom>
+          <a:noFill/>
+          <a:ln/>
+        </p:spPr>
+        <p:txBody>
+          <a:bodyPr wrap="square" lIns="0" tIns="0" rIns="0" bIns="0" rtlCol="0" anchor="ctr"/>
+          <a:lstStyle/>
+          <a:p>
+            <a:pPr algn="r" indent="0" marL="0">
+              <a:buNone/>
+            </a:pPr>
+            <a:r>
+              <a:rPr lang="en-US" sz="900" dirty="0">
+                <a:solidFill>
+                  <a:srgbClr val="5F7181"/>
+                </a:solidFill>
+                <a:latin typeface="Aptos" pitchFamily="34" charset="0"/>
+                <a:ea typeface="Aptos" pitchFamily="34" charset="-122"/>
+                <a:cs typeface="Aptos" pitchFamily="34" charset="-120"/>
+              </a:rPr>
+              <a:t>2</a:t>
+            </a:r>
+            <a:endParaRPr lang="en-US" sz="900" dirty="0"/>
+          </a:p>
+        </p:txBody>
+      </p:sp>
+      <p:sp>
+        <p:nvSpPr>
+          <p:cNvPr id="8" name="Text 6"/>
+          <p:cNvSpPr/>
+          <p:nvPr/>
+        </p:nvSpPr>
+        <p:spPr>
+          <a:xfrm>
             <a:off x="640080" y="658368"/>
-            <a:ext cx="10881360" cy="566928"/>
+            <a:ext cx="10881360" cy="713232"/>
           </a:xfrm>
           <a:prstGeom prst="rect">
             <a:avLst/>
@@ -8994,7 +9392,7 @@
               <a:buNone/>
             </a:pPr>
             <a:r>
-              <a:rPr lang="en-US" sz="2700" b="1" dirty="0">
+              <a:rPr lang="en-US" sz="3400" b="1" dirty="0">
                 <a:solidFill>
                   <a:srgbClr val="003A63"/>
                 </a:solidFill>
@@ -9004,20 +9402,20 @@
               </a:rPr>
               <a:t>What this module helps you do</a:t>
             </a:r>
-            <a:endParaRPr lang="en-US" sz="2700" dirty="0"/>
-          </a:p>
-        </p:txBody>
-      </p:sp>
-      <p:sp>
-        <p:nvSpPr>
-          <p:cNvPr id="8" name="Text 6"/>
-          <p:cNvSpPr/>
-          <p:nvPr/>
-        </p:nvSpPr>
-        <p:spPr>
-          <a:xfrm>
-            <a:off x="868680" y="1417320"/>
-            <a:ext cx="6675120" cy="3291840"/>
+            <a:endParaRPr lang="en-US" sz="3400" dirty="0"/>
+          </a:p>
+        </p:txBody>
+      </p:sp>
+      <p:sp>
+        <p:nvSpPr>
+          <p:cNvPr id="9" name="Text 7"/>
+          <p:cNvSpPr/>
+          <p:nvPr/>
+        </p:nvSpPr>
+        <p:spPr>
+          <a:xfrm>
+            <a:off x="868680" y="1508760"/>
+            <a:ext cx="6446520" cy="2926080"/>
           </a:xfrm>
           <a:prstGeom prst="rect">
             <a:avLst/>
@@ -9032,7 +9430,7 @@
           <a:lstStyle/>
           <a:p>
             <a:r>
-              <a:rPr lang="en-US" sz="1700" dirty="0">
+              <a:rPr lang="en-US" sz="2100" dirty="0">
                 <a:solidFill>
                   <a:srgbClr val="17364A"/>
                 </a:solidFill>
@@ -9040,13 +9438,13 @@
                 <a:ea typeface="Aptos" pitchFamily="34" charset="-122"/>
                 <a:cs typeface="Aptos" pitchFamily="34" charset="-120"/>
               </a:rPr>
-              <a:t>AI procurement requires stronger requirements than ordinary software purchasing because agencies must define not only features, but also data.</a:t>
-            </a:r>
-            <a:endParaRPr lang="en-US" sz="1700" dirty="0"/>
-          </a:p>
-          <a:p>
-            <a:r>
-              <a:rPr lang="en-US" sz="1700" dirty="0">
+              <a:t>AI procurement requires stronger requirements than ordinary software purchasing because agencies must define not.</a:t>
+            </a:r>
+            <a:endParaRPr lang="en-US" sz="2100" dirty="0"/>
+          </a:p>
+          <a:p>
+            <a:r>
+              <a:rPr lang="en-US" sz="2100" dirty="0">
                 <a:solidFill>
                   <a:srgbClr val="17364A"/>
                 </a:solidFill>
@@ -9054,15 +9452,15 @@
                 <a:ea typeface="Aptos" pitchFamily="34" charset="-122"/>
                 <a:cs typeface="Aptos" pitchFamily="34" charset="-120"/>
               </a:rPr>
-              <a:t>This module teaches learners how to write requirements that can be evaluated, tested, enforced, and monitored throughout implementation.</a:t>
-            </a:r>
-            <a:endParaRPr lang="en-US" sz="1700" dirty="0"/>
-          </a:p>
-        </p:txBody>
-      </p:sp>
-      <p:sp>
-        <p:nvSpPr>
-          <p:cNvPr id="9" name="Shape 7"/>
+              <a:t>This module teaches learners how to write requirements that can be evaluated, tested, enforced, and monitored.</a:t>
+            </a:r>
+            <a:endParaRPr lang="en-US" sz="2100" dirty="0"/>
+          </a:p>
+        </p:txBody>
+      </p:sp>
+      <p:sp>
+        <p:nvSpPr>
+          <p:cNvPr id="10" name="Shape 8"/>
           <p:cNvSpPr/>
           <p:nvPr/>
         </p:nvSpPr>
@@ -9089,14 +9487,14 @@
       </p:sp>
       <p:sp>
         <p:nvSpPr>
-          <p:cNvPr id="10" name="Text 8"/>
+          <p:cNvPr id="11" name="Text 9"/>
           <p:cNvSpPr/>
           <p:nvPr/>
         </p:nvSpPr>
         <p:spPr>
           <a:xfrm>
             <a:off x="8074152" y="1563624"/>
-            <a:ext cx="2825496" cy="201168"/>
+            <a:ext cx="2825496" cy="256032"/>
           </a:xfrm>
           <a:prstGeom prst="rect">
             <a:avLst/>
@@ -9112,7 +9510,7 @@
               <a:buNone/>
             </a:pPr>
             <a:r>
-              <a:rPr lang="en-US" sz="950" b="1" dirty="0">
+              <a:rPr lang="en-US" sz="1300" b="1" dirty="0">
                 <a:solidFill>
                   <a:srgbClr val="0068B7"/>
                 </a:solidFill>
@@ -9122,20 +9520,20 @@
               </a:rPr>
               <a:t>Module details</a:t>
             </a:r>
-            <a:endParaRPr lang="en-US" sz="950" dirty="0"/>
-          </a:p>
-        </p:txBody>
-      </p:sp>
-      <p:sp>
-        <p:nvSpPr>
-          <p:cNvPr id="11" name="Text 9"/>
-          <p:cNvSpPr/>
-          <p:nvPr/>
-        </p:nvSpPr>
-        <p:spPr>
-          <a:xfrm>
-            <a:off x="8074152" y="1856232"/>
-            <a:ext cx="2825496" cy="1353312"/>
+            <a:endParaRPr lang="en-US" sz="1300" dirty="0"/>
+          </a:p>
+        </p:txBody>
+      </p:sp>
+      <p:sp>
+        <p:nvSpPr>
+          <p:cNvPr id="12" name="Text 10"/>
+          <p:cNvSpPr/>
+          <p:nvPr/>
+        </p:nvSpPr>
+        <p:spPr>
+          <a:xfrm>
+            <a:off x="8074152" y="1920240"/>
+            <a:ext cx="2825496" cy="1280160"/>
           </a:xfrm>
           <a:prstGeom prst="rect">
             <a:avLst/>
@@ -9153,7 +9551,7 @@
               <a:buNone/>
             </a:pPr>
             <a:r>
-              <a:rPr lang="en-US" sz="1250" dirty="0">
+              <a:rPr lang="en-US" sz="1550" dirty="0">
                 <a:solidFill>
                   <a:srgbClr val="17364A"/>
                 </a:solidFill>
@@ -9163,14 +9561,14 @@
               </a:rPr>
               <a:t>Level: applied/foundational</a:t>
             </a:r>
-            <a:endParaRPr lang="en-US" sz="1250" dirty="0"/>
+            <a:endParaRPr lang="en-US" sz="1550" dirty="0"/>
           </a:p>
           <a:p>
             <a:pPr indent="0" marL="0">
               <a:buNone/>
             </a:pPr>
             <a:r>
-              <a:rPr lang="en-US" sz="1250" dirty="0">
+              <a:rPr lang="en-US" sz="1550" dirty="0">
                 <a:solidFill>
                   <a:srgbClr val="17364A"/>
                 </a:solidFill>
@@ -9180,14 +9578,14 @@
               </a:rPr>
               <a:t>Primary track: Program Management Role-Based Track</a:t>
             </a:r>
-            <a:endParaRPr lang="en-US" sz="1250" dirty="0"/>
+            <a:endParaRPr lang="en-US" sz="1550" dirty="0"/>
           </a:p>
           <a:p>
             <a:pPr indent="0" marL="0">
               <a:buNone/>
             </a:pPr>
             <a:r>
-              <a:rPr lang="en-US" sz="1250" dirty="0">
+              <a:rPr lang="en-US" sz="1550" dirty="0">
                 <a:solidFill>
                   <a:srgbClr val="17364A"/>
                 </a:solidFill>
@@ -9197,32 +9595,32 @@
               </a:rPr>
               <a:t>Appears in tracks: operations-data-quality</a:t>
             </a:r>
-            <a:endParaRPr lang="en-US" sz="1250" dirty="0"/>
-          </a:p>
-        </p:txBody>
-      </p:sp>
-      <p:sp>
-        <p:nvSpPr>
-          <p:cNvPr id="12" name="Shape 10"/>
-          <p:cNvSpPr/>
-          <p:nvPr/>
-        </p:nvSpPr>
-        <p:spPr>
-          <a:xfrm>
-            <a:off x="7909560" y="3611880"/>
-            <a:ext cx="3154680" cy="1783080"/>
+            <a:endParaRPr lang="en-US" sz="1550" dirty="0"/>
+          </a:p>
+        </p:txBody>
+      </p:sp>
+      <p:sp>
+        <p:nvSpPr>
+          <p:cNvPr id="13" name="Shape 11"/>
+          <p:cNvSpPr/>
+          <p:nvPr/>
+        </p:nvSpPr>
+        <p:spPr>
+          <a:xfrm>
+            <a:off x="7635240" y="3730752"/>
+            <a:ext cx="1033272" cy="749808"/>
           </a:xfrm>
           <a:prstGeom prst="roundRect">
             <a:avLst>
-              <a:gd name="adj" fmla="val 6154"/>
+              <a:gd name="adj" fmla="val 14634"/>
             </a:avLst>
           </a:prstGeom>
           <a:solidFill>
-            <a:srgbClr val="EEF8ED"/>
+            <a:srgbClr val="0068B7"/>
           </a:solidFill>
           <a:ln w="12700">
             <a:solidFill>
-              <a:srgbClr val="B9D7E6"/>
+              <a:srgbClr val="0068B7"/>
             </a:solidFill>
             <a:prstDash val="solid"/>
           </a:ln>
@@ -9230,81 +9628,256 @@
       </p:sp>
       <p:sp>
         <p:nvSpPr>
-          <p:cNvPr id="13" name="Text 11"/>
-          <p:cNvSpPr/>
-          <p:nvPr/>
-        </p:nvSpPr>
-        <p:spPr>
-          <a:xfrm>
-            <a:off x="8074152" y="3758184"/>
-            <a:ext cx="2825496" cy="201168"/>
-          </a:xfrm>
-          <a:prstGeom prst="rect">
-            <a:avLst/>
-          </a:prstGeom>
-          <a:noFill/>
-          <a:ln/>
-        </p:spPr>
-        <p:txBody>
-          <a:bodyPr wrap="square" lIns="0" tIns="0" rIns="0" bIns="0" rtlCol="0" anchor="ctr"/>
-          <a:lstStyle/>
-          <a:p>
-            <a:pPr indent="0" marL="0">
-              <a:buNone/>
-            </a:pPr>
-            <a:r>
-              <a:rPr lang="en-US" sz="950" b="1" dirty="0">
-                <a:solidFill>
-                  <a:srgbClr val="0068B7"/>
-                </a:solidFill>
-                <a:latin typeface="Aptos" pitchFamily="34" charset="0"/>
-                <a:ea typeface="Aptos" pitchFamily="34" charset="-122"/>
-                <a:cs typeface="Aptos" pitchFamily="34" charset="-120"/>
-              </a:rPr>
-              <a:t>Learning approach</a:t>
-            </a:r>
-            <a:endParaRPr lang="en-US" sz="950" dirty="0"/>
-          </a:p>
-        </p:txBody>
-      </p:sp>
-      <p:sp>
-        <p:nvSpPr>
           <p:cNvPr id="14" name="Text 12"/>
           <p:cNvSpPr/>
           <p:nvPr/>
         </p:nvSpPr>
         <p:spPr>
           <a:xfrm>
-            <a:off x="8074152" y="4050792"/>
-            <a:ext cx="2825496" cy="1216152"/>
-          </a:xfrm>
-          <a:prstGeom prst="rect">
-            <a:avLst/>
-          </a:prstGeom>
-          <a:noFill/>
-          <a:ln/>
-        </p:spPr>
-        <p:txBody>
-          <a:bodyPr wrap="square" lIns="0" tIns="0" rIns="0" bIns="0" rtlCol="0" anchor="t">
+            <a:off x="7708392" y="3922776"/>
+            <a:ext cx="886968" cy="310896"/>
+          </a:xfrm>
+          <a:prstGeom prst="rect">
+            <a:avLst/>
+          </a:prstGeom>
+          <a:noFill/>
+          <a:ln/>
+        </p:spPr>
+        <p:txBody>
+          <a:bodyPr wrap="square" lIns="0" tIns="0" rIns="0" bIns="0" rtlCol="0" anchor="ctr">
             <a:normAutofit/>
           </a:bodyPr>
           <a:lstStyle/>
           <a:p>
-            <a:pPr indent="0" marL="0">
-              <a:buNone/>
-            </a:pPr>
-            <a:r>
-              <a:rPr lang="en-US" sz="1250" dirty="0">
-                <a:solidFill>
-                  <a:srgbClr val="17364A"/>
-                </a:solidFill>
-                <a:latin typeface="Aptos" pitchFamily="34" charset="0"/>
-                <a:ea typeface="Aptos" pitchFamily="34" charset="-122"/>
-                <a:cs typeface="Aptos" pitchFamily="34" charset="-120"/>
-              </a:rPr>
-              <a:t>Review the core ideas, complete the practical exercise, check your understanding, and use the related plays and tools to apply the lesson.</a:t>
-            </a:r>
-            <a:endParaRPr lang="en-US" sz="1250" dirty="0"/>
+            <a:pPr algn="ctr" indent="0" marL="0">
+              <a:buNone/>
+            </a:pPr>
+            <a:r>
+              <a:rPr lang="en-US" sz="1500" b="1" dirty="0">
+                <a:solidFill>
+                  <a:srgbClr val="FFFFFF"/>
+                </a:solidFill>
+                <a:latin typeface="Aptos" pitchFamily="34" charset="0"/>
+                <a:ea typeface="Aptos" pitchFamily="34" charset="-122"/>
+                <a:cs typeface="Aptos" pitchFamily="34" charset="-120"/>
+              </a:rPr>
+              <a:t>Learn</a:t>
+            </a:r>
+            <a:endParaRPr lang="en-US" sz="1500" dirty="0"/>
+          </a:p>
+        </p:txBody>
+      </p:sp>
+      <p:sp>
+        <p:nvSpPr>
+          <p:cNvPr id="15" name="Text 13"/>
+          <p:cNvSpPr/>
+          <p:nvPr/>
+        </p:nvSpPr>
+        <p:spPr>
+          <a:xfrm>
+            <a:off x="8695944" y="3941064"/>
+            <a:ext cx="201168" cy="256032"/>
+          </a:xfrm>
+          <a:prstGeom prst="rect">
+            <a:avLst/>
+          </a:prstGeom>
+          <a:noFill/>
+          <a:ln/>
+        </p:spPr>
+        <p:txBody>
+          <a:bodyPr wrap="square" lIns="0" tIns="0" rIns="0" bIns="0" rtlCol="0" anchor="ctr"/>
+          <a:lstStyle/>
+          <a:p>
+            <a:pPr algn="ctr" indent="0" marL="0">
+              <a:buNone/>
+            </a:pPr>
+            <a:r>
+              <a:rPr lang="en-US" sz="1800" b="1" dirty="0">
+                <a:solidFill>
+                  <a:srgbClr val="0068B7"/>
+                </a:solidFill>
+                <a:latin typeface="Aptos" pitchFamily="34" charset="0"/>
+                <a:ea typeface="Aptos" pitchFamily="34" charset="-122"/>
+                <a:cs typeface="Aptos" pitchFamily="34" charset="-120"/>
+              </a:rPr>
+              <a:t>â†’</a:t>
+            </a:r>
+            <a:endParaRPr lang="en-US" sz="1800" dirty="0"/>
+          </a:p>
+        </p:txBody>
+      </p:sp>
+      <p:sp>
+        <p:nvSpPr>
+          <p:cNvPr id="16" name="Shape 14"/>
+          <p:cNvSpPr/>
+          <p:nvPr/>
+        </p:nvSpPr>
+        <p:spPr>
+          <a:xfrm>
+            <a:off x="8924544" y="3730752"/>
+            <a:ext cx="1033272" cy="749808"/>
+          </a:xfrm>
+          <a:prstGeom prst="roundRect">
+            <a:avLst>
+              <a:gd name="adj" fmla="val 14634"/>
+            </a:avLst>
+          </a:prstGeom>
+          <a:solidFill>
+            <a:srgbClr val="2F8A28"/>
+          </a:solidFill>
+          <a:ln w="12700">
+            <a:solidFill>
+              <a:srgbClr val="2F8A28"/>
+            </a:solidFill>
+            <a:prstDash val="solid"/>
+          </a:ln>
+        </p:spPr>
+      </p:sp>
+      <p:sp>
+        <p:nvSpPr>
+          <p:cNvPr id="17" name="Text 15"/>
+          <p:cNvSpPr/>
+          <p:nvPr/>
+        </p:nvSpPr>
+        <p:spPr>
+          <a:xfrm>
+            <a:off x="8997696" y="3922776"/>
+            <a:ext cx="886968" cy="310896"/>
+          </a:xfrm>
+          <a:prstGeom prst="rect">
+            <a:avLst/>
+          </a:prstGeom>
+          <a:noFill/>
+          <a:ln/>
+        </p:spPr>
+        <p:txBody>
+          <a:bodyPr wrap="square" lIns="0" tIns="0" rIns="0" bIns="0" rtlCol="0" anchor="ctr">
+            <a:normAutofit/>
+          </a:bodyPr>
+          <a:lstStyle/>
+          <a:p>
+            <a:pPr algn="ctr" indent="0" marL="0">
+              <a:buNone/>
+            </a:pPr>
+            <a:r>
+              <a:rPr lang="en-US" sz="1500" b="1" dirty="0">
+                <a:solidFill>
+                  <a:srgbClr val="FFFFFF"/>
+                </a:solidFill>
+                <a:latin typeface="Aptos" pitchFamily="34" charset="0"/>
+                <a:ea typeface="Aptos" pitchFamily="34" charset="-122"/>
+                <a:cs typeface="Aptos" pitchFamily="34" charset="-120"/>
+              </a:rPr>
+              <a:t>Apply</a:t>
+            </a:r>
+            <a:endParaRPr lang="en-US" sz="1500" dirty="0"/>
+          </a:p>
+        </p:txBody>
+      </p:sp>
+      <p:sp>
+        <p:nvSpPr>
+          <p:cNvPr id="18" name="Text 16"/>
+          <p:cNvSpPr/>
+          <p:nvPr/>
+        </p:nvSpPr>
+        <p:spPr>
+          <a:xfrm>
+            <a:off x="9985248" y="3941064"/>
+            <a:ext cx="201168" cy="256032"/>
+          </a:xfrm>
+          <a:prstGeom prst="rect">
+            <a:avLst/>
+          </a:prstGeom>
+          <a:noFill/>
+          <a:ln/>
+        </p:spPr>
+        <p:txBody>
+          <a:bodyPr wrap="square" lIns="0" tIns="0" rIns="0" bIns="0" rtlCol="0" anchor="ctr"/>
+          <a:lstStyle/>
+          <a:p>
+            <a:pPr algn="ctr" indent="0" marL="0">
+              <a:buNone/>
+            </a:pPr>
+            <a:r>
+              <a:rPr lang="en-US" sz="1800" b="1" dirty="0">
+                <a:solidFill>
+                  <a:srgbClr val="0068B7"/>
+                </a:solidFill>
+                <a:latin typeface="Aptos" pitchFamily="34" charset="0"/>
+                <a:ea typeface="Aptos" pitchFamily="34" charset="-122"/>
+                <a:cs typeface="Aptos" pitchFamily="34" charset="-120"/>
+              </a:rPr>
+              <a:t>â†’</a:t>
+            </a:r>
+            <a:endParaRPr lang="en-US" sz="1800" dirty="0"/>
+          </a:p>
+        </p:txBody>
+      </p:sp>
+      <p:sp>
+        <p:nvSpPr>
+          <p:cNvPr id="19" name="Shape 17"/>
+          <p:cNvSpPr/>
+          <p:nvPr/>
+        </p:nvSpPr>
+        <p:spPr>
+          <a:xfrm>
+            <a:off x="10213848" y="3730752"/>
+            <a:ext cx="1033272" cy="749808"/>
+          </a:xfrm>
+          <a:prstGeom prst="roundRect">
+            <a:avLst>
+              <a:gd name="adj" fmla="val 14634"/>
+            </a:avLst>
+          </a:prstGeom>
+          <a:solidFill>
+            <a:srgbClr val="6A4CA3"/>
+          </a:solidFill>
+          <a:ln w="12700">
+            <a:solidFill>
+              <a:srgbClr val="6A4CA3"/>
+            </a:solidFill>
+            <a:prstDash val="solid"/>
+          </a:ln>
+        </p:spPr>
+      </p:sp>
+      <p:sp>
+        <p:nvSpPr>
+          <p:cNvPr id="20" name="Text 18"/>
+          <p:cNvSpPr/>
+          <p:nvPr/>
+        </p:nvSpPr>
+        <p:spPr>
+          <a:xfrm>
+            <a:off x="10287000" y="3922776"/>
+            <a:ext cx="886968" cy="310896"/>
+          </a:xfrm>
+          <a:prstGeom prst="rect">
+            <a:avLst/>
+          </a:prstGeom>
+          <a:noFill/>
+          <a:ln/>
+        </p:spPr>
+        <p:txBody>
+          <a:bodyPr wrap="square" lIns="0" tIns="0" rIns="0" bIns="0" rtlCol="0" anchor="ctr">
+            <a:normAutofit/>
+          </a:bodyPr>
+          <a:lstStyle/>
+          <a:p>
+            <a:pPr algn="ctr" indent="0" marL="0">
+              <a:buNone/>
+            </a:pPr>
+            <a:r>
+              <a:rPr lang="en-US" sz="1500" b="1" dirty="0">
+                <a:solidFill>
+                  <a:srgbClr val="FFFFFF"/>
+                </a:solidFill>
+                <a:latin typeface="Aptos" pitchFamily="34" charset="0"/>
+                <a:ea typeface="Aptos" pitchFamily="34" charset="-122"/>
+                <a:cs typeface="Aptos" pitchFamily="34" charset="-120"/>
+              </a:rPr>
+              <a:t>Document</a:t>
+            </a:r>
+            <a:endParaRPr lang="en-US" sz="1500" dirty="0"/>
           </a:p>
         </p:txBody>
       </p:sp>
@@ -9501,7 +10074,7 @@
                 <a:ea typeface="Aptos" pitchFamily="34" charset="-122"/>
                 <a:cs typeface="Aptos" pitchFamily="34" charset="-120"/>
               </a:rPr>
-              <a:t>© Paula Soper</a:t>
+              <a:t>Â© Paula Soper</a:t>
             </a:r>
             <a:endParaRPr lang="en-US" sz="800" dirty="0"/>
           </a:p>
@@ -9509,7 +10082,46 @@
       </p:sp>
       <p:sp>
         <p:nvSpPr>
-          <p:cNvPr id="7" name="Shape 5"/>
+          <p:cNvPr id="7" name="Text 5"/>
+          <p:cNvSpPr/>
+          <p:nvPr/>
+        </p:nvSpPr>
+        <p:spPr>
+          <a:xfrm>
+            <a:off x="11137392" y="6510528"/>
+            <a:ext cx="411480" cy="201168"/>
+          </a:xfrm>
+          <a:prstGeom prst="rect">
+            <a:avLst/>
+          </a:prstGeom>
+          <a:noFill/>
+          <a:ln/>
+        </p:spPr>
+        <p:txBody>
+          <a:bodyPr wrap="square" lIns="0" tIns="0" rIns="0" bIns="0" rtlCol="0" anchor="ctr"/>
+          <a:lstStyle/>
+          <a:p>
+            <a:pPr algn="r" indent="0" marL="0">
+              <a:buNone/>
+            </a:pPr>
+            <a:r>
+              <a:rPr lang="en-US" sz="900" dirty="0">
+                <a:solidFill>
+                  <a:srgbClr val="5F7181"/>
+                </a:solidFill>
+                <a:latin typeface="Aptos" pitchFamily="34" charset="0"/>
+                <a:ea typeface="Aptos" pitchFamily="34" charset="-122"/>
+                <a:cs typeface="Aptos" pitchFamily="34" charset="-120"/>
+              </a:rPr>
+              <a:t>20</a:t>
+            </a:r>
+            <a:endParaRPr lang="en-US" sz="900" dirty="0"/>
+          </a:p>
+        </p:txBody>
+      </p:sp>
+      <p:sp>
+        <p:nvSpPr>
+          <p:cNvPr id="8" name="Shape 6"/>
           <p:cNvSpPr/>
           <p:nvPr/>
         </p:nvSpPr>
@@ -9534,7 +10146,7 @@
       </p:sp>
       <p:sp>
         <p:nvSpPr>
-          <p:cNvPr id="8" name="Text 6"/>
+          <p:cNvPr id="9" name="Text 7"/>
           <p:cNvSpPr/>
           <p:nvPr/>
         </p:nvSpPr>
@@ -9573,14 +10185,14 @@
       </p:sp>
       <p:sp>
         <p:nvSpPr>
-          <p:cNvPr id="9" name="Text 7"/>
+          <p:cNvPr id="10" name="Text 8"/>
           <p:cNvSpPr/>
           <p:nvPr/>
         </p:nvSpPr>
         <p:spPr>
           <a:xfrm>
             <a:off x="640080" y="621792"/>
-            <a:ext cx="10881360" cy="566928"/>
+            <a:ext cx="10881360" cy="713232"/>
           </a:xfrm>
           <a:prstGeom prst="rect">
             <a:avLst/>
@@ -9598,7 +10210,7 @@
               <a:buNone/>
             </a:pPr>
             <a:r>
-              <a:rPr lang="en-US" sz="2700" b="1" dirty="0">
+              <a:rPr lang="en-US" sz="3400" b="1" dirty="0">
                 <a:solidFill>
                   <a:srgbClr val="003A63"/>
                 </a:solidFill>
@@ -9608,20 +10220,20 @@
               </a:rPr>
               <a:t>Knowledge Check</a:t>
             </a:r>
-            <a:endParaRPr lang="en-US" sz="2700" dirty="0"/>
-          </a:p>
-        </p:txBody>
-      </p:sp>
-      <p:sp>
-        <p:nvSpPr>
-          <p:cNvPr id="10" name="Text 8"/>
-          <p:cNvSpPr/>
-          <p:nvPr/>
-        </p:nvSpPr>
-        <p:spPr>
-          <a:xfrm>
-            <a:off x="868680" y="1417320"/>
-            <a:ext cx="6675120" cy="4434840"/>
+            <a:endParaRPr lang="en-US" sz="3400" dirty="0"/>
+          </a:p>
+        </p:txBody>
+      </p:sp>
+      <p:sp>
+        <p:nvSpPr>
+          <p:cNvPr id="11" name="Text 9"/>
+          <p:cNvSpPr/>
+          <p:nvPr/>
+        </p:nvSpPr>
+        <p:spPr>
+          <a:xfrm>
+            <a:off x="868680" y="1508760"/>
+            <a:ext cx="6537960" cy="4160520"/>
           </a:xfrm>
           <a:prstGeom prst="rect">
             <a:avLst/>
@@ -9636,7 +10248,7 @@
           <a:lstStyle/>
           <a:p>
             <a:r>
-              <a:rPr lang="en-US" sz="1700" dirty="0">
+              <a:rPr lang="en-US" sz="2100" dirty="0">
                 <a:solidFill>
                   <a:srgbClr val="17364A"/>
                 </a:solidFill>
@@ -9644,13 +10256,13 @@
                 <a:ea typeface="Aptos" pitchFamily="34" charset="-122"/>
                 <a:cs typeface="Aptos" pitchFamily="34" charset="-120"/>
               </a:rPr>
-              <a:t>1. What is the best reason to address requirements writing for ai procurement and implementation before deployment?</a:t>
-            </a:r>
-            <a:endParaRPr lang="en-US" sz="1700" dirty="0"/>
-          </a:p>
-          <a:p>
-            <a:r>
-              <a:rPr lang="en-US" sz="1700" dirty="0">
+              <a:t>1. What is the best reason to address requirements writing for ai procurement and implementation before.</a:t>
+            </a:r>
+            <a:endParaRPr lang="en-US" sz="2100" dirty="0"/>
+          </a:p>
+          <a:p>
+            <a:r>
+              <a:rPr lang="en-US" sz="2100" dirty="0">
                 <a:solidFill>
                   <a:srgbClr val="17364A"/>
                 </a:solidFill>
@@ -9660,11 +10272,11 @@
               </a:rPr>
               <a:t>2. Which practice best supports responsible implementation?</a:t>
             </a:r>
-            <a:endParaRPr lang="en-US" sz="1700" dirty="0"/>
-          </a:p>
-          <a:p>
-            <a:r>
-              <a:rPr lang="en-US" sz="1700" dirty="0">
+            <a:endParaRPr lang="en-US" sz="2100" dirty="0"/>
+          </a:p>
+          <a:p>
+            <a:r>
+              <a:rPr lang="en-US" sz="2100" dirty="0">
                 <a:solidFill>
                   <a:srgbClr val="17364A"/>
                 </a:solidFill>
@@ -9674,27 +10286,13 @@
               </a:rPr>
               <a:t>3. Which statement best describes a common failure mode?</a:t>
             </a:r>
-            <a:endParaRPr lang="en-US" sz="1700" dirty="0"/>
-          </a:p>
-          <a:p>
-            <a:r>
-              <a:rPr lang="en-US" sz="1700" dirty="0">
-                <a:solidFill>
-                  <a:srgbClr val="17364A"/>
-                </a:solidFill>
-                <a:latin typeface="Aptos" pitchFamily="34" charset="0"/>
-                <a:ea typeface="Aptos" pitchFamily="34" charset="-122"/>
-                <a:cs typeface="Aptos" pitchFamily="34" charset="-120"/>
-              </a:rPr>
-              <a:t>4. What should be included in the practical artifact for this module?</a:t>
-            </a:r>
-            <a:endParaRPr lang="en-US" sz="1700" dirty="0"/>
-          </a:p>
-        </p:txBody>
-      </p:sp>
-      <p:sp>
-        <p:nvSpPr>
-          <p:cNvPr id="11" name="Shape 9"/>
+            <a:endParaRPr lang="en-US" sz="2100" dirty="0"/>
+          </a:p>
+        </p:txBody>
+      </p:sp>
+      <p:sp>
+        <p:nvSpPr>
+          <p:cNvPr id="12" name="Shape 10"/>
           <p:cNvSpPr/>
           <p:nvPr/>
         </p:nvSpPr>
@@ -9721,14 +10319,14 @@
       </p:sp>
       <p:sp>
         <p:nvSpPr>
-          <p:cNvPr id="12" name="Text 10"/>
+          <p:cNvPr id="13" name="Text 11"/>
           <p:cNvSpPr/>
           <p:nvPr/>
         </p:nvSpPr>
         <p:spPr>
           <a:xfrm>
             <a:off x="8074152" y="1563624"/>
-            <a:ext cx="2825496" cy="201168"/>
+            <a:ext cx="2825496" cy="256032"/>
           </a:xfrm>
           <a:prstGeom prst="rect">
             <a:avLst/>
@@ -9744,7 +10342,7 @@
               <a:buNone/>
             </a:pPr>
             <a:r>
-              <a:rPr lang="en-US" sz="950" b="1" dirty="0">
+              <a:rPr lang="en-US" sz="1300" b="1" dirty="0">
                 <a:solidFill>
                   <a:srgbClr val="0068B7"/>
                 </a:solidFill>
@@ -9754,20 +10352,20 @@
               </a:rPr>
               <a:t>Key idea</a:t>
             </a:r>
-            <a:endParaRPr lang="en-US" sz="950" dirty="0"/>
-          </a:p>
-        </p:txBody>
-      </p:sp>
-      <p:sp>
-        <p:nvSpPr>
-          <p:cNvPr id="13" name="Text 11"/>
-          <p:cNvSpPr/>
-          <p:nvPr/>
-        </p:nvSpPr>
-        <p:spPr>
-          <a:xfrm>
-            <a:off x="8074152" y="1856232"/>
-            <a:ext cx="2825496" cy="1261872"/>
+            <a:endParaRPr lang="en-US" sz="1300" dirty="0"/>
+          </a:p>
+        </p:txBody>
+      </p:sp>
+      <p:sp>
+        <p:nvSpPr>
+          <p:cNvPr id="14" name="Text 12"/>
+          <p:cNvSpPr/>
+          <p:nvPr/>
+        </p:nvSpPr>
+        <p:spPr>
+          <a:xfrm>
+            <a:off x="8074152" y="1920240"/>
+            <a:ext cx="2825496" cy="1188720"/>
           </a:xfrm>
           <a:prstGeom prst="rect">
             <a:avLst/>
@@ -9785,7 +10383,7 @@
               <a:buNone/>
             </a:pPr>
             <a:r>
-              <a:rPr lang="en-US" sz="1250" dirty="0">
+              <a:rPr lang="en-US" sz="1550" dirty="0">
                 <a:solidFill>
                   <a:srgbClr val="17364A"/>
                 </a:solidFill>
@@ -9793,15 +10391,15 @@
                 <a:ea typeface="Aptos" pitchFamily="34" charset="-122"/>
                 <a:cs typeface="Aptos" pitchFamily="34" charset="-120"/>
               </a:rPr>
-              <a:t>1. What is the best reason to address requirements writing for ai procurement and implementation before deployment?</a:t>
-            </a:r>
-            <a:endParaRPr lang="en-US" sz="1250" dirty="0"/>
-          </a:p>
-        </p:txBody>
-      </p:sp>
-      <p:sp>
-        <p:nvSpPr>
-          <p:cNvPr id="14" name="Shape 12"/>
+              <a:t>1. What is the best reason to address requirements writing for ai procurement and implementation before.</a:t>
+            </a:r>
+            <a:endParaRPr lang="en-US" sz="1550" dirty="0"/>
+          </a:p>
+        </p:txBody>
+      </p:sp>
+      <p:sp>
+        <p:nvSpPr>
+          <p:cNvPr id="15" name="Shape 13"/>
           <p:cNvSpPr/>
           <p:nvPr/>
         </p:nvSpPr>
@@ -9828,14 +10426,14 @@
       </p:sp>
       <p:sp>
         <p:nvSpPr>
-          <p:cNvPr id="15" name="Text 13"/>
+          <p:cNvPr id="16" name="Text 14"/>
           <p:cNvSpPr/>
           <p:nvPr/>
         </p:nvSpPr>
         <p:spPr>
           <a:xfrm>
             <a:off x="8074152" y="3666744"/>
-            <a:ext cx="2825496" cy="201168"/>
+            <a:ext cx="2825496" cy="256032"/>
           </a:xfrm>
           <a:prstGeom prst="rect">
             <a:avLst/>
@@ -9851,7 +10449,7 @@
               <a:buNone/>
             </a:pPr>
             <a:r>
-              <a:rPr lang="en-US" sz="950" b="1" dirty="0">
+              <a:rPr lang="en-US" sz="1300" b="1" dirty="0">
                 <a:solidFill>
                   <a:srgbClr val="0068B7"/>
                 </a:solidFill>
@@ -9861,20 +10459,20 @@
               </a:rPr>
               <a:t>Use this for</a:t>
             </a:r>
-            <a:endParaRPr lang="en-US" sz="950" dirty="0"/>
-          </a:p>
-        </p:txBody>
-      </p:sp>
-      <p:sp>
-        <p:nvSpPr>
-          <p:cNvPr id="16" name="Text 14"/>
-          <p:cNvSpPr/>
-          <p:nvPr/>
-        </p:nvSpPr>
-        <p:spPr>
-          <a:xfrm>
-            <a:off x="8074152" y="3959352"/>
-            <a:ext cx="2825496" cy="1170432"/>
+            <a:endParaRPr lang="en-US" sz="1300" dirty="0"/>
+          </a:p>
+        </p:txBody>
+      </p:sp>
+      <p:sp>
+        <p:nvSpPr>
+          <p:cNvPr id="17" name="Text 15"/>
+          <p:cNvSpPr/>
+          <p:nvPr/>
+        </p:nvSpPr>
+        <p:spPr>
+          <a:xfrm>
+            <a:off x="8074152" y="4023360"/>
+            <a:ext cx="2825496" cy="1097280"/>
           </a:xfrm>
           <a:prstGeom prst="rect">
             <a:avLst/>
@@ -9892,7 +10490,7 @@
               <a:buNone/>
             </a:pPr>
             <a:r>
-              <a:rPr lang="en-US" sz="1250" dirty="0">
+              <a:rPr lang="en-US" sz="1550" dirty="0">
                 <a:solidFill>
                   <a:srgbClr val="17364A"/>
                 </a:solidFill>
@@ -9902,7 +10500,7 @@
               </a:rPr>
               <a:t>Connect the concept to public health decisions, safeguards, documentation, or implementation work.</a:t>
             </a:r>
-            <a:endParaRPr lang="en-US" sz="1250" dirty="0"/>
+            <a:endParaRPr lang="en-US" sz="1550" dirty="0"/>
           </a:p>
         </p:txBody>
       </p:sp>
@@ -10099,7 +10697,7 @@
                 <a:ea typeface="Aptos" pitchFamily="34" charset="-122"/>
                 <a:cs typeface="Aptos" pitchFamily="34" charset="-120"/>
               </a:rPr>
-              <a:t>© Paula Soper</a:t>
+              <a:t>Â© Paula Soper</a:t>
             </a:r>
             <a:endParaRPr lang="en-US" sz="800" dirty="0"/>
           </a:p>
@@ -10107,7 +10705,46 @@
       </p:sp>
       <p:sp>
         <p:nvSpPr>
-          <p:cNvPr id="7" name="Shape 5"/>
+          <p:cNvPr id="7" name="Text 5"/>
+          <p:cNvSpPr/>
+          <p:nvPr/>
+        </p:nvSpPr>
+        <p:spPr>
+          <a:xfrm>
+            <a:off x="11137392" y="6510528"/>
+            <a:ext cx="411480" cy="201168"/>
+          </a:xfrm>
+          <a:prstGeom prst="rect">
+            <a:avLst/>
+          </a:prstGeom>
+          <a:noFill/>
+          <a:ln/>
+        </p:spPr>
+        <p:txBody>
+          <a:bodyPr wrap="square" lIns="0" tIns="0" rIns="0" bIns="0" rtlCol="0" anchor="ctr"/>
+          <a:lstStyle/>
+          <a:p>
+            <a:pPr algn="r" indent="0" marL="0">
+              <a:buNone/>
+            </a:pPr>
+            <a:r>
+              <a:rPr lang="en-US" sz="900" dirty="0">
+                <a:solidFill>
+                  <a:srgbClr val="5F7181"/>
+                </a:solidFill>
+                <a:latin typeface="Aptos" pitchFamily="34" charset="0"/>
+                <a:ea typeface="Aptos" pitchFamily="34" charset="-122"/>
+                <a:cs typeface="Aptos" pitchFamily="34" charset="-120"/>
+              </a:rPr>
+              <a:t>21</a:t>
+            </a:r>
+            <a:endParaRPr lang="en-US" sz="900" dirty="0"/>
+          </a:p>
+        </p:txBody>
+      </p:sp>
+      <p:sp>
+        <p:nvSpPr>
+          <p:cNvPr id="8" name="Shape 6"/>
           <p:cNvSpPr/>
           <p:nvPr/>
         </p:nvSpPr>
@@ -10132,7 +10769,7 @@
       </p:sp>
       <p:sp>
         <p:nvSpPr>
-          <p:cNvPr id="8" name="Text 6"/>
+          <p:cNvPr id="9" name="Text 7"/>
           <p:cNvSpPr/>
           <p:nvPr/>
         </p:nvSpPr>
@@ -10171,14 +10808,14 @@
       </p:sp>
       <p:sp>
         <p:nvSpPr>
-          <p:cNvPr id="9" name="Text 7"/>
+          <p:cNvPr id="10" name="Text 8"/>
           <p:cNvSpPr/>
           <p:nvPr/>
         </p:nvSpPr>
         <p:spPr>
           <a:xfrm>
             <a:off x="640080" y="621792"/>
-            <a:ext cx="10881360" cy="566928"/>
+            <a:ext cx="10881360" cy="713232"/>
           </a:xfrm>
           <a:prstGeom prst="rect">
             <a:avLst/>
@@ -10196,7 +10833,7 @@
               <a:buNone/>
             </a:pPr>
             <a:r>
-              <a:rPr lang="en-US" sz="2700" b="1" dirty="0">
+              <a:rPr lang="en-US" sz="3400" b="1" dirty="0">
                 <a:solidFill>
                   <a:srgbClr val="003A63"/>
                 </a:solidFill>
@@ -10206,20 +10843,20 @@
               </a:rPr>
               <a:t>References and Resources</a:t>
             </a:r>
-            <a:endParaRPr lang="en-US" sz="2700" dirty="0"/>
-          </a:p>
-        </p:txBody>
-      </p:sp>
-      <p:sp>
-        <p:nvSpPr>
-          <p:cNvPr id="10" name="Text 8"/>
-          <p:cNvSpPr/>
-          <p:nvPr/>
-        </p:nvSpPr>
-        <p:spPr>
-          <a:xfrm>
-            <a:off x="868680" y="1417320"/>
-            <a:ext cx="6675120" cy="4434840"/>
+            <a:endParaRPr lang="en-US" sz="3400" dirty="0"/>
+          </a:p>
+        </p:txBody>
+      </p:sp>
+      <p:sp>
+        <p:nvSpPr>
+          <p:cNvPr id="11" name="Text 9"/>
+          <p:cNvSpPr/>
+          <p:nvPr/>
+        </p:nvSpPr>
+        <p:spPr>
+          <a:xfrm>
+            <a:off x="868680" y="1508760"/>
+            <a:ext cx="6537960" cy="4160520"/>
           </a:xfrm>
           <a:prstGeom prst="rect">
             <a:avLst/>
@@ -10234,7 +10871,7 @@
           <a:lstStyle/>
           <a:p>
             <a:r>
-              <a:rPr lang="en-US" sz="1700" dirty="0">
+              <a:rPr lang="en-US" sz="2100" dirty="0">
                 <a:solidFill>
                   <a:srgbClr val="17364A"/>
                 </a:solidFill>
@@ -10244,11 +10881,11 @@
               </a:rPr>
               <a:t>NIST AI Risk Management Framework: https://www.nist.gov/itl/ai-risk-management-framework</a:t>
             </a:r>
-            <a:endParaRPr lang="en-US" sz="1700" dirty="0"/>
-          </a:p>
-          <a:p>
-            <a:r>
-              <a:rPr lang="en-US" sz="1700" dirty="0">
+            <a:endParaRPr lang="en-US" sz="2100" dirty="0"/>
+          </a:p>
+          <a:p>
+            <a:r>
+              <a:rPr lang="en-US" sz="2100" dirty="0">
                 <a:solidFill>
                   <a:srgbClr val="17364A"/>
                 </a:solidFill>
@@ -10258,11 +10895,11 @@
               </a:rPr>
               <a:t>ONC interoperability resources and agency procurement templates</a:t>
             </a:r>
-            <a:endParaRPr lang="en-US" sz="1700" dirty="0"/>
-          </a:p>
-          <a:p>
-            <a:r>
-              <a:rPr lang="en-US" sz="1700" dirty="0">
+            <a:endParaRPr lang="en-US" sz="2100" dirty="0"/>
+          </a:p>
+          <a:p>
+            <a:r>
+              <a:rPr lang="en-US" sz="2100" dirty="0">
                 <a:solidFill>
                   <a:srgbClr val="17364A"/>
                 </a:solidFill>
@@ -10272,27 +10909,13 @@
               </a:rPr>
               <a:t>NIST Generative AI Profile:.</a:t>
             </a:r>
-            <a:endParaRPr lang="en-US" sz="1700" dirty="0"/>
-          </a:p>
-          <a:p>
-            <a:r>
-              <a:rPr lang="en-US" sz="1700" dirty="0">
-                <a:solidFill>
-                  <a:srgbClr val="17364A"/>
-                </a:solidFill>
-                <a:latin typeface="Aptos" pitchFamily="34" charset="0"/>
-                <a:ea typeface="Aptos" pitchFamily="34" charset="-122"/>
-                <a:cs typeface="Aptos" pitchFamily="34" charset="-120"/>
-              </a:rPr>
-              <a:t>CDC Public Health Data Strategy and Data Modernization resources:.</a:t>
-            </a:r>
-            <a:endParaRPr lang="en-US" sz="1700" dirty="0"/>
-          </a:p>
-        </p:txBody>
-      </p:sp>
-      <p:sp>
-        <p:nvSpPr>
-          <p:cNvPr id="11" name="Shape 9"/>
+            <a:endParaRPr lang="en-US" sz="2100" dirty="0"/>
+          </a:p>
+        </p:txBody>
+      </p:sp>
+      <p:sp>
+        <p:nvSpPr>
+          <p:cNvPr id="12" name="Shape 10"/>
           <p:cNvSpPr/>
           <p:nvPr/>
         </p:nvSpPr>
@@ -10319,14 +10942,14 @@
       </p:sp>
       <p:sp>
         <p:nvSpPr>
-          <p:cNvPr id="12" name="Text 10"/>
+          <p:cNvPr id="13" name="Text 11"/>
           <p:cNvSpPr/>
           <p:nvPr/>
         </p:nvSpPr>
         <p:spPr>
           <a:xfrm>
             <a:off x="8074152" y="1563624"/>
-            <a:ext cx="2825496" cy="201168"/>
+            <a:ext cx="2825496" cy="256032"/>
           </a:xfrm>
           <a:prstGeom prst="rect">
             <a:avLst/>
@@ -10342,7 +10965,7 @@
               <a:buNone/>
             </a:pPr>
             <a:r>
-              <a:rPr lang="en-US" sz="950" b="1" dirty="0">
+              <a:rPr lang="en-US" sz="1300" b="1" dirty="0">
                 <a:solidFill>
                   <a:srgbClr val="0068B7"/>
                 </a:solidFill>
@@ -10352,20 +10975,20 @@
               </a:rPr>
               <a:t>Key idea</a:t>
             </a:r>
-            <a:endParaRPr lang="en-US" sz="950" dirty="0"/>
-          </a:p>
-        </p:txBody>
-      </p:sp>
-      <p:sp>
-        <p:nvSpPr>
-          <p:cNvPr id="13" name="Text 11"/>
-          <p:cNvSpPr/>
-          <p:nvPr/>
-        </p:nvSpPr>
-        <p:spPr>
-          <a:xfrm>
-            <a:off x="8074152" y="1856232"/>
-            <a:ext cx="2825496" cy="1261872"/>
+            <a:endParaRPr lang="en-US" sz="1300" dirty="0"/>
+          </a:p>
+        </p:txBody>
+      </p:sp>
+      <p:sp>
+        <p:nvSpPr>
+          <p:cNvPr id="14" name="Text 12"/>
+          <p:cNvSpPr/>
+          <p:nvPr/>
+        </p:nvSpPr>
+        <p:spPr>
+          <a:xfrm>
+            <a:off x="8074152" y="1920240"/>
+            <a:ext cx="2825496" cy="1188720"/>
           </a:xfrm>
           <a:prstGeom prst="rect">
             <a:avLst/>
@@ -10383,7 +11006,7 @@
               <a:buNone/>
             </a:pPr>
             <a:r>
-              <a:rPr lang="en-US" sz="1250" dirty="0">
+              <a:rPr lang="en-US" sz="1550" dirty="0">
                 <a:solidFill>
                   <a:srgbClr val="17364A"/>
                 </a:solidFill>
@@ -10393,13 +11016,13 @@
               </a:rPr>
               <a:t>NIST AI Risk Management Framework: https://www.nist.gov/itl/ai-risk-management-framework</a:t>
             </a:r>
-            <a:endParaRPr lang="en-US" sz="1250" dirty="0"/>
-          </a:p>
-        </p:txBody>
-      </p:sp>
-      <p:sp>
-        <p:nvSpPr>
-          <p:cNvPr id="14" name="Shape 12"/>
+            <a:endParaRPr lang="en-US" sz="1550" dirty="0"/>
+          </a:p>
+        </p:txBody>
+      </p:sp>
+      <p:sp>
+        <p:nvSpPr>
+          <p:cNvPr id="15" name="Shape 13"/>
           <p:cNvSpPr/>
           <p:nvPr/>
         </p:nvSpPr>
@@ -10426,14 +11049,14 @@
       </p:sp>
       <p:sp>
         <p:nvSpPr>
-          <p:cNvPr id="15" name="Text 13"/>
+          <p:cNvPr id="16" name="Text 14"/>
           <p:cNvSpPr/>
           <p:nvPr/>
         </p:nvSpPr>
         <p:spPr>
           <a:xfrm>
             <a:off x="8074152" y="3666744"/>
-            <a:ext cx="2825496" cy="201168"/>
+            <a:ext cx="2825496" cy="256032"/>
           </a:xfrm>
           <a:prstGeom prst="rect">
             <a:avLst/>
@@ -10449,7 +11072,7 @@
               <a:buNone/>
             </a:pPr>
             <a:r>
-              <a:rPr lang="en-US" sz="950" b="1" dirty="0">
+              <a:rPr lang="en-US" sz="1300" b="1" dirty="0">
                 <a:solidFill>
                   <a:srgbClr val="0068B7"/>
                 </a:solidFill>
@@ -10459,20 +11082,20 @@
               </a:rPr>
               <a:t>Use this for</a:t>
             </a:r>
-            <a:endParaRPr lang="en-US" sz="950" dirty="0"/>
-          </a:p>
-        </p:txBody>
-      </p:sp>
-      <p:sp>
-        <p:nvSpPr>
-          <p:cNvPr id="16" name="Text 14"/>
-          <p:cNvSpPr/>
-          <p:nvPr/>
-        </p:nvSpPr>
-        <p:spPr>
-          <a:xfrm>
-            <a:off x="8074152" y="3959352"/>
-            <a:ext cx="2825496" cy="1170432"/>
+            <a:endParaRPr lang="en-US" sz="1300" dirty="0"/>
+          </a:p>
+        </p:txBody>
+      </p:sp>
+      <p:sp>
+        <p:nvSpPr>
+          <p:cNvPr id="17" name="Text 15"/>
+          <p:cNvSpPr/>
+          <p:nvPr/>
+        </p:nvSpPr>
+        <p:spPr>
+          <a:xfrm>
+            <a:off x="8074152" y="4023360"/>
+            <a:ext cx="2825496" cy="1097280"/>
           </a:xfrm>
           <a:prstGeom prst="rect">
             <a:avLst/>
@@ -10490,7 +11113,7 @@
               <a:buNone/>
             </a:pPr>
             <a:r>
-              <a:rPr lang="en-US" sz="1250" dirty="0">
+              <a:rPr lang="en-US" sz="1550" dirty="0">
                 <a:solidFill>
                   <a:srgbClr val="17364A"/>
                 </a:solidFill>
@@ -10500,7 +11123,7 @@
               </a:rPr>
               <a:t>Connect the concept to public health decisions, safeguards, documentation, or implementation work.</a:t>
             </a:r>
-            <a:endParaRPr lang="en-US" sz="1250" dirty="0"/>
+            <a:endParaRPr lang="en-US" sz="1550" dirty="0"/>
           </a:p>
         </p:txBody>
       </p:sp>
@@ -10697,7 +11320,7 @@
                 <a:ea typeface="Aptos" pitchFamily="34" charset="-122"/>
                 <a:cs typeface="Aptos" pitchFamily="34" charset="-120"/>
               </a:rPr>
-              <a:t>© Paula Soper</a:t>
+              <a:t>Â© Paula Soper</a:t>
             </a:r>
             <a:endParaRPr lang="en-US" sz="800" dirty="0"/>
           </a:p>
@@ -10711,8 +11334,47 @@
         </p:nvSpPr>
         <p:spPr>
           <a:xfrm>
+            <a:off x="11137392" y="6510528"/>
+            <a:ext cx="411480" cy="201168"/>
+          </a:xfrm>
+          <a:prstGeom prst="rect">
+            <a:avLst/>
+          </a:prstGeom>
+          <a:noFill/>
+          <a:ln/>
+        </p:spPr>
+        <p:txBody>
+          <a:bodyPr wrap="square" lIns="0" tIns="0" rIns="0" bIns="0" rtlCol="0" anchor="ctr"/>
+          <a:lstStyle/>
+          <a:p>
+            <a:pPr algn="r" indent="0" marL="0">
+              <a:buNone/>
+            </a:pPr>
+            <a:r>
+              <a:rPr lang="en-US" sz="900" dirty="0">
+                <a:solidFill>
+                  <a:srgbClr val="5F7181"/>
+                </a:solidFill>
+                <a:latin typeface="Aptos" pitchFamily="34" charset="0"/>
+                <a:ea typeface="Aptos" pitchFamily="34" charset="-122"/>
+                <a:cs typeface="Aptos" pitchFamily="34" charset="-120"/>
+              </a:rPr>
+              <a:t>22</a:t>
+            </a:r>
+            <a:endParaRPr lang="en-US" sz="900" dirty="0"/>
+          </a:p>
+        </p:txBody>
+      </p:sp>
+      <p:sp>
+        <p:nvSpPr>
+          <p:cNvPr id="8" name="Text 6"/>
+          <p:cNvSpPr/>
+          <p:nvPr/>
+        </p:nvSpPr>
+        <p:spPr>
+          <a:xfrm>
             <a:off x="640080" y="658368"/>
-            <a:ext cx="10881360" cy="566928"/>
+            <a:ext cx="10881360" cy="713232"/>
           </a:xfrm>
           <a:prstGeom prst="rect">
             <a:avLst/>
@@ -10730,7 +11392,7 @@
               <a:buNone/>
             </a:pPr>
             <a:r>
-              <a:rPr lang="en-US" sz="2700" b="1" dirty="0">
+              <a:rPr lang="en-US" sz="3400" b="1" dirty="0">
                 <a:solidFill>
                   <a:srgbClr val="003A63"/>
                 </a:solidFill>
@@ -10740,20 +11402,20 @@
               </a:rPr>
               <a:t>References and Resources Continued</a:t>
             </a:r>
-            <a:endParaRPr lang="en-US" sz="2700" dirty="0"/>
-          </a:p>
-        </p:txBody>
-      </p:sp>
-      <p:sp>
-        <p:nvSpPr>
-          <p:cNvPr id="8" name="Text 6"/>
-          <p:cNvSpPr/>
-          <p:nvPr/>
-        </p:nvSpPr>
-        <p:spPr>
-          <a:xfrm>
-            <a:off x="868680" y="1417320"/>
-            <a:ext cx="6675120" cy="4434840"/>
+            <a:endParaRPr lang="en-US" sz="3400" dirty="0"/>
+          </a:p>
+        </p:txBody>
+      </p:sp>
+      <p:sp>
+        <p:nvSpPr>
+          <p:cNvPr id="9" name="Text 7"/>
+          <p:cNvSpPr/>
+          <p:nvPr/>
+        </p:nvSpPr>
+        <p:spPr>
+          <a:xfrm>
+            <a:off x="868680" y="1508760"/>
+            <a:ext cx="6537960" cy="4160520"/>
           </a:xfrm>
           <a:prstGeom prst="rect">
             <a:avLst/>
@@ -10768,7 +11430,7 @@
           <a:lstStyle/>
           <a:p>
             <a:r>
-              <a:rPr lang="en-US" sz="1700" dirty="0">
+              <a:rPr lang="en-US" sz="2100" dirty="0">
                 <a:solidFill>
                   <a:srgbClr val="17364A"/>
                 </a:solidFill>
@@ -10778,13 +11440,13 @@
               </a:rPr>
               <a:t>Agency privacy, cybersecurity, data governance, procurement, and records management policies</a:t>
             </a:r>
-            <a:endParaRPr lang="en-US" sz="1700" dirty="0"/>
-          </a:p>
-        </p:txBody>
-      </p:sp>
-      <p:sp>
-        <p:nvSpPr>
-          <p:cNvPr id="9" name="Shape 7"/>
+            <a:endParaRPr lang="en-US" sz="2100" dirty="0"/>
+          </a:p>
+        </p:txBody>
+      </p:sp>
+      <p:sp>
+        <p:nvSpPr>
+          <p:cNvPr id="10" name="Shape 8"/>
           <p:cNvSpPr/>
           <p:nvPr/>
         </p:nvSpPr>
@@ -10811,14 +11473,14 @@
       </p:sp>
       <p:sp>
         <p:nvSpPr>
-          <p:cNvPr id="10" name="Text 8"/>
+          <p:cNvPr id="11" name="Text 9"/>
           <p:cNvSpPr/>
           <p:nvPr/>
         </p:nvSpPr>
         <p:spPr>
           <a:xfrm>
             <a:off x="8074152" y="1563624"/>
-            <a:ext cx="2825496" cy="201168"/>
+            <a:ext cx="2825496" cy="256032"/>
           </a:xfrm>
           <a:prstGeom prst="rect">
             <a:avLst/>
@@ -10834,7 +11496,7 @@
               <a:buNone/>
             </a:pPr>
             <a:r>
-              <a:rPr lang="en-US" sz="950" b="1" dirty="0">
+              <a:rPr lang="en-US" sz="1300" b="1" dirty="0">
                 <a:solidFill>
                   <a:srgbClr val="0068B7"/>
                 </a:solidFill>
@@ -10844,20 +11506,20 @@
               </a:rPr>
               <a:t>Key idea</a:t>
             </a:r>
-            <a:endParaRPr lang="en-US" sz="950" dirty="0"/>
-          </a:p>
-        </p:txBody>
-      </p:sp>
-      <p:sp>
-        <p:nvSpPr>
-          <p:cNvPr id="11" name="Text 9"/>
-          <p:cNvSpPr/>
-          <p:nvPr/>
-        </p:nvSpPr>
-        <p:spPr>
-          <a:xfrm>
-            <a:off x="8074152" y="1856232"/>
-            <a:ext cx="2825496" cy="1261872"/>
+            <a:endParaRPr lang="en-US" sz="1300" dirty="0"/>
+          </a:p>
+        </p:txBody>
+      </p:sp>
+      <p:sp>
+        <p:nvSpPr>
+          <p:cNvPr id="12" name="Text 10"/>
+          <p:cNvSpPr/>
+          <p:nvPr/>
+        </p:nvSpPr>
+        <p:spPr>
+          <a:xfrm>
+            <a:off x="8074152" y="1920240"/>
+            <a:ext cx="2825496" cy="1188720"/>
           </a:xfrm>
           <a:prstGeom prst="rect">
             <a:avLst/>
@@ -10875,7 +11537,7 @@
               <a:buNone/>
             </a:pPr>
             <a:r>
-              <a:rPr lang="en-US" sz="1250" dirty="0">
+              <a:rPr lang="en-US" sz="1550" dirty="0">
                 <a:solidFill>
                   <a:srgbClr val="17364A"/>
                 </a:solidFill>
@@ -10885,13 +11547,13 @@
               </a:rPr>
               <a:t>Agency privacy, cybersecurity, data governance, procurement, and records management policies</a:t>
             </a:r>
-            <a:endParaRPr lang="en-US" sz="1250" dirty="0"/>
-          </a:p>
-        </p:txBody>
-      </p:sp>
-      <p:sp>
-        <p:nvSpPr>
-          <p:cNvPr id="12" name="Shape 10"/>
+            <a:endParaRPr lang="en-US" sz="1550" dirty="0"/>
+          </a:p>
+        </p:txBody>
+      </p:sp>
+      <p:sp>
+        <p:nvSpPr>
+          <p:cNvPr id="13" name="Shape 11"/>
           <p:cNvSpPr/>
           <p:nvPr/>
         </p:nvSpPr>
@@ -10918,14 +11580,14 @@
       </p:sp>
       <p:sp>
         <p:nvSpPr>
-          <p:cNvPr id="13" name="Text 11"/>
+          <p:cNvPr id="14" name="Text 12"/>
           <p:cNvSpPr/>
           <p:nvPr/>
         </p:nvSpPr>
         <p:spPr>
           <a:xfrm>
             <a:off x="8074152" y="3666744"/>
-            <a:ext cx="2825496" cy="201168"/>
+            <a:ext cx="2825496" cy="256032"/>
           </a:xfrm>
           <a:prstGeom prst="rect">
             <a:avLst/>
@@ -10941,7 +11603,7 @@
               <a:buNone/>
             </a:pPr>
             <a:r>
-              <a:rPr lang="en-US" sz="950" b="1" dirty="0">
+              <a:rPr lang="en-US" sz="1300" b="1" dirty="0">
                 <a:solidFill>
                   <a:srgbClr val="0068B7"/>
                 </a:solidFill>
@@ -10951,20 +11613,20 @@
               </a:rPr>
               <a:t>Use this for</a:t>
             </a:r>
-            <a:endParaRPr lang="en-US" sz="950" dirty="0"/>
-          </a:p>
-        </p:txBody>
-      </p:sp>
-      <p:sp>
-        <p:nvSpPr>
-          <p:cNvPr id="14" name="Text 12"/>
-          <p:cNvSpPr/>
-          <p:nvPr/>
-        </p:nvSpPr>
-        <p:spPr>
-          <a:xfrm>
-            <a:off x="8074152" y="3959352"/>
-            <a:ext cx="2825496" cy="1170432"/>
+            <a:endParaRPr lang="en-US" sz="1300" dirty="0"/>
+          </a:p>
+        </p:txBody>
+      </p:sp>
+      <p:sp>
+        <p:nvSpPr>
+          <p:cNvPr id="15" name="Text 13"/>
+          <p:cNvSpPr/>
+          <p:nvPr/>
+        </p:nvSpPr>
+        <p:spPr>
+          <a:xfrm>
+            <a:off x="8074152" y="4023360"/>
+            <a:ext cx="2825496" cy="1097280"/>
           </a:xfrm>
           <a:prstGeom prst="rect">
             <a:avLst/>
@@ -10982,7 +11644,7 @@
               <a:buNone/>
             </a:pPr>
             <a:r>
-              <a:rPr lang="en-US" sz="1250" dirty="0">
+              <a:rPr lang="en-US" sz="1550" dirty="0">
                 <a:solidFill>
                   <a:srgbClr val="17364A"/>
                 </a:solidFill>
@@ -10992,7 +11654,7 @@
               </a:rPr>
               <a:t>Connect the concept to public health decisions, safeguards, documentation, or implementation work.</a:t>
             </a:r>
-            <a:endParaRPr lang="en-US" sz="1250" dirty="0"/>
+            <a:endParaRPr lang="en-US" sz="1550" dirty="0"/>
           </a:p>
         </p:txBody>
       </p:sp>
@@ -11189,7 +11851,7 @@
                 <a:ea typeface="Aptos" pitchFamily="34" charset="-122"/>
                 <a:cs typeface="Aptos" pitchFamily="34" charset="-120"/>
               </a:rPr>
-              <a:t>© Paula Soper</a:t>
+              <a:t>Â© Paula Soper</a:t>
             </a:r>
             <a:endParaRPr lang="en-US" sz="800" dirty="0"/>
           </a:p>
@@ -11203,8 +11865,47 @@
         </p:nvSpPr>
         <p:spPr>
           <a:xfrm>
+            <a:off x="11137392" y="6510528"/>
+            <a:ext cx="411480" cy="201168"/>
+          </a:xfrm>
+          <a:prstGeom prst="rect">
+            <a:avLst/>
+          </a:prstGeom>
+          <a:noFill/>
+          <a:ln/>
+        </p:spPr>
+        <p:txBody>
+          <a:bodyPr wrap="square" lIns="0" tIns="0" rIns="0" bIns="0" rtlCol="0" anchor="ctr"/>
+          <a:lstStyle/>
+          <a:p>
+            <a:pPr algn="r" indent="0" marL="0">
+              <a:buNone/>
+            </a:pPr>
+            <a:r>
+              <a:rPr lang="en-US" sz="900" dirty="0">
+                <a:solidFill>
+                  <a:srgbClr val="5F7181"/>
+                </a:solidFill>
+                <a:latin typeface="Aptos" pitchFamily="34" charset="0"/>
+                <a:ea typeface="Aptos" pitchFamily="34" charset="-122"/>
+                <a:cs typeface="Aptos" pitchFamily="34" charset="-120"/>
+              </a:rPr>
+              <a:t>3</a:t>
+            </a:r>
+            <a:endParaRPr lang="en-US" sz="900" dirty="0"/>
+          </a:p>
+        </p:txBody>
+      </p:sp>
+      <p:sp>
+        <p:nvSpPr>
+          <p:cNvPr id="8" name="Text 6"/>
+          <p:cNvSpPr/>
+          <p:nvPr/>
+        </p:nvSpPr>
+        <p:spPr>
+          <a:xfrm>
             <a:off x="640080" y="658368"/>
-            <a:ext cx="10881360" cy="566928"/>
+            <a:ext cx="10881360" cy="713232"/>
           </a:xfrm>
           <a:prstGeom prst="rect">
             <a:avLst/>
@@ -11222,7 +11923,7 @@
               <a:buNone/>
             </a:pPr>
             <a:r>
-              <a:rPr lang="en-US" sz="2700" b="1" dirty="0">
+              <a:rPr lang="en-US" sz="3400" b="1" dirty="0">
                 <a:solidFill>
                   <a:srgbClr val="003A63"/>
                 </a:solidFill>
@@ -11232,20 +11933,20 @@
               </a:rPr>
               <a:t>How this module connects to the playbook</a:t>
             </a:r>
-            <a:endParaRPr lang="en-US" sz="2700" dirty="0"/>
-          </a:p>
-        </p:txBody>
-      </p:sp>
-      <p:sp>
-        <p:nvSpPr>
-          <p:cNvPr id="8" name="Text 6"/>
-          <p:cNvSpPr/>
-          <p:nvPr/>
-        </p:nvSpPr>
-        <p:spPr>
-          <a:xfrm>
-            <a:off x="868680" y="1417320"/>
-            <a:ext cx="6903720" cy="4480560"/>
+            <a:endParaRPr lang="en-US" sz="3400" dirty="0"/>
+          </a:p>
+        </p:txBody>
+      </p:sp>
+      <p:sp>
+        <p:nvSpPr>
+          <p:cNvPr id="9" name="Text 7"/>
+          <p:cNvSpPr/>
+          <p:nvPr/>
+        </p:nvSpPr>
+        <p:spPr>
+          <a:xfrm>
+            <a:off x="868680" y="1508760"/>
+            <a:ext cx="6812280" cy="3977640"/>
           </a:xfrm>
           <a:prstGeom prst="rect">
             <a:avLst/>
@@ -11260,7 +11961,7 @@
           <a:lstStyle/>
           <a:p>
             <a:r>
-              <a:rPr lang="en-US" sz="1540" dirty="0">
+              <a:rPr lang="en-US" sz="1900" dirty="0">
                 <a:solidFill>
                   <a:srgbClr val="17364A"/>
                 </a:solidFill>
@@ -11268,13 +11969,13 @@
                 <a:ea typeface="Aptos" pitchFamily="34" charset="-122"/>
                 <a:cs typeface="Aptos" pitchFamily="34" charset="-120"/>
               </a:rPr>
-              <a:t>Play 11: Build and Deploy AI Solutions - This lesson informs Play 11 by helping learners connect the lesson topic to build and deploy.</a:t>
-            </a:r>
-            <a:endParaRPr lang="en-US" sz="1540" dirty="0"/>
-          </a:p>
-          <a:p>
-            <a:r>
-              <a:rPr lang="en-US" sz="1540" dirty="0">
+              <a:t>Play 11: Build and Deploy AI Solutions - This lesson informs Play 11 by helping learners connect the lesson.</a:t>
+            </a:r>
+            <a:endParaRPr lang="en-US" sz="1900" dirty="0"/>
+          </a:p>
+          <a:p>
+            <a:r>
+              <a:rPr lang="en-US" sz="1900" dirty="0">
                 <a:solidFill>
                   <a:srgbClr val="17364A"/>
                 </a:solidFill>
@@ -11282,13 +11983,13 @@
                 <a:ea typeface="Aptos" pitchFamily="34" charset="-122"/>
                 <a:cs typeface="Aptos" pitchFamily="34" charset="-120"/>
               </a:rPr>
-              <a:t>Play 2: Readiness Assessment - This lesson informs Play 2 by helping learners connect the lesson topic to readiness assessment work.</a:t>
-            </a:r>
-            <a:endParaRPr lang="en-US" sz="1540" dirty="0"/>
-          </a:p>
-          <a:p>
-            <a:r>
-              <a:rPr lang="en-US" sz="1540" dirty="0">
+              <a:t>Play 2: Readiness Assessment - This lesson informs Play 2 by helping learners connect the lesson topic to.</a:t>
+            </a:r>
+            <a:endParaRPr lang="en-US" sz="1900" dirty="0"/>
+          </a:p>
+          <a:p>
+            <a:r>
+              <a:rPr lang="en-US" sz="1900" dirty="0">
                 <a:solidFill>
                   <a:srgbClr val="17364A"/>
                 </a:solidFill>
@@ -11296,13 +11997,13 @@
                 <a:ea typeface="Aptos" pitchFamily="34" charset="-122"/>
                 <a:cs typeface="Aptos" pitchFamily="34" charset="-120"/>
               </a:rPr>
-              <a:t>Play 7: Prioritize Use Cases - This lesson informs Play 7 by helping learners connect the lesson topic to prioritize use cases work.</a:t>
-            </a:r>
-            <a:endParaRPr lang="en-US" sz="1540" dirty="0"/>
-          </a:p>
-          <a:p>
-            <a:r>
-              <a:rPr lang="en-US" sz="1540" dirty="0">
+              <a:t>Play 7: Prioritize Use Cases - This lesson informs Play 7 by helping learners connect the lesson topic to.</a:t>
+            </a:r>
+            <a:endParaRPr lang="en-US" sz="1900" dirty="0"/>
+          </a:p>
+          <a:p>
+            <a:r>
+              <a:rPr lang="en-US" sz="1900" dirty="0">
                 <a:solidFill>
                   <a:srgbClr val="17364A"/>
                 </a:solidFill>
@@ -11310,15 +12011,15 @@
                 <a:ea typeface="Aptos" pitchFamily="34" charset="-122"/>
                 <a:cs typeface="Aptos" pitchFamily="34" charset="-120"/>
               </a:rPr>
-              <a:t>Play 3: Establish AI Governance - This lesson informs Play 3 by helping learners connect the lesson topic to establish ai governance.</a:t>
-            </a:r>
-            <a:endParaRPr lang="en-US" sz="1540" dirty="0"/>
-          </a:p>
-        </p:txBody>
-      </p:sp>
-      <p:sp>
-        <p:nvSpPr>
-          <p:cNvPr id="9" name="Shape 7"/>
+              <a:t>Play 3: Establish AI Governance - This lesson informs Play 3 by helping learners connect the lesson topic to.</a:t>
+            </a:r>
+            <a:endParaRPr lang="en-US" sz="1900" dirty="0"/>
+          </a:p>
+        </p:txBody>
+      </p:sp>
+      <p:sp>
+        <p:nvSpPr>
+          <p:cNvPr id="10" name="Shape 8"/>
           <p:cNvSpPr/>
           <p:nvPr/>
         </p:nvSpPr>
@@ -11345,14 +12046,14 @@
       </p:sp>
       <p:sp>
         <p:nvSpPr>
-          <p:cNvPr id="10" name="Text 8"/>
+          <p:cNvPr id="11" name="Text 9"/>
           <p:cNvSpPr/>
           <p:nvPr/>
         </p:nvSpPr>
         <p:spPr>
           <a:xfrm>
             <a:off x="8211312" y="1563624"/>
-            <a:ext cx="2734056" cy="201168"/>
+            <a:ext cx="2734056" cy="256032"/>
           </a:xfrm>
           <a:prstGeom prst="rect">
             <a:avLst/>
@@ -11368,7 +12069,7 @@
               <a:buNone/>
             </a:pPr>
             <a:r>
-              <a:rPr lang="en-US" sz="950" b="1" dirty="0">
+              <a:rPr lang="en-US" sz="1300" b="1" dirty="0">
                 <a:solidFill>
                   <a:srgbClr val="0068B7"/>
                 </a:solidFill>
@@ -11378,20 +12079,20 @@
               </a:rPr>
               <a:t>Apply the lesson</a:t>
             </a:r>
-            <a:endParaRPr lang="en-US" sz="950" dirty="0"/>
-          </a:p>
-        </p:txBody>
-      </p:sp>
-      <p:sp>
-        <p:nvSpPr>
-          <p:cNvPr id="11" name="Text 9"/>
-          <p:cNvSpPr/>
-          <p:nvPr/>
-        </p:nvSpPr>
-        <p:spPr>
-          <a:xfrm>
-            <a:off x="8211312" y="1856232"/>
-            <a:ext cx="2734056" cy="1536192"/>
+            <a:endParaRPr lang="en-US" sz="1300" dirty="0"/>
+          </a:p>
+        </p:txBody>
+      </p:sp>
+      <p:sp>
+        <p:nvSpPr>
+          <p:cNvPr id="12" name="Text 10"/>
+          <p:cNvSpPr/>
+          <p:nvPr/>
+        </p:nvSpPr>
+        <p:spPr>
+          <a:xfrm>
+            <a:off x="8211312" y="1920240"/>
+            <a:ext cx="2734056" cy="1463040"/>
           </a:xfrm>
           <a:prstGeom prst="rect">
             <a:avLst/>
@@ -11409,7 +12110,7 @@
               <a:buNone/>
             </a:pPr>
             <a:r>
-              <a:rPr lang="en-US" sz="1250" dirty="0">
+              <a:rPr lang="en-US" sz="1550" dirty="0">
                 <a:solidFill>
                   <a:srgbClr val="17364A"/>
                 </a:solidFill>
@@ -11419,32 +12120,32 @@
               </a:rPr>
               <a:t>Use the related plays to identify decisions, participants, timing, approvals, and documentation needed for responsible implementation.</a:t>
             </a:r>
-            <a:endParaRPr lang="en-US" sz="1250" dirty="0"/>
-          </a:p>
-        </p:txBody>
-      </p:sp>
-      <p:sp>
-        <p:nvSpPr>
-          <p:cNvPr id="12" name="Shape 10"/>
-          <p:cNvSpPr/>
-          <p:nvPr/>
-        </p:nvSpPr>
-        <p:spPr>
-          <a:xfrm>
-            <a:off x="8046720" y="3794760"/>
-            <a:ext cx="3063240" cy="1508760"/>
+            <a:endParaRPr lang="en-US" sz="1550" dirty="0"/>
+          </a:p>
+        </p:txBody>
+      </p:sp>
+      <p:sp>
+        <p:nvSpPr>
+          <p:cNvPr id="13" name="Shape 11"/>
+          <p:cNvSpPr/>
+          <p:nvPr/>
+        </p:nvSpPr>
+        <p:spPr>
+          <a:xfrm>
+            <a:off x="7818120" y="3977640"/>
+            <a:ext cx="972312" cy="749808"/>
           </a:xfrm>
           <a:prstGeom prst="roundRect">
             <a:avLst>
-              <a:gd name="adj" fmla="val 7273"/>
+              <a:gd name="adj" fmla="val 14634"/>
             </a:avLst>
           </a:prstGeom>
           <a:solidFill>
-            <a:srgbClr val="FFF4D9"/>
+            <a:srgbClr val="0068B7"/>
           </a:solidFill>
           <a:ln w="12700">
             <a:solidFill>
-              <a:srgbClr val="B9D7E6"/>
+              <a:srgbClr val="0068B7"/>
             </a:solidFill>
             <a:prstDash val="solid"/>
           </a:ln>
@@ -11452,81 +12153,256 @@
       </p:sp>
       <p:sp>
         <p:nvSpPr>
-          <p:cNvPr id="13" name="Text 11"/>
-          <p:cNvSpPr/>
-          <p:nvPr/>
-        </p:nvSpPr>
-        <p:spPr>
-          <a:xfrm>
-            <a:off x="8211312" y="3941064"/>
-            <a:ext cx="2734056" cy="201168"/>
-          </a:xfrm>
-          <a:prstGeom prst="rect">
-            <a:avLst/>
-          </a:prstGeom>
-          <a:noFill/>
-          <a:ln/>
-        </p:spPr>
-        <p:txBody>
-          <a:bodyPr wrap="square" lIns="0" tIns="0" rIns="0" bIns="0" rtlCol="0" anchor="ctr"/>
-          <a:lstStyle/>
-          <a:p>
-            <a:pPr indent="0" marL="0">
-              <a:buNone/>
-            </a:pPr>
-            <a:r>
-              <a:rPr lang="en-US" sz="950" b="1" dirty="0">
-                <a:solidFill>
-                  <a:srgbClr val="0068B7"/>
-                </a:solidFill>
-                <a:latin typeface="Aptos" pitchFamily="34" charset="0"/>
-                <a:ea typeface="Aptos" pitchFamily="34" charset="-122"/>
-                <a:cs typeface="Aptos" pitchFamily="34" charset="-120"/>
-              </a:rPr>
-              <a:t>Keep in mind</a:t>
-            </a:r>
-            <a:endParaRPr lang="en-US" sz="950" dirty="0"/>
-          </a:p>
-        </p:txBody>
-      </p:sp>
-      <p:sp>
-        <p:nvSpPr>
           <p:cNvPr id="14" name="Text 12"/>
           <p:cNvSpPr/>
           <p:nvPr/>
         </p:nvSpPr>
         <p:spPr>
           <a:xfrm>
-            <a:off x="8211312" y="4233672"/>
-            <a:ext cx="2734056" cy="941832"/>
-          </a:xfrm>
-          <a:prstGeom prst="rect">
-            <a:avLst/>
-          </a:prstGeom>
-          <a:noFill/>
-          <a:ln/>
-        </p:spPr>
-        <p:txBody>
-          <a:bodyPr wrap="square" lIns="0" tIns="0" rIns="0" bIns="0" rtlCol="0" anchor="t">
+            <a:off x="7891272" y="4169664"/>
+            <a:ext cx="826008" cy="310896"/>
+          </a:xfrm>
+          <a:prstGeom prst="rect">
+            <a:avLst/>
+          </a:prstGeom>
+          <a:noFill/>
+          <a:ln/>
+        </p:spPr>
+        <p:txBody>
+          <a:bodyPr wrap="square" lIns="0" tIns="0" rIns="0" bIns="0" rtlCol="0" anchor="ctr">
             <a:normAutofit/>
           </a:bodyPr>
           <a:lstStyle/>
           <a:p>
-            <a:pPr indent="0" marL="0">
-              <a:buNone/>
-            </a:pPr>
-            <a:r>
-              <a:rPr lang="en-US" sz="1250" dirty="0">
-                <a:solidFill>
-                  <a:srgbClr val="17364A"/>
-                </a:solidFill>
-                <a:latin typeface="Aptos" pitchFamily="34" charset="0"/>
-                <a:ea typeface="Aptos" pitchFamily="34" charset="-122"/>
-                <a:cs typeface="Aptos" pitchFamily="34" charset="-120"/>
-              </a:rPr>
-              <a:t>The playbook connection helps turn training into agency work, not just individual knowledge.</a:t>
-            </a:r>
-            <a:endParaRPr lang="en-US" sz="1250" dirty="0"/>
+            <a:pPr algn="ctr" indent="0" marL="0">
+              <a:buNone/>
+            </a:pPr>
+            <a:r>
+              <a:rPr lang="en-US" sz="1500" b="1" dirty="0">
+                <a:solidFill>
+                  <a:srgbClr val="FFFFFF"/>
+                </a:solidFill>
+                <a:latin typeface="Aptos" pitchFamily="34" charset="0"/>
+                <a:ea typeface="Aptos" pitchFamily="34" charset="-122"/>
+                <a:cs typeface="Aptos" pitchFamily="34" charset="-120"/>
+              </a:rPr>
+              <a:t>Lesson</a:t>
+            </a:r>
+            <a:endParaRPr lang="en-US" sz="1500" dirty="0"/>
+          </a:p>
+        </p:txBody>
+      </p:sp>
+      <p:sp>
+        <p:nvSpPr>
+          <p:cNvPr id="15" name="Text 13"/>
+          <p:cNvSpPr/>
+          <p:nvPr/>
+        </p:nvSpPr>
+        <p:spPr>
+          <a:xfrm>
+            <a:off x="8817864" y="4187952"/>
+            <a:ext cx="201168" cy="256032"/>
+          </a:xfrm>
+          <a:prstGeom prst="rect">
+            <a:avLst/>
+          </a:prstGeom>
+          <a:noFill/>
+          <a:ln/>
+        </p:spPr>
+        <p:txBody>
+          <a:bodyPr wrap="square" lIns="0" tIns="0" rIns="0" bIns="0" rtlCol="0" anchor="ctr"/>
+          <a:lstStyle/>
+          <a:p>
+            <a:pPr algn="ctr" indent="0" marL="0">
+              <a:buNone/>
+            </a:pPr>
+            <a:r>
+              <a:rPr lang="en-US" sz="1800" b="1" dirty="0">
+                <a:solidFill>
+                  <a:srgbClr val="0068B7"/>
+                </a:solidFill>
+                <a:latin typeface="Aptos" pitchFamily="34" charset="0"/>
+                <a:ea typeface="Aptos" pitchFamily="34" charset="-122"/>
+                <a:cs typeface="Aptos" pitchFamily="34" charset="-120"/>
+              </a:rPr>
+              <a:t>â†’</a:t>
+            </a:r>
+            <a:endParaRPr lang="en-US" sz="1800" dirty="0"/>
+          </a:p>
+        </p:txBody>
+      </p:sp>
+      <p:sp>
+        <p:nvSpPr>
+          <p:cNvPr id="16" name="Shape 14"/>
+          <p:cNvSpPr/>
+          <p:nvPr/>
+        </p:nvSpPr>
+        <p:spPr>
+          <a:xfrm>
+            <a:off x="9046464" y="3977640"/>
+            <a:ext cx="972312" cy="749808"/>
+          </a:xfrm>
+          <a:prstGeom prst="roundRect">
+            <a:avLst>
+              <a:gd name="adj" fmla="val 14634"/>
+            </a:avLst>
+          </a:prstGeom>
+          <a:solidFill>
+            <a:srgbClr val="2F8A28"/>
+          </a:solidFill>
+          <a:ln w="12700">
+            <a:solidFill>
+              <a:srgbClr val="2F8A28"/>
+            </a:solidFill>
+            <a:prstDash val="solid"/>
+          </a:ln>
+        </p:spPr>
+      </p:sp>
+      <p:sp>
+        <p:nvSpPr>
+          <p:cNvPr id="17" name="Text 15"/>
+          <p:cNvSpPr/>
+          <p:nvPr/>
+        </p:nvSpPr>
+        <p:spPr>
+          <a:xfrm>
+            <a:off x="9119616" y="4169664"/>
+            <a:ext cx="826008" cy="310896"/>
+          </a:xfrm>
+          <a:prstGeom prst="rect">
+            <a:avLst/>
+          </a:prstGeom>
+          <a:noFill/>
+          <a:ln/>
+        </p:spPr>
+        <p:txBody>
+          <a:bodyPr wrap="square" lIns="0" tIns="0" rIns="0" bIns="0" rtlCol="0" anchor="ctr">
+            <a:normAutofit/>
+          </a:bodyPr>
+          <a:lstStyle/>
+          <a:p>
+            <a:pPr algn="ctr" indent="0" marL="0">
+              <a:buNone/>
+            </a:pPr>
+            <a:r>
+              <a:rPr lang="en-US" sz="1500" b="1" dirty="0">
+                <a:solidFill>
+                  <a:srgbClr val="FFFFFF"/>
+                </a:solidFill>
+                <a:latin typeface="Aptos" pitchFamily="34" charset="0"/>
+                <a:ea typeface="Aptos" pitchFamily="34" charset="-122"/>
+                <a:cs typeface="Aptos" pitchFamily="34" charset="-120"/>
+              </a:rPr>
+              <a:t>Plays</a:t>
+            </a:r>
+            <a:endParaRPr lang="en-US" sz="1500" dirty="0"/>
+          </a:p>
+        </p:txBody>
+      </p:sp>
+      <p:sp>
+        <p:nvSpPr>
+          <p:cNvPr id="18" name="Text 16"/>
+          <p:cNvSpPr/>
+          <p:nvPr/>
+        </p:nvSpPr>
+        <p:spPr>
+          <a:xfrm>
+            <a:off x="10046208" y="4187952"/>
+            <a:ext cx="201168" cy="256032"/>
+          </a:xfrm>
+          <a:prstGeom prst="rect">
+            <a:avLst/>
+          </a:prstGeom>
+          <a:noFill/>
+          <a:ln/>
+        </p:spPr>
+        <p:txBody>
+          <a:bodyPr wrap="square" lIns="0" tIns="0" rIns="0" bIns="0" rtlCol="0" anchor="ctr"/>
+          <a:lstStyle/>
+          <a:p>
+            <a:pPr algn="ctr" indent="0" marL="0">
+              <a:buNone/>
+            </a:pPr>
+            <a:r>
+              <a:rPr lang="en-US" sz="1800" b="1" dirty="0">
+                <a:solidFill>
+                  <a:srgbClr val="0068B7"/>
+                </a:solidFill>
+                <a:latin typeface="Aptos" pitchFamily="34" charset="0"/>
+                <a:ea typeface="Aptos" pitchFamily="34" charset="-122"/>
+                <a:cs typeface="Aptos" pitchFamily="34" charset="-120"/>
+              </a:rPr>
+              <a:t>â†’</a:t>
+            </a:r>
+            <a:endParaRPr lang="en-US" sz="1800" dirty="0"/>
+          </a:p>
+        </p:txBody>
+      </p:sp>
+      <p:sp>
+        <p:nvSpPr>
+          <p:cNvPr id="19" name="Shape 17"/>
+          <p:cNvSpPr/>
+          <p:nvPr/>
+        </p:nvSpPr>
+        <p:spPr>
+          <a:xfrm>
+            <a:off x="10274808" y="3977640"/>
+            <a:ext cx="972312" cy="749808"/>
+          </a:xfrm>
+          <a:prstGeom prst="roundRect">
+            <a:avLst>
+              <a:gd name="adj" fmla="val 14634"/>
+            </a:avLst>
+          </a:prstGeom>
+          <a:solidFill>
+            <a:srgbClr val="6A4CA3"/>
+          </a:solidFill>
+          <a:ln w="12700">
+            <a:solidFill>
+              <a:srgbClr val="6A4CA3"/>
+            </a:solidFill>
+            <a:prstDash val="solid"/>
+          </a:ln>
+        </p:spPr>
+      </p:sp>
+      <p:sp>
+        <p:nvSpPr>
+          <p:cNvPr id="20" name="Text 18"/>
+          <p:cNvSpPr/>
+          <p:nvPr/>
+        </p:nvSpPr>
+        <p:spPr>
+          <a:xfrm>
+            <a:off x="10347960" y="4169664"/>
+            <a:ext cx="826008" cy="310896"/>
+          </a:xfrm>
+          <a:prstGeom prst="rect">
+            <a:avLst/>
+          </a:prstGeom>
+          <a:noFill/>
+          <a:ln/>
+        </p:spPr>
+        <p:txBody>
+          <a:bodyPr wrap="square" lIns="0" tIns="0" rIns="0" bIns="0" rtlCol="0" anchor="ctr">
+            <a:normAutofit/>
+          </a:bodyPr>
+          <a:lstStyle/>
+          <a:p>
+            <a:pPr algn="ctr" indent="0" marL="0">
+              <a:buNone/>
+            </a:pPr>
+            <a:r>
+              <a:rPr lang="en-US" sz="1500" b="1" dirty="0">
+                <a:solidFill>
+                  <a:srgbClr val="FFFFFF"/>
+                </a:solidFill>
+                <a:latin typeface="Aptos" pitchFamily="34" charset="0"/>
+                <a:ea typeface="Aptos" pitchFamily="34" charset="-122"/>
+                <a:cs typeface="Aptos" pitchFamily="34" charset="-120"/>
+              </a:rPr>
+              <a:t>Action</a:t>
+            </a:r>
+            <a:endParaRPr lang="en-US" sz="1500" dirty="0"/>
           </a:p>
         </p:txBody>
       </p:sp>
@@ -11723,7 +12599,7 @@
                 <a:ea typeface="Aptos" pitchFamily="34" charset="-122"/>
                 <a:cs typeface="Aptos" pitchFamily="34" charset="-120"/>
               </a:rPr>
-              <a:t>© Paula Soper</a:t>
+              <a:t>Â© Paula Soper</a:t>
             </a:r>
             <a:endParaRPr lang="en-US" sz="800" dirty="0"/>
           </a:p>
@@ -11737,8 +12613,47 @@
         </p:nvSpPr>
         <p:spPr>
           <a:xfrm>
+            <a:off x="11137392" y="6510528"/>
+            <a:ext cx="411480" cy="201168"/>
+          </a:xfrm>
+          <a:prstGeom prst="rect">
+            <a:avLst/>
+          </a:prstGeom>
+          <a:noFill/>
+          <a:ln/>
+        </p:spPr>
+        <p:txBody>
+          <a:bodyPr wrap="square" lIns="0" tIns="0" rIns="0" bIns="0" rtlCol="0" anchor="ctr"/>
+          <a:lstStyle/>
+          <a:p>
+            <a:pPr algn="r" indent="0" marL="0">
+              <a:buNone/>
+            </a:pPr>
+            <a:r>
+              <a:rPr lang="en-US" sz="900" dirty="0">
+                <a:solidFill>
+                  <a:srgbClr val="5F7181"/>
+                </a:solidFill>
+                <a:latin typeface="Aptos" pitchFamily="34" charset="0"/>
+                <a:ea typeface="Aptos" pitchFamily="34" charset="-122"/>
+                <a:cs typeface="Aptos" pitchFamily="34" charset="-120"/>
+              </a:rPr>
+              <a:t>4</a:t>
+            </a:r>
+            <a:endParaRPr lang="en-US" sz="900" dirty="0"/>
+          </a:p>
+        </p:txBody>
+      </p:sp>
+      <p:sp>
+        <p:nvSpPr>
+          <p:cNvPr id="8" name="Text 6"/>
+          <p:cNvSpPr/>
+          <p:nvPr/>
+        </p:nvSpPr>
+        <p:spPr>
+          <a:xfrm>
             <a:off x="640080" y="658368"/>
-            <a:ext cx="10881360" cy="566928"/>
+            <a:ext cx="10881360" cy="713232"/>
           </a:xfrm>
           <a:prstGeom prst="rect">
             <a:avLst/>
@@ -11756,7 +12671,7 @@
               <a:buNone/>
             </a:pPr>
             <a:r>
-              <a:rPr lang="en-US" sz="2700" b="1" dirty="0">
+              <a:rPr lang="en-US" sz="3400" b="1" dirty="0">
                 <a:solidFill>
                   <a:srgbClr val="003A63"/>
                 </a:solidFill>
@@ -11766,20 +12681,20 @@
               </a:rPr>
               <a:t>Related toolkit resources</a:t>
             </a:r>
-            <a:endParaRPr lang="en-US" sz="2700" dirty="0"/>
-          </a:p>
-        </p:txBody>
-      </p:sp>
-      <p:sp>
-        <p:nvSpPr>
-          <p:cNvPr id="8" name="Text 6"/>
-          <p:cNvSpPr/>
-          <p:nvPr/>
-        </p:nvSpPr>
-        <p:spPr>
-          <a:xfrm>
-            <a:off x="868680" y="1417320"/>
-            <a:ext cx="6903720" cy="4480560"/>
+            <a:endParaRPr lang="en-US" sz="3400" dirty="0"/>
+          </a:p>
+        </p:txBody>
+      </p:sp>
+      <p:sp>
+        <p:nvSpPr>
+          <p:cNvPr id="9" name="Text 7"/>
+          <p:cNvSpPr/>
+          <p:nvPr/>
+        </p:nvSpPr>
+        <p:spPr>
+          <a:xfrm>
+            <a:off x="868680" y="1508760"/>
+            <a:ext cx="6812280" cy="3977640"/>
           </a:xfrm>
           <a:prstGeom prst="rect">
             <a:avLst/>
@@ -11794,7 +12709,7 @@
           <a:lstStyle/>
           <a:p>
             <a:r>
-              <a:rPr lang="en-US" sz="1460" dirty="0">
+              <a:rPr lang="en-US" sz="1850" dirty="0">
                 <a:solidFill>
                   <a:srgbClr val="17364A"/>
                 </a:solidFill>
@@ -11802,13 +12717,13 @@
                 <a:ea typeface="Aptos" pitchFamily="34" charset="-122"/>
                 <a:cs typeface="Aptos" pitchFamily="34" charset="-120"/>
               </a:rPr>
-              <a:t>Tool 4: AI Policy Landscape Scan (Worksheet) - Use AI Policy Landscape Scan to translate this lesson into a documented public health.</a:t>
-            </a:r>
-            <a:endParaRPr lang="en-US" sz="1460" dirty="0"/>
-          </a:p>
-          <a:p>
-            <a:r>
-              <a:rPr lang="en-US" sz="1460" dirty="0">
+              <a:t>Tool 4: AI Policy Landscape Scan (Worksheet) - Use AI Policy Landscape Scan to translate this lesson into a.</a:t>
+            </a:r>
+            <a:endParaRPr lang="en-US" sz="1850" dirty="0"/>
+          </a:p>
+          <a:p>
+            <a:r>
+              <a:rPr lang="en-US" sz="1850" dirty="0">
                 <a:solidFill>
                   <a:srgbClr val="17364A"/>
                 </a:solidFill>
@@ -11816,13 +12731,13 @@
                 <a:ea typeface="Aptos" pitchFamily="34" charset="-122"/>
                 <a:cs typeface="Aptos" pitchFamily="34" charset="-120"/>
               </a:rPr>
-              <a:t>Tool 5: AI Environmental and Resource Impact Review (Checklist) - Use this tool to complete or strengthen the practical exercise for.</a:t>
-            </a:r>
-            <a:endParaRPr lang="en-US" sz="1460" dirty="0"/>
-          </a:p>
-          <a:p>
-            <a:r>
-              <a:rPr lang="en-US" sz="1460" dirty="0">
+              <a:t>Tool 5: AI Environmental and Resource Impact Review (Checklist) - Use this tool to complete or strengthen.</a:t>
+            </a:r>
+            <a:endParaRPr lang="en-US" sz="1850" dirty="0"/>
+          </a:p>
+          <a:p>
+            <a:r>
+              <a:rPr lang="en-US" sz="1850" dirty="0">
                 <a:solidFill>
                   <a:srgbClr val="17364A"/>
                 </a:solidFill>
@@ -11830,13 +12745,13 @@
                 <a:ea typeface="Aptos" pitchFamily="34" charset="-122"/>
                 <a:cs typeface="Aptos" pitchFamily="34" charset="-120"/>
               </a:rPr>
-              <a:t>Tool 6: Human-Centered AI Decision Rule Checklist (Checklist) - Use Human-Centered AI Decision Rule Checklist to translate this.</a:t>
-            </a:r>
-            <a:endParaRPr lang="en-US" sz="1460" dirty="0"/>
-          </a:p>
-          <a:p>
-            <a:r>
-              <a:rPr lang="en-US" sz="1460" dirty="0">
+              <a:t>Tool 6: Human-Centered AI Decision Rule Checklist (Checklist) - Use Human-Centered AI Decision Rule.</a:t>
+            </a:r>
+            <a:endParaRPr lang="en-US" sz="1850" dirty="0"/>
+          </a:p>
+          <a:p>
+            <a:r>
+              <a:rPr lang="en-US" sz="1850" dirty="0">
                 <a:solidFill>
                   <a:srgbClr val="17364A"/>
                 </a:solidFill>
@@ -11844,29 +12759,15 @@
                 <a:ea typeface="Aptos" pitchFamily="34" charset="-122"/>
                 <a:cs typeface="Aptos" pitchFamily="34" charset="-120"/>
               </a:rPr>
-              <a:t>Tool 8: AI Project Charter (Planning) - Use AI Project Charter to translate this lesson into a documented public health AI planning,.</a:t>
-            </a:r>
-            <a:endParaRPr lang="en-US" sz="1460" dirty="0"/>
-          </a:p>
-          <a:p>
-            <a:r>
-              <a:rPr lang="en-US" sz="1460" dirty="0">
-                <a:solidFill>
-                  <a:srgbClr val="17364A"/>
-                </a:solidFill>
-                <a:latin typeface="Aptos" pitchFamily="34" charset="0"/>
-                <a:ea typeface="Aptos" pitchFamily="34" charset="-122"/>
-                <a:cs typeface="Aptos" pitchFamily="34" charset="-120"/>
-              </a:rPr>
-              <a:t>Tool 9: Data Quality Assessment Checklist (Checklist) - Use this tool to complete or strengthen the practical exercise for the module.</a:t>
-            </a:r>
-            <a:endParaRPr lang="en-US" sz="1460" dirty="0"/>
-          </a:p>
-        </p:txBody>
-      </p:sp>
-      <p:sp>
-        <p:nvSpPr>
-          <p:cNvPr id="9" name="Shape 7"/>
+              <a:t>Tool 8: AI Project Charter (Planning) - Use AI Project Charter to translate this lesson into a documented.</a:t>
+            </a:r>
+            <a:endParaRPr lang="en-US" sz="1850" dirty="0"/>
+          </a:p>
+        </p:txBody>
+      </p:sp>
+      <p:sp>
+        <p:nvSpPr>
+          <p:cNvPr id="10" name="Shape 8"/>
           <p:cNvSpPr/>
           <p:nvPr/>
         </p:nvSpPr>
@@ -11893,14 +12794,14 @@
       </p:sp>
       <p:sp>
         <p:nvSpPr>
-          <p:cNvPr id="10" name="Text 8"/>
+          <p:cNvPr id="11" name="Text 9"/>
           <p:cNvSpPr/>
           <p:nvPr/>
         </p:nvSpPr>
         <p:spPr>
           <a:xfrm>
             <a:off x="8211312" y="1563624"/>
-            <a:ext cx="2734056" cy="201168"/>
+            <a:ext cx="2734056" cy="256032"/>
           </a:xfrm>
           <a:prstGeom prst="rect">
             <a:avLst/>
@@ -11916,7 +12817,7 @@
               <a:buNone/>
             </a:pPr>
             <a:r>
-              <a:rPr lang="en-US" sz="950" b="1" dirty="0">
+              <a:rPr lang="en-US" sz="1300" b="1" dirty="0">
                 <a:solidFill>
                   <a:srgbClr val="0068B7"/>
                 </a:solidFill>
@@ -11926,20 +12827,20 @@
               </a:rPr>
               <a:t>Use the tools</a:t>
             </a:r>
-            <a:endParaRPr lang="en-US" sz="950" dirty="0"/>
-          </a:p>
-        </p:txBody>
-      </p:sp>
-      <p:sp>
-        <p:nvSpPr>
-          <p:cNvPr id="11" name="Text 9"/>
-          <p:cNvSpPr/>
-          <p:nvPr/>
-        </p:nvSpPr>
-        <p:spPr>
-          <a:xfrm>
-            <a:off x="8211312" y="1856232"/>
-            <a:ext cx="2734056" cy="1536192"/>
+            <a:endParaRPr lang="en-US" sz="1300" dirty="0"/>
+          </a:p>
+        </p:txBody>
+      </p:sp>
+      <p:sp>
+        <p:nvSpPr>
+          <p:cNvPr id="12" name="Text 10"/>
+          <p:cNvSpPr/>
+          <p:nvPr/>
+        </p:nvSpPr>
+        <p:spPr>
+          <a:xfrm>
+            <a:off x="8211312" y="1920240"/>
+            <a:ext cx="2734056" cy="1463040"/>
           </a:xfrm>
           <a:prstGeom prst="rect">
             <a:avLst/>
@@ -11957,7 +12858,7 @@
               <a:buNone/>
             </a:pPr>
             <a:r>
-              <a:rPr lang="en-US" sz="1250" dirty="0">
+              <a:rPr lang="en-US" sz="1550" dirty="0">
                 <a:solidFill>
                   <a:srgbClr val="17364A"/>
                 </a:solidFill>
@@ -11967,32 +12868,32 @@
               </a:rPr>
               <a:t>Use linked tools when your department needs a structured worksheet, template, checklist, review process, or documentation artifact.</a:t>
             </a:r>
-            <a:endParaRPr lang="en-US" sz="1250" dirty="0"/>
-          </a:p>
-        </p:txBody>
-      </p:sp>
-      <p:sp>
-        <p:nvSpPr>
-          <p:cNvPr id="12" name="Shape 10"/>
-          <p:cNvSpPr/>
-          <p:nvPr/>
-        </p:nvSpPr>
-        <p:spPr>
-          <a:xfrm>
-            <a:off x="8046720" y="3794760"/>
-            <a:ext cx="3063240" cy="1508760"/>
+            <a:endParaRPr lang="en-US" sz="1550" dirty="0"/>
+          </a:p>
+        </p:txBody>
+      </p:sp>
+      <p:sp>
+        <p:nvSpPr>
+          <p:cNvPr id="13" name="Shape 11"/>
+          <p:cNvSpPr/>
+          <p:nvPr/>
+        </p:nvSpPr>
+        <p:spPr>
+          <a:xfrm>
+            <a:off x="7818120" y="3977640"/>
+            <a:ext cx="972312" cy="749808"/>
           </a:xfrm>
           <a:prstGeom prst="roundRect">
             <a:avLst>
-              <a:gd name="adj" fmla="val 7273"/>
+              <a:gd name="adj" fmla="val 14634"/>
             </a:avLst>
           </a:prstGeom>
           <a:solidFill>
-            <a:srgbClr val="EEF8ED"/>
+            <a:srgbClr val="0068B7"/>
           </a:solidFill>
           <a:ln w="12700">
             <a:solidFill>
-              <a:srgbClr val="B9D7E6"/>
+              <a:srgbClr val="0068B7"/>
             </a:solidFill>
             <a:prstDash val="solid"/>
           </a:ln>
@@ -12000,81 +12901,256 @@
       </p:sp>
       <p:sp>
         <p:nvSpPr>
-          <p:cNvPr id="13" name="Text 11"/>
-          <p:cNvSpPr/>
-          <p:nvPr/>
-        </p:nvSpPr>
-        <p:spPr>
-          <a:xfrm>
-            <a:off x="8211312" y="3941064"/>
-            <a:ext cx="2734056" cy="201168"/>
-          </a:xfrm>
-          <a:prstGeom prst="rect">
-            <a:avLst/>
-          </a:prstGeom>
-          <a:noFill/>
-          <a:ln/>
-        </p:spPr>
-        <p:txBody>
-          <a:bodyPr wrap="square" lIns="0" tIns="0" rIns="0" bIns="0" rtlCol="0" anchor="ctr"/>
-          <a:lstStyle/>
-          <a:p>
-            <a:pPr indent="0" marL="0">
-              <a:buNone/>
-            </a:pPr>
-            <a:r>
-              <a:rPr lang="en-US" sz="950" b="1" dirty="0">
-                <a:solidFill>
-                  <a:srgbClr val="0068B7"/>
-                </a:solidFill>
-                <a:latin typeface="Aptos" pitchFamily="34" charset="0"/>
-                <a:ea typeface="Aptos" pitchFamily="34" charset="-122"/>
-                <a:cs typeface="Aptos" pitchFamily="34" charset="-120"/>
-              </a:rPr>
-              <a:t>Avoid duplication</a:t>
-            </a:r>
-            <a:endParaRPr lang="en-US" sz="950" dirty="0"/>
-          </a:p>
-        </p:txBody>
-      </p:sp>
-      <p:sp>
-        <p:nvSpPr>
           <p:cNvPr id="14" name="Text 12"/>
           <p:cNvSpPr/>
           <p:nvPr/>
         </p:nvSpPr>
         <p:spPr>
           <a:xfrm>
-            <a:off x="8211312" y="4233672"/>
-            <a:ext cx="2734056" cy="941832"/>
-          </a:xfrm>
-          <a:prstGeom prst="rect">
-            <a:avLst/>
-          </a:prstGeom>
-          <a:noFill/>
-          <a:ln/>
-        </p:spPr>
-        <p:txBody>
-          <a:bodyPr wrap="square" lIns="0" tIns="0" rIns="0" bIns="0" rtlCol="0" anchor="t">
+            <a:off x="7891272" y="4169664"/>
+            <a:ext cx="826008" cy="310896"/>
+          </a:xfrm>
+          <a:prstGeom prst="rect">
+            <a:avLst/>
+          </a:prstGeom>
+          <a:noFill/>
+          <a:ln/>
+        </p:spPr>
+        <p:txBody>
+          <a:bodyPr wrap="square" lIns="0" tIns="0" rIns="0" bIns="0" rtlCol="0" anchor="ctr">
             <a:normAutofit/>
           </a:bodyPr>
           <a:lstStyle/>
           <a:p>
-            <a:pPr indent="0" marL="0">
-              <a:buNone/>
-            </a:pPr>
-            <a:r>
-              <a:rPr lang="en-US" sz="1250" dirty="0">
-                <a:solidFill>
-                  <a:srgbClr val="17364A"/>
-                </a:solidFill>
-                <a:latin typeface="Aptos" pitchFamily="34" charset="0"/>
-                <a:ea typeface="Aptos" pitchFamily="34" charset="-122"/>
-                <a:cs typeface="Aptos" pitchFamily="34" charset="-120"/>
-              </a:rPr>
-              <a:t>If your department already has a strong equivalent tool, adapt or use the existing process instead of recreating it.</a:t>
-            </a:r>
-            <a:endParaRPr lang="en-US" sz="1250" dirty="0"/>
+            <a:pPr algn="ctr" indent="0" marL="0">
+              <a:buNone/>
+            </a:pPr>
+            <a:r>
+              <a:rPr lang="en-US" sz="1500" b="1" dirty="0">
+                <a:solidFill>
+                  <a:srgbClr val="FFFFFF"/>
+                </a:solidFill>
+                <a:latin typeface="Aptos" pitchFamily="34" charset="0"/>
+                <a:ea typeface="Aptos" pitchFamily="34" charset="-122"/>
+                <a:cs typeface="Aptos" pitchFamily="34" charset="-120"/>
+              </a:rPr>
+              <a:t>Concept</a:t>
+            </a:r>
+            <a:endParaRPr lang="en-US" sz="1500" dirty="0"/>
+          </a:p>
+        </p:txBody>
+      </p:sp>
+      <p:sp>
+        <p:nvSpPr>
+          <p:cNvPr id="15" name="Text 13"/>
+          <p:cNvSpPr/>
+          <p:nvPr/>
+        </p:nvSpPr>
+        <p:spPr>
+          <a:xfrm>
+            <a:off x="8817864" y="4187952"/>
+            <a:ext cx="201168" cy="256032"/>
+          </a:xfrm>
+          <a:prstGeom prst="rect">
+            <a:avLst/>
+          </a:prstGeom>
+          <a:noFill/>
+          <a:ln/>
+        </p:spPr>
+        <p:txBody>
+          <a:bodyPr wrap="square" lIns="0" tIns="0" rIns="0" bIns="0" rtlCol="0" anchor="ctr"/>
+          <a:lstStyle/>
+          <a:p>
+            <a:pPr algn="ctr" indent="0" marL="0">
+              <a:buNone/>
+            </a:pPr>
+            <a:r>
+              <a:rPr lang="en-US" sz="1800" b="1" dirty="0">
+                <a:solidFill>
+                  <a:srgbClr val="0068B7"/>
+                </a:solidFill>
+                <a:latin typeface="Aptos" pitchFamily="34" charset="0"/>
+                <a:ea typeface="Aptos" pitchFamily="34" charset="-122"/>
+                <a:cs typeface="Aptos" pitchFamily="34" charset="-120"/>
+              </a:rPr>
+              <a:t>â†’</a:t>
+            </a:r>
+            <a:endParaRPr lang="en-US" sz="1800" dirty="0"/>
+          </a:p>
+        </p:txBody>
+      </p:sp>
+      <p:sp>
+        <p:nvSpPr>
+          <p:cNvPr id="16" name="Shape 14"/>
+          <p:cNvSpPr/>
+          <p:nvPr/>
+        </p:nvSpPr>
+        <p:spPr>
+          <a:xfrm>
+            <a:off x="9046464" y="3977640"/>
+            <a:ext cx="972312" cy="749808"/>
+          </a:xfrm>
+          <a:prstGeom prst="roundRect">
+            <a:avLst>
+              <a:gd name="adj" fmla="val 14634"/>
+            </a:avLst>
+          </a:prstGeom>
+          <a:solidFill>
+            <a:srgbClr val="2F8A28"/>
+          </a:solidFill>
+          <a:ln w="12700">
+            <a:solidFill>
+              <a:srgbClr val="2F8A28"/>
+            </a:solidFill>
+            <a:prstDash val="solid"/>
+          </a:ln>
+        </p:spPr>
+      </p:sp>
+      <p:sp>
+        <p:nvSpPr>
+          <p:cNvPr id="17" name="Text 15"/>
+          <p:cNvSpPr/>
+          <p:nvPr/>
+        </p:nvSpPr>
+        <p:spPr>
+          <a:xfrm>
+            <a:off x="9119616" y="4169664"/>
+            <a:ext cx="826008" cy="310896"/>
+          </a:xfrm>
+          <a:prstGeom prst="rect">
+            <a:avLst/>
+          </a:prstGeom>
+          <a:noFill/>
+          <a:ln/>
+        </p:spPr>
+        <p:txBody>
+          <a:bodyPr wrap="square" lIns="0" tIns="0" rIns="0" bIns="0" rtlCol="0" anchor="ctr">
+            <a:normAutofit/>
+          </a:bodyPr>
+          <a:lstStyle/>
+          <a:p>
+            <a:pPr algn="ctr" indent="0" marL="0">
+              <a:buNone/>
+            </a:pPr>
+            <a:r>
+              <a:rPr lang="en-US" sz="1500" b="1" dirty="0">
+                <a:solidFill>
+                  <a:srgbClr val="FFFFFF"/>
+                </a:solidFill>
+                <a:latin typeface="Aptos" pitchFamily="34" charset="0"/>
+                <a:ea typeface="Aptos" pitchFamily="34" charset="-122"/>
+                <a:cs typeface="Aptos" pitchFamily="34" charset="-120"/>
+              </a:rPr>
+              <a:t>Tool</a:t>
+            </a:r>
+            <a:endParaRPr lang="en-US" sz="1500" dirty="0"/>
+          </a:p>
+        </p:txBody>
+      </p:sp>
+      <p:sp>
+        <p:nvSpPr>
+          <p:cNvPr id="18" name="Text 16"/>
+          <p:cNvSpPr/>
+          <p:nvPr/>
+        </p:nvSpPr>
+        <p:spPr>
+          <a:xfrm>
+            <a:off x="10046208" y="4187952"/>
+            <a:ext cx="201168" cy="256032"/>
+          </a:xfrm>
+          <a:prstGeom prst="rect">
+            <a:avLst/>
+          </a:prstGeom>
+          <a:noFill/>
+          <a:ln/>
+        </p:spPr>
+        <p:txBody>
+          <a:bodyPr wrap="square" lIns="0" tIns="0" rIns="0" bIns="0" rtlCol="0" anchor="ctr"/>
+          <a:lstStyle/>
+          <a:p>
+            <a:pPr algn="ctr" indent="0" marL="0">
+              <a:buNone/>
+            </a:pPr>
+            <a:r>
+              <a:rPr lang="en-US" sz="1800" b="1" dirty="0">
+                <a:solidFill>
+                  <a:srgbClr val="0068B7"/>
+                </a:solidFill>
+                <a:latin typeface="Aptos" pitchFamily="34" charset="0"/>
+                <a:ea typeface="Aptos" pitchFamily="34" charset="-122"/>
+                <a:cs typeface="Aptos" pitchFamily="34" charset="-120"/>
+              </a:rPr>
+              <a:t>â†’</a:t>
+            </a:r>
+            <a:endParaRPr lang="en-US" sz="1800" dirty="0"/>
+          </a:p>
+        </p:txBody>
+      </p:sp>
+      <p:sp>
+        <p:nvSpPr>
+          <p:cNvPr id="19" name="Shape 17"/>
+          <p:cNvSpPr/>
+          <p:nvPr/>
+        </p:nvSpPr>
+        <p:spPr>
+          <a:xfrm>
+            <a:off x="10274808" y="3977640"/>
+            <a:ext cx="972312" cy="749808"/>
+          </a:xfrm>
+          <a:prstGeom prst="roundRect">
+            <a:avLst>
+              <a:gd name="adj" fmla="val 14634"/>
+            </a:avLst>
+          </a:prstGeom>
+          <a:solidFill>
+            <a:srgbClr val="D69A2D"/>
+          </a:solidFill>
+          <a:ln w="12700">
+            <a:solidFill>
+              <a:srgbClr val="D69A2D"/>
+            </a:solidFill>
+            <a:prstDash val="solid"/>
+          </a:ln>
+        </p:spPr>
+      </p:sp>
+      <p:sp>
+        <p:nvSpPr>
+          <p:cNvPr id="20" name="Text 18"/>
+          <p:cNvSpPr/>
+          <p:nvPr/>
+        </p:nvSpPr>
+        <p:spPr>
+          <a:xfrm>
+            <a:off x="10347960" y="4169664"/>
+            <a:ext cx="826008" cy="310896"/>
+          </a:xfrm>
+          <a:prstGeom prst="rect">
+            <a:avLst/>
+          </a:prstGeom>
+          <a:noFill/>
+          <a:ln/>
+        </p:spPr>
+        <p:txBody>
+          <a:bodyPr wrap="square" lIns="0" tIns="0" rIns="0" bIns="0" rtlCol="0" anchor="ctr">
+            <a:normAutofit/>
+          </a:bodyPr>
+          <a:lstStyle/>
+          <a:p>
+            <a:pPr algn="ctr" indent="0" marL="0">
+              <a:buNone/>
+            </a:pPr>
+            <a:r>
+              <a:rPr lang="en-US" sz="1500" b="1" dirty="0">
+                <a:solidFill>
+                  <a:srgbClr val="FFFFFF"/>
+                </a:solidFill>
+                <a:latin typeface="Aptos" pitchFamily="34" charset="0"/>
+                <a:ea typeface="Aptos" pitchFamily="34" charset="-122"/>
+                <a:cs typeface="Aptos" pitchFamily="34" charset="-120"/>
+              </a:rPr>
+              <a:t>Artifact</a:t>
+            </a:r>
+            <a:endParaRPr lang="en-US" sz="1500" dirty="0"/>
           </a:p>
         </p:txBody>
       </p:sp>
@@ -12271,7 +13347,7 @@
                 <a:ea typeface="Aptos" pitchFamily="34" charset="-122"/>
                 <a:cs typeface="Aptos" pitchFamily="34" charset="-120"/>
               </a:rPr>
-              <a:t>© Paula Soper</a:t>
+              <a:t>Â© Paula Soper</a:t>
             </a:r>
             <a:endParaRPr lang="en-US" sz="800" dirty="0"/>
           </a:p>
@@ -12279,7 +13355,46 @@
       </p:sp>
       <p:sp>
         <p:nvSpPr>
-          <p:cNvPr id="7" name="Shape 5"/>
+          <p:cNvPr id="7" name="Text 5"/>
+          <p:cNvSpPr/>
+          <p:nvPr/>
+        </p:nvSpPr>
+        <p:spPr>
+          <a:xfrm>
+            <a:off x="11137392" y="6510528"/>
+            <a:ext cx="411480" cy="201168"/>
+          </a:xfrm>
+          <a:prstGeom prst="rect">
+            <a:avLst/>
+          </a:prstGeom>
+          <a:noFill/>
+          <a:ln/>
+        </p:spPr>
+        <p:txBody>
+          <a:bodyPr wrap="square" lIns="0" tIns="0" rIns="0" bIns="0" rtlCol="0" anchor="ctr"/>
+          <a:lstStyle/>
+          <a:p>
+            <a:pPr algn="r" indent="0" marL="0">
+              <a:buNone/>
+            </a:pPr>
+            <a:r>
+              <a:rPr lang="en-US" sz="900" dirty="0">
+                <a:solidFill>
+                  <a:srgbClr val="5F7181"/>
+                </a:solidFill>
+                <a:latin typeface="Aptos" pitchFamily="34" charset="0"/>
+                <a:ea typeface="Aptos" pitchFamily="34" charset="-122"/>
+                <a:cs typeface="Aptos" pitchFamily="34" charset="-120"/>
+              </a:rPr>
+              <a:t>5</a:t>
+            </a:r>
+            <a:endParaRPr lang="en-US" sz="900" dirty="0"/>
+          </a:p>
+        </p:txBody>
+      </p:sp>
+      <p:sp>
+        <p:nvSpPr>
+          <p:cNvPr id="8" name="Shape 6"/>
           <p:cNvSpPr/>
           <p:nvPr/>
         </p:nvSpPr>
@@ -12304,7 +13419,7 @@
       </p:sp>
       <p:sp>
         <p:nvSpPr>
-          <p:cNvPr id="8" name="Text 6"/>
+          <p:cNvPr id="9" name="Text 7"/>
           <p:cNvSpPr/>
           <p:nvPr/>
         </p:nvSpPr>
@@ -12343,14 +13458,14 @@
       </p:sp>
       <p:sp>
         <p:nvSpPr>
-          <p:cNvPr id="9" name="Text 7"/>
+          <p:cNvPr id="10" name="Text 8"/>
           <p:cNvSpPr/>
           <p:nvPr/>
         </p:nvSpPr>
         <p:spPr>
           <a:xfrm>
             <a:off x="640080" y="621792"/>
-            <a:ext cx="10881360" cy="566928"/>
+            <a:ext cx="10881360" cy="713232"/>
           </a:xfrm>
           <a:prstGeom prst="rect">
             <a:avLst/>
@@ -12368,7 +13483,7 @@
               <a:buNone/>
             </a:pPr>
             <a:r>
-              <a:rPr lang="en-US" sz="2700" b="1" dirty="0">
+              <a:rPr lang="en-US" sz="3400" b="1" dirty="0">
                 <a:solidFill>
                   <a:srgbClr val="003A63"/>
                 </a:solidFill>
@@ -12378,20 +13493,20 @@
               </a:rPr>
               <a:t>Learning Objectives</a:t>
             </a:r>
-            <a:endParaRPr lang="en-US" sz="2700" dirty="0"/>
-          </a:p>
-        </p:txBody>
-      </p:sp>
-      <p:sp>
-        <p:nvSpPr>
-          <p:cNvPr id="10" name="Text 8"/>
-          <p:cNvSpPr/>
-          <p:nvPr/>
-        </p:nvSpPr>
-        <p:spPr>
-          <a:xfrm>
-            <a:off x="868680" y="1417320"/>
-            <a:ext cx="6675120" cy="4434840"/>
+            <a:endParaRPr lang="en-US" sz="3400" dirty="0"/>
+          </a:p>
+        </p:txBody>
+      </p:sp>
+      <p:sp>
+        <p:nvSpPr>
+          <p:cNvPr id="11" name="Text 9"/>
+          <p:cNvSpPr/>
+          <p:nvPr/>
+        </p:nvSpPr>
+        <p:spPr>
+          <a:xfrm>
+            <a:off x="868680" y="1508760"/>
+            <a:ext cx="6537960" cy="4160520"/>
           </a:xfrm>
           <a:prstGeom prst="rect">
             <a:avLst/>
@@ -12406,7 +13521,7 @@
           <a:lstStyle/>
           <a:p>
             <a:r>
-              <a:rPr lang="en-US" sz="1700" dirty="0">
+              <a:rPr lang="en-US" sz="2100" dirty="0">
                 <a:solidFill>
                   <a:srgbClr val="17364A"/>
                 </a:solidFill>
@@ -12414,13 +13529,13 @@
                 <a:ea typeface="Aptos" pitchFamily="34" charset="-122"/>
                 <a:cs typeface="Aptos" pitchFamily="34" charset="-120"/>
               </a:rPr>
-              <a:t>Explain the purpose of requirements writing for ai procurement and implementation in public health AI work.</a:t>
-            </a:r>
-            <a:endParaRPr lang="en-US" sz="1700" dirty="0"/>
-          </a:p>
-          <a:p>
-            <a:r>
-              <a:rPr lang="en-US" sz="1700" dirty="0">
+              <a:t>Explain the purpose of requirements writing for ai procurement and implementation in public health AI.</a:t>
+            </a:r>
+            <a:endParaRPr lang="en-US" sz="2100" dirty="0"/>
+          </a:p>
+          <a:p>
+            <a:r>
+              <a:rPr lang="en-US" sz="2100" dirty="0">
                 <a:solidFill>
                   <a:srgbClr val="17364A"/>
                 </a:solidFill>
@@ -12428,13 +13543,13 @@
                 <a:ea typeface="Aptos" pitchFamily="34" charset="-122"/>
                 <a:cs typeface="Aptos" pitchFamily="34" charset="-120"/>
               </a:rPr>
-              <a:t>Identify the technical, operational, privacy, security, equity, and governance issues associated with the topic.</a:t>
-            </a:r>
-            <a:endParaRPr lang="en-US" sz="1700" dirty="0"/>
-          </a:p>
-          <a:p>
-            <a:r>
-              <a:rPr lang="en-US" sz="1700" dirty="0">
+              <a:t>Identify the technical, operational, privacy, security, equity, and governance issues associated with.</a:t>
+            </a:r>
+            <a:endParaRPr lang="en-US" sz="2100" dirty="0"/>
+          </a:p>
+          <a:p>
+            <a:r>
+              <a:rPr lang="en-US" sz="2100" dirty="0">
                 <a:solidFill>
                   <a:srgbClr val="17364A"/>
                 </a:solidFill>
@@ -12444,27 +13559,13 @@
               </a:rPr>
               <a:t>Apply the topic to a real or realistic public health workflow, system, or implementation scenario.</a:t>
             </a:r>
-            <a:endParaRPr lang="en-US" sz="1700" dirty="0"/>
-          </a:p>
-          <a:p>
-            <a:r>
-              <a:rPr lang="en-US" sz="1700" dirty="0">
-                <a:solidFill>
-                  <a:srgbClr val="17364A"/>
-                </a:solidFill>
-                <a:latin typeface="Aptos" pitchFamily="34" charset="0"/>
-                <a:ea typeface="Aptos" pitchFamily="34" charset="-122"/>
-                <a:cs typeface="Aptos" pitchFamily="34" charset="-120"/>
-              </a:rPr>
-              <a:t>Recognize common failure modes that can affect safety, accuracy, trust, workflow fit, or sustainability.</a:t>
-            </a:r>
-            <a:endParaRPr lang="en-US" sz="1700" dirty="0"/>
-          </a:p>
-        </p:txBody>
-      </p:sp>
-      <p:sp>
-        <p:nvSpPr>
-          <p:cNvPr id="11" name="Shape 9"/>
+            <a:endParaRPr lang="en-US" sz="2100" dirty="0"/>
+          </a:p>
+        </p:txBody>
+      </p:sp>
+      <p:sp>
+        <p:nvSpPr>
+          <p:cNvPr id="12" name="Shape 10"/>
           <p:cNvSpPr/>
           <p:nvPr/>
         </p:nvSpPr>
@@ -12491,14 +13592,14 @@
       </p:sp>
       <p:sp>
         <p:nvSpPr>
-          <p:cNvPr id="12" name="Text 10"/>
+          <p:cNvPr id="13" name="Text 11"/>
           <p:cNvSpPr/>
           <p:nvPr/>
         </p:nvSpPr>
         <p:spPr>
           <a:xfrm>
             <a:off x="8074152" y="1563624"/>
-            <a:ext cx="2825496" cy="201168"/>
+            <a:ext cx="2825496" cy="256032"/>
           </a:xfrm>
           <a:prstGeom prst="rect">
             <a:avLst/>
@@ -12514,7 +13615,7 @@
               <a:buNone/>
             </a:pPr>
             <a:r>
-              <a:rPr lang="en-US" sz="950" b="1" dirty="0">
+              <a:rPr lang="en-US" sz="1300" b="1" dirty="0">
                 <a:solidFill>
                   <a:srgbClr val="0068B7"/>
                 </a:solidFill>
@@ -12524,20 +13625,20 @@
               </a:rPr>
               <a:t>Key idea</a:t>
             </a:r>
-            <a:endParaRPr lang="en-US" sz="950" dirty="0"/>
-          </a:p>
-        </p:txBody>
-      </p:sp>
-      <p:sp>
-        <p:nvSpPr>
-          <p:cNvPr id="13" name="Text 11"/>
-          <p:cNvSpPr/>
-          <p:nvPr/>
-        </p:nvSpPr>
-        <p:spPr>
-          <a:xfrm>
-            <a:off x="8074152" y="1856232"/>
-            <a:ext cx="2825496" cy="1261872"/>
+            <a:endParaRPr lang="en-US" sz="1300" dirty="0"/>
+          </a:p>
+        </p:txBody>
+      </p:sp>
+      <p:sp>
+        <p:nvSpPr>
+          <p:cNvPr id="14" name="Text 12"/>
+          <p:cNvSpPr/>
+          <p:nvPr/>
+        </p:nvSpPr>
+        <p:spPr>
+          <a:xfrm>
+            <a:off x="8074152" y="1920240"/>
+            <a:ext cx="2825496" cy="1188720"/>
           </a:xfrm>
           <a:prstGeom prst="rect">
             <a:avLst/>
@@ -12555,7 +13656,7 @@
               <a:buNone/>
             </a:pPr>
             <a:r>
-              <a:rPr lang="en-US" sz="1250" dirty="0">
+              <a:rPr lang="en-US" sz="1550" dirty="0">
                 <a:solidFill>
                   <a:srgbClr val="17364A"/>
                 </a:solidFill>
@@ -12563,15 +13664,15 @@
                 <a:ea typeface="Aptos" pitchFamily="34" charset="-122"/>
                 <a:cs typeface="Aptos" pitchFamily="34" charset="-120"/>
               </a:rPr>
-              <a:t>Explain the purpose of requirements writing for ai procurement and implementation in public health AI work.</a:t>
-            </a:r>
-            <a:endParaRPr lang="en-US" sz="1250" dirty="0"/>
-          </a:p>
-        </p:txBody>
-      </p:sp>
-      <p:sp>
-        <p:nvSpPr>
-          <p:cNvPr id="14" name="Shape 12"/>
+              <a:t>Explain the purpose of requirements writing for ai procurement and implementation in public health AI.</a:t>
+            </a:r>
+            <a:endParaRPr lang="en-US" sz="1550" dirty="0"/>
+          </a:p>
+        </p:txBody>
+      </p:sp>
+      <p:sp>
+        <p:nvSpPr>
+          <p:cNvPr id="15" name="Shape 13"/>
           <p:cNvSpPr/>
           <p:nvPr/>
         </p:nvSpPr>
@@ -12598,14 +13699,14 @@
       </p:sp>
       <p:sp>
         <p:nvSpPr>
-          <p:cNvPr id="15" name="Text 13"/>
+          <p:cNvPr id="16" name="Text 14"/>
           <p:cNvSpPr/>
           <p:nvPr/>
         </p:nvSpPr>
         <p:spPr>
           <a:xfrm>
             <a:off x="8074152" y="3666744"/>
-            <a:ext cx="2825496" cy="201168"/>
+            <a:ext cx="2825496" cy="256032"/>
           </a:xfrm>
           <a:prstGeom prst="rect">
             <a:avLst/>
@@ -12621,7 +13722,7 @@
               <a:buNone/>
             </a:pPr>
             <a:r>
-              <a:rPr lang="en-US" sz="950" b="1" dirty="0">
+              <a:rPr lang="en-US" sz="1300" b="1" dirty="0">
                 <a:solidFill>
                   <a:srgbClr val="0068B7"/>
                 </a:solidFill>
@@ -12631,20 +13732,20 @@
               </a:rPr>
               <a:t>Use this for</a:t>
             </a:r>
-            <a:endParaRPr lang="en-US" sz="950" dirty="0"/>
-          </a:p>
-        </p:txBody>
-      </p:sp>
-      <p:sp>
-        <p:nvSpPr>
-          <p:cNvPr id="16" name="Text 14"/>
-          <p:cNvSpPr/>
-          <p:nvPr/>
-        </p:nvSpPr>
-        <p:spPr>
-          <a:xfrm>
-            <a:off x="8074152" y="3959352"/>
-            <a:ext cx="2825496" cy="1170432"/>
+            <a:endParaRPr lang="en-US" sz="1300" dirty="0"/>
+          </a:p>
+        </p:txBody>
+      </p:sp>
+      <p:sp>
+        <p:nvSpPr>
+          <p:cNvPr id="17" name="Text 15"/>
+          <p:cNvSpPr/>
+          <p:nvPr/>
+        </p:nvSpPr>
+        <p:spPr>
+          <a:xfrm>
+            <a:off x="8074152" y="4023360"/>
+            <a:ext cx="2825496" cy="1097280"/>
           </a:xfrm>
           <a:prstGeom prst="rect">
             <a:avLst/>
@@ -12662,7 +13763,7 @@
               <a:buNone/>
             </a:pPr>
             <a:r>
-              <a:rPr lang="en-US" sz="1250" dirty="0">
+              <a:rPr lang="en-US" sz="1550" dirty="0">
                 <a:solidFill>
                   <a:srgbClr val="17364A"/>
                 </a:solidFill>
@@ -12672,7 +13773,7 @@
               </a:rPr>
               <a:t>Connect the concept to public health decisions, safeguards, documentation, or implementation work.</a:t>
             </a:r>
-            <a:endParaRPr lang="en-US" sz="1250" dirty="0"/>
+            <a:endParaRPr lang="en-US" sz="1550" dirty="0"/>
           </a:p>
         </p:txBody>
       </p:sp>
@@ -12869,7 +13970,7 @@
                 <a:ea typeface="Aptos" pitchFamily="34" charset="-122"/>
                 <a:cs typeface="Aptos" pitchFamily="34" charset="-120"/>
               </a:rPr>
-              <a:t>© Paula Soper</a:t>
+              <a:t>Â© Paula Soper</a:t>
             </a:r>
             <a:endParaRPr lang="en-US" sz="800" dirty="0"/>
           </a:p>
@@ -12883,8 +13984,47 @@
         </p:nvSpPr>
         <p:spPr>
           <a:xfrm>
+            <a:off x="11137392" y="6510528"/>
+            <a:ext cx="411480" cy="201168"/>
+          </a:xfrm>
+          <a:prstGeom prst="rect">
+            <a:avLst/>
+          </a:prstGeom>
+          <a:noFill/>
+          <a:ln/>
+        </p:spPr>
+        <p:txBody>
+          <a:bodyPr wrap="square" lIns="0" tIns="0" rIns="0" bIns="0" rtlCol="0" anchor="ctr"/>
+          <a:lstStyle/>
+          <a:p>
+            <a:pPr algn="r" indent="0" marL="0">
+              <a:buNone/>
+            </a:pPr>
+            <a:r>
+              <a:rPr lang="en-US" sz="900" dirty="0">
+                <a:solidFill>
+                  <a:srgbClr val="5F7181"/>
+                </a:solidFill>
+                <a:latin typeface="Aptos" pitchFamily="34" charset="0"/>
+                <a:ea typeface="Aptos" pitchFamily="34" charset="-122"/>
+                <a:cs typeface="Aptos" pitchFamily="34" charset="-120"/>
+              </a:rPr>
+              <a:t>6</a:t>
+            </a:r>
+            <a:endParaRPr lang="en-US" sz="900" dirty="0"/>
+          </a:p>
+        </p:txBody>
+      </p:sp>
+      <p:sp>
+        <p:nvSpPr>
+          <p:cNvPr id="8" name="Text 6"/>
+          <p:cNvSpPr/>
+          <p:nvPr/>
+        </p:nvSpPr>
+        <p:spPr>
+          <a:xfrm>
             <a:off x="640080" y="658368"/>
-            <a:ext cx="10881360" cy="566928"/>
+            <a:ext cx="10881360" cy="713232"/>
           </a:xfrm>
           <a:prstGeom prst="rect">
             <a:avLst/>
@@ -12902,7 +14042,7 @@
               <a:buNone/>
             </a:pPr>
             <a:r>
-              <a:rPr lang="en-US" sz="2700" b="1" dirty="0">
+              <a:rPr lang="en-US" sz="3400" b="1" dirty="0">
                 <a:solidFill>
                   <a:srgbClr val="003A63"/>
                 </a:solidFill>
@@ -12912,20 +14052,20 @@
               </a:rPr>
               <a:t>Learning Objectives Continued</a:t>
             </a:r>
-            <a:endParaRPr lang="en-US" sz="2700" dirty="0"/>
-          </a:p>
-        </p:txBody>
-      </p:sp>
-      <p:sp>
-        <p:nvSpPr>
-          <p:cNvPr id="8" name="Text 6"/>
-          <p:cNvSpPr/>
-          <p:nvPr/>
-        </p:nvSpPr>
-        <p:spPr>
-          <a:xfrm>
-            <a:off x="868680" y="1417320"/>
-            <a:ext cx="6675120" cy="4434840"/>
+            <a:endParaRPr lang="en-US" sz="3400" dirty="0"/>
+          </a:p>
+        </p:txBody>
+      </p:sp>
+      <p:sp>
+        <p:nvSpPr>
+          <p:cNvPr id="9" name="Text 7"/>
+          <p:cNvSpPr/>
+          <p:nvPr/>
+        </p:nvSpPr>
+        <p:spPr>
+          <a:xfrm>
+            <a:off x="868680" y="1508760"/>
+            <a:ext cx="6537960" cy="4160520"/>
           </a:xfrm>
           <a:prstGeom prst="rect">
             <a:avLst/>
@@ -12940,7 +14080,7 @@
           <a:lstStyle/>
           <a:p>
             <a:r>
-              <a:rPr lang="en-US" sz="1700" dirty="0">
+              <a:rPr lang="en-US" sz="2100" dirty="0">
                 <a:solidFill>
                   <a:srgbClr val="17364A"/>
                 </a:solidFill>
@@ -12948,15 +14088,15 @@
                 <a:ea typeface="Aptos" pitchFamily="34" charset="-122"/>
                 <a:cs typeface="Aptos" pitchFamily="34" charset="-120"/>
               </a:rPr>
-              <a:t>Produce a AI requirements matrix that can support readiness assessment, governance review, procurement, implementation, or.</a:t>
-            </a:r>
-            <a:endParaRPr lang="en-US" sz="1700" dirty="0"/>
-          </a:p>
-        </p:txBody>
-      </p:sp>
-      <p:sp>
-        <p:nvSpPr>
-          <p:cNvPr id="9" name="Shape 7"/>
+              <a:t>Produce a AI requirements matrix that can support readiness assessment, governance review, procurement,.</a:t>
+            </a:r>
+            <a:endParaRPr lang="en-US" sz="2100" dirty="0"/>
+          </a:p>
+        </p:txBody>
+      </p:sp>
+      <p:sp>
+        <p:nvSpPr>
+          <p:cNvPr id="10" name="Shape 8"/>
           <p:cNvSpPr/>
           <p:nvPr/>
         </p:nvSpPr>
@@ -12983,14 +14123,14 @@
       </p:sp>
       <p:sp>
         <p:nvSpPr>
-          <p:cNvPr id="10" name="Text 8"/>
+          <p:cNvPr id="11" name="Text 9"/>
           <p:cNvSpPr/>
           <p:nvPr/>
         </p:nvSpPr>
         <p:spPr>
           <a:xfrm>
             <a:off x="8074152" y="1563624"/>
-            <a:ext cx="2825496" cy="201168"/>
+            <a:ext cx="2825496" cy="256032"/>
           </a:xfrm>
           <a:prstGeom prst="rect">
             <a:avLst/>
@@ -13006,7 +14146,7 @@
               <a:buNone/>
             </a:pPr>
             <a:r>
-              <a:rPr lang="en-US" sz="950" b="1" dirty="0">
+              <a:rPr lang="en-US" sz="1300" b="1" dirty="0">
                 <a:solidFill>
                   <a:srgbClr val="0068B7"/>
                 </a:solidFill>
@@ -13016,20 +14156,20 @@
               </a:rPr>
               <a:t>Key idea</a:t>
             </a:r>
-            <a:endParaRPr lang="en-US" sz="950" dirty="0"/>
-          </a:p>
-        </p:txBody>
-      </p:sp>
-      <p:sp>
-        <p:nvSpPr>
-          <p:cNvPr id="11" name="Text 9"/>
-          <p:cNvSpPr/>
-          <p:nvPr/>
-        </p:nvSpPr>
-        <p:spPr>
-          <a:xfrm>
-            <a:off x="8074152" y="1856232"/>
-            <a:ext cx="2825496" cy="1261872"/>
+            <a:endParaRPr lang="en-US" sz="1300" dirty="0"/>
+          </a:p>
+        </p:txBody>
+      </p:sp>
+      <p:sp>
+        <p:nvSpPr>
+          <p:cNvPr id="12" name="Text 10"/>
+          <p:cNvSpPr/>
+          <p:nvPr/>
+        </p:nvSpPr>
+        <p:spPr>
+          <a:xfrm>
+            <a:off x="8074152" y="1920240"/>
+            <a:ext cx="2825496" cy="1188720"/>
           </a:xfrm>
           <a:prstGeom prst="rect">
             <a:avLst/>
@@ -13047,7 +14187,7 @@
               <a:buNone/>
             </a:pPr>
             <a:r>
-              <a:rPr lang="en-US" sz="1250" dirty="0">
+              <a:rPr lang="en-US" sz="1550" dirty="0">
                 <a:solidFill>
                   <a:srgbClr val="17364A"/>
                 </a:solidFill>
@@ -13055,15 +14195,15 @@
                 <a:ea typeface="Aptos" pitchFamily="34" charset="-122"/>
                 <a:cs typeface="Aptos" pitchFamily="34" charset="-120"/>
               </a:rPr>
-              <a:t>Produce a AI requirements matrix that can support readiness assessment, governance review, procurement, implementation, or.</a:t>
-            </a:r>
-            <a:endParaRPr lang="en-US" sz="1250" dirty="0"/>
-          </a:p>
-        </p:txBody>
-      </p:sp>
-      <p:sp>
-        <p:nvSpPr>
-          <p:cNvPr id="12" name="Shape 10"/>
+              <a:t>Produce a AI requirements matrix that can support readiness assessment, governance review, procurement,.</a:t>
+            </a:r>
+            <a:endParaRPr lang="en-US" sz="1550" dirty="0"/>
+          </a:p>
+        </p:txBody>
+      </p:sp>
+      <p:sp>
+        <p:nvSpPr>
+          <p:cNvPr id="13" name="Shape 11"/>
           <p:cNvSpPr/>
           <p:nvPr/>
         </p:nvSpPr>
@@ -13090,14 +14230,14 @@
       </p:sp>
       <p:sp>
         <p:nvSpPr>
-          <p:cNvPr id="13" name="Text 11"/>
+          <p:cNvPr id="14" name="Text 12"/>
           <p:cNvSpPr/>
           <p:nvPr/>
         </p:nvSpPr>
         <p:spPr>
           <a:xfrm>
             <a:off x="8074152" y="3666744"/>
-            <a:ext cx="2825496" cy="201168"/>
+            <a:ext cx="2825496" cy="256032"/>
           </a:xfrm>
           <a:prstGeom prst="rect">
             <a:avLst/>
@@ -13113,7 +14253,7 @@
               <a:buNone/>
             </a:pPr>
             <a:r>
-              <a:rPr lang="en-US" sz="950" b="1" dirty="0">
+              <a:rPr lang="en-US" sz="1300" b="1" dirty="0">
                 <a:solidFill>
                   <a:srgbClr val="0068B7"/>
                 </a:solidFill>
@@ -13123,20 +14263,20 @@
               </a:rPr>
               <a:t>Use this for</a:t>
             </a:r>
-            <a:endParaRPr lang="en-US" sz="950" dirty="0"/>
-          </a:p>
-        </p:txBody>
-      </p:sp>
-      <p:sp>
-        <p:nvSpPr>
-          <p:cNvPr id="14" name="Text 12"/>
-          <p:cNvSpPr/>
-          <p:nvPr/>
-        </p:nvSpPr>
-        <p:spPr>
-          <a:xfrm>
-            <a:off x="8074152" y="3959352"/>
-            <a:ext cx="2825496" cy="1170432"/>
+            <a:endParaRPr lang="en-US" sz="1300" dirty="0"/>
+          </a:p>
+        </p:txBody>
+      </p:sp>
+      <p:sp>
+        <p:nvSpPr>
+          <p:cNvPr id="15" name="Text 13"/>
+          <p:cNvSpPr/>
+          <p:nvPr/>
+        </p:nvSpPr>
+        <p:spPr>
+          <a:xfrm>
+            <a:off x="8074152" y="4023360"/>
+            <a:ext cx="2825496" cy="1097280"/>
           </a:xfrm>
           <a:prstGeom prst="rect">
             <a:avLst/>
@@ -13154,7 +14294,7 @@
               <a:buNone/>
             </a:pPr>
             <a:r>
-              <a:rPr lang="en-US" sz="1250" dirty="0">
+              <a:rPr lang="en-US" sz="1550" dirty="0">
                 <a:solidFill>
                   <a:srgbClr val="17364A"/>
                 </a:solidFill>
@@ -13164,7 +14304,7 @@
               </a:rPr>
               <a:t>Connect the concept to public health decisions, safeguards, documentation, or implementation work.</a:t>
             </a:r>
-            <a:endParaRPr lang="en-US" sz="1250" dirty="0"/>
+            <a:endParaRPr lang="en-US" sz="1550" dirty="0"/>
           </a:p>
         </p:txBody>
       </p:sp>
@@ -13361,7 +14501,7 @@
                 <a:ea typeface="Aptos" pitchFamily="34" charset="-122"/>
                 <a:cs typeface="Aptos" pitchFamily="34" charset="-120"/>
               </a:rPr>
-              <a:t>© Paula Soper</a:t>
+              <a:t>Â© Paula Soper</a:t>
             </a:r>
             <a:endParaRPr lang="en-US" sz="800" dirty="0"/>
           </a:p>
@@ -13369,7 +14509,46 @@
       </p:sp>
       <p:sp>
         <p:nvSpPr>
-          <p:cNvPr id="7" name="Shape 5"/>
+          <p:cNvPr id="7" name="Text 5"/>
+          <p:cNvSpPr/>
+          <p:nvPr/>
+        </p:nvSpPr>
+        <p:spPr>
+          <a:xfrm>
+            <a:off x="11137392" y="6510528"/>
+            <a:ext cx="411480" cy="201168"/>
+          </a:xfrm>
+          <a:prstGeom prst="rect">
+            <a:avLst/>
+          </a:prstGeom>
+          <a:noFill/>
+          <a:ln/>
+        </p:spPr>
+        <p:txBody>
+          <a:bodyPr wrap="square" lIns="0" tIns="0" rIns="0" bIns="0" rtlCol="0" anchor="ctr"/>
+          <a:lstStyle/>
+          <a:p>
+            <a:pPr algn="r" indent="0" marL="0">
+              <a:buNone/>
+            </a:pPr>
+            <a:r>
+              <a:rPr lang="en-US" sz="900" dirty="0">
+                <a:solidFill>
+                  <a:srgbClr val="5F7181"/>
+                </a:solidFill>
+                <a:latin typeface="Aptos" pitchFamily="34" charset="0"/>
+                <a:ea typeface="Aptos" pitchFamily="34" charset="-122"/>
+                <a:cs typeface="Aptos" pitchFamily="34" charset="-120"/>
+              </a:rPr>
+              <a:t>7</a:t>
+            </a:r>
+            <a:endParaRPr lang="en-US" sz="900" dirty="0"/>
+          </a:p>
+        </p:txBody>
+      </p:sp>
+      <p:sp>
+        <p:nvSpPr>
+          <p:cNvPr id="8" name="Shape 6"/>
           <p:cNvSpPr/>
           <p:nvPr/>
         </p:nvSpPr>
@@ -13394,7 +14573,7 @@
       </p:sp>
       <p:sp>
         <p:nvSpPr>
-          <p:cNvPr id="8" name="Text 6"/>
+          <p:cNvPr id="9" name="Text 7"/>
           <p:cNvSpPr/>
           <p:nvPr/>
         </p:nvSpPr>
@@ -13433,14 +14612,14 @@
       </p:sp>
       <p:sp>
         <p:nvSpPr>
-          <p:cNvPr id="9" name="Text 7"/>
+          <p:cNvPr id="10" name="Text 8"/>
           <p:cNvSpPr/>
           <p:nvPr/>
         </p:nvSpPr>
         <p:spPr>
           <a:xfrm>
             <a:off x="640080" y="621792"/>
-            <a:ext cx="10881360" cy="566928"/>
+            <a:ext cx="10881360" cy="713232"/>
           </a:xfrm>
           <a:prstGeom prst="rect">
             <a:avLst/>
@@ -13458,7 +14637,7 @@
               <a:buNone/>
             </a:pPr>
             <a:r>
-              <a:rPr lang="en-US" sz="2700" b="1" dirty="0">
+              <a:rPr lang="en-US" sz="3400" b="1" dirty="0">
                 <a:solidFill>
                   <a:srgbClr val="003A63"/>
                 </a:solidFill>
@@ -13468,20 +14647,20 @@
               </a:rPr>
               <a:t>Module Overview</a:t>
             </a:r>
-            <a:endParaRPr lang="en-US" sz="2700" dirty="0"/>
-          </a:p>
-        </p:txBody>
-      </p:sp>
-      <p:sp>
-        <p:nvSpPr>
-          <p:cNvPr id="10" name="Text 8"/>
-          <p:cNvSpPr/>
-          <p:nvPr/>
-        </p:nvSpPr>
-        <p:spPr>
-          <a:xfrm>
-            <a:off x="868680" y="1417320"/>
-            <a:ext cx="6675120" cy="4434840"/>
+            <a:endParaRPr lang="en-US" sz="3400" dirty="0"/>
+          </a:p>
+        </p:txBody>
+      </p:sp>
+      <p:sp>
+        <p:nvSpPr>
+          <p:cNvPr id="11" name="Text 9"/>
+          <p:cNvSpPr/>
+          <p:nvPr/>
+        </p:nvSpPr>
+        <p:spPr>
+          <a:xfrm>
+            <a:off x="868680" y="1508760"/>
+            <a:ext cx="6537960" cy="4160520"/>
           </a:xfrm>
           <a:prstGeom prst="rect">
             <a:avLst/>
@@ -13496,7 +14675,7 @@
           <a:lstStyle/>
           <a:p>
             <a:r>
-              <a:rPr lang="en-US" sz="1700" dirty="0">
+              <a:rPr lang="en-US" sz="2100" dirty="0">
                 <a:solidFill>
                   <a:srgbClr val="17364A"/>
                 </a:solidFill>
@@ -13504,13 +14683,13 @@
                 <a:ea typeface="Aptos" pitchFamily="34" charset="-122"/>
                 <a:cs typeface="Aptos" pitchFamily="34" charset="-120"/>
               </a:rPr>
-              <a:t>AI procurement requires stronger requirements than ordinary software purchasing because agencies must define not only.</a:t>
-            </a:r>
-            <a:endParaRPr lang="en-US" sz="1700" dirty="0"/>
-          </a:p>
-          <a:p>
-            <a:r>
-              <a:rPr lang="en-US" sz="1700" dirty="0">
+              <a:t>AI procurement requires stronger requirements than ordinary software purchasing because agencies must.</a:t>
+            </a:r>
+            <a:endParaRPr lang="en-US" sz="2100" dirty="0"/>
+          </a:p>
+          <a:p>
+            <a:r>
+              <a:rPr lang="en-US" sz="2100" dirty="0">
                 <a:solidFill>
                   <a:srgbClr val="17364A"/>
                 </a:solidFill>
@@ -13518,15 +14697,15 @@
                 <a:ea typeface="Aptos" pitchFamily="34" charset="-122"/>
                 <a:cs typeface="Aptos" pitchFamily="34" charset="-120"/>
               </a:rPr>
-              <a:t>This module teaches learners how to write requirements that can be evaluated, tested, enforced, and monitored throughout.</a:t>
-            </a:r>
-            <a:endParaRPr lang="en-US" sz="1700" dirty="0"/>
-          </a:p>
-        </p:txBody>
-      </p:sp>
-      <p:sp>
-        <p:nvSpPr>
-          <p:cNvPr id="11" name="Shape 9"/>
+              <a:t>This module teaches learners how to write requirements that can be evaluated, tested, enforced, and.</a:t>
+            </a:r>
+            <a:endParaRPr lang="en-US" sz="2100" dirty="0"/>
+          </a:p>
+        </p:txBody>
+      </p:sp>
+      <p:sp>
+        <p:nvSpPr>
+          <p:cNvPr id="12" name="Shape 10"/>
           <p:cNvSpPr/>
           <p:nvPr/>
         </p:nvSpPr>
@@ -13553,14 +14732,14 @@
       </p:sp>
       <p:sp>
         <p:nvSpPr>
-          <p:cNvPr id="12" name="Text 10"/>
+          <p:cNvPr id="13" name="Text 11"/>
           <p:cNvSpPr/>
           <p:nvPr/>
         </p:nvSpPr>
         <p:spPr>
           <a:xfrm>
             <a:off x="8074152" y="1563624"/>
-            <a:ext cx="2825496" cy="201168"/>
+            <a:ext cx="2825496" cy="256032"/>
           </a:xfrm>
           <a:prstGeom prst="rect">
             <a:avLst/>
@@ -13576,7 +14755,7 @@
               <a:buNone/>
             </a:pPr>
             <a:r>
-              <a:rPr lang="en-US" sz="950" b="1" dirty="0">
+              <a:rPr lang="en-US" sz="1300" b="1" dirty="0">
                 <a:solidFill>
                   <a:srgbClr val="0068B7"/>
                 </a:solidFill>
@@ -13586,20 +14765,20 @@
               </a:rPr>
               <a:t>Key idea</a:t>
             </a:r>
-            <a:endParaRPr lang="en-US" sz="950" dirty="0"/>
-          </a:p>
-        </p:txBody>
-      </p:sp>
-      <p:sp>
-        <p:nvSpPr>
-          <p:cNvPr id="13" name="Text 11"/>
-          <p:cNvSpPr/>
-          <p:nvPr/>
-        </p:nvSpPr>
-        <p:spPr>
-          <a:xfrm>
-            <a:off x="8074152" y="1856232"/>
-            <a:ext cx="2825496" cy="1261872"/>
+            <a:endParaRPr lang="en-US" sz="1300" dirty="0"/>
+          </a:p>
+        </p:txBody>
+      </p:sp>
+      <p:sp>
+        <p:nvSpPr>
+          <p:cNvPr id="14" name="Text 12"/>
+          <p:cNvSpPr/>
+          <p:nvPr/>
+        </p:nvSpPr>
+        <p:spPr>
+          <a:xfrm>
+            <a:off x="8074152" y="1920240"/>
+            <a:ext cx="2825496" cy="1188720"/>
           </a:xfrm>
           <a:prstGeom prst="rect">
             <a:avLst/>
@@ -13617,7 +14796,7 @@
               <a:buNone/>
             </a:pPr>
             <a:r>
-              <a:rPr lang="en-US" sz="1250" dirty="0">
+              <a:rPr lang="en-US" sz="1550" dirty="0">
                 <a:solidFill>
                   <a:srgbClr val="17364A"/>
                 </a:solidFill>
@@ -13625,15 +14804,15 @@
                 <a:ea typeface="Aptos" pitchFamily="34" charset="-122"/>
                 <a:cs typeface="Aptos" pitchFamily="34" charset="-120"/>
               </a:rPr>
-              <a:t>AI procurement requires stronger requirements than ordinary software purchasing because agencies must define not only.</a:t>
-            </a:r>
-            <a:endParaRPr lang="en-US" sz="1250" dirty="0"/>
-          </a:p>
-        </p:txBody>
-      </p:sp>
-      <p:sp>
-        <p:nvSpPr>
-          <p:cNvPr id="14" name="Shape 12"/>
+              <a:t>AI procurement requires stronger requirements than ordinary software purchasing because agencies must.</a:t>
+            </a:r>
+            <a:endParaRPr lang="en-US" sz="1550" dirty="0"/>
+          </a:p>
+        </p:txBody>
+      </p:sp>
+      <p:sp>
+        <p:nvSpPr>
+          <p:cNvPr id="15" name="Shape 13"/>
           <p:cNvSpPr/>
           <p:nvPr/>
         </p:nvSpPr>
@@ -13660,14 +14839,14 @@
       </p:sp>
       <p:sp>
         <p:nvSpPr>
-          <p:cNvPr id="15" name="Text 13"/>
+          <p:cNvPr id="16" name="Text 14"/>
           <p:cNvSpPr/>
           <p:nvPr/>
         </p:nvSpPr>
         <p:spPr>
           <a:xfrm>
             <a:off x="8074152" y="3666744"/>
-            <a:ext cx="2825496" cy="201168"/>
+            <a:ext cx="2825496" cy="256032"/>
           </a:xfrm>
           <a:prstGeom prst="rect">
             <a:avLst/>
@@ -13683,7 +14862,7 @@
               <a:buNone/>
             </a:pPr>
             <a:r>
-              <a:rPr lang="en-US" sz="950" b="1" dirty="0">
+              <a:rPr lang="en-US" sz="1300" b="1" dirty="0">
                 <a:solidFill>
                   <a:srgbClr val="0068B7"/>
                 </a:solidFill>
@@ -13693,20 +14872,20 @@
               </a:rPr>
               <a:t>Use this for</a:t>
             </a:r>
-            <a:endParaRPr lang="en-US" sz="950" dirty="0"/>
-          </a:p>
-        </p:txBody>
-      </p:sp>
-      <p:sp>
-        <p:nvSpPr>
-          <p:cNvPr id="16" name="Text 14"/>
-          <p:cNvSpPr/>
-          <p:nvPr/>
-        </p:nvSpPr>
-        <p:spPr>
-          <a:xfrm>
-            <a:off x="8074152" y="3959352"/>
-            <a:ext cx="2825496" cy="1170432"/>
+            <a:endParaRPr lang="en-US" sz="1300" dirty="0"/>
+          </a:p>
+        </p:txBody>
+      </p:sp>
+      <p:sp>
+        <p:nvSpPr>
+          <p:cNvPr id="17" name="Text 15"/>
+          <p:cNvSpPr/>
+          <p:nvPr/>
+        </p:nvSpPr>
+        <p:spPr>
+          <a:xfrm>
+            <a:off x="8074152" y="4023360"/>
+            <a:ext cx="2825496" cy="1097280"/>
           </a:xfrm>
           <a:prstGeom prst="rect">
             <a:avLst/>
@@ -13724,7 +14903,7 @@
               <a:buNone/>
             </a:pPr>
             <a:r>
-              <a:rPr lang="en-US" sz="1250" dirty="0">
+              <a:rPr lang="en-US" sz="1550" dirty="0">
                 <a:solidFill>
                   <a:srgbClr val="17364A"/>
                 </a:solidFill>
@@ -13734,7 +14913,7 @@
               </a:rPr>
               <a:t>Connect the concept to public health decisions, safeguards, documentation, or implementation work.</a:t>
             </a:r>
-            <a:endParaRPr lang="en-US" sz="1250" dirty="0"/>
+            <a:endParaRPr lang="en-US" sz="1550" dirty="0"/>
           </a:p>
         </p:txBody>
       </p:sp>
@@ -13931,7 +15110,7 @@
                 <a:ea typeface="Aptos" pitchFamily="34" charset="-122"/>
                 <a:cs typeface="Aptos" pitchFamily="34" charset="-120"/>
               </a:rPr>
-              <a:t>© Paula Soper</a:t>
+              <a:t>Â© Paula Soper</a:t>
             </a:r>
             <a:endParaRPr lang="en-US" sz="800" dirty="0"/>
           </a:p>
@@ -13939,7 +15118,46 @@
       </p:sp>
       <p:sp>
         <p:nvSpPr>
-          <p:cNvPr id="7" name="Shape 5"/>
+          <p:cNvPr id="7" name="Text 5"/>
+          <p:cNvSpPr/>
+          <p:nvPr/>
+        </p:nvSpPr>
+        <p:spPr>
+          <a:xfrm>
+            <a:off x="11137392" y="6510528"/>
+            <a:ext cx="411480" cy="201168"/>
+          </a:xfrm>
+          <a:prstGeom prst="rect">
+            <a:avLst/>
+          </a:prstGeom>
+          <a:noFill/>
+          <a:ln/>
+        </p:spPr>
+        <p:txBody>
+          <a:bodyPr wrap="square" lIns="0" tIns="0" rIns="0" bIns="0" rtlCol="0" anchor="ctr"/>
+          <a:lstStyle/>
+          <a:p>
+            <a:pPr algn="r" indent="0" marL="0">
+              <a:buNone/>
+            </a:pPr>
+            <a:r>
+              <a:rPr lang="en-US" sz="900" dirty="0">
+                <a:solidFill>
+                  <a:srgbClr val="5F7181"/>
+                </a:solidFill>
+                <a:latin typeface="Aptos" pitchFamily="34" charset="0"/>
+                <a:ea typeface="Aptos" pitchFamily="34" charset="-122"/>
+                <a:cs typeface="Aptos" pitchFamily="34" charset="-120"/>
+              </a:rPr>
+              <a:t>8</a:t>
+            </a:r>
+            <a:endParaRPr lang="en-US" sz="900" dirty="0"/>
+          </a:p>
+        </p:txBody>
+      </p:sp>
+      <p:sp>
+        <p:nvSpPr>
+          <p:cNvPr id="8" name="Shape 6"/>
           <p:cNvSpPr/>
           <p:nvPr/>
         </p:nvSpPr>
@@ -13964,7 +15182,7 @@
       </p:sp>
       <p:sp>
         <p:nvSpPr>
-          <p:cNvPr id="8" name="Text 6"/>
+          <p:cNvPr id="9" name="Text 7"/>
           <p:cNvSpPr/>
           <p:nvPr/>
         </p:nvSpPr>
@@ -14003,14 +15221,14 @@
       </p:sp>
       <p:sp>
         <p:nvSpPr>
-          <p:cNvPr id="9" name="Text 7"/>
+          <p:cNvPr id="10" name="Text 8"/>
           <p:cNvSpPr/>
           <p:nvPr/>
         </p:nvSpPr>
         <p:spPr>
           <a:xfrm>
             <a:off x="640080" y="621792"/>
-            <a:ext cx="10881360" cy="566928"/>
+            <a:ext cx="10881360" cy="713232"/>
           </a:xfrm>
           <a:prstGeom prst="rect">
             <a:avLst/>
@@ -14028,7 +15246,7 @@
               <a:buNone/>
             </a:pPr>
             <a:r>
-              <a:rPr lang="en-US" sz="2700" b="1" dirty="0">
+              <a:rPr lang="en-US" sz="3400" b="1" dirty="0">
                 <a:solidFill>
                   <a:srgbClr val="003A63"/>
                 </a:solidFill>
@@ -14038,20 +15256,20 @@
               </a:rPr>
               <a:t>Jurisdiction and Agency Policy Note</a:t>
             </a:r>
-            <a:endParaRPr lang="en-US" sz="2700" dirty="0"/>
-          </a:p>
-        </p:txBody>
-      </p:sp>
-      <p:sp>
-        <p:nvSpPr>
-          <p:cNvPr id="10" name="Text 8"/>
-          <p:cNvSpPr/>
-          <p:nvPr/>
-        </p:nvSpPr>
-        <p:spPr>
-          <a:xfrm>
-            <a:off x="868680" y="1417320"/>
-            <a:ext cx="6675120" cy="4434840"/>
+            <a:endParaRPr lang="en-US" sz="3400" dirty="0"/>
+          </a:p>
+        </p:txBody>
+      </p:sp>
+      <p:sp>
+        <p:nvSpPr>
+          <p:cNvPr id="11" name="Text 9"/>
+          <p:cNvSpPr/>
+          <p:nvPr/>
+        </p:nvSpPr>
+        <p:spPr>
+          <a:xfrm>
+            <a:off x="868680" y="1508760"/>
+            <a:ext cx="6537960" cy="4160520"/>
           </a:xfrm>
           <a:prstGeom prst="rect">
             <a:avLst/>
@@ -14066,7 +15284,7 @@
           <a:lstStyle/>
           <a:p>
             <a:r>
-              <a:rPr lang="en-US" sz="1700" dirty="0">
+              <a:rPr lang="en-US" sz="2100" dirty="0">
                 <a:solidFill>
                   <a:srgbClr val="17364A"/>
                 </a:solidFill>
@@ -14076,11 +15294,11 @@
               </a:rPr>
               <a:t>This module provides national-level training guidance for public health agencies and partners.</a:t>
             </a:r>
-            <a:endParaRPr lang="en-US" sz="1700" dirty="0"/>
-          </a:p>
-          <a:p>
-            <a:r>
-              <a:rPr lang="en-US" sz="1700" dirty="0">
+            <a:endParaRPr lang="en-US" sz="2100" dirty="0"/>
+          </a:p>
+          <a:p>
+            <a:r>
+              <a:rPr lang="en-US" sz="2100" dirty="0">
                 <a:solidFill>
                   <a:srgbClr val="17364A"/>
                 </a:solidFill>
@@ -14088,13 +15306,13 @@
                 <a:ea typeface="Aptos" pitchFamily="34" charset="-122"/>
                 <a:cs typeface="Aptos" pitchFamily="34" charset="-120"/>
               </a:rPr>
-              <a:t>It is not legal advice and does not replace review by agency legal counsel, privacy officers, procurement officials, civil.</a:t>
-            </a:r>
-            <a:endParaRPr lang="en-US" sz="1700" dirty="0"/>
-          </a:p>
-          <a:p>
-            <a:r>
-              <a:rPr lang="en-US" sz="1700" dirty="0">
+              <a:t>It is not legal advice and does not replace review by agency legal counsel, privacy officers,.</a:t>
+            </a:r>
+            <a:endParaRPr lang="en-US" sz="2100" dirty="0"/>
+          </a:p>
+          <a:p>
+            <a:r>
+              <a:rPr lang="en-US" sz="2100" dirty="0">
                 <a:solidFill>
                   <a:srgbClr val="17364A"/>
                 </a:solidFill>
@@ -14102,29 +15320,15 @@
                 <a:ea typeface="Aptos" pitchFamily="34" charset="-122"/>
                 <a:cs typeface="Aptos" pitchFamily="34" charset="-120"/>
               </a:rPr>
-              <a:t>Requirements may vary by state, locality, territory, Tribe, agency, funding source, data-sharing agreement, emergency.</a:t>
-            </a:r>
-            <a:endParaRPr lang="en-US" sz="1700" dirty="0"/>
-          </a:p>
-          <a:p>
-            <a:r>
-              <a:rPr lang="en-US" sz="1700" dirty="0">
-                <a:solidFill>
-                  <a:srgbClr val="17364A"/>
-                </a:solidFill>
-                <a:latin typeface="Aptos" pitchFamily="34" charset="0"/>
-                <a:ea typeface="Aptos" pitchFamily="34" charset="-122"/>
-                <a:cs typeface="Aptos" pitchFamily="34" charset="-120"/>
-              </a:rPr>
-              <a:t>Learners should use this module to identify the issues that require review and should confirm applicable requirements.</a:t>
-            </a:r>
-            <a:endParaRPr lang="en-US" sz="1700" dirty="0"/>
-          </a:p>
-        </p:txBody>
-      </p:sp>
-      <p:sp>
-        <p:nvSpPr>
-          <p:cNvPr id="11" name="Shape 9"/>
+              <a:t>Requirements may vary by state, locality, territory, Tribe, agency, funding source, data-sharing.</a:t>
+            </a:r>
+            <a:endParaRPr lang="en-US" sz="2100" dirty="0"/>
+          </a:p>
+        </p:txBody>
+      </p:sp>
+      <p:sp>
+        <p:nvSpPr>
+          <p:cNvPr id="12" name="Shape 10"/>
           <p:cNvSpPr/>
           <p:nvPr/>
         </p:nvSpPr>
@@ -14151,14 +15355,14 @@
       </p:sp>
       <p:sp>
         <p:nvSpPr>
-          <p:cNvPr id="12" name="Text 10"/>
+          <p:cNvPr id="13" name="Text 11"/>
           <p:cNvSpPr/>
           <p:nvPr/>
         </p:nvSpPr>
         <p:spPr>
           <a:xfrm>
             <a:off x="8074152" y="1563624"/>
-            <a:ext cx="2825496" cy="201168"/>
+            <a:ext cx="2825496" cy="256032"/>
           </a:xfrm>
           <a:prstGeom prst="rect">
             <a:avLst/>
@@ -14174,7 +15378,7 @@
               <a:buNone/>
             </a:pPr>
             <a:r>
-              <a:rPr lang="en-US" sz="950" b="1" dirty="0">
+              <a:rPr lang="en-US" sz="1300" b="1" dirty="0">
                 <a:solidFill>
                   <a:srgbClr val="0068B7"/>
                 </a:solidFill>
@@ -14184,20 +15388,20 @@
               </a:rPr>
               <a:t>Key idea</a:t>
             </a:r>
-            <a:endParaRPr lang="en-US" sz="950" dirty="0"/>
-          </a:p>
-        </p:txBody>
-      </p:sp>
-      <p:sp>
-        <p:nvSpPr>
-          <p:cNvPr id="13" name="Text 11"/>
-          <p:cNvSpPr/>
-          <p:nvPr/>
-        </p:nvSpPr>
-        <p:spPr>
-          <a:xfrm>
-            <a:off x="8074152" y="1856232"/>
-            <a:ext cx="2825496" cy="1261872"/>
+            <a:endParaRPr lang="en-US" sz="1300" dirty="0"/>
+          </a:p>
+        </p:txBody>
+      </p:sp>
+      <p:sp>
+        <p:nvSpPr>
+          <p:cNvPr id="14" name="Text 12"/>
+          <p:cNvSpPr/>
+          <p:nvPr/>
+        </p:nvSpPr>
+        <p:spPr>
+          <a:xfrm>
+            <a:off x="8074152" y="1920240"/>
+            <a:ext cx="2825496" cy="1188720"/>
           </a:xfrm>
           <a:prstGeom prst="rect">
             <a:avLst/>
@@ -14215,7 +15419,7 @@
               <a:buNone/>
             </a:pPr>
             <a:r>
-              <a:rPr lang="en-US" sz="1250" dirty="0">
+              <a:rPr lang="en-US" sz="1550" dirty="0">
                 <a:solidFill>
                   <a:srgbClr val="17364A"/>
                 </a:solidFill>
@@ -14225,13 +15429,13 @@
               </a:rPr>
               <a:t>This module provides national-level training guidance for public health agencies and partners.</a:t>
             </a:r>
-            <a:endParaRPr lang="en-US" sz="1250" dirty="0"/>
-          </a:p>
-        </p:txBody>
-      </p:sp>
-      <p:sp>
-        <p:nvSpPr>
-          <p:cNvPr id="14" name="Shape 12"/>
+            <a:endParaRPr lang="en-US" sz="1550" dirty="0"/>
+          </a:p>
+        </p:txBody>
+      </p:sp>
+      <p:sp>
+        <p:nvSpPr>
+          <p:cNvPr id="15" name="Shape 13"/>
           <p:cNvSpPr/>
           <p:nvPr/>
         </p:nvSpPr>
@@ -14258,14 +15462,14 @@
       </p:sp>
       <p:sp>
         <p:nvSpPr>
-          <p:cNvPr id="15" name="Text 13"/>
+          <p:cNvPr id="16" name="Text 14"/>
           <p:cNvSpPr/>
           <p:nvPr/>
         </p:nvSpPr>
         <p:spPr>
           <a:xfrm>
             <a:off x="8074152" y="3666744"/>
-            <a:ext cx="2825496" cy="201168"/>
+            <a:ext cx="2825496" cy="256032"/>
           </a:xfrm>
           <a:prstGeom prst="rect">
             <a:avLst/>
@@ -14281,7 +15485,7 @@
               <a:buNone/>
             </a:pPr>
             <a:r>
-              <a:rPr lang="en-US" sz="950" b="1" dirty="0">
+              <a:rPr lang="en-US" sz="1300" b="1" dirty="0">
                 <a:solidFill>
                   <a:srgbClr val="0068B7"/>
                 </a:solidFill>
@@ -14291,20 +15495,20 @@
               </a:rPr>
               <a:t>Use this for</a:t>
             </a:r>
-            <a:endParaRPr lang="en-US" sz="950" dirty="0"/>
-          </a:p>
-        </p:txBody>
-      </p:sp>
-      <p:sp>
-        <p:nvSpPr>
-          <p:cNvPr id="16" name="Text 14"/>
-          <p:cNvSpPr/>
-          <p:nvPr/>
-        </p:nvSpPr>
-        <p:spPr>
-          <a:xfrm>
-            <a:off x="8074152" y="3959352"/>
-            <a:ext cx="2825496" cy="1170432"/>
+            <a:endParaRPr lang="en-US" sz="1300" dirty="0"/>
+          </a:p>
+        </p:txBody>
+      </p:sp>
+      <p:sp>
+        <p:nvSpPr>
+          <p:cNvPr id="17" name="Text 15"/>
+          <p:cNvSpPr/>
+          <p:nvPr/>
+        </p:nvSpPr>
+        <p:spPr>
+          <a:xfrm>
+            <a:off x="8074152" y="4023360"/>
+            <a:ext cx="2825496" cy="1097280"/>
           </a:xfrm>
           <a:prstGeom prst="rect">
             <a:avLst/>
@@ -14322,7 +15526,7 @@
               <a:buNone/>
             </a:pPr>
             <a:r>
-              <a:rPr lang="en-US" sz="1250" dirty="0">
+              <a:rPr lang="en-US" sz="1550" dirty="0">
                 <a:solidFill>
                   <a:srgbClr val="17364A"/>
                 </a:solidFill>
@@ -14332,7 +15536,7 @@
               </a:rPr>
               <a:t>Connect the concept to public health decisions, safeguards, documentation, or implementation work.</a:t>
             </a:r>
-            <a:endParaRPr lang="en-US" sz="1250" dirty="0"/>
+            <a:endParaRPr lang="en-US" sz="1550" dirty="0"/>
           </a:p>
         </p:txBody>
       </p:sp>
@@ -14529,7 +15733,7 @@
                 <a:ea typeface="Aptos" pitchFamily="34" charset="-122"/>
                 <a:cs typeface="Aptos" pitchFamily="34" charset="-120"/>
               </a:rPr>
-              <a:t>© Paula Soper</a:t>
+              <a:t>Â© Paula Soper</a:t>
             </a:r>
             <a:endParaRPr lang="en-US" sz="800" dirty="0"/>
           </a:p>
@@ -14537,7 +15741,46 @@
       </p:sp>
       <p:sp>
         <p:nvSpPr>
-          <p:cNvPr id="7" name="Shape 5"/>
+          <p:cNvPr id="7" name="Text 5"/>
+          <p:cNvSpPr/>
+          <p:nvPr/>
+        </p:nvSpPr>
+        <p:spPr>
+          <a:xfrm>
+            <a:off x="11137392" y="6510528"/>
+            <a:ext cx="411480" cy="201168"/>
+          </a:xfrm>
+          <a:prstGeom prst="rect">
+            <a:avLst/>
+          </a:prstGeom>
+          <a:noFill/>
+          <a:ln/>
+        </p:spPr>
+        <p:txBody>
+          <a:bodyPr wrap="square" lIns="0" tIns="0" rIns="0" bIns="0" rtlCol="0" anchor="ctr"/>
+          <a:lstStyle/>
+          <a:p>
+            <a:pPr algn="r" indent="0" marL="0">
+              <a:buNone/>
+            </a:pPr>
+            <a:r>
+              <a:rPr lang="en-US" sz="900" dirty="0">
+                <a:solidFill>
+                  <a:srgbClr val="5F7181"/>
+                </a:solidFill>
+                <a:latin typeface="Aptos" pitchFamily="34" charset="0"/>
+                <a:ea typeface="Aptos" pitchFamily="34" charset="-122"/>
+                <a:cs typeface="Aptos" pitchFamily="34" charset="-120"/>
+              </a:rPr>
+              <a:t>9</a:t>
+            </a:r>
+            <a:endParaRPr lang="en-US" sz="900" dirty="0"/>
+          </a:p>
+        </p:txBody>
+      </p:sp>
+      <p:sp>
+        <p:nvSpPr>
+          <p:cNvPr id="8" name="Shape 6"/>
           <p:cNvSpPr/>
           <p:nvPr/>
         </p:nvSpPr>
@@ -14562,7 +15805,7 @@
       </p:sp>
       <p:sp>
         <p:nvSpPr>
-          <p:cNvPr id="8" name="Text 6"/>
+          <p:cNvPr id="9" name="Text 7"/>
           <p:cNvSpPr/>
           <p:nvPr/>
         </p:nvSpPr>
@@ -14601,14 +15844,14 @@
       </p:sp>
       <p:sp>
         <p:nvSpPr>
-          <p:cNvPr id="9" name="Text 7"/>
+          <p:cNvPr id="10" name="Text 8"/>
           <p:cNvSpPr/>
           <p:nvPr/>
         </p:nvSpPr>
         <p:spPr>
           <a:xfrm>
             <a:off x="640080" y="621792"/>
-            <a:ext cx="10881360" cy="566928"/>
+            <a:ext cx="10881360" cy="713232"/>
           </a:xfrm>
           <a:prstGeom prst="rect">
             <a:avLst/>
@@ -14626,7 +15869,7 @@
               <a:buNone/>
             </a:pPr>
             <a:r>
-              <a:rPr lang="en-US" sz="2700" b="1" dirty="0">
+              <a:rPr lang="en-US" sz="3400" b="1" dirty="0">
                 <a:solidFill>
                   <a:srgbClr val="003A63"/>
                 </a:solidFill>
@@ -14636,20 +15879,20 @@
               </a:rPr>
               <a:t>Why This Topic Matters for Public Health AI</a:t>
             </a:r>
-            <a:endParaRPr lang="en-US" sz="2700" dirty="0"/>
-          </a:p>
-        </p:txBody>
-      </p:sp>
-      <p:sp>
-        <p:nvSpPr>
-          <p:cNvPr id="10" name="Text 8"/>
-          <p:cNvSpPr/>
-          <p:nvPr/>
-        </p:nvSpPr>
-        <p:spPr>
-          <a:xfrm>
-            <a:off x="868680" y="1417320"/>
-            <a:ext cx="6675120" cy="4434840"/>
+            <a:endParaRPr lang="en-US" sz="3400" dirty="0"/>
+          </a:p>
+        </p:txBody>
+      </p:sp>
+      <p:sp>
+        <p:nvSpPr>
+          <p:cNvPr id="11" name="Text 9"/>
+          <p:cNvSpPr/>
+          <p:nvPr/>
+        </p:nvSpPr>
+        <p:spPr>
+          <a:xfrm>
+            <a:off x="868680" y="1508760"/>
+            <a:ext cx="6537960" cy="4160520"/>
           </a:xfrm>
           <a:prstGeom prst="rect">
             <a:avLst/>
@@ -14664,7 +15907,7 @@
           <a:lstStyle/>
           <a:p>
             <a:r>
-              <a:rPr lang="en-US" sz="1700" dirty="0">
+              <a:rPr lang="en-US" sz="2100" dirty="0">
                 <a:solidFill>
                   <a:srgbClr val="17364A"/>
                 </a:solidFill>
@@ -14672,13 +15915,13 @@
                 <a:ea typeface="Aptos" pitchFamily="34" charset="-122"/>
                 <a:cs typeface="Aptos" pitchFamily="34" charset="-120"/>
               </a:rPr>
-              <a:t>Requirements Writing for AI Procurement and Implementation matters because AI systems are embedded in public health.</a:t>
-            </a:r>
-            <a:endParaRPr lang="en-US" sz="1700" dirty="0"/>
-          </a:p>
-          <a:p>
-            <a:r>
-              <a:rPr lang="en-US" sz="1700" dirty="0">
+              <a:t>Requirements Writing for AI Procurement and Implementation matters because AI systems are embedded in.</a:t>
+            </a:r>
+            <a:endParaRPr lang="en-US" sz="2100" dirty="0"/>
+          </a:p>
+          <a:p>
+            <a:r>
+              <a:rPr lang="en-US" sz="2100" dirty="0">
                 <a:solidFill>
                   <a:srgbClr val="17364A"/>
                 </a:solidFill>
@@ -14688,11 +15931,11 @@
               </a:rPr>
               <a:t>The topic affects whether AI outputs are accurate, explainable, safe, equitable, secure, and sustainable.</a:t>
             </a:r>
-            <a:endParaRPr lang="en-US" sz="1700" dirty="0"/>
-          </a:p>
-          <a:p>
-            <a:r>
-              <a:rPr lang="en-US" sz="1700" dirty="0">
+            <a:endParaRPr lang="en-US" sz="2100" dirty="0"/>
+          </a:p>
+          <a:p>
+            <a:r>
+              <a:rPr lang="en-US" sz="2100" dirty="0">
                 <a:solidFill>
                   <a:srgbClr val="17364A"/>
                 </a:solidFill>
@@ -14702,27 +15945,13 @@
               </a:rPr>
               <a:t>Agencies that ignore this area may create tools that work in a demonstration but fail in actual practice.</a:t>
             </a:r>
-            <a:endParaRPr lang="en-US" sz="1700" dirty="0"/>
-          </a:p>
-          <a:p>
-            <a:r>
-              <a:rPr lang="en-US" sz="1700" dirty="0">
-                <a:solidFill>
-                  <a:srgbClr val="17364A"/>
-                </a:solidFill>
-                <a:latin typeface="Aptos" pitchFamily="34" charset="0"/>
-                <a:ea typeface="Aptos" pitchFamily="34" charset="-122"/>
-                <a:cs typeface="Aptos" pitchFamily="34" charset="-120"/>
-              </a:rPr>
-              <a:t>The topic also affects accountability.</a:t>
-            </a:r>
-            <a:endParaRPr lang="en-US" sz="1700" dirty="0"/>
-          </a:p>
-        </p:txBody>
-      </p:sp>
-      <p:sp>
-        <p:nvSpPr>
-          <p:cNvPr id="11" name="Shape 9"/>
+            <a:endParaRPr lang="en-US" sz="2100" dirty="0"/>
+          </a:p>
+        </p:txBody>
+      </p:sp>
+      <p:sp>
+        <p:nvSpPr>
+          <p:cNvPr id="12" name="Shape 10"/>
           <p:cNvSpPr/>
           <p:nvPr/>
         </p:nvSpPr>
@@ -14749,14 +15978,14 @@
       </p:sp>
       <p:sp>
         <p:nvSpPr>
-          <p:cNvPr id="12" name="Text 10"/>
+          <p:cNvPr id="13" name="Text 11"/>
           <p:cNvSpPr/>
           <p:nvPr/>
         </p:nvSpPr>
         <p:spPr>
           <a:xfrm>
             <a:off x="8074152" y="1563624"/>
-            <a:ext cx="2825496" cy="201168"/>
+            <a:ext cx="2825496" cy="256032"/>
           </a:xfrm>
           <a:prstGeom prst="rect">
             <a:avLst/>
@@ -14772,7 +16001,7 @@
               <a:buNone/>
             </a:pPr>
             <a:r>
-              <a:rPr lang="en-US" sz="950" b="1" dirty="0">
+              <a:rPr lang="en-US" sz="1300" b="1" dirty="0">
                 <a:solidFill>
                   <a:srgbClr val="0068B7"/>
                 </a:solidFill>
@@ -14782,20 +16011,20 @@
               </a:rPr>
               <a:t>Key idea</a:t>
             </a:r>
-            <a:endParaRPr lang="en-US" sz="950" dirty="0"/>
-          </a:p>
-        </p:txBody>
-      </p:sp>
-      <p:sp>
-        <p:nvSpPr>
-          <p:cNvPr id="13" name="Text 11"/>
-          <p:cNvSpPr/>
-          <p:nvPr/>
-        </p:nvSpPr>
-        <p:spPr>
-          <a:xfrm>
-            <a:off x="8074152" y="1856232"/>
-            <a:ext cx="2825496" cy="1261872"/>
+            <a:endParaRPr lang="en-US" sz="1300" dirty="0"/>
+          </a:p>
+        </p:txBody>
+      </p:sp>
+      <p:sp>
+        <p:nvSpPr>
+          <p:cNvPr id="14" name="Text 12"/>
+          <p:cNvSpPr/>
+          <p:nvPr/>
+        </p:nvSpPr>
+        <p:spPr>
+          <a:xfrm>
+            <a:off x="8074152" y="1920240"/>
+            <a:ext cx="2825496" cy="1188720"/>
           </a:xfrm>
           <a:prstGeom prst="rect">
             <a:avLst/>
@@ -14813,7 +16042,7 @@
               <a:buNone/>
             </a:pPr>
             <a:r>
-              <a:rPr lang="en-US" sz="1250" dirty="0">
+              <a:rPr lang="en-US" sz="1550" dirty="0">
                 <a:solidFill>
                   <a:srgbClr val="17364A"/>
                 </a:solidFill>
@@ -14821,15 +16050,15 @@
                 <a:ea typeface="Aptos" pitchFamily="34" charset="-122"/>
                 <a:cs typeface="Aptos" pitchFamily="34" charset="-120"/>
               </a:rPr>
-              <a:t>Requirements Writing for AI Procurement and Implementation matters because AI systems are embedded in public health.</a:t>
-            </a:r>
-            <a:endParaRPr lang="en-US" sz="1250" dirty="0"/>
-          </a:p>
-        </p:txBody>
-      </p:sp>
-      <p:sp>
-        <p:nvSpPr>
-          <p:cNvPr id="14" name="Shape 12"/>
+              <a:t>Requirements Writing for AI Procurement and Implementation matters because AI systems are embedded in.</a:t>
+            </a:r>
+            <a:endParaRPr lang="en-US" sz="1550" dirty="0"/>
+          </a:p>
+        </p:txBody>
+      </p:sp>
+      <p:sp>
+        <p:nvSpPr>
+          <p:cNvPr id="15" name="Shape 13"/>
           <p:cNvSpPr/>
           <p:nvPr/>
         </p:nvSpPr>
@@ -14856,14 +16085,14 @@
       </p:sp>
       <p:sp>
         <p:nvSpPr>
-          <p:cNvPr id="15" name="Text 13"/>
+          <p:cNvPr id="16" name="Text 14"/>
           <p:cNvSpPr/>
           <p:nvPr/>
         </p:nvSpPr>
         <p:spPr>
           <a:xfrm>
             <a:off x="8074152" y="3666744"/>
-            <a:ext cx="2825496" cy="201168"/>
+            <a:ext cx="2825496" cy="256032"/>
           </a:xfrm>
           <a:prstGeom prst="rect">
             <a:avLst/>
@@ -14879,7 +16108,7 @@
               <a:buNone/>
             </a:pPr>
             <a:r>
-              <a:rPr lang="en-US" sz="950" b="1" dirty="0">
+              <a:rPr lang="en-US" sz="1300" b="1" dirty="0">
                 <a:solidFill>
                   <a:srgbClr val="0068B7"/>
                 </a:solidFill>
@@ -14889,20 +16118,20 @@
               </a:rPr>
               <a:t>Use this for</a:t>
             </a:r>
-            <a:endParaRPr lang="en-US" sz="950" dirty="0"/>
-          </a:p>
-        </p:txBody>
-      </p:sp>
-      <p:sp>
-        <p:nvSpPr>
-          <p:cNvPr id="16" name="Text 14"/>
-          <p:cNvSpPr/>
-          <p:nvPr/>
-        </p:nvSpPr>
-        <p:spPr>
-          <a:xfrm>
-            <a:off x="8074152" y="3959352"/>
-            <a:ext cx="2825496" cy="1170432"/>
+            <a:endParaRPr lang="en-US" sz="1300" dirty="0"/>
+          </a:p>
+        </p:txBody>
+      </p:sp>
+      <p:sp>
+        <p:nvSpPr>
+          <p:cNvPr id="17" name="Text 15"/>
+          <p:cNvSpPr/>
+          <p:nvPr/>
+        </p:nvSpPr>
+        <p:spPr>
+          <a:xfrm>
+            <a:off x="8074152" y="4023360"/>
+            <a:ext cx="2825496" cy="1097280"/>
           </a:xfrm>
           <a:prstGeom prst="rect">
             <a:avLst/>
@@ -14920,7 +16149,7 @@
               <a:buNone/>
             </a:pPr>
             <a:r>
-              <a:rPr lang="en-US" sz="1250" dirty="0">
+              <a:rPr lang="en-US" sz="1550" dirty="0">
                 <a:solidFill>
                   <a:srgbClr val="17364A"/>
                 </a:solidFill>
@@ -14930,7 +16159,7 @@
               </a:rPr>
               <a:t>Connect the concept to public health decisions, safeguards, documentation, or implementation work.</a:t>
             </a:r>
-            <a:endParaRPr lang="en-US" sz="1250" dirty="0"/>
+            <a:endParaRPr lang="en-US" sz="1550" dirty="0"/>
           </a:p>
         </p:txBody>
       </p:sp>
